--- a/slides/Lecture_Chapter08.pptx
+++ b/slides/Lecture_Chapter08.pptx
@@ -130,7 +130,7 @@
   <p:extLst>
     <p:ext uri="{521415D9-36F7-43E2-AB2F-B90AF26B5E84}">
       <p14:sectionLst xmlns:p14="http://schemas.microsoft.com/office/powerpoint/2010/main">
-        <p14:section name="Default Section" id="{83286E67-F0F0-421C-8F74-7B93ABA17FBF}">
+        <p14:section name="Tabular Methods" id="{83286E67-F0F0-421C-8F74-7B93ABA17FBF}">
           <p14:sldIdLst>
             <p14:sldId id="256"/>
             <p14:sldId id="313"/>
@@ -330,7 +330,7 @@
           <a:p>
             <a:fld id="{3E22BF2E-04DA-469E-97C5-BB68A0368813}" type="datetimeFigureOut">
               <a:rPr lang="en-US" smtClean="0"/>
-              <a:t>3/30/2026</a:t>
+              <a:t>10/15/26</a:t>
             </a:fld>
             <a:endParaRPr lang="en-US"/>
           </a:p>
@@ -528,7 +528,7 @@
           <a:p>
             <a:fld id="{3E22BF2E-04DA-469E-97C5-BB68A0368813}" type="datetimeFigureOut">
               <a:rPr lang="en-US" smtClean="0"/>
-              <a:t>3/30/2026</a:t>
+              <a:t>10/15/26</a:t>
             </a:fld>
             <a:endParaRPr lang="en-US"/>
           </a:p>
@@ -736,7 +736,7 @@
           <a:p>
             <a:fld id="{3E22BF2E-04DA-469E-97C5-BB68A0368813}" type="datetimeFigureOut">
               <a:rPr lang="en-US" smtClean="0"/>
-              <a:t>3/30/2026</a:t>
+              <a:t>10/15/26</a:t>
             </a:fld>
             <a:endParaRPr lang="en-US"/>
           </a:p>
@@ -944,7 +944,7 @@
           <a:p>
             <a:fld id="{3E22BF2E-04DA-469E-97C5-BB68A0368813}" type="datetimeFigureOut">
               <a:rPr lang="en-US" smtClean="0"/>
-              <a:t>3/30/2026</a:t>
+              <a:t>10/15/26</a:t>
             </a:fld>
             <a:endParaRPr lang="en-US"/>
           </a:p>
@@ -1219,7 +1219,7 @@
           <a:p>
             <a:fld id="{3E22BF2E-04DA-469E-97C5-BB68A0368813}" type="datetimeFigureOut">
               <a:rPr lang="en-US" smtClean="0"/>
-              <a:t>3/30/2026</a:t>
+              <a:t>10/15/26</a:t>
             </a:fld>
             <a:endParaRPr lang="en-US"/>
           </a:p>
@@ -1484,7 +1484,7 @@
           <a:p>
             <a:fld id="{3E22BF2E-04DA-469E-97C5-BB68A0368813}" type="datetimeFigureOut">
               <a:rPr lang="en-US" smtClean="0"/>
-              <a:t>3/30/2026</a:t>
+              <a:t>10/15/26</a:t>
             </a:fld>
             <a:endParaRPr lang="en-US"/>
           </a:p>
@@ -1896,7 +1896,7 @@
           <a:p>
             <a:fld id="{3E22BF2E-04DA-469E-97C5-BB68A0368813}" type="datetimeFigureOut">
               <a:rPr lang="en-US" smtClean="0"/>
-              <a:t>3/30/2026</a:t>
+              <a:t>10/15/26</a:t>
             </a:fld>
             <a:endParaRPr lang="en-US"/>
           </a:p>
@@ -2037,7 +2037,7 @@
           <a:p>
             <a:fld id="{3E22BF2E-04DA-469E-97C5-BB68A0368813}" type="datetimeFigureOut">
               <a:rPr lang="en-US" smtClean="0"/>
-              <a:t>3/30/2026</a:t>
+              <a:t>10/15/26</a:t>
             </a:fld>
             <a:endParaRPr lang="en-US"/>
           </a:p>
@@ -2150,7 +2150,7 @@
           <a:p>
             <a:fld id="{3E22BF2E-04DA-469E-97C5-BB68A0368813}" type="datetimeFigureOut">
               <a:rPr lang="en-US" smtClean="0"/>
-              <a:t>3/30/2026</a:t>
+              <a:t>10/15/26</a:t>
             </a:fld>
             <a:endParaRPr lang="en-US"/>
           </a:p>
@@ -2461,7 +2461,7 @@
           <a:p>
             <a:fld id="{3E22BF2E-04DA-469E-97C5-BB68A0368813}" type="datetimeFigureOut">
               <a:rPr lang="en-US" smtClean="0"/>
-              <a:t>3/30/2026</a:t>
+              <a:t>10/15/26</a:t>
             </a:fld>
             <a:endParaRPr lang="en-US"/>
           </a:p>
@@ -2749,7 +2749,7 @@
           <a:p>
             <a:fld id="{3E22BF2E-04DA-469E-97C5-BB68A0368813}" type="datetimeFigureOut">
               <a:rPr lang="en-US" smtClean="0"/>
-              <a:t>3/30/2026</a:t>
+              <a:t>10/15/26</a:t>
             </a:fld>
             <a:endParaRPr lang="en-US"/>
           </a:p>
@@ -2990,7 +2990,7 @@
           <a:p>
             <a:fld id="{3E22BF2E-04DA-469E-97C5-BB68A0368813}" type="datetimeFigureOut">
               <a:rPr lang="en-US" smtClean="0"/>
-              <a:t>3/30/2026</a:t>
+              <a:t>10/15/26</a:t>
             </a:fld>
             <a:endParaRPr lang="en-US"/>
           </a:p>
@@ -3691,92 +3691,56 @@
           </a:p>
         </p:txBody>
       </p:sp>
-      <p:sp>
-        <p:nvSpPr>
-          <p:cNvPr id="3" name="Subtitle 2">
+      <p:pic>
+        <p:nvPicPr>
+          <p:cNvPr id="6" name="Picture 5">
             <a:extLst>
               <a:ext uri="{FF2B5EF4-FFF2-40B4-BE49-F238E27FC236}">
-                <a16:creationId xmlns:a16="http://schemas.microsoft.com/office/drawing/2014/main" id="{7FFF10C2-8C10-0E89-D285-D614C36EEE69}"/>
+                <a16:creationId xmlns:a16="http://schemas.microsoft.com/office/drawing/2014/main" id="{8AD28C7D-14A3-CFEB-3DEC-2E01272844F2}"/>
+              </a:ext>
+              <a:ext uri="{C183D7F6-B498-43B3-948B-1728B52AA6E4}">
+                <adec:decorative xmlns:adec="http://schemas.microsoft.com/office/drawing/2017/decorative" val="1"/>
               </a:ext>
             </a:extLst>
           </p:cNvPr>
-          <p:cNvSpPr>
-            <a:spLocks noGrp="1"/>
-          </p:cNvSpPr>
-          <p:nvPr>
-            <p:ph type="subTitle" idx="1"/>
-          </p:nvPr>
-        </p:nvSpPr>
-        <p:spPr>
+          <p:cNvPicPr>
+            <a:picLocks noChangeAspect="1" noChangeArrowheads="1"/>
+          </p:cNvPicPr>
+          <p:nvPr/>
+        </p:nvPicPr>
+        <p:blipFill>
+          <a:blip r:embed="rId3">
+            <a:extLst>
+              <a:ext uri="{28A0092B-C50C-407E-A947-70E740481C1C}">
+                <a14:useLocalDpi xmlns:a14="http://schemas.microsoft.com/office/drawing/2010/main" val="0"/>
+              </a:ext>
+            </a:extLst>
+          </a:blip>
+          <a:srcRect/>
+          <a:stretch>
+            <a:fillRect/>
+          </a:stretch>
+        </p:blipFill>
+        <p:spPr bwMode="auto">
           <a:xfrm>
-            <a:off x="477982" y="4868822"/>
-            <a:ext cx="4169519" cy="1443894"/>
+            <a:off x="7857741" y="125210"/>
+            <a:ext cx="4182403" cy="1000945"/>
           </a:xfrm>
+          <a:prstGeom prst="rect">
+            <a:avLst/>
+          </a:prstGeom>
+          <a:noFill/>
+          <a:extLst>
+            <a:ext uri="{909E8E84-426E-40DD-AFC4-6F175D3DCCD1}">
+              <a14:hiddenFill xmlns:a14="http://schemas.microsoft.com/office/drawing/2010/main">
+                <a:solidFill>
+                  <a:srgbClr val="FFFFFF"/>
+                </a:solidFill>
+              </a14:hiddenFill>
+            </a:ext>
+          </a:extLst>
         </p:spPr>
-        <p:txBody>
-          <a:bodyPr>
-            <a:normAutofit fontScale="92500"/>
-          </a:bodyPr>
-          <a:lstStyle/>
-          <a:p>
-            <a:pPr algn="l"/>
-            <a:r>
-              <a:rPr lang="en-US" sz="1700" dirty="0">
-                <a:solidFill>
-                  <a:schemeClr val="bg1"/>
-                </a:solidFill>
-              </a:rPr>
-              <a:t>Michael Hahsler, SMU</a:t>
-            </a:r>
-          </a:p>
-          <a:p>
-            <a:pPr algn="l"/>
-            <a:r>
-              <a:rPr lang="en-US" sz="1300" dirty="0">
-                <a:solidFill>
-                  <a:schemeClr val="bg1"/>
-                </a:solidFill>
-              </a:rPr>
-              <a:t>With figures from Sutton/Barto*</a:t>
-            </a:r>
-          </a:p>
-          <a:p>
-            <a:pPr algn="l"/>
-            <a:endParaRPr lang="en-US" sz="1300" dirty="0">
-              <a:solidFill>
-                <a:schemeClr val="bg1"/>
-              </a:solidFill>
-            </a:endParaRPr>
-          </a:p>
-          <a:p>
-            <a:pPr algn="l"/>
-            <a:r>
-              <a:rPr lang="en-US" sz="1300" dirty="0">
-                <a:solidFill>
-                  <a:schemeClr val="bg1"/>
-                </a:solidFill>
-              </a:rPr>
-              <a:t>*Sutton and Barto, Reinforcement Learning: An Introduction, 2</a:t>
-            </a:r>
-            <a:r>
-              <a:rPr lang="en-US" sz="1300" baseline="30000" dirty="0">
-                <a:solidFill>
-                  <a:schemeClr val="bg1"/>
-                </a:solidFill>
-              </a:rPr>
-              <a:t>nd</a:t>
-            </a:r>
-            <a:r>
-              <a:rPr lang="en-US" sz="1300" dirty="0">
-                <a:solidFill>
-                  <a:schemeClr val="bg1"/>
-                </a:solidFill>
-              </a:rPr>
-              <a:t> edition, MIT Press, Cambridge, MA, 2018</a:t>
-            </a:r>
-          </a:p>
-        </p:txBody>
-      </p:sp>
+      </p:pic>
       <p:sp>
         <p:nvSpPr>
           <p:cNvPr id="14" name="Rectangle 13">
@@ -3938,88 +3902,104 @@
           </a:p>
         </p:txBody>
       </p:sp>
-      <p:pic>
-        <p:nvPicPr>
-          <p:cNvPr id="4" name="object 23">
-            <a:hlinkClick r:id="rId3"/>
+      <p:sp>
+        <p:nvSpPr>
+          <p:cNvPr id="3" name="Subtitle 2">
             <a:extLst>
               <a:ext uri="{FF2B5EF4-FFF2-40B4-BE49-F238E27FC236}">
-                <a16:creationId xmlns:a16="http://schemas.microsoft.com/office/drawing/2014/main" id="{3CBD6548-3D4E-9A40-CA35-355261D4E92C}"/>
+                <a16:creationId xmlns:a16="http://schemas.microsoft.com/office/drawing/2014/main" id="{7FFF10C2-8C10-0E89-D285-D614C36EEE69}"/>
+              </a:ext>
+              <a:ext uri="{C183D7F6-B498-43B3-948B-1728B52AA6E4}">
+                <adec:decorative xmlns:adec="http://schemas.microsoft.com/office/drawing/2017/decorative" val="1"/>
               </a:ext>
             </a:extLst>
           </p:cNvPr>
-          <p:cNvPicPr/>
-          <p:nvPr/>
-        </p:nvPicPr>
-        <p:blipFill>
-          <a:blip r:embed="rId4" cstate="print"/>
-          <a:stretch>
-            <a:fillRect/>
-          </a:stretch>
-        </p:blipFill>
+          <p:cNvSpPr>
+            <a:spLocks noGrp="1"/>
+          </p:cNvSpPr>
+          <p:nvPr>
+            <p:ph type="subTitle" idx="1"/>
+          </p:nvPr>
+        </p:nvSpPr>
         <p:spPr>
           <a:xfrm>
-            <a:off x="10961016" y="6265038"/>
-            <a:ext cx="1037459" cy="383579"/>
+            <a:off x="477982" y="4868822"/>
+            <a:ext cx="4169519" cy="1443894"/>
           </a:xfrm>
-          <a:prstGeom prst="rect">
-            <a:avLst/>
-          </a:prstGeom>
         </p:spPr>
-      </p:pic>
-      <p:pic>
-        <p:nvPicPr>
-          <p:cNvPr id="6" name="Picture 5">
-            <a:extLst>
-              <a:ext uri="{FF2B5EF4-FFF2-40B4-BE49-F238E27FC236}">
-                <a16:creationId xmlns:a16="http://schemas.microsoft.com/office/drawing/2014/main" id="{8AD28C7D-14A3-CFEB-3DEC-2E01272844F2}"/>
-              </a:ext>
-            </a:extLst>
-          </p:cNvPr>
-          <p:cNvPicPr>
-            <a:picLocks noChangeAspect="1" noChangeArrowheads="1"/>
-          </p:cNvPicPr>
-          <p:nvPr/>
-        </p:nvPicPr>
-        <p:blipFill>
-          <a:blip r:embed="rId5">
-            <a:extLst>
-              <a:ext uri="{28A0092B-C50C-407E-A947-70E740481C1C}">
-                <a14:useLocalDpi xmlns:a14="http://schemas.microsoft.com/office/drawing/2010/main" val="0"/>
-              </a:ext>
-            </a:extLst>
-          </a:blip>
-          <a:srcRect/>
-          <a:stretch>
-            <a:fillRect/>
-          </a:stretch>
-        </p:blipFill>
-        <p:spPr bwMode="auto">
-          <a:xfrm>
-            <a:off x="7857741" y="125210"/>
-            <a:ext cx="4182403" cy="1000945"/>
-          </a:xfrm>
-          <a:prstGeom prst="rect">
-            <a:avLst/>
-          </a:prstGeom>
-          <a:noFill/>
-          <a:extLst>
-            <a:ext uri="{909E8E84-426E-40DD-AFC4-6F175D3DCCD1}">
-              <a14:hiddenFill xmlns:a14="http://schemas.microsoft.com/office/drawing/2010/main">
+        <p:txBody>
+          <a:bodyPr>
+            <a:normAutofit fontScale="92500"/>
+          </a:bodyPr>
+          <a:lstStyle/>
+          <a:p>
+            <a:pPr algn="l"/>
+            <a:r>
+              <a:rPr lang="en-US" sz="1700" dirty="0">
                 <a:solidFill>
-                  <a:srgbClr val="FFFFFF"/>
+                  <a:schemeClr val="bg1"/>
                 </a:solidFill>
-              </a14:hiddenFill>
-            </a:ext>
-          </a:extLst>
-        </p:spPr>
-      </p:pic>
+              </a:rPr>
+              <a:t>Michael Hahsler, SMU</a:t>
+            </a:r>
+          </a:p>
+          <a:p>
+            <a:pPr algn="l"/>
+            <a:r>
+              <a:rPr lang="en-US" sz="1300" dirty="0">
+                <a:solidFill>
+                  <a:schemeClr val="bg1"/>
+                </a:solidFill>
+              </a:rPr>
+              <a:t>With figures from Sutton/Barto*</a:t>
+            </a:r>
+          </a:p>
+          <a:p>
+            <a:pPr algn="l"/>
+            <a:endParaRPr lang="en-US" sz="1300" dirty="0">
+              <a:solidFill>
+                <a:schemeClr val="bg1"/>
+              </a:solidFill>
+            </a:endParaRPr>
+          </a:p>
+          <a:p>
+            <a:pPr algn="l"/>
+            <a:r>
+              <a:rPr lang="en-US" sz="1300" dirty="0">
+                <a:solidFill>
+                  <a:schemeClr val="bg1"/>
+                </a:solidFill>
+              </a:rPr>
+              <a:t>*Sutton and Barto, Reinforcement Learning: An Introduction, 2</a:t>
+            </a:r>
+            <a:r>
+              <a:rPr lang="en-US" sz="1300" baseline="30000" dirty="0">
+                <a:solidFill>
+                  <a:schemeClr val="bg1"/>
+                </a:solidFill>
+              </a:rPr>
+              <a:t>nd</a:t>
+            </a:r>
+            <a:r>
+              <a:rPr lang="en-US" sz="1300" dirty="0">
+                <a:solidFill>
+                  <a:schemeClr val="bg1"/>
+                </a:solidFill>
+              </a:rPr>
+              <a:t> edition, MIT Press, Cambridge, MA, 2018</a:t>
+            </a:r>
+          </a:p>
+        </p:txBody>
+      </p:sp>
       <p:grpSp>
         <p:nvGrpSpPr>
           <p:cNvPr id="7" name="Group 6">
             <a:extLst>
               <a:ext uri="{FF2B5EF4-FFF2-40B4-BE49-F238E27FC236}">
                 <a16:creationId xmlns:a16="http://schemas.microsoft.com/office/drawing/2014/main" id="{DA1C6744-BD97-2C10-F393-A0B726F71E7A}"/>
+              </a:ext>
+              <a:ext uri="{C183D7F6-B498-43B3-948B-1728B52AA6E4}">
+                <adec:decorative xmlns:adec="http://schemas.microsoft.com/office/drawing/2017/decorative" val="1"/>
               </a:ext>
             </a:extLst>
           </p:cNvPr>
@@ -4041,6 +4021,9 @@
                 <a:ext uri="{FF2B5EF4-FFF2-40B4-BE49-F238E27FC236}">
                   <a16:creationId xmlns:a16="http://schemas.microsoft.com/office/drawing/2014/main" id="{2F5FC233-1ACF-0EE9-5B1F-F0A29270EECF}"/>
                 </a:ext>
+                <a:ext uri="{C183D7F6-B498-43B3-948B-1728B52AA6E4}">
+                  <adec:decorative xmlns:adec="http://schemas.microsoft.com/office/drawing/2017/decorative" val="1"/>
+                </a:ext>
               </a:extLst>
             </p:cNvPr>
             <p:cNvPicPr>
@@ -4049,7 +4032,7 @@
             <p:nvPr/>
           </p:nvPicPr>
           <p:blipFill>
-            <a:blip r:embed="rId6"/>
+            <a:blip r:embed="rId4"/>
             <a:stretch>
               <a:fillRect/>
             </a:stretch>
@@ -4066,7 +4049,7 @@
         </p:pic>
         <p:pic>
           <p:nvPicPr>
-            <p:cNvPr id="9" name="Picture 8">
+            <p:cNvPr id="9" name="Picture 8" descr="QR code linking to the online course material.">
               <a:extLst>
                 <a:ext uri="{FF2B5EF4-FFF2-40B4-BE49-F238E27FC236}">
                   <a16:creationId xmlns:a16="http://schemas.microsoft.com/office/drawing/2014/main" id="{26CB3135-CE78-1137-FBA3-29AA8592D8FA}"/>
@@ -4079,7 +4062,7 @@
             <p:nvPr/>
           </p:nvPicPr>
           <p:blipFill>
-            <a:blip r:embed="rId7"/>
+            <a:blip r:embed="rId5"/>
             <a:stretch>
               <a:fillRect/>
             </a:stretch>
@@ -4095,6 +4078,38 @@
           </p:spPr>
         </p:pic>
       </p:grpSp>
+      <p:pic>
+        <p:nvPicPr>
+          <p:cNvPr id="4" name="object 23">
+            <a:hlinkClick r:id="rId6"/>
+            <a:extLst>
+              <a:ext uri="{FF2B5EF4-FFF2-40B4-BE49-F238E27FC236}">
+                <a16:creationId xmlns:a16="http://schemas.microsoft.com/office/drawing/2014/main" id="{3CBD6548-3D4E-9A40-CA35-355261D4E92C}"/>
+              </a:ext>
+              <a:ext uri="{C183D7F6-B498-43B3-948B-1728B52AA6E4}">
+                <adec:decorative xmlns:adec="http://schemas.microsoft.com/office/drawing/2017/decorative" val="1"/>
+              </a:ext>
+            </a:extLst>
+          </p:cNvPr>
+          <p:cNvPicPr/>
+          <p:nvPr/>
+        </p:nvPicPr>
+        <p:blipFill>
+          <a:blip r:embed="rId7" cstate="print"/>
+          <a:stretch>
+            <a:fillRect/>
+          </a:stretch>
+        </p:blipFill>
+        <p:spPr>
+          <a:xfrm>
+            <a:off x="10961016" y="6265038"/>
+            <a:ext cx="1037459" cy="383579"/>
+          </a:xfrm>
+          <a:prstGeom prst="rect">
+            <a:avLst/>
+          </a:prstGeom>
+        </p:spPr>
+      </p:pic>
     </p:spTree>
     <p:extLst>
       <p:ext uri="{BB962C8B-B14F-4D97-AF65-F5344CB8AC3E}">
@@ -4160,7 +4175,37 @@
       </p:sp>
       <p:pic>
         <p:nvPicPr>
-          <p:cNvPr id="4" name="Picture 3">
+          <p:cNvPr id="2" name="Picture 1" descr="Dyna cycle (Sutton and Barto Figure 8.1): acting turns the value/policy into experience; experience improves the value/policy directly (direct RL) and is also used for model learning; the model is then used for planning, which improves the value/policy again.">
+            <a:extLst>
+              <a:ext uri="{FF2B5EF4-FFF2-40B4-BE49-F238E27FC236}">
+                <a16:creationId xmlns:a16="http://schemas.microsoft.com/office/drawing/2014/main" id="{C1666A5B-CCA6-7A12-3D37-72BB0409CA5C}"/>
+              </a:ext>
+            </a:extLst>
+          </p:cNvPr>
+          <p:cNvPicPr>
+            <a:picLocks noChangeAspect="1"/>
+          </p:cNvPicPr>
+          <p:nvPr/>
+        </p:nvPicPr>
+        <p:blipFill>
+          <a:blip r:embed="rId2"/>
+          <a:stretch>
+            <a:fillRect/>
+          </a:stretch>
+        </p:blipFill>
+        <p:spPr>
+          <a:xfrm>
+            <a:off x="9315449" y="185109"/>
+            <a:ext cx="2597348" cy="2051905"/>
+          </a:xfrm>
+          <a:prstGeom prst="rect">
+            <a:avLst/>
+          </a:prstGeom>
+        </p:spPr>
+      </p:pic>
+      <p:pic>
+        <p:nvPicPr>
+          <p:cNvPr id="4" name="Picture 3" descr="Dyna maze results (Sutton and Barto Figure 8.2). Inset: a 6 by 9 grid maze with start S on the left, goal G at the top right, a few gray wall blocks, and four possible actions, up, down, left and right. Line chart of steps per episode (14 to 800) against episodes (2 to 50): with 0 planning steps (direct RL only, blue) the agent needs hundreds of steps early on and takes about 30 episodes to settle near the optimum of 14 steps; with 5 planning steps (green) it reaches near-optimal paths within about 5 episodes; with 50 planning steps (red) within about 3 episodes.">
             <a:extLst>
               <a:ext uri="{FF2B5EF4-FFF2-40B4-BE49-F238E27FC236}">
                 <a16:creationId xmlns:a16="http://schemas.microsoft.com/office/drawing/2014/main" id="{25CE6196-0C58-18A7-BA50-D3B376B607E3}"/>
@@ -4173,7 +4218,7 @@
           <p:nvPr/>
         </p:nvPicPr>
         <p:blipFill>
-          <a:blip r:embed="rId2"/>
+          <a:blip r:embed="rId3"/>
           <a:stretch>
             <a:fillRect/>
           </a:stretch>
@@ -4192,7 +4237,7 @@
         <mc:Choice Requires="a14">
           <p:sp>
             <p:nvSpPr>
-              <p:cNvPr id="6" name="Content Placeholder 5">
+              <p:cNvPr id="6" name="Content Placeholder 5" descr="Benefit: Adding planning speeds learning by reusing sampled experience. Issues: Planning is a problem if the model is wrong:. Based on an insufficient number of samples. p -function approximation is not great. Environment changes. Luckily, Dyna quickly corrects overly optimistic predictions since they will be selected for the next real action in the direct RL step. For changing environments:. Keep exploring. Keep track of how out-of-date estimates are. I.e., for how long each action/state combination was not tried">
                 <a:extLst>
                   <a:ext uri="{FF2B5EF4-FFF2-40B4-BE49-F238E27FC236}">
                     <a16:creationId xmlns:a16="http://schemas.microsoft.com/office/drawing/2014/main" id="{5C0268D5-3842-005A-9D87-7A037B2EC858}"/>
@@ -4309,7 +4354,7 @@
         <mc:Fallback xmlns="">
           <p:sp>
             <p:nvSpPr>
-              <p:cNvPr id="6" name="Content Placeholder 5">
+              <p:cNvPr id="6" name="Content Placeholder 5" descr="Benefit: Adding planning speeds learning by reusing sampled experience. Issues: Planning is a problem if the model is wrong:. Based on an insufficient number of samples. p -function approximation is not great. Environment changes. Luckily, Dyna quickly corrects overly optimistic predictions since they will be selected for the next real action in the direct RL step. For changing environments:. Keep exploring. Keep track of how out-of-date estimates are. I.e., for how long each action/state combination was not tried">
                 <a:extLst>
                   <a:ext uri="{FF2B5EF4-FFF2-40B4-BE49-F238E27FC236}">
                     <a16:creationId xmlns:a16="http://schemas.microsoft.com/office/drawing/2014/main" id="{5C0268D5-3842-005A-9D87-7A037B2EC858}"/>
@@ -4329,7 +4374,7 @@
                 <a:ext cx="5623420" cy="4221072"/>
               </a:xfrm>
               <a:blipFill>
-                <a:blip r:embed="rId3"/>
+                <a:blip r:embed="rId4"/>
                 <a:stretch>
                   <a:fillRect l="-651" t="-2312"/>
                 </a:stretch>
@@ -4350,36 +4395,6 @@
           </p:sp>
         </mc:Fallback>
       </mc:AlternateContent>
-      <p:pic>
-        <p:nvPicPr>
-          <p:cNvPr id="2" name="Picture 1">
-            <a:extLst>
-              <a:ext uri="{FF2B5EF4-FFF2-40B4-BE49-F238E27FC236}">
-                <a16:creationId xmlns:a16="http://schemas.microsoft.com/office/drawing/2014/main" id="{C1666A5B-CCA6-7A12-3D37-72BB0409CA5C}"/>
-              </a:ext>
-            </a:extLst>
-          </p:cNvPr>
-          <p:cNvPicPr>
-            <a:picLocks noChangeAspect="1"/>
-          </p:cNvPicPr>
-          <p:nvPr/>
-        </p:nvPicPr>
-        <p:blipFill>
-          <a:blip r:embed="rId4"/>
-          <a:stretch>
-            <a:fillRect/>
-          </a:stretch>
-        </p:blipFill>
-        <p:spPr>
-          <a:xfrm>
-            <a:off x="9315449" y="185109"/>
-            <a:ext cx="2597348" cy="2051905"/>
-          </a:xfrm>
-          <a:prstGeom prst="rect">
-            <a:avLst/>
-          </a:prstGeom>
-        </p:spPr>
-      </p:pic>
     </p:spTree>
     <p:extLst>
       <p:ext uri="{BB962C8B-B14F-4D97-AF65-F5344CB8AC3E}">
@@ -4921,41 +4936,11 @@
           </a:p>
         </p:txBody>
       </p:sp>
-      <p:pic>
-        <p:nvPicPr>
-          <p:cNvPr id="5" name="Picture 4">
-            <a:extLst>
-              <a:ext uri="{FF2B5EF4-FFF2-40B4-BE49-F238E27FC236}">
-                <a16:creationId xmlns:a16="http://schemas.microsoft.com/office/drawing/2014/main" id="{D398651C-D732-C69E-3D6A-B222E9D993EA}"/>
-              </a:ext>
-            </a:extLst>
-          </p:cNvPr>
-          <p:cNvPicPr>
-            <a:picLocks noChangeAspect="1"/>
-          </p:cNvPicPr>
-          <p:nvPr/>
-        </p:nvPicPr>
-        <p:blipFill>
-          <a:blip r:embed="rId2"/>
-          <a:stretch>
-            <a:fillRect/>
-          </a:stretch>
-        </p:blipFill>
-        <p:spPr>
-          <a:xfrm>
-            <a:off x="7674723" y="302003"/>
-            <a:ext cx="4049567" cy="6253993"/>
-          </a:xfrm>
-          <a:prstGeom prst="rect">
-            <a:avLst/>
-          </a:prstGeom>
-        </p:spPr>
-      </p:pic>
       <mc:AlternateContent xmlns:mc="http://schemas.openxmlformats.org/markup-compatibility/2006" xmlns:a14="http://schemas.microsoft.com/office/drawing/2010/main">
         <mc:Choice Requires="a14">
           <p:sp>
             <p:nvSpPr>
-              <p:cNvPr id="3" name="Content Placeholder 2">
+              <p:cNvPr id="3" name="Content Placeholder 2" descr="Expected updates (DP) Q (s,a) gets the sum over s prime,r, of p (s prime,r given s,a) [r plus gamma max over a prime, of Q(s prime,a prime)]. Sample updates (on-step TD) Q (s,a) gets Q (s,a) plus alpha [R plus gamma max over a prime, of Q (s prime,a) minus Q(s,a)]. Sampling adds variance due to the sample error but is computationally much cheaper">
                 <a:extLst>
                   <a:ext uri="{FF2B5EF4-FFF2-40B4-BE49-F238E27FC236}">
                     <a16:creationId xmlns:a16="http://schemas.microsoft.com/office/drawing/2014/main" id="{16DB3DD2-F232-A22F-AD76-91496286CEF6}"/>
@@ -5163,7 +5148,7 @@
                             <m:begChr m:val="["/>
                             <m:endChr m:val="]"/>
                             <m:ctrlPr>
-                              <a:rPr lang="en-US" sz="2400" b="0" i="1" dirty="0" smtClean="0">
+                              <a:rPr lang="en-US" sz="2400" i="1" dirty="0">
                                 <a:latin typeface="Cambria Math" panose="02040503050406030204" pitchFamily="18" charset="0"/>
                               </a:rPr>
                             </m:ctrlPr>
@@ -5199,7 +5184,7 @@
                                 <m:limLow>
                                   <m:limLowPr>
                                     <m:ctrlPr>
-                                      <a:rPr lang="en-US" sz="2400" i="1" dirty="0">
+                                      <a:rPr lang="en-US" sz="2400" dirty="0">
                                         <a:latin typeface="Cambria Math" panose="02040503050406030204" pitchFamily="18" charset="0"/>
                                       </a:rPr>
                                     </m:ctrlPr>
@@ -5477,7 +5462,7 @@
                             <m:limLow>
                               <m:limLowPr>
                                 <m:ctrlPr>
-                                  <a:rPr lang="en-US" sz="2400" b="0" i="1" smtClean="0">
+                                  <a:rPr lang="en-US" sz="2400" b="0" i="0" smtClean="0">
                                     <a:latin typeface="Cambria Math" panose="02040503050406030204" pitchFamily="18" charset="0"/>
                                   </a:rPr>
                                 </m:ctrlPr>
@@ -5632,7 +5617,7 @@
         <mc:Fallback xmlns="">
           <p:sp>
             <p:nvSpPr>
-              <p:cNvPr id="3" name="Content Placeholder 2">
+              <p:cNvPr id="3" name="Content Placeholder 2" descr="Expected updates (DP) Q (s,a) gets the sum over s prime,r, of p (s prime,r given s,a) [r plus gamma max over a prime, of Q(s prime,a prime)]. Sample updates (on-step TD) Q (s,a) gets Q (s,a) plus alpha [R plus gamma max over a prime, of Q (s prime,a) minus Q(s,a)]. Sampling adds variance due to the sample error but is computationally much cheaper">
                 <a:extLst>
                   <a:ext uri="{FF2B5EF4-FFF2-40B4-BE49-F238E27FC236}">
                     <a16:creationId xmlns:a16="http://schemas.microsoft.com/office/drawing/2014/main" id="{16DB3DD2-F232-A22F-AD76-91496286CEF6}"/>
@@ -5673,6 +5658,36 @@
           </p:sp>
         </mc:Fallback>
       </mc:AlternateContent>
+      <p:pic>
+        <p:nvPicPr>
+          <p:cNvPr id="5" name="Picture 4" descr="Table of backup diagrams (Sutton and Barto Figure 8.6). Rows: the value estimated, v pi(s), v star(s), q pi(s, a) and q star(s, a). Column 1, expected updates (DP): policy evaluation, value iteration (with a max over actions), q-policy evaluation and q-value iteration (with a max at the next state); each branches over every action and every next state. Column 2, sample updates (one-step TD): TD(0) for v pi (s, A, R, S′), no sample update for v star, Sarsa for q pi (s, a, R, S′, A′) and Q-learning for q star (s, a, R, S′, then a max over a′); each follows a single sampled path.">
+            <a:extLst>
+              <a:ext uri="{FF2B5EF4-FFF2-40B4-BE49-F238E27FC236}">
+                <a16:creationId xmlns:a16="http://schemas.microsoft.com/office/drawing/2014/main" id="{D398651C-D732-C69E-3D6A-B222E9D993EA}"/>
+              </a:ext>
+            </a:extLst>
+          </p:cNvPr>
+          <p:cNvPicPr>
+            <a:picLocks noChangeAspect="1"/>
+          </p:cNvPicPr>
+          <p:nvPr/>
+        </p:nvPicPr>
+        <p:blipFill>
+          <a:blip r:embed="rId4"/>
+          <a:stretch>
+            <a:fillRect/>
+          </a:stretch>
+        </p:blipFill>
+        <p:spPr>
+          <a:xfrm>
+            <a:off x="7674723" y="302003"/>
+            <a:ext cx="4049567" cy="6253993"/>
+          </a:xfrm>
+          <a:prstGeom prst="rect">
+            <a:avLst/>
+          </a:prstGeom>
+        </p:spPr>
+      </p:pic>
     </p:spTree>
     <p:extLst>
       <p:ext uri="{BB962C8B-B14F-4D97-AF65-F5344CB8AC3E}">
@@ -5796,36 +5811,723 @@
           <a:chExt cx="0" cy="0"/>
         </a:xfrm>
       </p:grpSpPr>
-      <p:pic>
-        <p:nvPicPr>
-          <p:cNvPr id="7" name="Picture 6">
+      <p:sp>
+        <p:nvSpPr>
+          <p:cNvPr id="8" name="Speech Bubble: Rectangle with Corners Rounded 7">
             <a:extLst>
               <a:ext uri="{FF2B5EF4-FFF2-40B4-BE49-F238E27FC236}">
-                <a16:creationId xmlns:a16="http://schemas.microsoft.com/office/drawing/2014/main" id="{3A6356EF-E592-3AC7-97BD-5A89144E7797}"/>
+                <a16:creationId xmlns:a16="http://schemas.microsoft.com/office/drawing/2014/main" id="{9CBFCEF7-963A-4187-6A15-D0E256203C8E}"/>
+              </a:ext>
+              <a:ext uri="{C183D7F6-B498-43B3-948B-1728B52AA6E4}">
+                <adec:decorative xmlns:adec="http://schemas.microsoft.com/office/drawing/2017/decorative" val="1"/>
               </a:ext>
             </a:extLst>
           </p:cNvPr>
-          <p:cNvPicPr>
-            <a:picLocks noChangeAspect="1"/>
-          </p:cNvPicPr>
+          <p:cNvSpPr/>
           <p:nvPr/>
-        </p:nvPicPr>
-        <p:blipFill>
-          <a:blip r:embed="rId2"/>
-          <a:stretch>
-            <a:fillRect/>
-          </a:stretch>
-        </p:blipFill>
+        </p:nvSpPr>
         <p:spPr>
           <a:xfrm>
-            <a:off x="5155917" y="2076147"/>
-            <a:ext cx="6456730" cy="3213065"/>
+            <a:off x="8214611" y="5561579"/>
+            <a:ext cx="3247086" cy="359863"/>
+          </a:xfrm>
+          <a:prstGeom prst="wedgeRoundRectCallout">
+            <a:avLst>
+              <a:gd name="adj1" fmla="val 37593"/>
+              <a:gd name="adj2" fmla="val -381818"/>
+              <a:gd name="adj3" fmla="val 16667"/>
+            </a:avLst>
+          </a:prstGeom>
+        </p:spPr>
+        <p:style>
+          <a:lnRef idx="2">
+            <a:schemeClr val="accent1">
+              <a:shade val="15000"/>
+            </a:schemeClr>
+          </a:lnRef>
+          <a:fillRef idx="1">
+            <a:schemeClr val="accent1"/>
+          </a:fillRef>
+          <a:effectRef idx="0">
+            <a:schemeClr val="accent1"/>
+          </a:effectRef>
+          <a:fontRef idx="minor">
+            <a:schemeClr val="lt1"/>
+          </a:fontRef>
+        </p:style>
+        <p:txBody>
+          <a:bodyPr rtlCol="0" anchor="ctr"/>
+          <a:lstStyle/>
+          <a:p>
+            <a:pPr algn="ctr"/>
+            <a:r>
+              <a:rPr lang="en-US" dirty="0"/>
+              <a:t>2. Estimate leaf node values</a:t>
+            </a:r>
+          </a:p>
+        </p:txBody>
+      </p:sp>
+      <p:sp>
+        <p:nvSpPr>
+          <p:cNvPr id="10" name="Arrow: Down 9">
+            <a:extLst>
+              <a:ext uri="{FF2B5EF4-FFF2-40B4-BE49-F238E27FC236}">
+                <a16:creationId xmlns:a16="http://schemas.microsoft.com/office/drawing/2014/main" id="{E4EFD103-2544-1279-0631-58B4728E2AD2}"/>
+              </a:ext>
+              <a:ext uri="{C183D7F6-B498-43B3-948B-1728B52AA6E4}">
+                <adec:decorative xmlns:adec="http://schemas.microsoft.com/office/drawing/2017/decorative" val="1"/>
+              </a:ext>
+            </a:extLst>
+          </p:cNvPr>
+          <p:cNvSpPr/>
+          <p:nvPr/>
+        </p:nvSpPr>
+        <p:spPr>
+          <a:xfrm flipV="1">
+            <a:off x="11154283" y="2248525"/>
+            <a:ext cx="781777" cy="2764966"/>
+          </a:xfrm>
+          <a:prstGeom prst="downArrow">
+            <a:avLst/>
+          </a:prstGeom>
+        </p:spPr>
+        <p:style>
+          <a:lnRef idx="2">
+            <a:schemeClr val="accent1">
+              <a:shade val="15000"/>
+            </a:schemeClr>
+          </a:lnRef>
+          <a:fillRef idx="1">
+            <a:schemeClr val="accent1"/>
+          </a:fillRef>
+          <a:effectRef idx="0">
+            <a:schemeClr val="accent1"/>
+          </a:effectRef>
+          <a:fontRef idx="minor">
+            <a:schemeClr val="lt1"/>
+          </a:fontRef>
+        </p:style>
+        <p:txBody>
+          <a:bodyPr vert="vert" rtlCol="0" anchor="ctr"/>
+          <a:lstStyle/>
+          <a:p>
+            <a:pPr algn="ctr"/>
+            <a:r>
+              <a:rPr lang="en-US" dirty="0"/>
+              <a:t>3. backup</a:t>
+            </a:r>
+          </a:p>
+        </p:txBody>
+      </p:sp>
+      <p:sp>
+        <p:nvSpPr>
+          <p:cNvPr id="11" name="Speech Bubble: Rectangle with Corners Rounded 10">
+            <a:extLst>
+              <a:ext uri="{FF2B5EF4-FFF2-40B4-BE49-F238E27FC236}">
+                <a16:creationId xmlns:a16="http://schemas.microsoft.com/office/drawing/2014/main" id="{25F441F9-26AE-4857-0003-6C4FFDACE6EE}"/>
+              </a:ext>
+              <a:ext uri="{C183D7F6-B498-43B3-948B-1728B52AA6E4}">
+                <adec:decorative xmlns:adec="http://schemas.microsoft.com/office/drawing/2017/decorative" val="1"/>
+              </a:ext>
+            </a:extLst>
+          </p:cNvPr>
+          <p:cNvSpPr/>
+          <p:nvPr/>
+        </p:nvSpPr>
+        <p:spPr>
+          <a:xfrm>
+            <a:off x="7689758" y="901563"/>
+            <a:ext cx="2938744" cy="665202"/>
+          </a:xfrm>
+          <a:prstGeom prst="wedgeRoundRectCallout">
+            <a:avLst>
+              <a:gd name="adj1" fmla="val -29245"/>
+              <a:gd name="adj2" fmla="val 141648"/>
+              <a:gd name="adj3" fmla="val 16667"/>
+            </a:avLst>
+          </a:prstGeom>
+        </p:spPr>
+        <p:style>
+          <a:lnRef idx="2">
+            <a:schemeClr val="accent1">
+              <a:shade val="15000"/>
+            </a:schemeClr>
+          </a:lnRef>
+          <a:fillRef idx="1">
+            <a:schemeClr val="accent1"/>
+          </a:fillRef>
+          <a:effectRef idx="0">
+            <a:schemeClr val="accent1"/>
+          </a:effectRef>
+          <a:fontRef idx="minor">
+            <a:schemeClr val="lt1"/>
+          </a:fontRef>
+        </p:style>
+        <p:txBody>
+          <a:bodyPr rtlCol="0" anchor="ctr"/>
+          <a:lstStyle/>
+          <a:p>
+            <a:pPr algn="ctr"/>
+            <a:r>
+              <a:rPr lang="en-US" dirty="0"/>
+              <a:t>4. Pick best action leasing to largest Q-value</a:t>
+            </a:r>
+          </a:p>
+        </p:txBody>
+      </p:sp>
+      <mc:AlternateContent xmlns:mc="http://schemas.openxmlformats.org/markup-compatibility/2006">
+        <mc:Choice xmlns:a14="http://schemas.microsoft.com/office/drawing/2010/main" Requires="a14">
+          <p:sp>
+            <p:nvSpPr>
+              <p:cNvPr id="2" name="TextBox 1">
+                <a:extLst>
+                  <a:ext uri="{FF2B5EF4-FFF2-40B4-BE49-F238E27FC236}">
+                    <a16:creationId xmlns:a16="http://schemas.microsoft.com/office/drawing/2014/main" id="{5A54AD96-0F25-00BD-1813-50A2CBD3189F}"/>
+                  </a:ext>
+                  <a:ext uri="{C183D7F6-B498-43B3-948B-1728B52AA6E4}">
+                    <adec:decorative xmlns:adec="http://schemas.microsoft.com/office/drawing/2017/decorative" val="1"/>
+                  </a:ext>
+                </a:extLst>
+              </p:cNvPr>
+              <p:cNvSpPr txBox="1"/>
+              <p:nvPr/>
+            </p:nvSpPr>
+            <p:spPr>
+              <a:xfrm>
+                <a:off x="8829206" y="2149381"/>
+                <a:ext cx="202368" cy="369332"/>
+              </a:xfrm>
+              <a:prstGeom prst="rect">
+                <a:avLst/>
+              </a:prstGeom>
+              <a:noFill/>
+            </p:spPr>
+            <p:txBody>
+              <a:bodyPr wrap="square" rtlCol="0">
+                <a:spAutoFit/>
+              </a:bodyPr>
+              <a:lstStyle/>
+              <a:p>
+                <a:pPr/>
+                <a14:m>
+                  <m:oMathPara xmlns:m="http://schemas.openxmlformats.org/officeDocument/2006/math">
+                    <m:oMath>
+                      <m:r>
+                        <a:rPr lang="en-US" b="0" i="1" smtClean="0">
+                          <a:latin typeface="Cambria Math" panose="02040503050406030204" pitchFamily="18" charset="0"/>
+                        </a:rPr>
+                        <m:t>𝑅</m:t>
+                      </m:r>
+                    </m:oMath>
+                  </m:oMathPara>
+                </a14:m>
+                <a:endParaRPr lang="en-US" dirty="0"/>
+              </a:p>
+            </p:txBody>
+          </p:sp>
+        </mc:Choice>
+        <mc:Fallback>
+          <p:sp>
+            <p:nvSpPr>
+              <p:cNvPr id="2" name="TextBox 1">
+                <a:extLst>
+                  <a:ext uri="{FF2B5EF4-FFF2-40B4-BE49-F238E27FC236}">
+                    <a16:creationId xmlns:a16="http://schemas.microsoft.com/office/drawing/2014/main" id="{5A54AD96-0F25-00BD-1813-50A2CBD3189F}"/>
+                  </a:ext>
+                  <a:ext uri="{C183D7F6-B498-43B3-948B-1728B52AA6E4}">
+                    <adec:decorative xmlns:adec="http://schemas.microsoft.com/office/drawing/2017/decorative" val="1"/>
+                  </a:ext>
+                </a:extLst>
+              </p:cNvPr>
+              <p:cNvSpPr txBox="1">
+                <a:spLocks noRot="1" noChangeAspect="1" noMove="1" noResize="1" noEditPoints="1" noAdjustHandles="1" noChangeArrowheads="1" noChangeShapeType="1" noTextEdit="1"/>
+              </p:cNvSpPr>
+              <p:nvPr/>
+            </p:nvSpPr>
+            <p:spPr>
+              <a:xfrm>
+                <a:off x="8829206" y="2149381"/>
+                <a:ext cx="202368" cy="369332"/>
+              </a:xfrm>
+              <a:prstGeom prst="rect">
+                <a:avLst/>
+              </a:prstGeom>
+              <a:blipFill>
+                <a:blip r:embed="rId2"/>
+                <a:stretch>
+                  <a:fillRect r="-47059"/>
+                </a:stretch>
+              </a:blipFill>
+            </p:spPr>
+            <p:txBody>
+              <a:bodyPr/>
+              <a:lstStyle/>
+              <a:p>
+                <a:r>
+                  <a:rPr lang="en-US">
+                    <a:noFill/>
+                  </a:rPr>
+                  <a:t> </a:t>
+                </a:r>
+              </a:p>
+            </p:txBody>
+          </p:sp>
+        </mc:Fallback>
+      </mc:AlternateContent>
+      <mc:AlternateContent xmlns:mc="http://schemas.openxmlformats.org/markup-compatibility/2006">
+        <mc:Choice xmlns:a14="http://schemas.microsoft.com/office/drawing/2010/main" Requires="a14">
+          <p:sp>
+            <p:nvSpPr>
+              <p:cNvPr id="6" name="TextBox 5">
+                <a:extLst>
+                  <a:ext uri="{FF2B5EF4-FFF2-40B4-BE49-F238E27FC236}">
+                    <a16:creationId xmlns:a16="http://schemas.microsoft.com/office/drawing/2014/main" id="{F9B57E89-CCA6-FDBE-3927-B474DEB79AEE}"/>
+                  </a:ext>
+                  <a:ext uri="{C183D7F6-B498-43B3-948B-1728B52AA6E4}">
+                    <adec:decorative xmlns:adec="http://schemas.microsoft.com/office/drawing/2017/decorative" val="1"/>
+                  </a:ext>
+                </a:extLst>
+              </p:cNvPr>
+              <p:cNvSpPr txBox="1"/>
+              <p:nvPr/>
+            </p:nvSpPr>
+            <p:spPr>
+              <a:xfrm>
+                <a:off x="9918491" y="2518713"/>
+                <a:ext cx="202368" cy="369332"/>
+              </a:xfrm>
+              <a:prstGeom prst="rect">
+                <a:avLst/>
+              </a:prstGeom>
+              <a:noFill/>
+            </p:spPr>
+            <p:txBody>
+              <a:bodyPr wrap="square" rtlCol="0">
+                <a:spAutoFit/>
+              </a:bodyPr>
+              <a:lstStyle/>
+              <a:p>
+                <a:pPr/>
+                <a14:m>
+                  <m:oMathPara xmlns:m="http://schemas.openxmlformats.org/officeDocument/2006/math">
+                    <m:oMath>
+                      <m:r>
+                        <a:rPr lang="en-US" b="0" i="1" smtClean="0">
+                          <a:latin typeface="Cambria Math" panose="02040503050406030204" pitchFamily="18" charset="0"/>
+                        </a:rPr>
+                        <m:t>𝑅</m:t>
+                      </m:r>
+                    </m:oMath>
+                  </m:oMathPara>
+                </a14:m>
+                <a:endParaRPr lang="en-US" dirty="0"/>
+              </a:p>
+            </p:txBody>
+          </p:sp>
+        </mc:Choice>
+        <mc:Fallback>
+          <p:sp>
+            <p:nvSpPr>
+              <p:cNvPr id="6" name="TextBox 5">
+                <a:extLst>
+                  <a:ext uri="{FF2B5EF4-FFF2-40B4-BE49-F238E27FC236}">
+                    <a16:creationId xmlns:a16="http://schemas.microsoft.com/office/drawing/2014/main" id="{F9B57E89-CCA6-FDBE-3927-B474DEB79AEE}"/>
+                  </a:ext>
+                  <a:ext uri="{C183D7F6-B498-43B3-948B-1728B52AA6E4}">
+                    <adec:decorative xmlns:adec="http://schemas.microsoft.com/office/drawing/2017/decorative" val="1"/>
+                  </a:ext>
+                </a:extLst>
+              </p:cNvPr>
+              <p:cNvSpPr txBox="1">
+                <a:spLocks noRot="1" noChangeAspect="1" noMove="1" noResize="1" noEditPoints="1" noAdjustHandles="1" noChangeArrowheads="1" noChangeShapeType="1" noTextEdit="1"/>
+              </p:cNvSpPr>
+              <p:nvPr/>
+            </p:nvSpPr>
+            <p:spPr>
+              <a:xfrm>
+                <a:off x="9918491" y="2518713"/>
+                <a:ext cx="202368" cy="369332"/>
+              </a:xfrm>
+              <a:prstGeom prst="rect">
+                <a:avLst/>
+              </a:prstGeom>
+              <a:blipFill>
+                <a:blip r:embed="rId3"/>
+                <a:stretch>
+                  <a:fillRect r="-52941"/>
+                </a:stretch>
+              </a:blipFill>
+            </p:spPr>
+            <p:txBody>
+              <a:bodyPr/>
+              <a:lstStyle/>
+              <a:p>
+                <a:r>
+                  <a:rPr lang="en-US">
+                    <a:noFill/>
+                  </a:rPr>
+                  <a:t> </a:t>
+                </a:r>
+              </a:p>
+            </p:txBody>
+          </p:sp>
+        </mc:Fallback>
+      </mc:AlternateContent>
+      <mc:AlternateContent xmlns:mc="http://schemas.openxmlformats.org/markup-compatibility/2006">
+        <mc:Choice xmlns:a14="http://schemas.microsoft.com/office/drawing/2010/main" Requires="a14">
+          <p:sp>
+            <p:nvSpPr>
+              <p:cNvPr id="9" name="TextBox 8">
+                <a:extLst>
+                  <a:ext uri="{FF2B5EF4-FFF2-40B4-BE49-F238E27FC236}">
+                    <a16:creationId xmlns:a16="http://schemas.microsoft.com/office/drawing/2014/main" id="{433EA472-B1A1-B839-4937-338ED139E14A}"/>
+                  </a:ext>
+                  <a:ext uri="{C183D7F6-B498-43B3-948B-1728B52AA6E4}">
+                    <adec:decorative xmlns:adec="http://schemas.microsoft.com/office/drawing/2017/decorative" val="1"/>
+                  </a:ext>
+                </a:extLst>
+              </p:cNvPr>
+              <p:cNvSpPr txBox="1"/>
+              <p:nvPr/>
+            </p:nvSpPr>
+            <p:spPr>
+              <a:xfrm>
+                <a:off x="10628502" y="2910721"/>
+                <a:ext cx="202368" cy="369332"/>
+              </a:xfrm>
+              <a:prstGeom prst="rect">
+                <a:avLst/>
+              </a:prstGeom>
+              <a:noFill/>
+            </p:spPr>
+            <p:txBody>
+              <a:bodyPr wrap="square" rtlCol="0">
+                <a:spAutoFit/>
+              </a:bodyPr>
+              <a:lstStyle/>
+              <a:p>
+                <a:pPr/>
+                <a14:m>
+                  <m:oMathPara xmlns:m="http://schemas.openxmlformats.org/officeDocument/2006/math">
+                    <m:oMath>
+                      <m:r>
+                        <a:rPr lang="en-US" b="0" i="1" smtClean="0">
+                          <a:latin typeface="Cambria Math" panose="02040503050406030204" pitchFamily="18" charset="0"/>
+                        </a:rPr>
+                        <m:t>𝑅</m:t>
+                      </m:r>
+                    </m:oMath>
+                  </m:oMathPara>
+                </a14:m>
+                <a:endParaRPr lang="en-US" dirty="0"/>
+              </a:p>
+            </p:txBody>
+          </p:sp>
+        </mc:Choice>
+        <mc:Fallback>
+          <p:sp>
+            <p:nvSpPr>
+              <p:cNvPr id="9" name="TextBox 8">
+                <a:extLst>
+                  <a:ext uri="{FF2B5EF4-FFF2-40B4-BE49-F238E27FC236}">
+                    <a16:creationId xmlns:a16="http://schemas.microsoft.com/office/drawing/2014/main" id="{433EA472-B1A1-B839-4937-338ED139E14A}"/>
+                  </a:ext>
+                  <a:ext uri="{C183D7F6-B498-43B3-948B-1728B52AA6E4}">
+                    <adec:decorative xmlns:adec="http://schemas.microsoft.com/office/drawing/2017/decorative" val="1"/>
+                  </a:ext>
+                </a:extLst>
+              </p:cNvPr>
+              <p:cNvSpPr txBox="1">
+                <a:spLocks noRot="1" noChangeAspect="1" noMove="1" noResize="1" noEditPoints="1" noAdjustHandles="1" noChangeArrowheads="1" noChangeShapeType="1" noTextEdit="1"/>
+              </p:cNvSpPr>
+              <p:nvPr/>
+            </p:nvSpPr>
+            <p:spPr>
+              <a:xfrm>
+                <a:off x="10628502" y="2910721"/>
+                <a:ext cx="202368" cy="369332"/>
+              </a:xfrm>
+              <a:prstGeom prst="rect">
+                <a:avLst/>
+              </a:prstGeom>
+              <a:blipFill>
+                <a:blip r:embed="rId4"/>
+                <a:stretch>
+                  <a:fillRect r="-56250"/>
+                </a:stretch>
+              </a:blipFill>
+            </p:spPr>
+            <p:txBody>
+              <a:bodyPr/>
+              <a:lstStyle/>
+              <a:p>
+                <a:r>
+                  <a:rPr lang="en-US">
+                    <a:noFill/>
+                  </a:rPr>
+                  <a:t> </a:t>
+                </a:r>
+              </a:p>
+            </p:txBody>
+          </p:sp>
+        </mc:Fallback>
+      </mc:AlternateContent>
+      <mc:AlternateContent xmlns:mc="http://schemas.openxmlformats.org/markup-compatibility/2006">
+        <mc:Choice xmlns:a14="http://schemas.microsoft.com/office/drawing/2010/main" Requires="a14">
+          <p:sp>
+            <p:nvSpPr>
+              <p:cNvPr id="12" name="TextBox 11">
+                <a:extLst>
+                  <a:ext uri="{FF2B5EF4-FFF2-40B4-BE49-F238E27FC236}">
+                    <a16:creationId xmlns:a16="http://schemas.microsoft.com/office/drawing/2014/main" id="{F654F0F7-FADF-FB82-93D5-74148073B8B6}"/>
+                  </a:ext>
+                  <a:ext uri="{C183D7F6-B498-43B3-948B-1728B52AA6E4}">
+                    <adec:decorative xmlns:adec="http://schemas.microsoft.com/office/drawing/2017/decorative" val="1"/>
+                  </a:ext>
+                </a:extLst>
+              </p:cNvPr>
+              <p:cNvSpPr txBox="1"/>
+              <p:nvPr/>
+            </p:nvSpPr>
+            <p:spPr>
+              <a:xfrm>
+                <a:off x="10951915" y="3363020"/>
+                <a:ext cx="202368" cy="369332"/>
+              </a:xfrm>
+              <a:prstGeom prst="rect">
+                <a:avLst/>
+              </a:prstGeom>
+              <a:noFill/>
+            </p:spPr>
+            <p:txBody>
+              <a:bodyPr wrap="square" rtlCol="0">
+                <a:spAutoFit/>
+              </a:bodyPr>
+              <a:lstStyle/>
+              <a:p>
+                <a:pPr/>
+                <a14:m>
+                  <m:oMathPara xmlns:m="http://schemas.openxmlformats.org/officeDocument/2006/math">
+                    <m:oMath>
+                      <m:r>
+                        <a:rPr lang="en-US" b="0" i="1" smtClean="0">
+                          <a:latin typeface="Cambria Math" panose="02040503050406030204" pitchFamily="18" charset="0"/>
+                        </a:rPr>
+                        <m:t>𝑅</m:t>
+                      </m:r>
+                    </m:oMath>
+                  </m:oMathPara>
+                </a14:m>
+                <a:endParaRPr lang="en-US" dirty="0"/>
+              </a:p>
+            </p:txBody>
+          </p:sp>
+        </mc:Choice>
+        <mc:Fallback>
+          <p:sp>
+            <p:nvSpPr>
+              <p:cNvPr id="12" name="TextBox 11">
+                <a:extLst>
+                  <a:ext uri="{FF2B5EF4-FFF2-40B4-BE49-F238E27FC236}">
+                    <a16:creationId xmlns:a16="http://schemas.microsoft.com/office/drawing/2014/main" id="{F654F0F7-FADF-FB82-93D5-74148073B8B6}"/>
+                  </a:ext>
+                  <a:ext uri="{C183D7F6-B498-43B3-948B-1728B52AA6E4}">
+                    <adec:decorative xmlns:adec="http://schemas.microsoft.com/office/drawing/2017/decorative" val="1"/>
+                  </a:ext>
+                </a:extLst>
+              </p:cNvPr>
+              <p:cNvSpPr txBox="1">
+                <a:spLocks noRot="1" noChangeAspect="1" noMove="1" noResize="1" noEditPoints="1" noAdjustHandles="1" noChangeArrowheads="1" noChangeShapeType="1" noTextEdit="1"/>
+              </p:cNvSpPr>
+              <p:nvPr/>
+            </p:nvSpPr>
+            <p:spPr>
+              <a:xfrm>
+                <a:off x="10951915" y="3363020"/>
+                <a:ext cx="202368" cy="369332"/>
+              </a:xfrm>
+              <a:prstGeom prst="rect">
+                <a:avLst/>
+              </a:prstGeom>
+              <a:blipFill>
+                <a:blip r:embed="rId5"/>
+                <a:stretch>
+                  <a:fillRect r="-52941"/>
+                </a:stretch>
+              </a:blipFill>
+            </p:spPr>
+            <p:txBody>
+              <a:bodyPr/>
+              <a:lstStyle/>
+              <a:p>
+                <a:r>
+                  <a:rPr lang="en-US">
+                    <a:noFill/>
+                  </a:rPr>
+                  <a:t> </a:t>
+                </a:r>
+              </a:p>
+            </p:txBody>
+          </p:sp>
+        </mc:Fallback>
+      </mc:AlternateContent>
+      <mc:AlternateContent xmlns:mc="http://schemas.openxmlformats.org/markup-compatibility/2006">
+        <mc:Choice xmlns:a14="http://schemas.microsoft.com/office/drawing/2010/main" Requires="a14">
+          <p:sp>
+            <p:nvSpPr>
+              <p:cNvPr id="13" name="TextBox 12">
+                <a:extLst>
+                  <a:ext uri="{FF2B5EF4-FFF2-40B4-BE49-F238E27FC236}">
+                    <a16:creationId xmlns:a16="http://schemas.microsoft.com/office/drawing/2014/main" id="{A2AB9A23-FBD3-DB90-9801-00E1D6F3D56C}"/>
+                  </a:ext>
+                  <a:ext uri="{C183D7F6-B498-43B3-948B-1728B52AA6E4}">
+                    <adec:decorative xmlns:adec="http://schemas.microsoft.com/office/drawing/2017/decorative" val="1"/>
+                  </a:ext>
+                </a:extLst>
+              </p:cNvPr>
+              <p:cNvSpPr txBox="1"/>
+              <p:nvPr/>
+            </p:nvSpPr>
+            <p:spPr>
+              <a:xfrm>
+                <a:off x="11053099" y="4057069"/>
+                <a:ext cx="202368" cy="369332"/>
+              </a:xfrm>
+              <a:prstGeom prst="rect">
+                <a:avLst/>
+              </a:prstGeom>
+              <a:noFill/>
+            </p:spPr>
+            <p:txBody>
+              <a:bodyPr wrap="square" rtlCol="0">
+                <a:spAutoFit/>
+              </a:bodyPr>
+              <a:lstStyle/>
+              <a:p>
+                <a:pPr/>
+                <a14:m>
+                  <m:oMathPara xmlns:m="http://schemas.openxmlformats.org/officeDocument/2006/math">
+                    <m:oMath>
+                      <m:r>
+                        <a:rPr lang="en-US" b="0" i="1" smtClean="0">
+                          <a:latin typeface="Cambria Math" panose="02040503050406030204" pitchFamily="18" charset="0"/>
+                        </a:rPr>
+                        <m:t>𝑄</m:t>
+                      </m:r>
+                    </m:oMath>
+                  </m:oMathPara>
+                </a14:m>
+                <a:endParaRPr lang="en-US" dirty="0"/>
+              </a:p>
+            </p:txBody>
+          </p:sp>
+        </mc:Choice>
+        <mc:Fallback>
+          <p:sp>
+            <p:nvSpPr>
+              <p:cNvPr id="13" name="TextBox 12">
+                <a:extLst>
+                  <a:ext uri="{FF2B5EF4-FFF2-40B4-BE49-F238E27FC236}">
+                    <a16:creationId xmlns:a16="http://schemas.microsoft.com/office/drawing/2014/main" id="{A2AB9A23-FBD3-DB90-9801-00E1D6F3D56C}"/>
+                  </a:ext>
+                  <a:ext uri="{C183D7F6-B498-43B3-948B-1728B52AA6E4}">
+                    <adec:decorative xmlns:adec="http://schemas.microsoft.com/office/drawing/2017/decorative" val="1"/>
+                  </a:ext>
+                </a:extLst>
+              </p:cNvPr>
+              <p:cNvSpPr txBox="1">
+                <a:spLocks noRot="1" noChangeAspect="1" noMove="1" noResize="1" noEditPoints="1" noAdjustHandles="1" noChangeArrowheads="1" noChangeShapeType="1" noTextEdit="1"/>
+              </p:cNvSpPr>
+              <p:nvPr/>
+            </p:nvSpPr>
+            <p:spPr>
+              <a:xfrm>
+                <a:off x="11053099" y="4057069"/>
+                <a:ext cx="202368" cy="369332"/>
+              </a:xfrm>
+              <a:prstGeom prst="rect">
+                <a:avLst/>
+              </a:prstGeom>
+              <a:blipFill>
+                <a:blip r:embed="rId6"/>
+                <a:stretch>
+                  <a:fillRect l="-5882" r="-64706" b="-6667"/>
+                </a:stretch>
+              </a:blipFill>
+            </p:spPr>
+            <p:txBody>
+              <a:bodyPr/>
+              <a:lstStyle/>
+              <a:p>
+                <a:r>
+                  <a:rPr lang="en-US">
+                    <a:noFill/>
+                  </a:rPr>
+                  <a:t> </a:t>
+                </a:r>
+              </a:p>
+            </p:txBody>
+          </p:sp>
+        </mc:Fallback>
+      </mc:AlternateContent>
+      <p:sp>
+        <p:nvSpPr>
+          <p:cNvPr id="3" name="TextBox 2">
+            <a:extLst>
+              <a:ext uri="{FF2B5EF4-FFF2-40B4-BE49-F238E27FC236}">
+                <a16:creationId xmlns:a16="http://schemas.microsoft.com/office/drawing/2014/main" id="{1FD0F962-53D0-07DC-792F-6FB00B52DA93}"/>
+              </a:ext>
+              <a:ext uri="{C183D7F6-B498-43B3-948B-1728B52AA6E4}">
+                <adec:decorative xmlns:adec="http://schemas.microsoft.com/office/drawing/2017/decorative" val="1"/>
+              </a:ext>
+            </a:extLst>
+          </p:cNvPr>
+          <p:cNvSpPr txBox="1"/>
+          <p:nvPr/>
+        </p:nvSpPr>
+        <p:spPr>
+          <a:xfrm>
+            <a:off x="3238995" y="6217463"/>
+            <a:ext cx="6593669" cy="369332"/>
           </a:xfrm>
           <a:prstGeom prst="rect">
             <a:avLst/>
           </a:prstGeom>
         </p:spPr>
-      </p:pic>
+        <p:style>
+          <a:lnRef idx="2">
+            <a:schemeClr val="accent3">
+              <a:shade val="15000"/>
+            </a:schemeClr>
+          </a:lnRef>
+          <a:fillRef idx="1">
+            <a:schemeClr val="accent3"/>
+          </a:fillRef>
+          <a:effectRef idx="0">
+            <a:schemeClr val="accent3"/>
+          </a:effectRef>
+          <a:fontRef idx="minor">
+            <a:schemeClr val="lt1"/>
+          </a:fontRef>
+        </p:style>
+        <p:txBody>
+          <a:bodyPr wrap="square" rtlCol="0">
+            <a:spAutoFit/>
+          </a:bodyPr>
+          <a:lstStyle/>
+          <a:p>
+            <a:pPr algn="ctr"/>
+            <a:r>
+              <a:rPr lang="en-US" b="1" dirty="0"/>
+              <a:t>Note</a:t>
+            </a:r>
+            <a:r>
+              <a:rPr lang="en-US" dirty="0"/>
+              <a:t>: This is like heuristic (cut-off) min-max search for games.</a:t>
+            </a:r>
+          </a:p>
+        </p:txBody>
+      </p:sp>
       <p:sp>
         <p:nvSpPr>
           <p:cNvPr id="4" name="Title 3">
@@ -5858,7 +6560,7 @@
         <mc:Choice Requires="a14">
           <p:sp>
             <p:nvSpPr>
-              <p:cNvPr id="5" name="Content Placeholder 4">
+              <p:cNvPr id="5" name="Content Placeholder 4" descr="At decision time in state s :. Consider a large tree of possible continuations (trajectories of a given length) for the current state. Apply an approx. value function to the states in leaf nodes. Back values towards the current state (using max). Similar to n -step estimation, but it always uses the best and not the observed action. Choose the best next action for the current state">
                 <a:extLst>
                   <a:ext uri="{FF2B5EF4-FFF2-40B4-BE49-F238E27FC236}">
                     <a16:creationId xmlns:a16="http://schemas.microsoft.com/office/drawing/2014/main" id="{19E62A12-5D57-D939-F926-D55F98DA3329}"/>
@@ -5994,7 +6696,7 @@
         <mc:Fallback xmlns="">
           <p:sp>
             <p:nvSpPr>
-              <p:cNvPr id="5" name="Content Placeholder 4">
+              <p:cNvPr id="5" name="Content Placeholder 4" descr="At decision time in state s :. Consider a large tree of possible continuations (trajectories of a given length) for the current state. Apply an approx. value function to the states in leaf nodes. Back values towards the current state (using max). Similar to n -step estimation, but it always uses the best and not the observed action. Choose the best next action for the current state">
                 <a:extLst>
                   <a:ext uri="{FF2B5EF4-FFF2-40B4-BE49-F238E27FC236}">
                     <a16:creationId xmlns:a16="http://schemas.microsoft.com/office/drawing/2014/main" id="{19E62A12-5D57-D939-F926-D55F98DA3329}"/>
@@ -6014,7 +6716,7 @@
                 <a:ext cx="4656364" cy="4583745"/>
               </a:xfrm>
               <a:blipFill>
-                <a:blip r:embed="rId3"/>
+                <a:blip r:embed="rId7"/>
                 <a:stretch>
                   <a:fillRect l="-1442" t="-2261"/>
                 </a:stretch>
@@ -6035,696 +6737,36 @@
           </p:sp>
         </mc:Fallback>
       </mc:AlternateContent>
-      <p:sp>
-        <p:nvSpPr>
-          <p:cNvPr id="8" name="Speech Bubble: Rectangle with Corners Rounded 7">
+      <p:pic>
+        <p:nvPicPr>
+          <p:cNvPr id="7" name="Picture 6" descr="Heuristic search as a sequence of one-step updates (Sutton and Barto Figure 8.9): a game tree below the current state, with the backed-up part outlined in blue and numbered 1 to 10. Updates 1 and 2 back up leaf values into their parents, 3 combines them, 4 to 9 do the same in the right subtree, and 10 finally backs everything up to the root, so values flow from the leaves of the selected subtree up to the current state.">
             <a:extLst>
               <a:ext uri="{FF2B5EF4-FFF2-40B4-BE49-F238E27FC236}">
-                <a16:creationId xmlns:a16="http://schemas.microsoft.com/office/drawing/2014/main" id="{9CBFCEF7-963A-4187-6A15-D0E256203C8E}"/>
+                <a16:creationId xmlns:a16="http://schemas.microsoft.com/office/drawing/2014/main" id="{3A6356EF-E592-3AC7-97BD-5A89144E7797}"/>
               </a:ext>
             </a:extLst>
           </p:cNvPr>
-          <p:cNvSpPr/>
+          <p:cNvPicPr>
+            <a:picLocks noChangeAspect="1"/>
+          </p:cNvPicPr>
           <p:nvPr/>
-        </p:nvSpPr>
+        </p:nvPicPr>
+        <p:blipFill>
+          <a:blip r:embed="rId8"/>
+          <a:stretch>
+            <a:fillRect/>
+          </a:stretch>
+        </p:blipFill>
         <p:spPr>
           <a:xfrm>
-            <a:off x="8214611" y="5561579"/>
-            <a:ext cx="3247086" cy="359863"/>
-          </a:xfrm>
-          <a:prstGeom prst="wedgeRoundRectCallout">
-            <a:avLst>
-              <a:gd name="adj1" fmla="val 37593"/>
-              <a:gd name="adj2" fmla="val -381818"/>
-              <a:gd name="adj3" fmla="val 16667"/>
-            </a:avLst>
-          </a:prstGeom>
-        </p:spPr>
-        <p:style>
-          <a:lnRef idx="2">
-            <a:schemeClr val="accent1">
-              <a:shade val="15000"/>
-            </a:schemeClr>
-          </a:lnRef>
-          <a:fillRef idx="1">
-            <a:schemeClr val="accent1"/>
-          </a:fillRef>
-          <a:effectRef idx="0">
-            <a:schemeClr val="accent1"/>
-          </a:effectRef>
-          <a:fontRef idx="minor">
-            <a:schemeClr val="lt1"/>
-          </a:fontRef>
-        </p:style>
-        <p:txBody>
-          <a:bodyPr rtlCol="0" anchor="ctr"/>
-          <a:lstStyle/>
-          <a:p>
-            <a:pPr algn="ctr"/>
-            <a:r>
-              <a:rPr lang="en-US" dirty="0"/>
-              <a:t>2. Estimate leaf node values</a:t>
-            </a:r>
-          </a:p>
-        </p:txBody>
-      </p:sp>
-      <p:sp>
-        <p:nvSpPr>
-          <p:cNvPr id="10" name="Arrow: Down 9">
-            <a:extLst>
-              <a:ext uri="{FF2B5EF4-FFF2-40B4-BE49-F238E27FC236}">
-                <a16:creationId xmlns:a16="http://schemas.microsoft.com/office/drawing/2014/main" id="{E4EFD103-2544-1279-0631-58B4728E2AD2}"/>
-              </a:ext>
-            </a:extLst>
-          </p:cNvPr>
-          <p:cNvSpPr/>
-          <p:nvPr/>
-        </p:nvSpPr>
-        <p:spPr>
-          <a:xfrm flipV="1">
-            <a:off x="11154283" y="2248525"/>
-            <a:ext cx="781777" cy="2764966"/>
-          </a:xfrm>
-          <a:prstGeom prst="downArrow">
-            <a:avLst/>
-          </a:prstGeom>
-        </p:spPr>
-        <p:style>
-          <a:lnRef idx="2">
-            <a:schemeClr val="accent1">
-              <a:shade val="15000"/>
-            </a:schemeClr>
-          </a:lnRef>
-          <a:fillRef idx="1">
-            <a:schemeClr val="accent1"/>
-          </a:fillRef>
-          <a:effectRef idx="0">
-            <a:schemeClr val="accent1"/>
-          </a:effectRef>
-          <a:fontRef idx="minor">
-            <a:schemeClr val="lt1"/>
-          </a:fontRef>
-        </p:style>
-        <p:txBody>
-          <a:bodyPr vert="vert" rtlCol="0" anchor="ctr"/>
-          <a:lstStyle/>
-          <a:p>
-            <a:pPr algn="ctr"/>
-            <a:r>
-              <a:rPr lang="en-US" dirty="0"/>
-              <a:t>3. backup</a:t>
-            </a:r>
-          </a:p>
-        </p:txBody>
-      </p:sp>
-      <p:sp>
-        <p:nvSpPr>
-          <p:cNvPr id="11" name="Speech Bubble: Rectangle with Corners Rounded 10">
-            <a:extLst>
-              <a:ext uri="{FF2B5EF4-FFF2-40B4-BE49-F238E27FC236}">
-                <a16:creationId xmlns:a16="http://schemas.microsoft.com/office/drawing/2014/main" id="{25F441F9-26AE-4857-0003-6C4FFDACE6EE}"/>
-              </a:ext>
-            </a:extLst>
-          </p:cNvPr>
-          <p:cNvSpPr/>
-          <p:nvPr/>
-        </p:nvSpPr>
-        <p:spPr>
-          <a:xfrm>
-            <a:off x="7689758" y="901563"/>
-            <a:ext cx="2938744" cy="665202"/>
-          </a:xfrm>
-          <a:prstGeom prst="wedgeRoundRectCallout">
-            <a:avLst>
-              <a:gd name="adj1" fmla="val -29245"/>
-              <a:gd name="adj2" fmla="val 141648"/>
-              <a:gd name="adj3" fmla="val 16667"/>
-            </a:avLst>
-          </a:prstGeom>
-        </p:spPr>
-        <p:style>
-          <a:lnRef idx="2">
-            <a:schemeClr val="accent1">
-              <a:shade val="15000"/>
-            </a:schemeClr>
-          </a:lnRef>
-          <a:fillRef idx="1">
-            <a:schemeClr val="accent1"/>
-          </a:fillRef>
-          <a:effectRef idx="0">
-            <a:schemeClr val="accent1"/>
-          </a:effectRef>
-          <a:fontRef idx="minor">
-            <a:schemeClr val="lt1"/>
-          </a:fontRef>
-        </p:style>
-        <p:txBody>
-          <a:bodyPr rtlCol="0" anchor="ctr"/>
-          <a:lstStyle/>
-          <a:p>
-            <a:pPr algn="ctr"/>
-            <a:r>
-              <a:rPr lang="en-US" dirty="0"/>
-              <a:t>4. Pick best action leasing to largest Q-value</a:t>
-            </a:r>
-          </a:p>
-        </p:txBody>
-      </p:sp>
-      <p:sp>
-        <p:nvSpPr>
-          <p:cNvPr id="3" name="TextBox 2">
-            <a:extLst>
-              <a:ext uri="{FF2B5EF4-FFF2-40B4-BE49-F238E27FC236}">
-                <a16:creationId xmlns:a16="http://schemas.microsoft.com/office/drawing/2014/main" id="{1FD0F962-53D0-07DC-792F-6FB00B52DA93}"/>
-              </a:ext>
-            </a:extLst>
-          </p:cNvPr>
-          <p:cNvSpPr txBox="1"/>
-          <p:nvPr/>
-        </p:nvSpPr>
-        <p:spPr>
-          <a:xfrm>
-            <a:off x="3238995" y="6217463"/>
-            <a:ext cx="6593669" cy="369332"/>
+            <a:off x="5155917" y="2076147"/>
+            <a:ext cx="6456730" cy="3213065"/>
           </a:xfrm>
           <a:prstGeom prst="rect">
             <a:avLst/>
           </a:prstGeom>
         </p:spPr>
-        <p:style>
-          <a:lnRef idx="2">
-            <a:schemeClr val="accent3">
-              <a:shade val="15000"/>
-            </a:schemeClr>
-          </a:lnRef>
-          <a:fillRef idx="1">
-            <a:schemeClr val="accent3"/>
-          </a:fillRef>
-          <a:effectRef idx="0">
-            <a:schemeClr val="accent3"/>
-          </a:effectRef>
-          <a:fontRef idx="minor">
-            <a:schemeClr val="lt1"/>
-          </a:fontRef>
-        </p:style>
-        <p:txBody>
-          <a:bodyPr wrap="square" rtlCol="0">
-            <a:spAutoFit/>
-          </a:bodyPr>
-          <a:lstStyle/>
-          <a:p>
-            <a:pPr algn="ctr"/>
-            <a:r>
-              <a:rPr lang="en-US" b="1" dirty="0"/>
-              <a:t>Note</a:t>
-            </a:r>
-            <a:r>
-              <a:rPr lang="en-US" dirty="0"/>
-              <a:t>: This is like heuristic (cut-off) min-max search for games.</a:t>
-            </a:r>
-          </a:p>
-        </p:txBody>
-      </p:sp>
-      <mc:AlternateContent xmlns:mc="http://schemas.openxmlformats.org/markup-compatibility/2006" xmlns:a14="http://schemas.microsoft.com/office/drawing/2010/main">
-        <mc:Choice Requires="a14">
-          <p:sp>
-            <p:nvSpPr>
-              <p:cNvPr id="2" name="TextBox 1">
-                <a:extLst>
-                  <a:ext uri="{FF2B5EF4-FFF2-40B4-BE49-F238E27FC236}">
-                    <a16:creationId xmlns:a16="http://schemas.microsoft.com/office/drawing/2014/main" id="{5A54AD96-0F25-00BD-1813-50A2CBD3189F}"/>
-                  </a:ext>
-                </a:extLst>
-              </p:cNvPr>
-              <p:cNvSpPr txBox="1"/>
-              <p:nvPr/>
-            </p:nvSpPr>
-            <p:spPr>
-              <a:xfrm>
-                <a:off x="8829206" y="2149381"/>
-                <a:ext cx="202368" cy="369332"/>
-              </a:xfrm>
-              <a:prstGeom prst="rect">
-                <a:avLst/>
-              </a:prstGeom>
-              <a:noFill/>
-            </p:spPr>
-            <p:txBody>
-              <a:bodyPr wrap="square" rtlCol="0">
-                <a:spAutoFit/>
-              </a:bodyPr>
-              <a:lstStyle/>
-              <a:p>
-                <a:pPr/>
-                <a14:m>
-                  <m:oMathPara xmlns:m="http://schemas.openxmlformats.org/officeDocument/2006/math">
-                    <m:oMathParaPr>
-                      <m:jc m:val="centerGroup"/>
-                    </m:oMathParaPr>
-                    <m:oMath xmlns:m="http://schemas.openxmlformats.org/officeDocument/2006/math">
-                      <m:r>
-                        <a:rPr lang="en-US" b="0" i="1" smtClean="0">
-                          <a:latin typeface="Cambria Math" panose="02040503050406030204" pitchFamily="18" charset="0"/>
-                        </a:rPr>
-                        <m:t>𝑅</m:t>
-                      </m:r>
-                    </m:oMath>
-                  </m:oMathPara>
-                </a14:m>
-                <a:endParaRPr lang="en-US" dirty="0"/>
-              </a:p>
-            </p:txBody>
-          </p:sp>
-        </mc:Choice>
-        <mc:Fallback xmlns="">
-          <p:sp>
-            <p:nvSpPr>
-              <p:cNvPr id="2" name="TextBox 1">
-                <a:extLst>
-                  <a:ext uri="{FF2B5EF4-FFF2-40B4-BE49-F238E27FC236}">
-                    <a16:creationId xmlns:a16="http://schemas.microsoft.com/office/drawing/2014/main" id="{5A54AD96-0F25-00BD-1813-50A2CBD3189F}"/>
-                  </a:ext>
-                </a:extLst>
-              </p:cNvPr>
-              <p:cNvSpPr txBox="1">
-                <a:spLocks noRot="1" noChangeAspect="1" noMove="1" noResize="1" noEditPoints="1" noAdjustHandles="1" noChangeArrowheads="1" noChangeShapeType="1" noTextEdit="1"/>
-              </p:cNvSpPr>
-              <p:nvPr/>
-            </p:nvSpPr>
-            <p:spPr>
-              <a:xfrm>
-                <a:off x="8829206" y="2149381"/>
-                <a:ext cx="202368" cy="369332"/>
-              </a:xfrm>
-              <a:prstGeom prst="rect">
-                <a:avLst/>
-              </a:prstGeom>
-              <a:blipFill>
-                <a:blip r:embed="rId4"/>
-                <a:stretch>
-                  <a:fillRect r="-55882"/>
-                </a:stretch>
-              </a:blipFill>
-            </p:spPr>
-            <p:txBody>
-              <a:bodyPr/>
-              <a:lstStyle/>
-              <a:p>
-                <a:r>
-                  <a:rPr lang="en-US">
-                    <a:noFill/>
-                  </a:rPr>
-                  <a:t> </a:t>
-                </a:r>
-              </a:p>
-            </p:txBody>
-          </p:sp>
-        </mc:Fallback>
-      </mc:AlternateContent>
-      <mc:AlternateContent xmlns:mc="http://schemas.openxmlformats.org/markup-compatibility/2006" xmlns:a14="http://schemas.microsoft.com/office/drawing/2010/main">
-        <mc:Choice Requires="a14">
-          <p:sp>
-            <p:nvSpPr>
-              <p:cNvPr id="6" name="TextBox 5">
-                <a:extLst>
-                  <a:ext uri="{FF2B5EF4-FFF2-40B4-BE49-F238E27FC236}">
-                    <a16:creationId xmlns:a16="http://schemas.microsoft.com/office/drawing/2014/main" id="{F9B57E89-CCA6-FDBE-3927-B474DEB79AEE}"/>
-                  </a:ext>
-                </a:extLst>
-              </p:cNvPr>
-              <p:cNvSpPr txBox="1"/>
-              <p:nvPr/>
-            </p:nvSpPr>
-            <p:spPr>
-              <a:xfrm>
-                <a:off x="9918491" y="2518713"/>
-                <a:ext cx="202368" cy="369332"/>
-              </a:xfrm>
-              <a:prstGeom prst="rect">
-                <a:avLst/>
-              </a:prstGeom>
-              <a:noFill/>
-            </p:spPr>
-            <p:txBody>
-              <a:bodyPr wrap="square" rtlCol="0">
-                <a:spAutoFit/>
-              </a:bodyPr>
-              <a:lstStyle/>
-              <a:p>
-                <a:pPr/>
-                <a14:m>
-                  <m:oMathPara xmlns:m="http://schemas.openxmlformats.org/officeDocument/2006/math">
-                    <m:oMathParaPr>
-                      <m:jc m:val="centerGroup"/>
-                    </m:oMathParaPr>
-                    <m:oMath xmlns:m="http://schemas.openxmlformats.org/officeDocument/2006/math">
-                      <m:r>
-                        <a:rPr lang="en-US" b="0" i="1" smtClean="0">
-                          <a:latin typeface="Cambria Math" panose="02040503050406030204" pitchFamily="18" charset="0"/>
-                        </a:rPr>
-                        <m:t>𝑅</m:t>
-                      </m:r>
-                    </m:oMath>
-                  </m:oMathPara>
-                </a14:m>
-                <a:endParaRPr lang="en-US" dirty="0"/>
-              </a:p>
-            </p:txBody>
-          </p:sp>
-        </mc:Choice>
-        <mc:Fallback xmlns="">
-          <p:sp>
-            <p:nvSpPr>
-              <p:cNvPr id="6" name="TextBox 5">
-                <a:extLst>
-                  <a:ext uri="{FF2B5EF4-FFF2-40B4-BE49-F238E27FC236}">
-                    <a16:creationId xmlns:a16="http://schemas.microsoft.com/office/drawing/2014/main" id="{F9B57E89-CCA6-FDBE-3927-B474DEB79AEE}"/>
-                  </a:ext>
-                </a:extLst>
-              </p:cNvPr>
-              <p:cNvSpPr txBox="1">
-                <a:spLocks noRot="1" noChangeAspect="1" noMove="1" noResize="1" noEditPoints="1" noAdjustHandles="1" noChangeArrowheads="1" noChangeShapeType="1" noTextEdit="1"/>
-              </p:cNvSpPr>
-              <p:nvPr/>
-            </p:nvSpPr>
-            <p:spPr>
-              <a:xfrm>
-                <a:off x="9918491" y="2518713"/>
-                <a:ext cx="202368" cy="369332"/>
-              </a:xfrm>
-              <a:prstGeom prst="rect">
-                <a:avLst/>
-              </a:prstGeom>
-              <a:blipFill>
-                <a:blip r:embed="rId5"/>
-                <a:stretch>
-                  <a:fillRect r="-60606"/>
-                </a:stretch>
-              </a:blipFill>
-            </p:spPr>
-            <p:txBody>
-              <a:bodyPr/>
-              <a:lstStyle/>
-              <a:p>
-                <a:r>
-                  <a:rPr lang="en-US">
-                    <a:noFill/>
-                  </a:rPr>
-                  <a:t> </a:t>
-                </a:r>
-              </a:p>
-            </p:txBody>
-          </p:sp>
-        </mc:Fallback>
-      </mc:AlternateContent>
-      <mc:AlternateContent xmlns:mc="http://schemas.openxmlformats.org/markup-compatibility/2006" xmlns:a14="http://schemas.microsoft.com/office/drawing/2010/main">
-        <mc:Choice Requires="a14">
-          <p:sp>
-            <p:nvSpPr>
-              <p:cNvPr id="9" name="TextBox 8">
-                <a:extLst>
-                  <a:ext uri="{FF2B5EF4-FFF2-40B4-BE49-F238E27FC236}">
-                    <a16:creationId xmlns:a16="http://schemas.microsoft.com/office/drawing/2014/main" id="{433EA472-B1A1-B839-4937-338ED139E14A}"/>
-                  </a:ext>
-                </a:extLst>
-              </p:cNvPr>
-              <p:cNvSpPr txBox="1"/>
-              <p:nvPr/>
-            </p:nvSpPr>
-            <p:spPr>
-              <a:xfrm>
-                <a:off x="10628502" y="2910721"/>
-                <a:ext cx="202368" cy="369332"/>
-              </a:xfrm>
-              <a:prstGeom prst="rect">
-                <a:avLst/>
-              </a:prstGeom>
-              <a:noFill/>
-            </p:spPr>
-            <p:txBody>
-              <a:bodyPr wrap="square" rtlCol="0">
-                <a:spAutoFit/>
-              </a:bodyPr>
-              <a:lstStyle/>
-              <a:p>
-                <a:pPr/>
-                <a14:m>
-                  <m:oMathPara xmlns:m="http://schemas.openxmlformats.org/officeDocument/2006/math">
-                    <m:oMathParaPr>
-                      <m:jc m:val="centerGroup"/>
-                    </m:oMathParaPr>
-                    <m:oMath xmlns:m="http://schemas.openxmlformats.org/officeDocument/2006/math">
-                      <m:r>
-                        <a:rPr lang="en-US" b="0" i="1" smtClean="0">
-                          <a:latin typeface="Cambria Math" panose="02040503050406030204" pitchFamily="18" charset="0"/>
-                        </a:rPr>
-                        <m:t>𝑅</m:t>
-                      </m:r>
-                    </m:oMath>
-                  </m:oMathPara>
-                </a14:m>
-                <a:endParaRPr lang="en-US" dirty="0"/>
-              </a:p>
-            </p:txBody>
-          </p:sp>
-        </mc:Choice>
-        <mc:Fallback xmlns="">
-          <p:sp>
-            <p:nvSpPr>
-              <p:cNvPr id="9" name="TextBox 8">
-                <a:extLst>
-                  <a:ext uri="{FF2B5EF4-FFF2-40B4-BE49-F238E27FC236}">
-                    <a16:creationId xmlns:a16="http://schemas.microsoft.com/office/drawing/2014/main" id="{433EA472-B1A1-B839-4937-338ED139E14A}"/>
-                  </a:ext>
-                </a:extLst>
-              </p:cNvPr>
-              <p:cNvSpPr txBox="1">
-                <a:spLocks noRot="1" noChangeAspect="1" noMove="1" noResize="1" noEditPoints="1" noAdjustHandles="1" noChangeArrowheads="1" noChangeShapeType="1" noTextEdit="1"/>
-              </p:cNvSpPr>
-              <p:nvPr/>
-            </p:nvSpPr>
-            <p:spPr>
-              <a:xfrm>
-                <a:off x="10628502" y="2910721"/>
-                <a:ext cx="202368" cy="369332"/>
-              </a:xfrm>
-              <a:prstGeom prst="rect">
-                <a:avLst/>
-              </a:prstGeom>
-              <a:blipFill>
-                <a:blip r:embed="rId6"/>
-                <a:stretch>
-                  <a:fillRect r="-57576"/>
-                </a:stretch>
-              </a:blipFill>
-            </p:spPr>
-            <p:txBody>
-              <a:bodyPr/>
-              <a:lstStyle/>
-              <a:p>
-                <a:r>
-                  <a:rPr lang="en-US">
-                    <a:noFill/>
-                  </a:rPr>
-                  <a:t> </a:t>
-                </a:r>
-              </a:p>
-            </p:txBody>
-          </p:sp>
-        </mc:Fallback>
-      </mc:AlternateContent>
-      <mc:AlternateContent xmlns:mc="http://schemas.openxmlformats.org/markup-compatibility/2006" xmlns:a14="http://schemas.microsoft.com/office/drawing/2010/main">
-        <mc:Choice Requires="a14">
-          <p:sp>
-            <p:nvSpPr>
-              <p:cNvPr id="12" name="TextBox 11">
-                <a:extLst>
-                  <a:ext uri="{FF2B5EF4-FFF2-40B4-BE49-F238E27FC236}">
-                    <a16:creationId xmlns:a16="http://schemas.microsoft.com/office/drawing/2014/main" id="{F654F0F7-FADF-FB82-93D5-74148073B8B6}"/>
-                  </a:ext>
-                </a:extLst>
-              </p:cNvPr>
-              <p:cNvSpPr txBox="1"/>
-              <p:nvPr/>
-            </p:nvSpPr>
-            <p:spPr>
-              <a:xfrm>
-                <a:off x="10951915" y="3363020"/>
-                <a:ext cx="202368" cy="369332"/>
-              </a:xfrm>
-              <a:prstGeom prst="rect">
-                <a:avLst/>
-              </a:prstGeom>
-              <a:noFill/>
-            </p:spPr>
-            <p:txBody>
-              <a:bodyPr wrap="square" rtlCol="0">
-                <a:spAutoFit/>
-              </a:bodyPr>
-              <a:lstStyle/>
-              <a:p>
-                <a:pPr/>
-                <a14:m>
-                  <m:oMathPara xmlns:m="http://schemas.openxmlformats.org/officeDocument/2006/math">
-                    <m:oMathParaPr>
-                      <m:jc m:val="centerGroup"/>
-                    </m:oMathParaPr>
-                    <m:oMath xmlns:m="http://schemas.openxmlformats.org/officeDocument/2006/math">
-                      <m:r>
-                        <a:rPr lang="en-US" b="0" i="1" smtClean="0">
-                          <a:latin typeface="Cambria Math" panose="02040503050406030204" pitchFamily="18" charset="0"/>
-                        </a:rPr>
-                        <m:t>𝑅</m:t>
-                      </m:r>
-                    </m:oMath>
-                  </m:oMathPara>
-                </a14:m>
-                <a:endParaRPr lang="en-US" dirty="0"/>
-              </a:p>
-            </p:txBody>
-          </p:sp>
-        </mc:Choice>
-        <mc:Fallback xmlns="">
-          <p:sp>
-            <p:nvSpPr>
-              <p:cNvPr id="12" name="TextBox 11">
-                <a:extLst>
-                  <a:ext uri="{FF2B5EF4-FFF2-40B4-BE49-F238E27FC236}">
-                    <a16:creationId xmlns:a16="http://schemas.microsoft.com/office/drawing/2014/main" id="{F654F0F7-FADF-FB82-93D5-74148073B8B6}"/>
-                  </a:ext>
-                </a:extLst>
-              </p:cNvPr>
-              <p:cNvSpPr txBox="1">
-                <a:spLocks noRot="1" noChangeAspect="1" noMove="1" noResize="1" noEditPoints="1" noAdjustHandles="1" noChangeArrowheads="1" noChangeShapeType="1" noTextEdit="1"/>
-              </p:cNvSpPr>
-              <p:nvPr/>
-            </p:nvSpPr>
-            <p:spPr>
-              <a:xfrm>
-                <a:off x="10951915" y="3363020"/>
-                <a:ext cx="202368" cy="369332"/>
-              </a:xfrm>
-              <a:prstGeom prst="rect">
-                <a:avLst/>
-              </a:prstGeom>
-              <a:blipFill>
-                <a:blip r:embed="rId7"/>
-                <a:stretch>
-                  <a:fillRect r="-57576"/>
-                </a:stretch>
-              </a:blipFill>
-            </p:spPr>
-            <p:txBody>
-              <a:bodyPr/>
-              <a:lstStyle/>
-              <a:p>
-                <a:r>
-                  <a:rPr lang="en-US">
-                    <a:noFill/>
-                  </a:rPr>
-                  <a:t> </a:t>
-                </a:r>
-              </a:p>
-            </p:txBody>
-          </p:sp>
-        </mc:Fallback>
-      </mc:AlternateContent>
-      <mc:AlternateContent xmlns:mc="http://schemas.openxmlformats.org/markup-compatibility/2006" xmlns:a14="http://schemas.microsoft.com/office/drawing/2010/main">
-        <mc:Choice Requires="a14">
-          <p:sp>
-            <p:nvSpPr>
-              <p:cNvPr id="13" name="TextBox 12">
-                <a:extLst>
-                  <a:ext uri="{FF2B5EF4-FFF2-40B4-BE49-F238E27FC236}">
-                    <a16:creationId xmlns:a16="http://schemas.microsoft.com/office/drawing/2014/main" id="{A2AB9A23-FBD3-DB90-9801-00E1D6F3D56C}"/>
-                  </a:ext>
-                </a:extLst>
-              </p:cNvPr>
-              <p:cNvSpPr txBox="1"/>
-              <p:nvPr/>
-            </p:nvSpPr>
-            <p:spPr>
-              <a:xfrm>
-                <a:off x="11053099" y="4057069"/>
-                <a:ext cx="202368" cy="369332"/>
-              </a:xfrm>
-              <a:prstGeom prst="rect">
-                <a:avLst/>
-              </a:prstGeom>
-              <a:noFill/>
-            </p:spPr>
-            <p:txBody>
-              <a:bodyPr wrap="square" rtlCol="0">
-                <a:spAutoFit/>
-              </a:bodyPr>
-              <a:lstStyle/>
-              <a:p>
-                <a:pPr/>
-                <a14:m>
-                  <m:oMathPara xmlns:m="http://schemas.openxmlformats.org/officeDocument/2006/math">
-                    <m:oMathParaPr>
-                      <m:jc m:val="centerGroup"/>
-                    </m:oMathParaPr>
-                    <m:oMath xmlns:m="http://schemas.openxmlformats.org/officeDocument/2006/math">
-                      <m:r>
-                        <a:rPr lang="en-US" b="0" i="1" smtClean="0">
-                          <a:latin typeface="Cambria Math" panose="02040503050406030204" pitchFamily="18" charset="0"/>
-                        </a:rPr>
-                        <m:t>𝑄</m:t>
-                      </m:r>
-                    </m:oMath>
-                  </m:oMathPara>
-                </a14:m>
-                <a:endParaRPr lang="en-US" dirty="0"/>
-              </a:p>
-            </p:txBody>
-          </p:sp>
-        </mc:Choice>
-        <mc:Fallback xmlns="">
-          <p:sp>
-            <p:nvSpPr>
-              <p:cNvPr id="13" name="TextBox 12">
-                <a:extLst>
-                  <a:ext uri="{FF2B5EF4-FFF2-40B4-BE49-F238E27FC236}">
-                    <a16:creationId xmlns:a16="http://schemas.microsoft.com/office/drawing/2014/main" id="{A2AB9A23-FBD3-DB90-9801-00E1D6F3D56C}"/>
-                  </a:ext>
-                </a:extLst>
-              </p:cNvPr>
-              <p:cNvSpPr txBox="1">
-                <a:spLocks noRot="1" noChangeAspect="1" noMove="1" noResize="1" noEditPoints="1" noAdjustHandles="1" noChangeArrowheads="1" noChangeShapeType="1" noTextEdit="1"/>
-              </p:cNvSpPr>
-              <p:nvPr/>
-            </p:nvSpPr>
-            <p:spPr>
-              <a:xfrm>
-                <a:off x="11053099" y="4057069"/>
-                <a:ext cx="202368" cy="369332"/>
-              </a:xfrm>
-              <a:prstGeom prst="rect">
-                <a:avLst/>
-              </a:prstGeom>
-              <a:blipFill>
-                <a:blip r:embed="rId8"/>
-                <a:stretch>
-                  <a:fillRect l="-6061" r="-75758" b="-10000"/>
-                </a:stretch>
-              </a:blipFill>
-            </p:spPr>
-            <p:txBody>
-              <a:bodyPr/>
-              <a:lstStyle/>
-              <a:p>
-                <a:r>
-                  <a:rPr lang="en-US">
-                    <a:noFill/>
-                  </a:rPr>
-                  <a:t> </a:t>
-                </a:r>
-              </a:p>
-            </p:txBody>
-          </p:sp>
-        </mc:Fallback>
-      </mc:AlternateContent>
+      </p:pic>
     </p:spTree>
     <p:extLst>
       <p:ext uri="{BB962C8B-B14F-4D97-AF65-F5344CB8AC3E}">
@@ -6972,7 +7014,7 @@
         <mc:Choice Requires="a14">
           <p:sp>
             <p:nvSpPr>
-              <p:cNvPr id="3" name="Content Placeholder 2">
+              <p:cNvPr id="3" name="Content Placeholder 2" descr="Start with an initial policy pi called the base policy. At decision time in state s :. Monte Carlo Policy Estimation: Use many simulated trajectories to approximate all state/action values q sub pi (s,a) for the current state s . Choose the best action a equals argmax over a, of q sub pi (s,a) according to the estimates. This is called the rollout policy. Properties:. If the base policy is reasonable (i.e., somewhat similar to the optimal policy), rollouts are locally optimal. Rollout policy is guaranteed to be at least as good as the base policy (in expectation). You get policy improvement without solving Bellman equations">
                 <a:extLst>
                   <a:ext uri="{FF2B5EF4-FFF2-40B4-BE49-F238E27FC236}">
                     <a16:creationId xmlns:a16="http://schemas.microsoft.com/office/drawing/2014/main" id="{2CC82524-2F85-6F77-02EE-038ACB2CB2FC}"/>
@@ -7164,7 +7206,7 @@
                         <m:limLow>
                           <m:limLowPr>
                             <m:ctrlPr>
-                              <a:rPr lang="en-US" b="0" i="1" smtClean="0">
+                              <a:rPr lang="en-US" b="0" i="0" smtClean="0">
                                 <a:latin typeface="Cambria Math" panose="02040503050406030204" pitchFamily="18" charset="0"/>
                               </a:rPr>
                             </m:ctrlPr>
@@ -7328,7 +7370,7 @@
         <mc:Fallback xmlns="">
           <p:sp>
             <p:nvSpPr>
-              <p:cNvPr id="3" name="Content Placeholder 2">
+              <p:cNvPr id="3" name="Content Placeholder 2" descr="Start with an initial policy pi called the base policy. At decision time in state s :. Monte Carlo Policy Estimation: Use many simulated trajectories to approximate all state/action values q sub pi (s,a) for the current state s . Choose the best action a equals argmax over a, of q sub pi (s,a) according to the estimates. This is called the rollout policy. Properties:. If the base policy is reasonable (i.e., somewhat similar to the optimal policy), rollouts are locally optimal. Rollout policy is guaranteed to be at least as good as the base policy (in expectation). You get policy improvement without solving Bellman equations">
                 <a:extLst>
                   <a:ext uri="{FF2B5EF4-FFF2-40B4-BE49-F238E27FC236}">
                     <a16:creationId xmlns:a16="http://schemas.microsoft.com/office/drawing/2014/main" id="{2CC82524-2F85-6F77-02EE-038ACB2CB2FC}"/>
@@ -7567,36 +7609,6 @@
           <a:chExt cx="0" cy="0"/>
         </a:xfrm>
       </p:grpSpPr>
-      <p:pic>
-        <p:nvPicPr>
-          <p:cNvPr id="5" name="Picture 4">
-            <a:extLst>
-              <a:ext uri="{FF2B5EF4-FFF2-40B4-BE49-F238E27FC236}">
-                <a16:creationId xmlns:a16="http://schemas.microsoft.com/office/drawing/2014/main" id="{1D29CDF0-6E54-CF31-4006-DA0CE95A62FC}"/>
-              </a:ext>
-            </a:extLst>
-          </p:cNvPr>
-          <p:cNvPicPr>
-            <a:picLocks noChangeAspect="1"/>
-          </p:cNvPicPr>
-          <p:nvPr/>
-        </p:nvPicPr>
-        <p:blipFill>
-          <a:blip r:embed="rId2"/>
-          <a:stretch>
-            <a:fillRect/>
-          </a:stretch>
-        </p:blipFill>
-        <p:spPr>
-          <a:xfrm>
-            <a:off x="5636910" y="1224786"/>
-            <a:ext cx="6086998" cy="3897773"/>
-          </a:xfrm>
-          <a:prstGeom prst="rect">
-            <a:avLst/>
-          </a:prstGeom>
-        </p:spPr>
-      </p:pic>
       <p:sp>
         <p:nvSpPr>
           <p:cNvPr id="2" name="Title 1">
@@ -7719,11 +7731,41 @@
           </a:p>
         </p:txBody>
       </p:sp>
+      <p:pic>
+        <p:nvPicPr>
+          <p:cNvPr id="5" name="Picture 4" descr="Monte Carlo Tree Search (Sutton and Barto Figure 8.10): four steps in a loop labelled &quot;Repeat while time remains&quot;. Selection: starting at the root, the tree policy follows blue arrows down the existing tree to a leaf node. Expansion: one or more child nodes are added below that leaf. Simulation: from the new node, the rollout policy follows a dashed blue path to a terminal state (a triangle). Backup: red arrows carry the result of the simulation back up through the nodes visited by the tree policy to the root.">
+            <a:extLst>
+              <a:ext uri="{FF2B5EF4-FFF2-40B4-BE49-F238E27FC236}">
+                <a16:creationId xmlns:a16="http://schemas.microsoft.com/office/drawing/2014/main" id="{1D29CDF0-6E54-CF31-4006-DA0CE95A62FC}"/>
+              </a:ext>
+            </a:extLst>
+          </p:cNvPr>
+          <p:cNvPicPr>
+            <a:picLocks noChangeAspect="1"/>
+          </p:cNvPicPr>
+          <p:nvPr/>
+        </p:nvPicPr>
+        <p:blipFill>
+          <a:blip r:embed="rId2"/>
+          <a:stretch>
+            <a:fillRect/>
+          </a:stretch>
+        </p:blipFill>
+        <p:spPr>
+          <a:xfrm>
+            <a:off x="5636910" y="1224786"/>
+            <a:ext cx="6086998" cy="3897773"/>
+          </a:xfrm>
+          <a:prstGeom prst="rect">
+            <a:avLst/>
+          </a:prstGeom>
+        </p:spPr>
+      </p:pic>
       <mc:AlternateContent xmlns:mc="http://schemas.openxmlformats.org/markup-compatibility/2006" xmlns:a14="http://schemas.microsoft.com/office/drawing/2010/main">
         <mc:Choice Requires="a14">
           <p:sp>
             <p:nvSpPr>
-              <p:cNvPr id="8" name="Speech Bubble: Rectangle with Corners Rounded 7">
+              <p:cNvPr id="8" name="Speech Bubble: Rectangle with Corners Rounded 7" descr="Stores estimated q(s,a) values">
                 <a:extLst>
                   <a:ext uri="{FF2B5EF4-FFF2-40B4-BE49-F238E27FC236}">
                     <a16:creationId xmlns:a16="http://schemas.microsoft.com/office/drawing/2014/main" id="{C8435328-960F-3341-B5FD-2B3A09AB85A7}"/>
@@ -7822,7 +7864,7 @@
         <mc:Fallback xmlns="">
           <p:sp>
             <p:nvSpPr>
-              <p:cNvPr id="8" name="Speech Bubble: Rectangle with Corners Rounded 7">
+              <p:cNvPr id="8" name="Speech Bubble: Rectangle with Corners Rounded 7" descr="Stores estimated q(s,a) values">
                 <a:extLst>
                   <a:ext uri="{FF2B5EF4-FFF2-40B4-BE49-F238E27FC236}">
                     <a16:creationId xmlns:a16="http://schemas.microsoft.com/office/drawing/2014/main" id="{C8435328-960F-3341-B5FD-2B3A09AB85A7}"/>
@@ -8736,6 +8778,9 @@
               <a:ext uri="{FF2B5EF4-FFF2-40B4-BE49-F238E27FC236}">
                 <a16:creationId xmlns:a16="http://schemas.microsoft.com/office/drawing/2014/main" id="{1C2D5D64-9B74-CBE4-593F-CD0BD612F90E}"/>
               </a:ext>
+              <a:ext uri="{C183D7F6-B498-43B3-948B-1728B52AA6E4}">
+                <adec:decorative xmlns:adec="http://schemas.microsoft.com/office/drawing/2017/decorative" val="1"/>
+              </a:ext>
             </a:extLst>
           </p:cNvPr>
           <p:cNvSpPr>
@@ -8905,7 +8950,7 @@
       </p:sp>
       <p:grpSp>
         <p:nvGrpSpPr>
-          <p:cNvPr id="11" name="Group 10">
+          <p:cNvPr id="11" name="Group 10" descr="Generalized policy iteration: an evaluation arrow from pi to V, labelled V goes to v pi, and an improvement arrow from V back to pi, labelled pi goes to greedy(V). Dots below show the cycle repeating until it reaches pi star and v star, joined by two arrows because each is consistent with the other. Labels: GPI.">
             <a:extLst>
               <a:ext uri="{FF2B5EF4-FFF2-40B4-BE49-F238E27FC236}">
                 <a16:creationId xmlns:a16="http://schemas.microsoft.com/office/drawing/2014/main" id="{3034BB89-D9AD-752C-0116-E0F49DEE26E2}"/>
@@ -8925,7 +8970,7 @@
         </p:grpSpPr>
         <p:pic>
           <p:nvPicPr>
-            <p:cNvPr id="9" name="Picture 8">
+            <p:cNvPr id="9" name="Picture 8" descr="Generalized policy iteration: an evaluation arrow from pi to V, labelled V goes to v pi, and an improvement arrow from V back to pi, labelled pi goes to greedy(V). Dots below show the cycle repeating until it reaches pi star and v star, joined by two arrows because each is consistent with the other.">
               <a:extLst>
                 <a:ext uri="{FF2B5EF4-FFF2-40B4-BE49-F238E27FC236}">
                   <a16:creationId xmlns:a16="http://schemas.microsoft.com/office/drawing/2014/main" id="{6D7366F6-2509-4BE8-74F6-EEAFAB9B333B}"/>
@@ -9232,39 +9277,9 @@
           </a:p>
         </p:txBody>
       </p:sp>
-      <p:pic>
-        <p:nvPicPr>
-          <p:cNvPr id="5" name="Picture 4">
-            <a:extLst>
-              <a:ext uri="{FF2B5EF4-FFF2-40B4-BE49-F238E27FC236}">
-                <a16:creationId xmlns:a16="http://schemas.microsoft.com/office/drawing/2014/main" id="{48DB6AFE-8E14-4667-7D60-A58A0303A73E}"/>
-              </a:ext>
-            </a:extLst>
-          </p:cNvPr>
-          <p:cNvPicPr>
-            <a:picLocks noChangeAspect="1"/>
-          </p:cNvPicPr>
-          <p:nvPr/>
-        </p:nvPicPr>
-        <p:blipFill>
-          <a:blip r:embed="rId2"/>
-          <a:stretch>
-            <a:fillRect/>
-          </a:stretch>
-        </p:blipFill>
-        <p:spPr>
-          <a:xfrm>
-            <a:off x="3126923" y="1210540"/>
-            <a:ext cx="5383802" cy="5015409"/>
-          </a:xfrm>
-          <a:prstGeom prst="rect">
-            <a:avLst/>
-          </a:prstGeom>
-        </p:spPr>
-      </p:pic>
       <p:grpSp>
         <p:nvGrpSpPr>
-          <p:cNvPr id="10" name="Group 9">
+          <p:cNvPr id="10" name="Group 9" descr="Depth axis: downward arrows from one-step methods, to n-step methods, to full-return methods.">
             <a:extLst>
               <a:ext uri="{FF2B5EF4-FFF2-40B4-BE49-F238E27FC236}">
                 <a16:creationId xmlns:a16="http://schemas.microsoft.com/office/drawing/2014/main" id="{5CA57B6F-AFA2-C742-A3A7-F8BFC16F658E}"/>
@@ -9401,6 +9416,9 @@
                 <a:ext uri="{FF2B5EF4-FFF2-40B4-BE49-F238E27FC236}">
                   <a16:creationId xmlns:a16="http://schemas.microsoft.com/office/drawing/2014/main" id="{14776485-2079-FEC2-09A9-7017DA2CC2F5}"/>
                 </a:ext>
+                <a:ext uri="{C183D7F6-B498-43B3-948B-1728B52AA6E4}">
+                  <adec:decorative xmlns:adec="http://schemas.microsoft.com/office/drawing/2017/decorative" val="1"/>
+                </a:ext>
               </a:extLst>
             </p:cNvPr>
             <p:cNvSpPr/>
@@ -9447,6 +9465,9 @@
                 <a:ext uri="{FF2B5EF4-FFF2-40B4-BE49-F238E27FC236}">
                   <a16:creationId xmlns:a16="http://schemas.microsoft.com/office/drawing/2014/main" id="{41E61BFF-8CD8-FB08-066F-8BE63D8D46A9}"/>
                 </a:ext>
+                <a:ext uri="{C183D7F6-B498-43B3-948B-1728B52AA6E4}">
+                  <adec:decorative xmlns:adec="http://schemas.microsoft.com/office/drawing/2017/decorative" val="1"/>
+                </a:ext>
               </a:extLst>
             </p:cNvPr>
             <p:cNvSpPr/>
@@ -9487,9 +9508,683 @@
           </p:txBody>
         </p:sp>
       </p:grpSp>
+      <p:pic>
+        <p:nvPicPr>
+          <p:cNvPr id="5" name="Picture 4" descr="The space of update methods (Sutton and Barto Figure 8.11): a square whose horizontal axis is the width of update (sample to expected) and whose vertical axis is the depth, or length, of update (one step to full episode). The four corners show temporal-difference learning (narrow and shallow, top left), dynamic programming (wide and shallow, top right), Monte Carlo (narrow and deep, bottom left) and exhaustive search (wide and deep, bottom right), each with its backup diagram.">
+            <a:extLst>
+              <a:ext uri="{FF2B5EF4-FFF2-40B4-BE49-F238E27FC236}">
+                <a16:creationId xmlns:a16="http://schemas.microsoft.com/office/drawing/2014/main" id="{48DB6AFE-8E14-4667-7D60-A58A0303A73E}"/>
+              </a:ext>
+            </a:extLst>
+          </p:cNvPr>
+          <p:cNvPicPr>
+            <a:picLocks noChangeAspect="1"/>
+          </p:cNvPicPr>
+          <p:nvPr/>
+        </p:nvPicPr>
+        <p:blipFill>
+          <a:blip r:embed="rId2"/>
+          <a:stretch>
+            <a:fillRect/>
+          </a:stretch>
+        </p:blipFill>
+        <p:spPr>
+          <a:xfrm>
+            <a:off x="3126923" y="1210540"/>
+            <a:ext cx="5383802" cy="5015409"/>
+          </a:xfrm>
+          <a:prstGeom prst="rect">
+            <a:avLst/>
+          </a:prstGeom>
+        </p:spPr>
+      </p:pic>
+      <p:sp>
+        <p:nvSpPr>
+          <p:cNvPr id="18" name="TextBox 17">
+            <a:extLst>
+              <a:ext uri="{FF2B5EF4-FFF2-40B4-BE49-F238E27FC236}">
+                <a16:creationId xmlns:a16="http://schemas.microsoft.com/office/drawing/2014/main" id="{4E74D7B6-C23A-AF2E-4548-1F2E9AF97501}"/>
+              </a:ext>
+            </a:extLst>
+          </p:cNvPr>
+          <p:cNvSpPr txBox="1"/>
+          <p:nvPr/>
+        </p:nvSpPr>
+        <p:spPr>
+          <a:xfrm>
+            <a:off x="4235080" y="1683811"/>
+            <a:ext cx="1531277" cy="523220"/>
+          </a:xfrm>
+          <a:prstGeom prst="rect">
+            <a:avLst/>
+          </a:prstGeom>
+          <a:noFill/>
+        </p:spPr>
+        <p:txBody>
+          <a:bodyPr wrap="square" rtlCol="0">
+            <a:spAutoFit/>
+          </a:bodyPr>
+          <a:lstStyle/>
+          <a:p>
+            <a:r>
+              <a:rPr lang="en-US" sz="1400" dirty="0"/>
+              <a:t>one-step Sarsa</a:t>
+            </a:r>
+            <a:br>
+              <a:rPr lang="en-US" sz="1400" dirty="0"/>
+            </a:br>
+            <a:r>
+              <a:rPr lang="en-US" sz="1400" dirty="0"/>
+              <a:t>Q-Learning</a:t>
+            </a:r>
+          </a:p>
+        </p:txBody>
+      </p:sp>
+      <p:sp>
+        <p:nvSpPr>
+          <p:cNvPr id="19" name="TextBox 18">
+            <a:extLst>
+              <a:ext uri="{FF2B5EF4-FFF2-40B4-BE49-F238E27FC236}">
+                <a16:creationId xmlns:a16="http://schemas.microsoft.com/office/drawing/2014/main" id="{5779370B-E9C9-008B-B236-A85F259625FE}"/>
+              </a:ext>
+            </a:extLst>
+          </p:cNvPr>
+          <p:cNvSpPr txBox="1"/>
+          <p:nvPr/>
+        </p:nvSpPr>
+        <p:spPr>
+          <a:xfrm>
+            <a:off x="8438052" y="1580720"/>
+            <a:ext cx="2564728" cy="307777"/>
+          </a:xfrm>
+          <a:prstGeom prst="rect">
+            <a:avLst/>
+          </a:prstGeom>
+          <a:noFill/>
+        </p:spPr>
+        <p:txBody>
+          <a:bodyPr wrap="square" rtlCol="0">
+            <a:spAutoFit/>
+          </a:bodyPr>
+          <a:lstStyle/>
+          <a:p>
+            <a:r>
+              <a:rPr lang="en-US" sz="1400" dirty="0"/>
+              <a:t>+ Expected Sarsa</a:t>
+            </a:r>
+          </a:p>
+        </p:txBody>
+      </p:sp>
+      <p:sp>
+        <p:nvSpPr>
+          <p:cNvPr id="24" name="Arrow: Down 23">
+            <a:extLst>
+              <a:ext uri="{FF2B5EF4-FFF2-40B4-BE49-F238E27FC236}">
+                <a16:creationId xmlns:a16="http://schemas.microsoft.com/office/drawing/2014/main" id="{9460DE18-4C9A-6BA3-92A8-156AF432C6B4}"/>
+              </a:ext>
+            </a:extLst>
+          </p:cNvPr>
+          <p:cNvSpPr/>
+          <p:nvPr/>
+        </p:nvSpPr>
+        <p:spPr>
+          <a:xfrm flipV="1">
+            <a:off x="2651452" y="2053157"/>
+            <a:ext cx="679509" cy="2852096"/>
+          </a:xfrm>
+          <a:prstGeom prst="downArrow">
+            <a:avLst/>
+          </a:prstGeom>
+        </p:spPr>
+        <p:style>
+          <a:lnRef idx="2">
+            <a:schemeClr val="accent3">
+              <a:shade val="15000"/>
+            </a:schemeClr>
+          </a:lnRef>
+          <a:fillRef idx="1">
+            <a:schemeClr val="accent3"/>
+          </a:fillRef>
+          <a:effectRef idx="0">
+            <a:schemeClr val="accent3"/>
+          </a:effectRef>
+          <a:fontRef idx="minor">
+            <a:schemeClr val="lt1"/>
+          </a:fontRef>
+        </p:style>
+        <p:txBody>
+          <a:bodyPr vert="vert" rtlCol="0" anchor="ctr"/>
+          <a:lstStyle/>
+          <a:p>
+            <a:pPr algn="ctr"/>
+            <a:r>
+              <a:rPr lang="en-US" dirty="0"/>
+              <a:t>Bias increases</a:t>
+            </a:r>
+          </a:p>
+        </p:txBody>
+      </p:sp>
+      <p:sp>
+        <p:nvSpPr>
+          <p:cNvPr id="23" name="TextBox 22">
+            <a:extLst>
+              <a:ext uri="{FF2B5EF4-FFF2-40B4-BE49-F238E27FC236}">
+                <a16:creationId xmlns:a16="http://schemas.microsoft.com/office/drawing/2014/main" id="{E0808173-01FB-4745-DD56-A2D88A5FE9FD}"/>
+              </a:ext>
+            </a:extLst>
+          </p:cNvPr>
+          <p:cNvSpPr txBox="1"/>
+          <p:nvPr/>
+        </p:nvSpPr>
+        <p:spPr>
+          <a:xfrm>
+            <a:off x="8986196" y="2360586"/>
+            <a:ext cx="2275530" cy="1200329"/>
+          </a:xfrm>
+          <a:prstGeom prst="rect">
+            <a:avLst/>
+          </a:prstGeom>
+        </p:spPr>
+        <p:style>
+          <a:lnRef idx="2">
+            <a:schemeClr val="accent3">
+              <a:shade val="15000"/>
+            </a:schemeClr>
+          </a:lnRef>
+          <a:fillRef idx="1">
+            <a:schemeClr val="accent3"/>
+          </a:fillRef>
+          <a:effectRef idx="0">
+            <a:schemeClr val="accent3"/>
+          </a:effectRef>
+          <a:fontRef idx="minor">
+            <a:schemeClr val="lt1"/>
+          </a:fontRef>
+        </p:style>
+        <p:txBody>
+          <a:bodyPr wrap="square" rtlCol="0">
+            <a:spAutoFit/>
+          </a:bodyPr>
+          <a:lstStyle/>
+          <a:p>
+            <a:r>
+              <a:rPr lang="en-US" dirty="0"/>
+              <a:t>Bias decreases the closer we get to the optimal value function.</a:t>
+            </a:r>
+          </a:p>
+        </p:txBody>
+      </p:sp>
       <p:grpSp>
         <p:nvGrpSpPr>
-          <p:cNvPr id="14" name="Group 13">
+          <p:cNvPr id="22" name="Group 21" descr="Point in the chart labelled n-step Sarsa.">
+            <a:extLst>
+              <a:ext uri="{FF2B5EF4-FFF2-40B4-BE49-F238E27FC236}">
+                <a16:creationId xmlns:a16="http://schemas.microsoft.com/office/drawing/2014/main" id="{AFABC249-B9C3-B83D-2555-FEAEA52E10A6}"/>
+              </a:ext>
+            </a:extLst>
+          </p:cNvPr>
+          <p:cNvGrpSpPr/>
+          <p:nvPr/>
+        </p:nvGrpSpPr>
+        <p:grpSpPr>
+          <a:xfrm>
+            <a:off x="4130378" y="3100944"/>
+            <a:ext cx="1583628" cy="307777"/>
+            <a:chOff x="4130378" y="3100944"/>
+            <a:chExt cx="1583628" cy="307777"/>
+          </a:xfrm>
+        </p:grpSpPr>
+        <p:sp>
+          <p:nvSpPr>
+            <p:cNvPr id="20" name="Oval 19">
+              <a:extLst>
+                <a:ext uri="{FF2B5EF4-FFF2-40B4-BE49-F238E27FC236}">
+                  <a16:creationId xmlns:a16="http://schemas.microsoft.com/office/drawing/2014/main" id="{A5FC1DEF-060E-DB48-CC65-B77A6C34CC20}"/>
+                </a:ext>
+                <a:ext uri="{C183D7F6-B498-43B3-948B-1728B52AA6E4}">
+                  <adec:decorative xmlns:adec="http://schemas.microsoft.com/office/drawing/2017/decorative" val="1"/>
+                </a:ext>
+              </a:extLst>
+            </p:cNvPr>
+            <p:cNvSpPr/>
+            <p:nvPr/>
+          </p:nvSpPr>
+          <p:spPr>
+            <a:xfrm>
+              <a:off x="4130378" y="3203521"/>
+              <a:ext cx="104702" cy="102624"/>
+            </a:xfrm>
+            <a:prstGeom prst="ellipse">
+              <a:avLst/>
+            </a:prstGeom>
+            <a:ln w="6350"/>
+          </p:spPr>
+          <p:style>
+            <a:lnRef idx="2">
+              <a:schemeClr val="dk1"/>
+            </a:lnRef>
+            <a:fillRef idx="1">
+              <a:schemeClr val="lt1"/>
+            </a:fillRef>
+            <a:effectRef idx="0">
+              <a:schemeClr val="dk1"/>
+            </a:effectRef>
+            <a:fontRef idx="minor">
+              <a:schemeClr val="dk1"/>
+            </a:fontRef>
+          </p:style>
+          <p:txBody>
+            <a:bodyPr rtlCol="0" anchor="ctr"/>
+            <a:lstStyle/>
+            <a:p>
+              <a:pPr algn="ctr"/>
+              <a:endParaRPr lang="en-US"/>
+            </a:p>
+          </p:txBody>
+        </p:sp>
+        <p:sp>
+          <p:nvSpPr>
+            <p:cNvPr id="21" name="TextBox 20">
+              <a:extLst>
+                <a:ext uri="{FF2B5EF4-FFF2-40B4-BE49-F238E27FC236}">
+                  <a16:creationId xmlns:a16="http://schemas.microsoft.com/office/drawing/2014/main" id="{F85C0057-A551-8186-D2E1-FC4CE09F09CD}"/>
+                </a:ext>
+              </a:extLst>
+            </p:cNvPr>
+            <p:cNvSpPr txBox="1"/>
+            <p:nvPr/>
+          </p:nvSpPr>
+          <p:spPr>
+            <a:xfrm>
+              <a:off x="4182729" y="3100944"/>
+              <a:ext cx="1531277" cy="307777"/>
+            </a:xfrm>
+            <a:prstGeom prst="rect">
+              <a:avLst/>
+            </a:prstGeom>
+            <a:noFill/>
+          </p:spPr>
+          <p:txBody>
+            <a:bodyPr wrap="square" rtlCol="0">
+              <a:spAutoFit/>
+            </a:bodyPr>
+            <a:lstStyle/>
+            <a:p>
+              <a:r>
+                <a:rPr lang="en-US" sz="1400" dirty="0"/>
+                <a:t>n-step Sarsa</a:t>
+              </a:r>
+            </a:p>
+          </p:txBody>
+        </p:sp>
+      </p:grpSp>
+      <p:grpSp>
+        <p:nvGrpSpPr>
+          <p:cNvPr id="27" name="Group 26" descr="Point in the chart labelled Heuristic Search.">
+            <a:extLst>
+              <a:ext uri="{FF2B5EF4-FFF2-40B4-BE49-F238E27FC236}">
+                <a16:creationId xmlns:a16="http://schemas.microsoft.com/office/drawing/2014/main" id="{7D1DE593-0B34-D530-BE33-148CB1599F39}"/>
+              </a:ext>
+            </a:extLst>
+          </p:cNvPr>
+          <p:cNvGrpSpPr/>
+          <p:nvPr/>
+        </p:nvGrpSpPr>
+        <p:grpSpPr>
+          <a:xfrm>
+            <a:off x="5227038" y="3517291"/>
+            <a:ext cx="1588797" cy="523220"/>
+            <a:chOff x="5069641" y="3855268"/>
+            <a:chExt cx="1588797" cy="523220"/>
+          </a:xfrm>
+        </p:grpSpPr>
+        <p:sp>
+          <p:nvSpPr>
+            <p:cNvPr id="28" name="Oval 27">
+              <a:extLst>
+                <a:ext uri="{FF2B5EF4-FFF2-40B4-BE49-F238E27FC236}">
+                  <a16:creationId xmlns:a16="http://schemas.microsoft.com/office/drawing/2014/main" id="{A9F37B31-30DD-6438-F97B-1D7F20C6B9DE}"/>
+                </a:ext>
+                <a:ext uri="{C183D7F6-B498-43B3-948B-1728B52AA6E4}">
+                  <adec:decorative xmlns:adec="http://schemas.microsoft.com/office/drawing/2017/decorative" val="1"/>
+                </a:ext>
+              </a:extLst>
+            </p:cNvPr>
+            <p:cNvSpPr/>
+            <p:nvPr/>
+          </p:nvSpPr>
+          <p:spPr>
+            <a:xfrm>
+              <a:off x="5069641" y="4071507"/>
+              <a:ext cx="104702" cy="102624"/>
+            </a:xfrm>
+            <a:prstGeom prst="ellipse">
+              <a:avLst/>
+            </a:prstGeom>
+            <a:ln w="6350"/>
+          </p:spPr>
+          <p:style>
+            <a:lnRef idx="2">
+              <a:schemeClr val="dk1"/>
+            </a:lnRef>
+            <a:fillRef idx="1">
+              <a:schemeClr val="lt1"/>
+            </a:fillRef>
+            <a:effectRef idx="0">
+              <a:schemeClr val="dk1"/>
+            </a:effectRef>
+            <a:fontRef idx="minor">
+              <a:schemeClr val="dk1"/>
+            </a:fontRef>
+          </p:style>
+          <p:txBody>
+            <a:bodyPr rtlCol="0" anchor="ctr"/>
+            <a:lstStyle/>
+            <a:p>
+              <a:pPr algn="ctr"/>
+              <a:endParaRPr lang="en-US"/>
+            </a:p>
+          </p:txBody>
+        </p:sp>
+        <p:sp>
+          <p:nvSpPr>
+            <p:cNvPr id="29" name="TextBox 28">
+              <a:extLst>
+                <a:ext uri="{FF2B5EF4-FFF2-40B4-BE49-F238E27FC236}">
+                  <a16:creationId xmlns:a16="http://schemas.microsoft.com/office/drawing/2014/main" id="{D5F71844-0FD3-56FF-0936-594357BEDB8D}"/>
+                </a:ext>
+              </a:extLst>
+            </p:cNvPr>
+            <p:cNvSpPr txBox="1"/>
+            <p:nvPr/>
+          </p:nvSpPr>
+          <p:spPr>
+            <a:xfrm>
+              <a:off x="5127161" y="3855268"/>
+              <a:ext cx="1531277" cy="523220"/>
+            </a:xfrm>
+            <a:prstGeom prst="rect">
+              <a:avLst/>
+            </a:prstGeom>
+            <a:noFill/>
+          </p:spPr>
+          <p:txBody>
+            <a:bodyPr wrap="square" rtlCol="0">
+              <a:spAutoFit/>
+            </a:bodyPr>
+            <a:lstStyle/>
+            <a:p>
+              <a:r>
+                <a:rPr lang="en-US" sz="1400" dirty="0"/>
+                <a:t>Heuristic</a:t>
+              </a:r>
+              <a:br>
+                <a:rPr lang="en-US" sz="1400" dirty="0"/>
+              </a:br>
+              <a:r>
+                <a:rPr lang="en-US" sz="1400" dirty="0"/>
+                <a:t>Search</a:t>
+              </a:r>
+            </a:p>
+          </p:txBody>
+        </p:sp>
+      </p:grpSp>
+      <p:sp>
+        <p:nvSpPr>
+          <p:cNvPr id="25" name="TextBox 24">
+            <a:extLst>
+              <a:ext uri="{FF2B5EF4-FFF2-40B4-BE49-F238E27FC236}">
+                <a16:creationId xmlns:a16="http://schemas.microsoft.com/office/drawing/2014/main" id="{09B2548B-E9B6-44AE-AA51-21FD905A4927}"/>
+              </a:ext>
+            </a:extLst>
+          </p:cNvPr>
+          <p:cNvSpPr txBox="1"/>
+          <p:nvPr/>
+        </p:nvSpPr>
+        <p:spPr>
+          <a:xfrm>
+            <a:off x="8986196" y="3724748"/>
+            <a:ext cx="2275530" cy="646331"/>
+          </a:xfrm>
+          <a:prstGeom prst="rect">
+            <a:avLst/>
+          </a:prstGeom>
+        </p:spPr>
+        <p:style>
+          <a:lnRef idx="2">
+            <a:schemeClr val="accent3">
+              <a:shade val="15000"/>
+            </a:schemeClr>
+          </a:lnRef>
+          <a:fillRef idx="1">
+            <a:schemeClr val="accent3"/>
+          </a:fillRef>
+          <a:effectRef idx="0">
+            <a:schemeClr val="accent3"/>
+          </a:effectRef>
+          <a:fontRef idx="minor">
+            <a:schemeClr val="lt1"/>
+          </a:fontRef>
+        </p:style>
+        <p:txBody>
+          <a:bodyPr wrap="square" rtlCol="0">
+            <a:spAutoFit/>
+          </a:bodyPr>
+          <a:lstStyle/>
+          <a:p>
+            <a:r>
+              <a:rPr lang="en-US" dirty="0"/>
+              <a:t>Variance decreases with sample size.</a:t>
+            </a:r>
+          </a:p>
+        </p:txBody>
+      </p:sp>
+      <p:grpSp>
+        <p:nvGrpSpPr>
+          <p:cNvPr id="17" name="Group 16" descr="Point in the chart labelled Rollout Algorithms.">
+            <a:extLst>
+              <a:ext uri="{FF2B5EF4-FFF2-40B4-BE49-F238E27FC236}">
+                <a16:creationId xmlns:a16="http://schemas.microsoft.com/office/drawing/2014/main" id="{5119C3A0-42FD-212B-5471-F32C75AA54ED}"/>
+              </a:ext>
+            </a:extLst>
+          </p:cNvPr>
+          <p:cNvGrpSpPr/>
+          <p:nvPr/>
+        </p:nvGrpSpPr>
+        <p:grpSpPr>
+          <a:xfrm>
+            <a:off x="5227038" y="4647030"/>
+            <a:ext cx="1588797" cy="523220"/>
+            <a:chOff x="5069641" y="3855268"/>
+            <a:chExt cx="1588797" cy="523220"/>
+          </a:xfrm>
+        </p:grpSpPr>
+        <p:sp>
+          <p:nvSpPr>
+            <p:cNvPr id="15" name="Oval 14">
+              <a:extLst>
+                <a:ext uri="{FF2B5EF4-FFF2-40B4-BE49-F238E27FC236}">
+                  <a16:creationId xmlns:a16="http://schemas.microsoft.com/office/drawing/2014/main" id="{1A7752DC-C919-21AB-695A-0B5E14D50DAF}"/>
+                </a:ext>
+                <a:ext uri="{C183D7F6-B498-43B3-948B-1728B52AA6E4}">
+                  <adec:decorative xmlns:adec="http://schemas.microsoft.com/office/drawing/2017/decorative" val="1"/>
+                </a:ext>
+              </a:extLst>
+            </p:cNvPr>
+            <p:cNvSpPr/>
+            <p:nvPr/>
+          </p:nvSpPr>
+          <p:spPr>
+            <a:xfrm>
+              <a:off x="5069641" y="4071507"/>
+              <a:ext cx="104702" cy="102624"/>
+            </a:xfrm>
+            <a:prstGeom prst="ellipse">
+              <a:avLst/>
+            </a:prstGeom>
+            <a:ln w="6350"/>
+          </p:spPr>
+          <p:style>
+            <a:lnRef idx="2">
+              <a:schemeClr val="dk1"/>
+            </a:lnRef>
+            <a:fillRef idx="1">
+              <a:schemeClr val="lt1"/>
+            </a:fillRef>
+            <a:effectRef idx="0">
+              <a:schemeClr val="dk1"/>
+            </a:effectRef>
+            <a:fontRef idx="minor">
+              <a:schemeClr val="dk1"/>
+            </a:fontRef>
+          </p:style>
+          <p:txBody>
+            <a:bodyPr rtlCol="0" anchor="ctr"/>
+            <a:lstStyle/>
+            <a:p>
+              <a:pPr algn="ctr"/>
+              <a:endParaRPr lang="en-US"/>
+            </a:p>
+          </p:txBody>
+        </p:sp>
+        <p:sp>
+          <p:nvSpPr>
+            <p:cNvPr id="16" name="TextBox 15">
+              <a:extLst>
+                <a:ext uri="{FF2B5EF4-FFF2-40B4-BE49-F238E27FC236}">
+                  <a16:creationId xmlns:a16="http://schemas.microsoft.com/office/drawing/2014/main" id="{A2938DCA-3D73-EEA6-5D71-9C1852C94B98}"/>
+                </a:ext>
+              </a:extLst>
+            </p:cNvPr>
+            <p:cNvSpPr txBox="1"/>
+            <p:nvPr/>
+          </p:nvSpPr>
+          <p:spPr>
+            <a:xfrm>
+              <a:off x="5127161" y="3855268"/>
+              <a:ext cx="1531277" cy="523220"/>
+            </a:xfrm>
+            <a:prstGeom prst="rect">
+              <a:avLst/>
+            </a:prstGeom>
+            <a:noFill/>
+          </p:spPr>
+          <p:txBody>
+            <a:bodyPr wrap="square" rtlCol="0">
+              <a:spAutoFit/>
+            </a:bodyPr>
+            <a:lstStyle/>
+            <a:p>
+              <a:r>
+                <a:rPr lang="en-US" sz="1400" dirty="0"/>
+                <a:t>Rollout Algorithms</a:t>
+              </a:r>
+            </a:p>
+          </p:txBody>
+        </p:sp>
+      </p:grpSp>
+      <p:sp>
+        <p:nvSpPr>
+          <p:cNvPr id="3" name="TextBox 2">
+            <a:extLst>
+              <a:ext uri="{FF2B5EF4-FFF2-40B4-BE49-F238E27FC236}">
+                <a16:creationId xmlns:a16="http://schemas.microsoft.com/office/drawing/2014/main" id="{FEF398DD-AA03-FE12-13CC-F67E547F1FF6}"/>
+              </a:ext>
+            </a:extLst>
+          </p:cNvPr>
+          <p:cNvSpPr txBox="1"/>
+          <p:nvPr/>
+        </p:nvSpPr>
+        <p:spPr>
+          <a:xfrm>
+            <a:off x="8986196" y="4797303"/>
+            <a:ext cx="2275530" cy="923330"/>
+          </a:xfrm>
+          <a:prstGeom prst="rect">
+            <a:avLst/>
+          </a:prstGeom>
+        </p:spPr>
+        <p:style>
+          <a:lnRef idx="2">
+            <a:schemeClr val="accent2">
+              <a:shade val="15000"/>
+            </a:schemeClr>
+          </a:lnRef>
+          <a:fillRef idx="1">
+            <a:schemeClr val="accent2"/>
+          </a:fillRef>
+          <a:effectRef idx="0">
+            <a:schemeClr val="accent2"/>
+          </a:effectRef>
+          <a:fontRef idx="minor">
+            <a:schemeClr val="lt1"/>
+          </a:fontRef>
+        </p:style>
+        <p:txBody>
+          <a:bodyPr wrap="square" rtlCol="0">
+            <a:spAutoFit/>
+          </a:bodyPr>
+          <a:lstStyle/>
+          <a:p>
+            <a:r>
+              <a:rPr lang="en-US" dirty="0"/>
+              <a:t>Each method is located somewhere  in this continuum.</a:t>
+            </a:r>
+          </a:p>
+        </p:txBody>
+      </p:sp>
+      <p:sp>
+        <p:nvSpPr>
+          <p:cNvPr id="26" name="Arrow: Right 25">
+            <a:extLst>
+              <a:ext uri="{FF2B5EF4-FFF2-40B4-BE49-F238E27FC236}">
+                <a16:creationId xmlns:a16="http://schemas.microsoft.com/office/drawing/2014/main" id="{9F10ED61-9697-A761-C38E-9B0931805EDB}"/>
+              </a:ext>
+            </a:extLst>
+          </p:cNvPr>
+          <p:cNvSpPr/>
+          <p:nvPr/>
+        </p:nvSpPr>
+        <p:spPr>
+          <a:xfrm flipH="1">
+            <a:off x="4369599" y="5513480"/>
+            <a:ext cx="2327944" cy="586950"/>
+          </a:xfrm>
+          <a:prstGeom prst="rightArrow">
+            <a:avLst/>
+          </a:prstGeom>
+        </p:spPr>
+        <p:style>
+          <a:lnRef idx="2">
+            <a:schemeClr val="accent3">
+              <a:shade val="15000"/>
+            </a:schemeClr>
+          </a:lnRef>
+          <a:fillRef idx="1">
+            <a:schemeClr val="accent3"/>
+          </a:fillRef>
+          <a:effectRef idx="0">
+            <a:schemeClr val="accent3"/>
+          </a:effectRef>
+          <a:fontRef idx="minor">
+            <a:schemeClr val="lt1"/>
+          </a:fontRef>
+        </p:style>
+        <p:txBody>
+          <a:bodyPr rtlCol="0" anchor="ctr"/>
+          <a:lstStyle/>
+          <a:p>
+            <a:pPr algn="ctr"/>
+            <a:r>
+              <a:rPr lang="en-US" dirty="0"/>
+              <a:t>Variance increases</a:t>
+            </a:r>
+          </a:p>
+        </p:txBody>
+      </p:sp>
+      <p:grpSp>
+        <p:nvGrpSpPr>
+          <p:cNvPr id="14" name="Group 13" descr="Width axis: an arrow from Sampled trajectory to Consider all actions (use expectation or max).">
             <a:extLst>
               <a:ext uri="{FF2B5EF4-FFF2-40B4-BE49-F238E27FC236}">
                 <a16:creationId xmlns:a16="http://schemas.microsoft.com/office/drawing/2014/main" id="{C4C207F5-CAC8-12B2-B67A-66F8D1C74980}"/>
@@ -9595,6 +10290,9 @@
                 <a:ext uri="{FF2B5EF4-FFF2-40B4-BE49-F238E27FC236}">
                   <a16:creationId xmlns:a16="http://schemas.microsoft.com/office/drawing/2014/main" id="{569A355E-8C8B-CA9F-BE38-4BCBB51D550C}"/>
                 </a:ext>
+                <a:ext uri="{C183D7F6-B498-43B3-948B-1728B52AA6E4}">
+                  <adec:decorative xmlns:adec="http://schemas.microsoft.com/office/drawing/2017/decorative" val="1"/>
+                </a:ext>
               </a:extLst>
             </p:cNvPr>
             <p:cNvSpPr/>
@@ -9635,641 +10333,6 @@
           </p:txBody>
         </p:sp>
       </p:grpSp>
-      <p:sp>
-        <p:nvSpPr>
-          <p:cNvPr id="3" name="TextBox 2">
-            <a:extLst>
-              <a:ext uri="{FF2B5EF4-FFF2-40B4-BE49-F238E27FC236}">
-                <a16:creationId xmlns:a16="http://schemas.microsoft.com/office/drawing/2014/main" id="{FEF398DD-AA03-FE12-13CC-F67E547F1FF6}"/>
-              </a:ext>
-            </a:extLst>
-          </p:cNvPr>
-          <p:cNvSpPr txBox="1"/>
-          <p:nvPr/>
-        </p:nvSpPr>
-        <p:spPr>
-          <a:xfrm>
-            <a:off x="8986196" y="4797303"/>
-            <a:ext cx="2275530" cy="923330"/>
-          </a:xfrm>
-          <a:prstGeom prst="rect">
-            <a:avLst/>
-          </a:prstGeom>
-        </p:spPr>
-        <p:style>
-          <a:lnRef idx="2">
-            <a:schemeClr val="accent2">
-              <a:shade val="15000"/>
-            </a:schemeClr>
-          </a:lnRef>
-          <a:fillRef idx="1">
-            <a:schemeClr val="accent2"/>
-          </a:fillRef>
-          <a:effectRef idx="0">
-            <a:schemeClr val="accent2"/>
-          </a:effectRef>
-          <a:fontRef idx="minor">
-            <a:schemeClr val="lt1"/>
-          </a:fontRef>
-        </p:style>
-        <p:txBody>
-          <a:bodyPr wrap="square" rtlCol="0">
-            <a:spAutoFit/>
-          </a:bodyPr>
-          <a:lstStyle/>
-          <a:p>
-            <a:r>
-              <a:rPr lang="en-US" dirty="0"/>
-              <a:t>Each method is located somewhere  in this continuum.</a:t>
-            </a:r>
-          </a:p>
-        </p:txBody>
-      </p:sp>
-      <p:grpSp>
-        <p:nvGrpSpPr>
-          <p:cNvPr id="17" name="Group 16">
-            <a:extLst>
-              <a:ext uri="{FF2B5EF4-FFF2-40B4-BE49-F238E27FC236}">
-                <a16:creationId xmlns:a16="http://schemas.microsoft.com/office/drawing/2014/main" id="{5119C3A0-42FD-212B-5471-F32C75AA54ED}"/>
-              </a:ext>
-            </a:extLst>
-          </p:cNvPr>
-          <p:cNvGrpSpPr/>
-          <p:nvPr/>
-        </p:nvGrpSpPr>
-        <p:grpSpPr>
-          <a:xfrm>
-            <a:off x="5227038" y="4647030"/>
-            <a:ext cx="1588797" cy="523220"/>
-            <a:chOff x="5069641" y="3855268"/>
-            <a:chExt cx="1588797" cy="523220"/>
-          </a:xfrm>
-        </p:grpSpPr>
-        <p:sp>
-          <p:nvSpPr>
-            <p:cNvPr id="15" name="Oval 14">
-              <a:extLst>
-                <a:ext uri="{FF2B5EF4-FFF2-40B4-BE49-F238E27FC236}">
-                  <a16:creationId xmlns:a16="http://schemas.microsoft.com/office/drawing/2014/main" id="{1A7752DC-C919-21AB-695A-0B5E14D50DAF}"/>
-                </a:ext>
-              </a:extLst>
-            </p:cNvPr>
-            <p:cNvSpPr/>
-            <p:nvPr/>
-          </p:nvSpPr>
-          <p:spPr>
-            <a:xfrm>
-              <a:off x="5069641" y="4071507"/>
-              <a:ext cx="104702" cy="102624"/>
-            </a:xfrm>
-            <a:prstGeom prst="ellipse">
-              <a:avLst/>
-            </a:prstGeom>
-            <a:ln w="6350"/>
-          </p:spPr>
-          <p:style>
-            <a:lnRef idx="2">
-              <a:schemeClr val="dk1"/>
-            </a:lnRef>
-            <a:fillRef idx="1">
-              <a:schemeClr val="lt1"/>
-            </a:fillRef>
-            <a:effectRef idx="0">
-              <a:schemeClr val="dk1"/>
-            </a:effectRef>
-            <a:fontRef idx="minor">
-              <a:schemeClr val="dk1"/>
-            </a:fontRef>
-          </p:style>
-          <p:txBody>
-            <a:bodyPr rtlCol="0" anchor="ctr"/>
-            <a:lstStyle/>
-            <a:p>
-              <a:pPr algn="ctr"/>
-              <a:endParaRPr lang="en-US"/>
-            </a:p>
-          </p:txBody>
-        </p:sp>
-        <p:sp>
-          <p:nvSpPr>
-            <p:cNvPr id="16" name="TextBox 15">
-              <a:extLst>
-                <a:ext uri="{FF2B5EF4-FFF2-40B4-BE49-F238E27FC236}">
-                  <a16:creationId xmlns:a16="http://schemas.microsoft.com/office/drawing/2014/main" id="{A2938DCA-3D73-EEA6-5D71-9C1852C94B98}"/>
-                </a:ext>
-              </a:extLst>
-            </p:cNvPr>
-            <p:cNvSpPr txBox="1"/>
-            <p:nvPr/>
-          </p:nvSpPr>
-          <p:spPr>
-            <a:xfrm>
-              <a:off x="5127161" y="3855268"/>
-              <a:ext cx="1531277" cy="523220"/>
-            </a:xfrm>
-            <a:prstGeom prst="rect">
-              <a:avLst/>
-            </a:prstGeom>
-            <a:noFill/>
-          </p:spPr>
-          <p:txBody>
-            <a:bodyPr wrap="square" rtlCol="0">
-              <a:spAutoFit/>
-            </a:bodyPr>
-            <a:lstStyle/>
-            <a:p>
-              <a:r>
-                <a:rPr lang="en-US" sz="1400" dirty="0"/>
-                <a:t>Rollout Algorithms</a:t>
-              </a:r>
-            </a:p>
-          </p:txBody>
-        </p:sp>
-      </p:grpSp>
-      <p:sp>
-        <p:nvSpPr>
-          <p:cNvPr id="18" name="TextBox 17">
-            <a:extLst>
-              <a:ext uri="{FF2B5EF4-FFF2-40B4-BE49-F238E27FC236}">
-                <a16:creationId xmlns:a16="http://schemas.microsoft.com/office/drawing/2014/main" id="{4E74D7B6-C23A-AF2E-4548-1F2E9AF97501}"/>
-              </a:ext>
-            </a:extLst>
-          </p:cNvPr>
-          <p:cNvSpPr txBox="1"/>
-          <p:nvPr/>
-        </p:nvSpPr>
-        <p:spPr>
-          <a:xfrm>
-            <a:off x="4235080" y="1683811"/>
-            <a:ext cx="1531277" cy="523220"/>
-          </a:xfrm>
-          <a:prstGeom prst="rect">
-            <a:avLst/>
-          </a:prstGeom>
-          <a:noFill/>
-        </p:spPr>
-        <p:txBody>
-          <a:bodyPr wrap="square" rtlCol="0">
-            <a:spAutoFit/>
-          </a:bodyPr>
-          <a:lstStyle/>
-          <a:p>
-            <a:r>
-              <a:rPr lang="en-US" sz="1400" dirty="0"/>
-              <a:t>one-step Sarsa</a:t>
-            </a:r>
-            <a:br>
-              <a:rPr lang="en-US" sz="1400" dirty="0"/>
-            </a:br>
-            <a:r>
-              <a:rPr lang="en-US" sz="1400" dirty="0"/>
-              <a:t>Q-Learning</a:t>
-            </a:r>
-          </a:p>
-        </p:txBody>
-      </p:sp>
-      <p:sp>
-        <p:nvSpPr>
-          <p:cNvPr id="19" name="TextBox 18">
-            <a:extLst>
-              <a:ext uri="{FF2B5EF4-FFF2-40B4-BE49-F238E27FC236}">
-                <a16:creationId xmlns:a16="http://schemas.microsoft.com/office/drawing/2014/main" id="{5779370B-E9C9-008B-B236-A85F259625FE}"/>
-              </a:ext>
-            </a:extLst>
-          </p:cNvPr>
-          <p:cNvSpPr txBox="1"/>
-          <p:nvPr/>
-        </p:nvSpPr>
-        <p:spPr>
-          <a:xfrm>
-            <a:off x="8438052" y="1580720"/>
-            <a:ext cx="2564728" cy="307777"/>
-          </a:xfrm>
-          <a:prstGeom prst="rect">
-            <a:avLst/>
-          </a:prstGeom>
-          <a:noFill/>
-        </p:spPr>
-        <p:txBody>
-          <a:bodyPr wrap="square" rtlCol="0">
-            <a:spAutoFit/>
-          </a:bodyPr>
-          <a:lstStyle/>
-          <a:p>
-            <a:r>
-              <a:rPr lang="en-US" sz="1400" dirty="0"/>
-              <a:t>+ Expected Sarsa</a:t>
-            </a:r>
-          </a:p>
-        </p:txBody>
-      </p:sp>
-      <p:grpSp>
-        <p:nvGrpSpPr>
-          <p:cNvPr id="22" name="Group 21">
-            <a:extLst>
-              <a:ext uri="{FF2B5EF4-FFF2-40B4-BE49-F238E27FC236}">
-                <a16:creationId xmlns:a16="http://schemas.microsoft.com/office/drawing/2014/main" id="{AFABC249-B9C3-B83D-2555-FEAEA52E10A6}"/>
-              </a:ext>
-            </a:extLst>
-          </p:cNvPr>
-          <p:cNvGrpSpPr/>
-          <p:nvPr/>
-        </p:nvGrpSpPr>
-        <p:grpSpPr>
-          <a:xfrm>
-            <a:off x="4130378" y="3100944"/>
-            <a:ext cx="1583628" cy="307777"/>
-            <a:chOff x="4130378" y="3100944"/>
-            <a:chExt cx="1583628" cy="307777"/>
-          </a:xfrm>
-        </p:grpSpPr>
-        <p:sp>
-          <p:nvSpPr>
-            <p:cNvPr id="20" name="Oval 19">
-              <a:extLst>
-                <a:ext uri="{FF2B5EF4-FFF2-40B4-BE49-F238E27FC236}">
-                  <a16:creationId xmlns:a16="http://schemas.microsoft.com/office/drawing/2014/main" id="{A5FC1DEF-060E-DB48-CC65-B77A6C34CC20}"/>
-                </a:ext>
-              </a:extLst>
-            </p:cNvPr>
-            <p:cNvSpPr/>
-            <p:nvPr/>
-          </p:nvSpPr>
-          <p:spPr>
-            <a:xfrm>
-              <a:off x="4130378" y="3203521"/>
-              <a:ext cx="104702" cy="102624"/>
-            </a:xfrm>
-            <a:prstGeom prst="ellipse">
-              <a:avLst/>
-            </a:prstGeom>
-            <a:ln w="6350"/>
-          </p:spPr>
-          <p:style>
-            <a:lnRef idx="2">
-              <a:schemeClr val="dk1"/>
-            </a:lnRef>
-            <a:fillRef idx="1">
-              <a:schemeClr val="lt1"/>
-            </a:fillRef>
-            <a:effectRef idx="0">
-              <a:schemeClr val="dk1"/>
-            </a:effectRef>
-            <a:fontRef idx="minor">
-              <a:schemeClr val="dk1"/>
-            </a:fontRef>
-          </p:style>
-          <p:txBody>
-            <a:bodyPr rtlCol="0" anchor="ctr"/>
-            <a:lstStyle/>
-            <a:p>
-              <a:pPr algn="ctr"/>
-              <a:endParaRPr lang="en-US"/>
-            </a:p>
-          </p:txBody>
-        </p:sp>
-        <p:sp>
-          <p:nvSpPr>
-            <p:cNvPr id="21" name="TextBox 20">
-              <a:extLst>
-                <a:ext uri="{FF2B5EF4-FFF2-40B4-BE49-F238E27FC236}">
-                  <a16:creationId xmlns:a16="http://schemas.microsoft.com/office/drawing/2014/main" id="{F85C0057-A551-8186-D2E1-FC4CE09F09CD}"/>
-                </a:ext>
-              </a:extLst>
-            </p:cNvPr>
-            <p:cNvSpPr txBox="1"/>
-            <p:nvPr/>
-          </p:nvSpPr>
-          <p:spPr>
-            <a:xfrm>
-              <a:off x="4182729" y="3100944"/>
-              <a:ext cx="1531277" cy="307777"/>
-            </a:xfrm>
-            <a:prstGeom prst="rect">
-              <a:avLst/>
-            </a:prstGeom>
-            <a:noFill/>
-          </p:spPr>
-          <p:txBody>
-            <a:bodyPr wrap="square" rtlCol="0">
-              <a:spAutoFit/>
-            </a:bodyPr>
-            <a:lstStyle/>
-            <a:p>
-              <a:r>
-                <a:rPr lang="en-US" sz="1400" dirty="0"/>
-                <a:t>n-step Sarsa</a:t>
-              </a:r>
-            </a:p>
-          </p:txBody>
-        </p:sp>
-      </p:grpSp>
-      <p:sp>
-        <p:nvSpPr>
-          <p:cNvPr id="24" name="Arrow: Down 23">
-            <a:extLst>
-              <a:ext uri="{FF2B5EF4-FFF2-40B4-BE49-F238E27FC236}">
-                <a16:creationId xmlns:a16="http://schemas.microsoft.com/office/drawing/2014/main" id="{9460DE18-4C9A-6BA3-92A8-156AF432C6B4}"/>
-              </a:ext>
-            </a:extLst>
-          </p:cNvPr>
-          <p:cNvSpPr/>
-          <p:nvPr/>
-        </p:nvSpPr>
-        <p:spPr>
-          <a:xfrm flipV="1">
-            <a:off x="2651452" y="2053157"/>
-            <a:ext cx="679509" cy="2852096"/>
-          </a:xfrm>
-          <a:prstGeom prst="downArrow">
-            <a:avLst/>
-          </a:prstGeom>
-        </p:spPr>
-        <p:style>
-          <a:lnRef idx="2">
-            <a:schemeClr val="accent3">
-              <a:shade val="15000"/>
-            </a:schemeClr>
-          </a:lnRef>
-          <a:fillRef idx="1">
-            <a:schemeClr val="accent3"/>
-          </a:fillRef>
-          <a:effectRef idx="0">
-            <a:schemeClr val="accent3"/>
-          </a:effectRef>
-          <a:fontRef idx="minor">
-            <a:schemeClr val="lt1"/>
-          </a:fontRef>
-        </p:style>
-        <p:txBody>
-          <a:bodyPr vert="vert" rtlCol="0" anchor="ctr"/>
-          <a:lstStyle/>
-          <a:p>
-            <a:pPr algn="ctr"/>
-            <a:r>
-              <a:rPr lang="en-US" dirty="0"/>
-              <a:t>Bias increases</a:t>
-            </a:r>
-          </a:p>
-        </p:txBody>
-      </p:sp>
-      <p:sp>
-        <p:nvSpPr>
-          <p:cNvPr id="26" name="Arrow: Right 25">
-            <a:extLst>
-              <a:ext uri="{FF2B5EF4-FFF2-40B4-BE49-F238E27FC236}">
-                <a16:creationId xmlns:a16="http://schemas.microsoft.com/office/drawing/2014/main" id="{9F10ED61-9697-A761-C38E-9B0931805EDB}"/>
-              </a:ext>
-            </a:extLst>
-          </p:cNvPr>
-          <p:cNvSpPr/>
-          <p:nvPr/>
-        </p:nvSpPr>
-        <p:spPr>
-          <a:xfrm flipH="1">
-            <a:off x="4369599" y="5513480"/>
-            <a:ext cx="2327944" cy="586950"/>
-          </a:xfrm>
-          <a:prstGeom prst="rightArrow">
-            <a:avLst/>
-          </a:prstGeom>
-        </p:spPr>
-        <p:style>
-          <a:lnRef idx="2">
-            <a:schemeClr val="accent3">
-              <a:shade val="15000"/>
-            </a:schemeClr>
-          </a:lnRef>
-          <a:fillRef idx="1">
-            <a:schemeClr val="accent3"/>
-          </a:fillRef>
-          <a:effectRef idx="0">
-            <a:schemeClr val="accent3"/>
-          </a:effectRef>
-          <a:fontRef idx="minor">
-            <a:schemeClr val="lt1"/>
-          </a:fontRef>
-        </p:style>
-        <p:txBody>
-          <a:bodyPr rtlCol="0" anchor="ctr"/>
-          <a:lstStyle/>
-          <a:p>
-            <a:pPr algn="ctr"/>
-            <a:r>
-              <a:rPr lang="en-US" dirty="0"/>
-              <a:t>Variance increases</a:t>
-            </a:r>
-          </a:p>
-        </p:txBody>
-      </p:sp>
-      <p:grpSp>
-        <p:nvGrpSpPr>
-          <p:cNvPr id="27" name="Group 26">
-            <a:extLst>
-              <a:ext uri="{FF2B5EF4-FFF2-40B4-BE49-F238E27FC236}">
-                <a16:creationId xmlns:a16="http://schemas.microsoft.com/office/drawing/2014/main" id="{7D1DE593-0B34-D530-BE33-148CB1599F39}"/>
-              </a:ext>
-            </a:extLst>
-          </p:cNvPr>
-          <p:cNvGrpSpPr/>
-          <p:nvPr/>
-        </p:nvGrpSpPr>
-        <p:grpSpPr>
-          <a:xfrm>
-            <a:off x="5227038" y="3517291"/>
-            <a:ext cx="1588797" cy="523220"/>
-            <a:chOff x="5069641" y="3855268"/>
-            <a:chExt cx="1588797" cy="523220"/>
-          </a:xfrm>
-        </p:grpSpPr>
-        <p:sp>
-          <p:nvSpPr>
-            <p:cNvPr id="28" name="Oval 27">
-              <a:extLst>
-                <a:ext uri="{FF2B5EF4-FFF2-40B4-BE49-F238E27FC236}">
-                  <a16:creationId xmlns:a16="http://schemas.microsoft.com/office/drawing/2014/main" id="{A9F37B31-30DD-6438-F97B-1D7F20C6B9DE}"/>
-                </a:ext>
-              </a:extLst>
-            </p:cNvPr>
-            <p:cNvSpPr/>
-            <p:nvPr/>
-          </p:nvSpPr>
-          <p:spPr>
-            <a:xfrm>
-              <a:off x="5069641" y="4071507"/>
-              <a:ext cx="104702" cy="102624"/>
-            </a:xfrm>
-            <a:prstGeom prst="ellipse">
-              <a:avLst/>
-            </a:prstGeom>
-            <a:ln w="6350"/>
-          </p:spPr>
-          <p:style>
-            <a:lnRef idx="2">
-              <a:schemeClr val="dk1"/>
-            </a:lnRef>
-            <a:fillRef idx="1">
-              <a:schemeClr val="lt1"/>
-            </a:fillRef>
-            <a:effectRef idx="0">
-              <a:schemeClr val="dk1"/>
-            </a:effectRef>
-            <a:fontRef idx="minor">
-              <a:schemeClr val="dk1"/>
-            </a:fontRef>
-          </p:style>
-          <p:txBody>
-            <a:bodyPr rtlCol="0" anchor="ctr"/>
-            <a:lstStyle/>
-            <a:p>
-              <a:pPr algn="ctr"/>
-              <a:endParaRPr lang="en-US"/>
-            </a:p>
-          </p:txBody>
-        </p:sp>
-        <p:sp>
-          <p:nvSpPr>
-            <p:cNvPr id="29" name="TextBox 28">
-              <a:extLst>
-                <a:ext uri="{FF2B5EF4-FFF2-40B4-BE49-F238E27FC236}">
-                  <a16:creationId xmlns:a16="http://schemas.microsoft.com/office/drawing/2014/main" id="{D5F71844-0FD3-56FF-0936-594357BEDB8D}"/>
-                </a:ext>
-              </a:extLst>
-            </p:cNvPr>
-            <p:cNvSpPr txBox="1"/>
-            <p:nvPr/>
-          </p:nvSpPr>
-          <p:spPr>
-            <a:xfrm>
-              <a:off x="5127161" y="3855268"/>
-              <a:ext cx="1531277" cy="523220"/>
-            </a:xfrm>
-            <a:prstGeom prst="rect">
-              <a:avLst/>
-            </a:prstGeom>
-            <a:noFill/>
-          </p:spPr>
-          <p:txBody>
-            <a:bodyPr wrap="square" rtlCol="0">
-              <a:spAutoFit/>
-            </a:bodyPr>
-            <a:lstStyle/>
-            <a:p>
-              <a:r>
-                <a:rPr lang="en-US" sz="1400" dirty="0"/>
-                <a:t>Heuristic</a:t>
-              </a:r>
-              <a:br>
-                <a:rPr lang="en-US" sz="1400" dirty="0"/>
-              </a:br>
-              <a:r>
-                <a:rPr lang="en-US" sz="1400" dirty="0"/>
-                <a:t>Search</a:t>
-              </a:r>
-            </a:p>
-          </p:txBody>
-        </p:sp>
-      </p:grpSp>
-      <p:sp>
-        <p:nvSpPr>
-          <p:cNvPr id="23" name="TextBox 22">
-            <a:extLst>
-              <a:ext uri="{FF2B5EF4-FFF2-40B4-BE49-F238E27FC236}">
-                <a16:creationId xmlns:a16="http://schemas.microsoft.com/office/drawing/2014/main" id="{E0808173-01FB-4745-DD56-A2D88A5FE9FD}"/>
-              </a:ext>
-            </a:extLst>
-          </p:cNvPr>
-          <p:cNvSpPr txBox="1"/>
-          <p:nvPr/>
-        </p:nvSpPr>
-        <p:spPr>
-          <a:xfrm>
-            <a:off x="8986196" y="2360586"/>
-            <a:ext cx="2275530" cy="1200329"/>
-          </a:xfrm>
-          <a:prstGeom prst="rect">
-            <a:avLst/>
-          </a:prstGeom>
-        </p:spPr>
-        <p:style>
-          <a:lnRef idx="2">
-            <a:schemeClr val="accent3">
-              <a:shade val="15000"/>
-            </a:schemeClr>
-          </a:lnRef>
-          <a:fillRef idx="1">
-            <a:schemeClr val="accent3"/>
-          </a:fillRef>
-          <a:effectRef idx="0">
-            <a:schemeClr val="accent3"/>
-          </a:effectRef>
-          <a:fontRef idx="minor">
-            <a:schemeClr val="lt1"/>
-          </a:fontRef>
-        </p:style>
-        <p:txBody>
-          <a:bodyPr wrap="square" rtlCol="0">
-            <a:spAutoFit/>
-          </a:bodyPr>
-          <a:lstStyle/>
-          <a:p>
-            <a:r>
-              <a:rPr lang="en-US" dirty="0"/>
-              <a:t>Bias decreases the closer we get to the optimal value function.</a:t>
-            </a:r>
-          </a:p>
-        </p:txBody>
-      </p:sp>
-      <p:sp>
-        <p:nvSpPr>
-          <p:cNvPr id="25" name="TextBox 24">
-            <a:extLst>
-              <a:ext uri="{FF2B5EF4-FFF2-40B4-BE49-F238E27FC236}">
-                <a16:creationId xmlns:a16="http://schemas.microsoft.com/office/drawing/2014/main" id="{09B2548B-E9B6-44AE-AA51-21FD905A4927}"/>
-              </a:ext>
-            </a:extLst>
-          </p:cNvPr>
-          <p:cNvSpPr txBox="1"/>
-          <p:nvPr/>
-        </p:nvSpPr>
-        <p:spPr>
-          <a:xfrm>
-            <a:off x="8986196" y="3724748"/>
-            <a:ext cx="2275530" cy="646331"/>
-          </a:xfrm>
-          <a:prstGeom prst="rect">
-            <a:avLst/>
-          </a:prstGeom>
-        </p:spPr>
-        <p:style>
-          <a:lnRef idx="2">
-            <a:schemeClr val="accent3">
-              <a:shade val="15000"/>
-            </a:schemeClr>
-          </a:lnRef>
-          <a:fillRef idx="1">
-            <a:schemeClr val="accent3"/>
-          </a:fillRef>
-          <a:effectRef idx="0">
-            <a:schemeClr val="accent3"/>
-          </a:effectRef>
-          <a:fontRef idx="minor">
-            <a:schemeClr val="lt1"/>
-          </a:fontRef>
-        </p:style>
-        <p:txBody>
-          <a:bodyPr wrap="square" rtlCol="0">
-            <a:spAutoFit/>
-          </a:bodyPr>
-          <a:lstStyle/>
-          <a:p>
-            <a:r>
-              <a:rPr lang="en-US" dirty="0"/>
-              <a:t>Variance decreases with sample size.</a:t>
-            </a:r>
-          </a:p>
-        </p:txBody>
-      </p:sp>
     </p:spTree>
     <p:extLst>
       <p:ext uri="{BB962C8B-B14F-4D97-AF65-F5344CB8AC3E}">
@@ -10814,13 +10877,13 @@
       </p:par>
     </p:tnLst>
     <p:bldLst>
-      <p:bldP spid="3" grpId="0" animBg="1"/>
       <p:bldP spid="18" grpId="0"/>
       <p:bldP spid="19" grpId="0"/>
       <p:bldP spid="24" grpId="0" animBg="1"/>
-      <p:bldP spid="26" grpId="0" animBg="1"/>
       <p:bldP spid="23" grpId="0" animBg="1"/>
       <p:bldP spid="25" grpId="0" animBg="1"/>
+      <p:bldP spid="3" grpId="0" animBg="1"/>
+      <p:bldP spid="26" grpId="0" animBg="1"/>
     </p:bldLst>
   </p:timing>
 </p:sld>
@@ -11368,7 +11431,7 @@
         <mc:Choice Requires="a14">
           <p:sp>
             <p:nvSpPr>
-              <p:cNvPr id="3" name="Content Placeholder 2">
+              <p:cNvPr id="3" name="Content Placeholder 2" descr="Definition of return:. Episodic vs. continuing task. Discounted vs. undiscounted. Action values q vs. state values v. Exploration vs. exploitation: This is a trade-off. Many methods need exploration (covering behavior policies) for convergence. This is related to on s. off-policy learning. Synchronous vs. asynchronous updates: Are all states updated at once or one by one in some order?. Real vs. simulated experience: Are real experiences, simulations, or both used for updates?">
                 <a:extLst>
                   <a:ext uri="{FF2B5EF4-FFF2-40B4-BE49-F238E27FC236}">
                     <a16:creationId xmlns:a16="http://schemas.microsoft.com/office/drawing/2014/main" id="{8CB60D31-9CD5-1596-21BF-AD897227AFBE}"/>
@@ -11505,7 +11568,7 @@
         <mc:Fallback xmlns="">
           <p:sp>
             <p:nvSpPr>
-              <p:cNvPr id="3" name="Content Placeholder 2">
+              <p:cNvPr id="3" name="Content Placeholder 2" descr="Definition of return:. Episodic vs. continuing task. Discounted vs. undiscounted. Action values q vs. state values v. Exploration vs. exploitation: This is a trade-off. Many methods need exploration (covering behavior policies) for convergence. This is related to on s. off-policy learning. Synchronous vs. asynchronous updates: Are all states updated at once or one by one in some order?. Real vs. simulated experience: Are real experiences, simulations, or both used for updates?">
                 <a:extLst>
                   <a:ext uri="{FF2B5EF4-FFF2-40B4-BE49-F238E27FC236}">
                     <a16:creationId xmlns:a16="http://schemas.microsoft.com/office/drawing/2014/main" id="{8CB60D31-9CD5-1596-21BF-AD897227AFBE}"/>
@@ -12140,7 +12203,7 @@
       </p:sp>
       <p:grpSp>
         <p:nvGrpSpPr>
-          <p:cNvPr id="17" name="Group 16">
+          <p:cNvPr id="17" name="Group 16" descr="A general learning agent (Russell and Norvig): inside the agent, sensors feed the critic and the performance element. The critic compares what it senses against an external performance standard and sends feedback to the learning element. The learning element sends changes to the performance element and receives knowledge from it, and sets learning goals for the problem generator, which suggests exploratory actions to the performance element. The performance element drives the actuators, which act on the environment. Labels: Model-free RL as A Learning Agent; Source: Artificial Intelligence: A Modern Approach, Chapter 2; E.g., TD error; policy; Expected return; Update value func; Exploring behavior.">
             <a:extLst>
               <a:ext uri="{FF2B5EF4-FFF2-40B4-BE49-F238E27FC236}">
                 <a16:creationId xmlns:a16="http://schemas.microsoft.com/office/drawing/2014/main" id="{828640CF-BEAF-75A2-FCE5-1B24B83B017E}"/>
@@ -12160,7 +12223,7 @@
         </p:grpSpPr>
         <p:pic>
           <p:nvPicPr>
-            <p:cNvPr id="4" name="Picture 3" descr="A figure showing that a learning agent adds a critic component, a learning element and a problem generator to the agent design.">
+            <p:cNvPr id="4" name="Picture 3" descr="A general learning agent (Russell and Norvig): inside the agent, sensors feed the critic and the performance element. The critic compares what it senses against an external performance standard and sends feedback to the learning element. The learning element sends changes to the performance element and receives knowledge from it, and sets learning goals for the problem generator, which suggests exploratory actions to the performance element. The performance element drives the actuators, which act on the environment.">
               <a:extLst>
                 <a:ext uri="{FF2B5EF4-FFF2-40B4-BE49-F238E27FC236}">
                   <a16:creationId xmlns:a16="http://schemas.microsoft.com/office/drawing/2014/main" id="{05C53980-2E3E-DE8E-EA48-72A467EC0A2C}"/>
@@ -12852,7 +12915,7 @@
         <mc:Choice Requires="a14">
           <p:sp>
             <p:nvSpPr>
-              <p:cNvPr id="3" name="Content Placeholder 2">
+              <p:cNvPr id="3" name="Content Placeholder 2" descr="Tables need a lot of space. A complete table with Q -values has size O (the absolute value of S times the absolute value of A) The state space is typically extremely large, or even infinite, in continuous spaces. Two states may be very similar and therefore should have similar Q -values. Tabular methods cannot generalize across states since each table entry is independent. We need a lot of data to estimate all entries. In the next part of this course, we will talk about approximate solution methods to deal with these issues">
                 <a:extLst>
                   <a:ext uri="{FF2B5EF4-FFF2-40B4-BE49-F238E27FC236}">
                     <a16:creationId xmlns:a16="http://schemas.microsoft.com/office/drawing/2014/main" id="{60A46212-D3F8-9478-4414-6401E13D0EB2}"/>
@@ -12931,8 +12994,9 @@
                             <m:begChr m:val="|"/>
                             <m:endChr m:val="|"/>
                             <m:ctrlPr>
-                              <a:rPr lang="en-US" b="0" i="1" smtClean="0">
+                              <a:rPr lang="en-US" i="1" dirty="0">
                                 <a:latin typeface="Cambria Math" panose="02040503050406030204" pitchFamily="18" charset="0"/>
+                                <a:ea typeface="Cambria Math" panose="02040503050406030204" pitchFamily="18" charset="0"/>
                               </a:rPr>
                             </m:ctrlPr>
                           </m:dPr>
@@ -12950,7 +13014,7 @@
                           <m:rPr>
                             <m:nor/>
                           </m:rPr>
-                          <a:rPr lang="en-US" dirty="0"/>
+                          <a:rPr lang="en-US" i="0" dirty="0"/>
                           <m:t> 	</m:t>
                         </m:r>
                         <m:r>
@@ -12964,8 +13028,9 @@
                             <m:begChr m:val="|"/>
                             <m:endChr m:val="|"/>
                             <m:ctrlPr>
-                              <a:rPr lang="en-US" b="0" i="1" dirty="0" smtClean="0">
+                              <a:rPr lang="en-US" i="1" dirty="0">
                                 <a:latin typeface="Cambria Math" panose="02040503050406030204" pitchFamily="18" charset="0"/>
+                                <a:ea typeface="Cambria Math" panose="02040503050406030204" pitchFamily="18" charset="0"/>
                               </a:rPr>
                             </m:ctrlPr>
                           </m:dPr>
@@ -13099,7 +13164,7 @@
         <mc:Fallback xmlns="">
           <p:sp>
             <p:nvSpPr>
-              <p:cNvPr id="3" name="Content Placeholder 2">
+              <p:cNvPr id="3" name="Content Placeholder 2" descr="Tables need a lot of space. A complete table with Q -values has size O (the absolute value of S times the absolute value of A) The state space is typically extremely large, or even infinite, in continuous spaces. Two states may be very similar and therefore should have similar Q -values. Tabular methods cannot generalize across states since each table entry is independent. We need a lot of data to estimate all entries. In the next part of this course, we will talk about approximate solution methods to deal with these issues">
                 <a:extLst>
                   <a:ext uri="{FF2B5EF4-FFF2-40B4-BE49-F238E27FC236}">
                     <a16:creationId xmlns:a16="http://schemas.microsoft.com/office/drawing/2014/main" id="{60A46212-D3F8-9478-4414-6401E13D0EB2}"/>
@@ -13378,7 +13443,668 @@
         <mc:Choice Requires="a14">
           <p:sp>
             <p:nvSpPr>
-              <p:cNvPr id="3" name="Content Placeholder 2">
+              <p:cNvPr id="10" name="TextBox 9" descr="General. X capital letters: random variables x, p lower-case letters: realizations of random variables or scalar functions. w Bold lower-case letters: real-valued vectors (even if random variables). W bold capitals: matrices. alpha Greek letters: parameters (vectors if in bolt). Pr{X equals x} probability that a random variable X takes on the value x. X~p random variable X selected from distribution p (x) equals Pr{X equals x}. E[X] expectation of a random variable X, i.e., E [X] equals the sum over x, of p (x) x. argmax sub a f(a) a value of action a at which f(a) takes its maximal value">
+                <a:extLst>
+                  <a:ext uri="{FF2B5EF4-FFF2-40B4-BE49-F238E27FC236}">
+                    <a16:creationId xmlns:a16="http://schemas.microsoft.com/office/drawing/2014/main" id="{5CD475E5-BE3B-5594-57DC-46A17411F2F9}"/>
+                  </a:ext>
+                </a:extLst>
+              </p:cNvPr>
+              <p:cNvSpPr txBox="1"/>
+              <p:nvPr/>
+            </p:nvSpPr>
+            <p:spPr>
+              <a:xfrm>
+                <a:off x="822820" y="1124198"/>
+                <a:ext cx="5273179" cy="2308324"/>
+              </a:xfrm>
+              <a:prstGeom prst="rect">
+                <a:avLst/>
+              </a:prstGeom>
+            </p:spPr>
+            <p:style>
+              <a:lnRef idx="2">
+                <a:schemeClr val="accent2"/>
+              </a:lnRef>
+              <a:fillRef idx="1">
+                <a:schemeClr val="lt1"/>
+              </a:fillRef>
+              <a:effectRef idx="0">
+                <a:schemeClr val="accent2"/>
+              </a:effectRef>
+              <a:fontRef idx="minor">
+                <a:schemeClr val="dk1"/>
+              </a:fontRef>
+            </p:style>
+            <p:txBody>
+              <a:bodyPr wrap="square">
+                <a:spAutoFit/>
+              </a:bodyPr>
+              <a:lstStyle/>
+              <a:p>
+                <a:r>
+                  <a:rPr lang="en-US" sz="1200" b="1" dirty="0"/>
+                  <a:t>General</a:t>
+                </a:r>
+                <a:endParaRPr lang="en-US" sz="1200" dirty="0"/>
+              </a:p>
+              <a:p>
+                <a14:m>
+                  <m:oMath xmlns:m="http://schemas.openxmlformats.org/officeDocument/2006/math">
+                    <m:r>
+                      <a:rPr lang="en-US" sz="1200" i="1" dirty="0" smtClean="0">
+                        <a:latin typeface="Cambria Math" panose="02040503050406030204" pitchFamily="18" charset="0"/>
+                      </a:rPr>
+                      <m:t>𝑋</m:t>
+                    </m:r>
+                  </m:oMath>
+                </a14:m>
+                <a:r>
+                  <a:rPr lang="en-US" sz="1200" dirty="0"/>
+                  <a:t>	capital letters: random variables</a:t>
+                </a:r>
+                <a:br>
+                  <a:rPr lang="en-US" sz="1200" dirty="0"/>
+                </a:br>
+                <a14:m>
+                  <m:oMath xmlns:m="http://schemas.openxmlformats.org/officeDocument/2006/math">
+                    <m:r>
+                      <a:rPr lang="en-US" sz="1200" b="0" i="1" smtClean="0">
+                        <a:latin typeface="Cambria Math" panose="02040503050406030204" pitchFamily="18" charset="0"/>
+                      </a:rPr>
+                      <m:t>𝑥</m:t>
+                    </m:r>
+                    <m:r>
+                      <a:rPr lang="en-US" sz="1200" b="0" i="0" smtClean="0">
+                        <a:latin typeface="Cambria Math" panose="02040503050406030204" pitchFamily="18" charset="0"/>
+                      </a:rPr>
+                      <m:t>, </m:t>
+                    </m:r>
+                    <m:r>
+                      <a:rPr lang="en-US" sz="1200" b="0" i="1" smtClean="0">
+                        <a:latin typeface="Cambria Math" panose="02040503050406030204" pitchFamily="18" charset="0"/>
+                      </a:rPr>
+                      <m:t>𝑝</m:t>
+                    </m:r>
+                  </m:oMath>
+                </a14:m>
+                <a:r>
+                  <a:rPr lang="en-US" sz="1200" dirty="0"/>
+                  <a:t>	lower-case letters: realizations of random variables </a:t>
+                </a:r>
+                <a:br>
+                  <a:rPr lang="en-US" sz="1200" dirty="0"/>
+                </a:br>
+                <a:r>
+                  <a:rPr lang="en-US" sz="1200" dirty="0"/>
+                  <a:t>	or scalar functions</a:t>
+                </a:r>
+              </a:p>
+              <a:p>
+                <a14:m>
+                  <m:oMath xmlns:m="http://schemas.openxmlformats.org/officeDocument/2006/math">
+                    <m:r>
+                      <a:rPr lang="en-US" sz="1200" b="1" i="1" smtClean="0">
+                        <a:latin typeface="Cambria Math" panose="02040503050406030204" pitchFamily="18" charset="0"/>
+                      </a:rPr>
+                      <m:t>𝒘</m:t>
+                    </m:r>
+                  </m:oMath>
+                </a14:m>
+                <a:r>
+                  <a:rPr lang="en-US" sz="1200" dirty="0"/>
+                  <a:t> 	Bold lower-case letters: real-valued vectors </a:t>
+                </a:r>
+                <a:br>
+                  <a:rPr lang="en-US" sz="1200" dirty="0"/>
+                </a:br>
+                <a:r>
+                  <a:rPr lang="en-US" sz="1200" dirty="0"/>
+                  <a:t>	(even if random variables)</a:t>
+                </a:r>
+              </a:p>
+              <a:p>
+                <a14:m>
+                  <m:oMath xmlns:m="http://schemas.openxmlformats.org/officeDocument/2006/math">
+                    <m:r>
+                      <a:rPr lang="en-US" sz="1200" b="1" i="1" smtClean="0">
+                        <a:latin typeface="Cambria Math" panose="02040503050406030204" pitchFamily="18" charset="0"/>
+                      </a:rPr>
+                      <m:t>𝑾</m:t>
+                    </m:r>
+                  </m:oMath>
+                </a14:m>
+                <a:r>
+                  <a:rPr lang="en-US" sz="1200" dirty="0"/>
+                  <a:t>	bold capitals: matrices</a:t>
+                </a:r>
+              </a:p>
+              <a:p>
+                <a14:m>
+                  <m:oMath xmlns:m="http://schemas.openxmlformats.org/officeDocument/2006/math">
+                    <m:r>
+                      <a:rPr lang="en-US" sz="1200" b="0" i="1" smtClean="0">
+                        <a:latin typeface="Cambria Math" panose="02040503050406030204" pitchFamily="18" charset="0"/>
+                      </a:rPr>
+                      <m:t>𝛼</m:t>
+                    </m:r>
+                  </m:oMath>
+                </a14:m>
+                <a:r>
+                  <a:rPr lang="en-US" sz="1200" dirty="0"/>
+                  <a:t>	Greek letters: parameters (vectors if in bolt)</a:t>
+                </a:r>
+              </a:p>
+              <a:p>
+                <a14:m>
+                  <m:oMath xmlns:m="http://schemas.openxmlformats.org/officeDocument/2006/math">
+                    <m:r>
+                      <m:rPr>
+                        <m:sty m:val="p"/>
+                      </m:rPr>
+                      <a:rPr lang="en-US" sz="1200" i="1" dirty="0">
+                        <a:latin typeface="Cambria Math" panose="02040503050406030204" pitchFamily="18" charset="0"/>
+                      </a:rPr>
+                      <m:t>Pr</m:t>
+                    </m:r>
+                    <m:r>
+                      <a:rPr lang="en-US" sz="1200" i="1" dirty="0">
+                        <a:latin typeface="Cambria Math" panose="02040503050406030204" pitchFamily="18" charset="0"/>
+                      </a:rPr>
+                      <m:t>⁡{</m:t>
+                    </m:r>
+                    <m:r>
+                      <a:rPr lang="en-US" sz="1200" i="1" dirty="0">
+                        <a:latin typeface="Cambria Math" panose="02040503050406030204" pitchFamily="18" charset="0"/>
+                      </a:rPr>
+                      <m:t>𝑋</m:t>
+                    </m:r>
+                    <m:r>
+                      <a:rPr lang="en-US" sz="1200" i="1" dirty="0">
+                        <a:latin typeface="Cambria Math" panose="02040503050406030204" pitchFamily="18" charset="0"/>
+                      </a:rPr>
+                      <m:t>=</m:t>
+                    </m:r>
+                    <m:r>
+                      <a:rPr lang="en-US" sz="1200" i="1" dirty="0">
+                        <a:latin typeface="Cambria Math" panose="02040503050406030204" pitchFamily="18" charset="0"/>
+                      </a:rPr>
+                      <m:t>𝑥</m:t>
+                    </m:r>
+                    <m:r>
+                      <a:rPr lang="en-US" sz="1200" i="1" dirty="0">
+                        <a:latin typeface="Cambria Math" panose="02040503050406030204" pitchFamily="18" charset="0"/>
+                      </a:rPr>
+                      <m:t>}</m:t>
+                    </m:r>
+                  </m:oMath>
+                </a14:m>
+                <a:r>
+                  <a:rPr lang="en-US" sz="1200" dirty="0"/>
+                  <a:t>	probability that a random variable </a:t>
+                </a:r>
+                <a14:m>
+                  <m:oMath xmlns:m="http://schemas.openxmlformats.org/officeDocument/2006/math">
+                    <m:r>
+                      <a:rPr lang="en-US" sz="1200" i="1" dirty="0">
+                        <a:latin typeface="Cambria Math" panose="02040503050406030204" pitchFamily="18" charset="0"/>
+                      </a:rPr>
+                      <m:t>𝑋</m:t>
+                    </m:r>
+                  </m:oMath>
+                </a14:m>
+                <a:r>
+                  <a:rPr lang="en-US" sz="1200" dirty="0"/>
+                  <a:t> takes on the value </a:t>
+                </a:r>
+                <a14:m>
+                  <m:oMath xmlns:m="http://schemas.openxmlformats.org/officeDocument/2006/math">
+                    <m:r>
+                      <a:rPr lang="en-US" sz="1200" i="1" dirty="0">
+                        <a:latin typeface="Cambria Math" panose="02040503050406030204" pitchFamily="18" charset="0"/>
+                      </a:rPr>
+                      <m:t>𝑥</m:t>
+                    </m:r>
+                  </m:oMath>
+                </a14:m>
+                <a:endParaRPr lang="en-US" sz="1200" dirty="0"/>
+              </a:p>
+              <a:p>
+                <a14:m>
+                  <m:oMath xmlns:m="http://schemas.openxmlformats.org/officeDocument/2006/math">
+                    <m:r>
+                      <a:rPr lang="en-US" sz="1200" i="1" dirty="0">
+                        <a:latin typeface="Cambria Math" panose="02040503050406030204" pitchFamily="18" charset="0"/>
+                      </a:rPr>
+                      <m:t>𝑋</m:t>
+                    </m:r>
+                    <m:r>
+                      <a:rPr lang="en-US" sz="1200" i="1" dirty="0">
+                        <a:latin typeface="Cambria Math" panose="02040503050406030204" pitchFamily="18" charset="0"/>
+                      </a:rPr>
+                      <m:t>~</m:t>
+                    </m:r>
+                    <m:r>
+                      <a:rPr lang="en-US" sz="1200" i="1" dirty="0">
+                        <a:latin typeface="Cambria Math" panose="02040503050406030204" pitchFamily="18" charset="0"/>
+                      </a:rPr>
+                      <m:t>𝑝</m:t>
+                    </m:r>
+                  </m:oMath>
+                </a14:m>
+                <a:r>
+                  <a:rPr lang="en-US" sz="1200" dirty="0"/>
+                  <a:t>	random variable </a:t>
+                </a:r>
+                <a14:m>
+                  <m:oMath xmlns:m="http://schemas.openxmlformats.org/officeDocument/2006/math">
+                    <m:r>
+                      <a:rPr lang="en-US" sz="1200" i="1" dirty="0">
+                        <a:latin typeface="Cambria Math" panose="02040503050406030204" pitchFamily="18" charset="0"/>
+                      </a:rPr>
+                      <m:t>𝑋</m:t>
+                    </m:r>
+                  </m:oMath>
+                </a14:m>
+                <a:r>
+                  <a:rPr lang="en-US" sz="1200" dirty="0"/>
+                  <a:t> selected from distribution </a:t>
+                </a:r>
+                <a14:m>
+                  <m:oMath xmlns:m="http://schemas.openxmlformats.org/officeDocument/2006/math">
+                    <m:r>
+                      <a:rPr lang="en-US" sz="1200" i="1">
+                        <a:latin typeface="Cambria Math" panose="02040503050406030204" pitchFamily="18" charset="0"/>
+                      </a:rPr>
+                      <m:t>𝑝</m:t>
+                    </m:r>
+                    <m:d>
+                      <m:dPr>
+                        <m:ctrlPr>
+                          <a:rPr lang="en-US" sz="1200" i="1">
+                            <a:latin typeface="Cambria Math" panose="02040503050406030204" pitchFamily="18" charset="0"/>
+                          </a:rPr>
+                        </m:ctrlPr>
+                      </m:dPr>
+                      <m:e>
+                        <m:r>
+                          <a:rPr lang="en-US" sz="1200" i="1">
+                            <a:latin typeface="Cambria Math" panose="02040503050406030204" pitchFamily="18" charset="0"/>
+                          </a:rPr>
+                          <m:t>𝑥</m:t>
+                        </m:r>
+                      </m:e>
+                    </m:d>
+                    <m:r>
+                      <a:rPr lang="en-US" sz="1200" i="1">
+                        <a:latin typeface="Cambria Math" panose="02040503050406030204" pitchFamily="18" charset="0"/>
+                      </a:rPr>
+                      <m:t>=</m:t>
+                    </m:r>
+                    <m:r>
+                      <m:rPr>
+                        <m:sty m:val="p"/>
+                      </m:rPr>
+                      <a:rPr lang="en-US" sz="1200">
+                        <a:latin typeface="Cambria Math" panose="02040503050406030204" pitchFamily="18" charset="0"/>
+                      </a:rPr>
+                      <m:t>Pr</m:t>
+                    </m:r>
+                    <m:r>
+                      <a:rPr lang="en-US" sz="1200" i="1">
+                        <a:latin typeface="Cambria Math" panose="02040503050406030204" pitchFamily="18" charset="0"/>
+                      </a:rPr>
+                      <m:t>⁡{</m:t>
+                    </m:r>
+                    <m:r>
+                      <a:rPr lang="en-US" sz="1200" i="1">
+                        <a:latin typeface="Cambria Math" panose="02040503050406030204" pitchFamily="18" charset="0"/>
+                      </a:rPr>
+                      <m:t>𝑋</m:t>
+                    </m:r>
+                    <m:r>
+                      <a:rPr lang="en-US" sz="1200" i="1">
+                        <a:latin typeface="Cambria Math" panose="02040503050406030204" pitchFamily="18" charset="0"/>
+                      </a:rPr>
+                      <m:t>=</m:t>
+                    </m:r>
+                    <m:r>
+                      <a:rPr lang="en-US" sz="1200" i="1">
+                        <a:latin typeface="Cambria Math" panose="02040503050406030204" pitchFamily="18" charset="0"/>
+                      </a:rPr>
+                      <m:t>𝑥</m:t>
+                    </m:r>
+                    <m:r>
+                      <a:rPr lang="en-US" sz="1200" i="1">
+                        <a:latin typeface="Cambria Math" panose="02040503050406030204" pitchFamily="18" charset="0"/>
+                      </a:rPr>
+                      <m:t>}</m:t>
+                    </m:r>
+                  </m:oMath>
+                </a14:m>
+                <a:endParaRPr lang="en-US" sz="1200" dirty="0"/>
+              </a:p>
+              <a:p>
+                <a14:m>
+                  <m:oMath xmlns:m="http://schemas.openxmlformats.org/officeDocument/2006/math">
+                    <m:r>
+                      <a:rPr lang="en-US" sz="1200" i="1">
+                        <a:latin typeface="Cambria Math" panose="02040503050406030204" pitchFamily="18" charset="0"/>
+                        <a:ea typeface="Cambria Math" panose="02040503050406030204" pitchFamily="18" charset="0"/>
+                      </a:rPr>
+                      <m:t>𝔼</m:t>
+                    </m:r>
+                    <m:r>
+                      <a:rPr lang="en-US" sz="1200" i="1">
+                        <a:latin typeface="Cambria Math" panose="02040503050406030204" pitchFamily="18" charset="0"/>
+                        <a:ea typeface="Cambria Math" panose="02040503050406030204" pitchFamily="18" charset="0"/>
+                      </a:rPr>
+                      <m:t>[</m:t>
+                    </m:r>
+                    <m:r>
+                      <a:rPr lang="en-US" sz="1200" i="1">
+                        <a:latin typeface="Cambria Math" panose="02040503050406030204" pitchFamily="18" charset="0"/>
+                        <a:ea typeface="Cambria Math" panose="02040503050406030204" pitchFamily="18" charset="0"/>
+                      </a:rPr>
+                      <m:t>𝑋</m:t>
+                    </m:r>
+                    <m:r>
+                      <a:rPr lang="en-US" sz="1200" i="1">
+                        <a:latin typeface="Cambria Math" panose="02040503050406030204" pitchFamily="18" charset="0"/>
+                        <a:ea typeface="Cambria Math" panose="02040503050406030204" pitchFamily="18" charset="0"/>
+                      </a:rPr>
+                      <m:t>]</m:t>
+                    </m:r>
+                  </m:oMath>
+                </a14:m>
+                <a:r>
+                  <a:rPr lang="en-US" sz="1200" dirty="0"/>
+                  <a:t>	expectation of a random variable </a:t>
+                </a:r>
+                <a14:m>
+                  <m:oMath xmlns:m="http://schemas.openxmlformats.org/officeDocument/2006/math">
+                    <m:r>
+                      <a:rPr lang="en-US" sz="1200" i="1" dirty="0">
+                        <a:latin typeface="Cambria Math" panose="02040503050406030204" pitchFamily="18" charset="0"/>
+                      </a:rPr>
+                      <m:t>𝑋</m:t>
+                    </m:r>
+                  </m:oMath>
+                </a14:m>
+                <a:r>
+                  <a:rPr lang="en-US" sz="1200" dirty="0"/>
+                  <a:t>, i.e., </a:t>
+                </a:r>
+                <a14:m>
+                  <m:oMath xmlns:m="http://schemas.openxmlformats.org/officeDocument/2006/math">
+                    <m:r>
+                      <a:rPr lang="en-US" sz="1200" i="1">
+                        <a:latin typeface="Cambria Math" panose="02040503050406030204" pitchFamily="18" charset="0"/>
+                        <a:ea typeface="Cambria Math" panose="02040503050406030204" pitchFamily="18" charset="0"/>
+                      </a:rPr>
+                      <m:t>𝔼</m:t>
+                    </m:r>
+                    <m:d>
+                      <m:dPr>
+                        <m:begChr m:val="["/>
+                        <m:endChr m:val="]"/>
+                        <m:ctrlPr>
+                          <a:rPr lang="en-US" sz="1200" i="1">
+                            <a:latin typeface="Cambria Math" panose="02040503050406030204" pitchFamily="18" charset="0"/>
+                            <a:ea typeface="Cambria Math" panose="02040503050406030204" pitchFamily="18" charset="0"/>
+                          </a:rPr>
+                        </m:ctrlPr>
+                      </m:dPr>
+                      <m:e>
+                        <m:r>
+                          <a:rPr lang="en-US" sz="1200" i="1">
+                            <a:latin typeface="Cambria Math" panose="02040503050406030204" pitchFamily="18" charset="0"/>
+                            <a:ea typeface="Cambria Math" panose="02040503050406030204" pitchFamily="18" charset="0"/>
+                          </a:rPr>
+                          <m:t>𝑋</m:t>
+                        </m:r>
+                      </m:e>
+                    </m:d>
+                    <m:r>
+                      <a:rPr lang="en-US" sz="1200" i="1">
+                        <a:latin typeface="Cambria Math" panose="02040503050406030204" pitchFamily="18" charset="0"/>
+                        <a:ea typeface="Cambria Math" panose="02040503050406030204" pitchFamily="18" charset="0"/>
+                      </a:rPr>
+                      <m:t>=</m:t>
+                    </m:r>
+                    <m:nary>
+                      <m:naryPr>
+                        <m:chr m:val="∑"/>
+                        <m:supHide m:val="on"/>
+                        <m:ctrlPr>
+                          <a:rPr lang="en-US" sz="1200" i="1">
+                            <a:latin typeface="Cambria Math" panose="02040503050406030204" pitchFamily="18" charset="0"/>
+                            <a:ea typeface="Cambria Math" panose="02040503050406030204" pitchFamily="18" charset="0"/>
+                          </a:rPr>
+                        </m:ctrlPr>
+                      </m:naryPr>
+                      <m:sub>
+                        <m:r>
+                          <a:rPr lang="en-US" sz="1200" i="1">
+                            <a:latin typeface="Cambria Math" panose="02040503050406030204" pitchFamily="18" charset="0"/>
+                            <a:ea typeface="Cambria Math" panose="02040503050406030204" pitchFamily="18" charset="0"/>
+                          </a:rPr>
+                          <m:t>𝑥</m:t>
+                        </m:r>
+                      </m:sub>
+                      <m:sup/>
+                      <m:e>
+                        <m:r>
+                          <a:rPr lang="en-US" sz="1200" i="1">
+                            <a:latin typeface="Cambria Math" panose="02040503050406030204" pitchFamily="18" charset="0"/>
+                            <a:ea typeface="Cambria Math" panose="02040503050406030204" pitchFamily="18" charset="0"/>
+                          </a:rPr>
+                          <m:t>𝑝</m:t>
+                        </m:r>
+                        <m:d>
+                          <m:dPr>
+                            <m:ctrlPr>
+                              <a:rPr lang="en-US" sz="1200" i="1">
+                                <a:latin typeface="Cambria Math" panose="02040503050406030204" pitchFamily="18" charset="0"/>
+                                <a:ea typeface="Cambria Math" panose="02040503050406030204" pitchFamily="18" charset="0"/>
+                              </a:rPr>
+                            </m:ctrlPr>
+                          </m:dPr>
+                          <m:e>
+                            <m:r>
+                              <a:rPr lang="en-US" sz="1200" i="1">
+                                <a:latin typeface="Cambria Math" panose="02040503050406030204" pitchFamily="18" charset="0"/>
+                                <a:ea typeface="Cambria Math" panose="02040503050406030204" pitchFamily="18" charset="0"/>
+                              </a:rPr>
+                              <m:t>𝑥</m:t>
+                            </m:r>
+                          </m:e>
+                        </m:d>
+                        <m:r>
+                          <a:rPr lang="en-US" sz="1200" i="1">
+                            <a:latin typeface="Cambria Math" panose="02040503050406030204" pitchFamily="18" charset="0"/>
+                            <a:ea typeface="Cambria Math" panose="02040503050406030204" pitchFamily="18" charset="0"/>
+                          </a:rPr>
+                          <m:t>𝑥</m:t>
+                        </m:r>
+                      </m:e>
+                    </m:nary>
+                  </m:oMath>
+                </a14:m>
+                <a:endParaRPr lang="en-US" sz="1200" dirty="0">
+                  <a:ea typeface="Cambria Math" panose="02040503050406030204" pitchFamily="18" charset="0"/>
+                </a:endParaRPr>
+              </a:p>
+              <a:p>
+                <a14:m>
+                  <m:oMath xmlns:m="http://schemas.openxmlformats.org/officeDocument/2006/math">
+                    <m:sSub>
+                      <m:sSubPr>
+                        <m:ctrlPr>
+                          <a:rPr lang="en-US" sz="1200" dirty="0">
+                            <a:latin typeface="Cambria Math" panose="02040503050406030204" pitchFamily="18" charset="0"/>
+                          </a:rPr>
+                        </m:ctrlPr>
+                      </m:sSubPr>
+                      <m:e>
+                        <m:r>
+                          <m:rPr>
+                            <m:sty m:val="p"/>
+                          </m:rPr>
+                          <a:rPr lang="en-US" sz="1200" dirty="0">
+                            <a:latin typeface="Cambria Math" panose="02040503050406030204" pitchFamily="18" charset="0"/>
+                          </a:rPr>
+                          <m:t>argmax</m:t>
+                        </m:r>
+                      </m:e>
+                      <m:sub>
+                        <m:r>
+                          <m:rPr>
+                            <m:sty m:val="p"/>
+                          </m:rPr>
+                          <a:rPr lang="en-US" sz="1200" dirty="0">
+                            <a:latin typeface="Cambria Math" panose="02040503050406030204" pitchFamily="18" charset="0"/>
+                          </a:rPr>
+                          <m:t>a</m:t>
+                        </m:r>
+                      </m:sub>
+                    </m:sSub>
+                    <m:r>
+                      <a:rPr lang="en-US" sz="1200" dirty="0">
+                        <a:latin typeface="Cambria Math" panose="02040503050406030204" pitchFamily="18" charset="0"/>
+                      </a:rPr>
+                      <m:t> </m:t>
+                    </m:r>
+                    <m:r>
+                      <a:rPr lang="en-US" sz="1200" i="1" dirty="0">
+                        <a:latin typeface="Cambria Math" panose="02040503050406030204" pitchFamily="18" charset="0"/>
+                      </a:rPr>
+                      <m:t>𝑓</m:t>
+                    </m:r>
+                    <m:r>
+                      <a:rPr lang="en-US" sz="1200" i="1" dirty="0">
+                        <a:latin typeface="Cambria Math" panose="02040503050406030204" pitchFamily="18" charset="0"/>
+                      </a:rPr>
+                      <m:t>(</m:t>
+                    </m:r>
+                    <m:r>
+                      <a:rPr lang="en-US" sz="1200" i="1" dirty="0">
+                        <a:latin typeface="Cambria Math" panose="02040503050406030204" pitchFamily="18" charset="0"/>
+                      </a:rPr>
+                      <m:t>𝑎</m:t>
+                    </m:r>
+                    <m:r>
+                      <a:rPr lang="en-US" sz="1200" i="1" dirty="0">
+                        <a:latin typeface="Cambria Math" panose="02040503050406030204" pitchFamily="18" charset="0"/>
+                      </a:rPr>
+                      <m:t>)</m:t>
+                    </m:r>
+                  </m:oMath>
+                </a14:m>
+                <a:r>
+                  <a:rPr lang="en-US" sz="1200" dirty="0"/>
+                  <a:t> a value of action </a:t>
+                </a:r>
+                <a14:m>
+                  <m:oMath xmlns:m="http://schemas.openxmlformats.org/officeDocument/2006/math">
+                    <m:r>
+                      <a:rPr lang="en-US" sz="1200" i="1" dirty="0">
+                        <a:latin typeface="Cambria Math" panose="02040503050406030204" pitchFamily="18" charset="0"/>
+                      </a:rPr>
+                      <m:t>𝑎</m:t>
+                    </m:r>
+                  </m:oMath>
+                </a14:m>
+                <a:r>
+                  <a:rPr lang="en-US" sz="1200" dirty="0"/>
+                  <a:t> at which </a:t>
+                </a:r>
+                <a14:m>
+                  <m:oMath xmlns:m="http://schemas.openxmlformats.org/officeDocument/2006/math">
+                    <m:r>
+                      <a:rPr lang="en-US" sz="1200" i="1" dirty="0">
+                        <a:latin typeface="Cambria Math" panose="02040503050406030204" pitchFamily="18" charset="0"/>
+                      </a:rPr>
+                      <m:t>𝑓</m:t>
+                    </m:r>
+                    <m:r>
+                      <a:rPr lang="en-US" sz="1200" i="1" dirty="0">
+                        <a:latin typeface="Cambria Math" panose="02040503050406030204" pitchFamily="18" charset="0"/>
+                      </a:rPr>
+                      <m:t>(</m:t>
+                    </m:r>
+                    <m:r>
+                      <a:rPr lang="en-US" sz="1200" i="1" dirty="0">
+                        <a:latin typeface="Cambria Math" panose="02040503050406030204" pitchFamily="18" charset="0"/>
+                      </a:rPr>
+                      <m:t>𝑎</m:t>
+                    </m:r>
+                    <m:r>
+                      <a:rPr lang="en-US" sz="1200" i="1" dirty="0">
+                        <a:latin typeface="Cambria Math" panose="02040503050406030204" pitchFamily="18" charset="0"/>
+                      </a:rPr>
+                      <m:t>)</m:t>
+                    </m:r>
+                  </m:oMath>
+                </a14:m>
+                <a:r>
+                  <a:rPr lang="en-US" sz="1200" dirty="0"/>
+                  <a:t> takes its maximal value</a:t>
+                </a:r>
+              </a:p>
+            </p:txBody>
+          </p:sp>
+        </mc:Choice>
+        <mc:Fallback xmlns="">
+          <p:sp>
+            <p:nvSpPr>
+              <p:cNvPr id="10" name="TextBox 9" descr="General. X capital letters: random variables x, p lower-case letters: realizations of random variables or scalar functions. w Bold lower-case letters: real-valued vectors (even if random variables). W bold capitals: matrices. alpha Greek letters: parameters (vectors if in bolt). Pr{X equals x} probability that a random variable X takes on the value x. X~p random variable X selected from distribution p (x) equals Pr{X equals x}. E[X] expectation of a random variable X, i.e., E [X] equals the sum over x, of p (x) x. argmax sub a f(a) a value of action a at which f(a) takes its maximal value">
+                <a:extLst>
+                  <a:ext uri="{FF2B5EF4-FFF2-40B4-BE49-F238E27FC236}">
+                    <a16:creationId xmlns:a16="http://schemas.microsoft.com/office/drawing/2014/main" id="{5CD475E5-BE3B-5594-57DC-46A17411F2F9}"/>
+                  </a:ext>
+                </a:extLst>
+              </p:cNvPr>
+              <p:cNvSpPr txBox="1">
+                <a:spLocks noRot="1" noChangeAspect="1" noMove="1" noResize="1" noEditPoints="1" noAdjustHandles="1" noChangeArrowheads="1" noChangeShapeType="1" noTextEdit="1"/>
+              </p:cNvSpPr>
+              <p:nvPr/>
+            </p:nvSpPr>
+            <p:spPr>
+              <a:xfrm>
+                <a:off x="822820" y="1124198"/>
+                <a:ext cx="5273179" cy="2308324"/>
+              </a:xfrm>
+              <a:prstGeom prst="rect">
+                <a:avLst/>
+              </a:prstGeom>
+              <a:blipFill>
+                <a:blip r:embed="rId3"/>
+                <a:stretch>
+                  <a:fillRect b="-9424"/>
+                </a:stretch>
+              </a:blipFill>
+            </p:spPr>
+            <p:txBody>
+              <a:bodyPr/>
+              <a:lstStyle/>
+              <a:p>
+                <a:r>
+                  <a:rPr lang="en-US">
+                    <a:noFill/>
+                  </a:rPr>
+                  <a:t> </a:t>
+                </a:r>
+              </a:p>
+            </p:txBody>
+          </p:sp>
+        </mc:Fallback>
+      </mc:AlternateContent>
+      <mc:AlternateContent xmlns:mc="http://schemas.openxmlformats.org/markup-compatibility/2006" xmlns:a14="http://schemas.microsoft.com/office/drawing/2010/main">
+        <mc:Choice Requires="a14">
+          <p:sp>
+            <p:nvSpPr>
+              <p:cNvPr id="3" name="Content Placeholder 2" descr="Value Function. G sub t return (cumulative reward) following time t. G sub t:h return from t to h (discounted and corrected). v sub pi (s) value of state s under policy pi (expected return). v sub star (s) value of state s under the optimal policy. q sub pi (s,a) value of taking action a in state s under policy pi. q sub star (s,a) value of taking action a in state s under the optimal policy. V, V sub t array estimates of state-value function v sub pi or v sub star. Q,Q sub t array estimates of action-value function q sub pi or v sub star">
                 <a:extLst>
                   <a:ext uri="{FF2B5EF4-FFF2-40B4-BE49-F238E27FC236}">
                     <a16:creationId xmlns:a16="http://schemas.microsoft.com/office/drawing/2014/main" id="{47E69C9C-42B6-9B0F-9AE0-20D17703E490}"/>
@@ -13450,7 +14176,7 @@
                     <m:sSub>
                       <m:sSubPr>
                         <m:ctrlPr>
-                          <a:rPr lang="en-US" sz="1200" i="1" dirty="0" smtClean="0">
+                          <a:rPr lang="en-US" sz="1200" i="1" dirty="0">
                             <a:latin typeface="Cambria Math" panose="02040503050406030204" pitchFamily="18" charset="0"/>
                           </a:rPr>
                         </m:ctrlPr>
@@ -13550,7 +14276,7 @@
                             </a:solidFill>
                             <a:latin typeface="Cambria Math" panose="02040503050406030204" pitchFamily="18" charset="0"/>
                           </a:rPr>
-                          <m:t>h</m:t>
+                          <m:t>ℎ</m:t>
                         </m:r>
                       </m:sub>
                     </m:sSub>
@@ -13594,7 +14320,7 @@
                         </a:solidFill>
                         <a:latin typeface="Cambria Math" panose="02040503050406030204" pitchFamily="18" charset="0"/>
                       </a:rPr>
-                      <m:t>h</m:t>
+                      <m:t>ℎ</m:t>
                     </m:r>
                   </m:oMath>
                 </a14:m>
@@ -14362,7 +15088,7 @@
         <mc:Fallback xmlns="">
           <p:sp>
             <p:nvSpPr>
-              <p:cNvPr id="3" name="Content Placeholder 2">
+              <p:cNvPr id="3" name="Content Placeholder 2" descr="Value Function. G sub t return (cumulative reward) following time t. G sub t:h return from t to h (discounted and corrected). v sub pi (s) value of state s under policy pi (expected return). v sub star (s) value of state s under the optimal policy. q sub pi (s,a) value of taking action a in state s under policy pi. q sub star (s,a) value of taking action a in state s under the optimal policy. V, V sub t array estimates of state-value function v sub pi or v sub star. Q,Q sub t array estimates of action-value function q sub pi or v sub star">
                 <a:extLst>
                   <a:ext uri="{FF2B5EF4-FFF2-40B4-BE49-F238E27FC236}">
                     <a16:creationId xmlns:a16="http://schemas.microsoft.com/office/drawing/2014/main" id="{47E69C9C-42B6-9B0F-9AE0-20D17703E490}"/>
@@ -14407,668 +15133,7 @@
         <mc:Choice Requires="a14">
           <p:sp>
             <p:nvSpPr>
-              <p:cNvPr id="10" name="TextBox 9">
-                <a:extLst>
-                  <a:ext uri="{FF2B5EF4-FFF2-40B4-BE49-F238E27FC236}">
-                    <a16:creationId xmlns:a16="http://schemas.microsoft.com/office/drawing/2014/main" id="{5CD475E5-BE3B-5594-57DC-46A17411F2F9}"/>
-                  </a:ext>
-                </a:extLst>
-              </p:cNvPr>
-              <p:cNvSpPr txBox="1"/>
-              <p:nvPr/>
-            </p:nvSpPr>
-            <p:spPr>
-              <a:xfrm>
-                <a:off x="822820" y="1124198"/>
-                <a:ext cx="5273179" cy="2308324"/>
-              </a:xfrm>
-              <a:prstGeom prst="rect">
-                <a:avLst/>
-              </a:prstGeom>
-            </p:spPr>
-            <p:style>
-              <a:lnRef idx="2">
-                <a:schemeClr val="accent2"/>
-              </a:lnRef>
-              <a:fillRef idx="1">
-                <a:schemeClr val="lt1"/>
-              </a:fillRef>
-              <a:effectRef idx="0">
-                <a:schemeClr val="accent2"/>
-              </a:effectRef>
-              <a:fontRef idx="minor">
-                <a:schemeClr val="dk1"/>
-              </a:fontRef>
-            </p:style>
-            <p:txBody>
-              <a:bodyPr wrap="square">
-                <a:spAutoFit/>
-              </a:bodyPr>
-              <a:lstStyle/>
-              <a:p>
-                <a:r>
-                  <a:rPr lang="en-US" sz="1200" b="1" dirty="0"/>
-                  <a:t>General</a:t>
-                </a:r>
-                <a:endParaRPr lang="en-US" sz="1200" dirty="0"/>
-              </a:p>
-              <a:p>
-                <a14:m>
-                  <m:oMath xmlns:m="http://schemas.openxmlformats.org/officeDocument/2006/math">
-                    <m:r>
-                      <a:rPr lang="en-US" sz="1200" i="1" dirty="0" smtClean="0">
-                        <a:latin typeface="Cambria Math" panose="02040503050406030204" pitchFamily="18" charset="0"/>
-                      </a:rPr>
-                      <m:t>𝑋</m:t>
-                    </m:r>
-                  </m:oMath>
-                </a14:m>
-                <a:r>
-                  <a:rPr lang="en-US" sz="1200" dirty="0"/>
-                  <a:t>	capital letters: random variables</a:t>
-                </a:r>
-                <a:br>
-                  <a:rPr lang="en-US" sz="1200" dirty="0"/>
-                </a:br>
-                <a14:m>
-                  <m:oMath xmlns:m="http://schemas.openxmlformats.org/officeDocument/2006/math">
-                    <m:r>
-                      <a:rPr lang="en-US" sz="1200" b="0" i="1" smtClean="0">
-                        <a:latin typeface="Cambria Math" panose="02040503050406030204" pitchFamily="18" charset="0"/>
-                      </a:rPr>
-                      <m:t>𝑥</m:t>
-                    </m:r>
-                    <m:r>
-                      <a:rPr lang="en-US" sz="1200" b="0" i="0" smtClean="0">
-                        <a:latin typeface="Cambria Math" panose="02040503050406030204" pitchFamily="18" charset="0"/>
-                      </a:rPr>
-                      <m:t>, </m:t>
-                    </m:r>
-                    <m:r>
-                      <a:rPr lang="en-US" sz="1200" b="0" i="1" smtClean="0">
-                        <a:latin typeface="Cambria Math" panose="02040503050406030204" pitchFamily="18" charset="0"/>
-                      </a:rPr>
-                      <m:t>𝑝</m:t>
-                    </m:r>
-                  </m:oMath>
-                </a14:m>
-                <a:r>
-                  <a:rPr lang="en-US" sz="1200" dirty="0"/>
-                  <a:t>	lower-case letters: realizations of random variables </a:t>
-                </a:r>
-                <a:br>
-                  <a:rPr lang="en-US" sz="1200" dirty="0"/>
-                </a:br>
-                <a:r>
-                  <a:rPr lang="en-US" sz="1200" dirty="0"/>
-                  <a:t>	or scalar functions</a:t>
-                </a:r>
-              </a:p>
-              <a:p>
-                <a14:m>
-                  <m:oMath xmlns:m="http://schemas.openxmlformats.org/officeDocument/2006/math">
-                    <m:r>
-                      <a:rPr lang="en-US" sz="1200" b="1" i="1" smtClean="0">
-                        <a:latin typeface="Cambria Math" panose="02040503050406030204" pitchFamily="18" charset="0"/>
-                      </a:rPr>
-                      <m:t>𝒘</m:t>
-                    </m:r>
-                  </m:oMath>
-                </a14:m>
-                <a:r>
-                  <a:rPr lang="en-US" sz="1200" dirty="0"/>
-                  <a:t> 	Bold lower-case letters: real-valued vectors </a:t>
-                </a:r>
-                <a:br>
-                  <a:rPr lang="en-US" sz="1200" dirty="0"/>
-                </a:br>
-                <a:r>
-                  <a:rPr lang="en-US" sz="1200" dirty="0"/>
-                  <a:t>	(even if random variables)</a:t>
-                </a:r>
-              </a:p>
-              <a:p>
-                <a14:m>
-                  <m:oMath xmlns:m="http://schemas.openxmlformats.org/officeDocument/2006/math">
-                    <m:r>
-                      <a:rPr lang="en-US" sz="1200" b="1" i="1" smtClean="0">
-                        <a:latin typeface="Cambria Math" panose="02040503050406030204" pitchFamily="18" charset="0"/>
-                      </a:rPr>
-                      <m:t>𝑾</m:t>
-                    </m:r>
-                  </m:oMath>
-                </a14:m>
-                <a:r>
-                  <a:rPr lang="en-US" sz="1200" dirty="0"/>
-                  <a:t>	bold capitals: matrices</a:t>
-                </a:r>
-              </a:p>
-              <a:p>
-                <a14:m>
-                  <m:oMath xmlns:m="http://schemas.openxmlformats.org/officeDocument/2006/math">
-                    <m:r>
-                      <a:rPr lang="en-US" sz="1200" b="0" i="1" smtClean="0">
-                        <a:latin typeface="Cambria Math" panose="02040503050406030204" pitchFamily="18" charset="0"/>
-                      </a:rPr>
-                      <m:t>𝛼</m:t>
-                    </m:r>
-                  </m:oMath>
-                </a14:m>
-                <a:r>
-                  <a:rPr lang="en-US" sz="1200" dirty="0"/>
-                  <a:t>	Greek letters: parameters (vectors if in bolt)</a:t>
-                </a:r>
-              </a:p>
-              <a:p>
-                <a14:m>
-                  <m:oMath xmlns:m="http://schemas.openxmlformats.org/officeDocument/2006/math">
-                    <m:r>
-                      <m:rPr>
-                        <m:sty m:val="p"/>
-                      </m:rPr>
-                      <a:rPr lang="en-US" sz="1200" i="1" dirty="0">
-                        <a:latin typeface="Cambria Math" panose="02040503050406030204" pitchFamily="18" charset="0"/>
-                      </a:rPr>
-                      <m:t>Pr</m:t>
-                    </m:r>
-                    <m:r>
-                      <a:rPr lang="en-US" sz="1200" i="1" dirty="0">
-                        <a:latin typeface="Cambria Math" panose="02040503050406030204" pitchFamily="18" charset="0"/>
-                      </a:rPr>
-                      <m:t>⁡{</m:t>
-                    </m:r>
-                    <m:r>
-                      <a:rPr lang="en-US" sz="1200" i="1" dirty="0">
-                        <a:latin typeface="Cambria Math" panose="02040503050406030204" pitchFamily="18" charset="0"/>
-                      </a:rPr>
-                      <m:t>𝑋</m:t>
-                    </m:r>
-                    <m:r>
-                      <a:rPr lang="en-US" sz="1200" i="1" dirty="0">
-                        <a:latin typeface="Cambria Math" panose="02040503050406030204" pitchFamily="18" charset="0"/>
-                      </a:rPr>
-                      <m:t>=</m:t>
-                    </m:r>
-                    <m:r>
-                      <a:rPr lang="en-US" sz="1200" i="1" dirty="0">
-                        <a:latin typeface="Cambria Math" panose="02040503050406030204" pitchFamily="18" charset="0"/>
-                      </a:rPr>
-                      <m:t>𝑥</m:t>
-                    </m:r>
-                    <m:r>
-                      <a:rPr lang="en-US" sz="1200" i="1" dirty="0">
-                        <a:latin typeface="Cambria Math" panose="02040503050406030204" pitchFamily="18" charset="0"/>
-                      </a:rPr>
-                      <m:t>}</m:t>
-                    </m:r>
-                  </m:oMath>
-                </a14:m>
-                <a:r>
-                  <a:rPr lang="en-US" sz="1200" dirty="0"/>
-                  <a:t>	probability that a random variable </a:t>
-                </a:r>
-                <a14:m>
-                  <m:oMath xmlns:m="http://schemas.openxmlformats.org/officeDocument/2006/math">
-                    <m:r>
-                      <a:rPr lang="en-US" sz="1200" i="1" dirty="0">
-                        <a:latin typeface="Cambria Math" panose="02040503050406030204" pitchFamily="18" charset="0"/>
-                      </a:rPr>
-                      <m:t>𝑋</m:t>
-                    </m:r>
-                  </m:oMath>
-                </a14:m>
-                <a:r>
-                  <a:rPr lang="en-US" sz="1200" dirty="0"/>
-                  <a:t> takes on the value </a:t>
-                </a:r>
-                <a14:m>
-                  <m:oMath xmlns:m="http://schemas.openxmlformats.org/officeDocument/2006/math">
-                    <m:r>
-                      <a:rPr lang="en-US" sz="1200" i="1" dirty="0">
-                        <a:latin typeface="Cambria Math" panose="02040503050406030204" pitchFamily="18" charset="0"/>
-                      </a:rPr>
-                      <m:t>𝑥</m:t>
-                    </m:r>
-                  </m:oMath>
-                </a14:m>
-                <a:endParaRPr lang="en-US" sz="1200" dirty="0"/>
-              </a:p>
-              <a:p>
-                <a14:m>
-                  <m:oMath xmlns:m="http://schemas.openxmlformats.org/officeDocument/2006/math">
-                    <m:r>
-                      <a:rPr lang="en-US" sz="1200" i="1" dirty="0">
-                        <a:latin typeface="Cambria Math" panose="02040503050406030204" pitchFamily="18" charset="0"/>
-                      </a:rPr>
-                      <m:t>𝑋</m:t>
-                    </m:r>
-                    <m:r>
-                      <a:rPr lang="en-US" sz="1200" i="1" dirty="0">
-                        <a:latin typeface="Cambria Math" panose="02040503050406030204" pitchFamily="18" charset="0"/>
-                      </a:rPr>
-                      <m:t>~</m:t>
-                    </m:r>
-                    <m:r>
-                      <a:rPr lang="en-US" sz="1200" i="1" dirty="0">
-                        <a:latin typeface="Cambria Math" panose="02040503050406030204" pitchFamily="18" charset="0"/>
-                      </a:rPr>
-                      <m:t>𝑝</m:t>
-                    </m:r>
-                  </m:oMath>
-                </a14:m>
-                <a:r>
-                  <a:rPr lang="en-US" sz="1200" dirty="0"/>
-                  <a:t>	random variable </a:t>
-                </a:r>
-                <a14:m>
-                  <m:oMath xmlns:m="http://schemas.openxmlformats.org/officeDocument/2006/math">
-                    <m:r>
-                      <a:rPr lang="en-US" sz="1200" i="1" dirty="0">
-                        <a:latin typeface="Cambria Math" panose="02040503050406030204" pitchFamily="18" charset="0"/>
-                      </a:rPr>
-                      <m:t>𝑋</m:t>
-                    </m:r>
-                  </m:oMath>
-                </a14:m>
-                <a:r>
-                  <a:rPr lang="en-US" sz="1200" dirty="0"/>
-                  <a:t> selected from distribution </a:t>
-                </a:r>
-                <a14:m>
-                  <m:oMath xmlns:m="http://schemas.openxmlformats.org/officeDocument/2006/math">
-                    <m:r>
-                      <a:rPr lang="en-US" sz="1200" i="1">
-                        <a:latin typeface="Cambria Math" panose="02040503050406030204" pitchFamily="18" charset="0"/>
-                      </a:rPr>
-                      <m:t>𝑝</m:t>
-                    </m:r>
-                    <m:d>
-                      <m:dPr>
-                        <m:ctrlPr>
-                          <a:rPr lang="en-US" sz="1200" i="1">
-                            <a:latin typeface="Cambria Math" panose="02040503050406030204" pitchFamily="18" charset="0"/>
-                          </a:rPr>
-                        </m:ctrlPr>
-                      </m:dPr>
-                      <m:e>
-                        <m:r>
-                          <a:rPr lang="en-US" sz="1200" i="1">
-                            <a:latin typeface="Cambria Math" panose="02040503050406030204" pitchFamily="18" charset="0"/>
-                          </a:rPr>
-                          <m:t>𝑥</m:t>
-                        </m:r>
-                      </m:e>
-                    </m:d>
-                    <m:r>
-                      <a:rPr lang="en-US" sz="1200" i="1">
-                        <a:latin typeface="Cambria Math" panose="02040503050406030204" pitchFamily="18" charset="0"/>
-                      </a:rPr>
-                      <m:t>=</m:t>
-                    </m:r>
-                    <m:r>
-                      <m:rPr>
-                        <m:sty m:val="p"/>
-                      </m:rPr>
-                      <a:rPr lang="en-US" sz="1200">
-                        <a:latin typeface="Cambria Math" panose="02040503050406030204" pitchFamily="18" charset="0"/>
-                      </a:rPr>
-                      <m:t>Pr</m:t>
-                    </m:r>
-                    <m:r>
-                      <a:rPr lang="en-US" sz="1200" i="1">
-                        <a:latin typeface="Cambria Math" panose="02040503050406030204" pitchFamily="18" charset="0"/>
-                      </a:rPr>
-                      <m:t>⁡{</m:t>
-                    </m:r>
-                    <m:r>
-                      <a:rPr lang="en-US" sz="1200" i="1">
-                        <a:latin typeface="Cambria Math" panose="02040503050406030204" pitchFamily="18" charset="0"/>
-                      </a:rPr>
-                      <m:t>𝑋</m:t>
-                    </m:r>
-                    <m:r>
-                      <a:rPr lang="en-US" sz="1200" i="1">
-                        <a:latin typeface="Cambria Math" panose="02040503050406030204" pitchFamily="18" charset="0"/>
-                      </a:rPr>
-                      <m:t>=</m:t>
-                    </m:r>
-                    <m:r>
-                      <a:rPr lang="en-US" sz="1200" i="1">
-                        <a:latin typeface="Cambria Math" panose="02040503050406030204" pitchFamily="18" charset="0"/>
-                      </a:rPr>
-                      <m:t>𝑥</m:t>
-                    </m:r>
-                    <m:r>
-                      <a:rPr lang="en-US" sz="1200" i="1">
-                        <a:latin typeface="Cambria Math" panose="02040503050406030204" pitchFamily="18" charset="0"/>
-                      </a:rPr>
-                      <m:t>}</m:t>
-                    </m:r>
-                  </m:oMath>
-                </a14:m>
-                <a:endParaRPr lang="en-US" sz="1200" dirty="0"/>
-              </a:p>
-              <a:p>
-                <a14:m>
-                  <m:oMath xmlns:m="http://schemas.openxmlformats.org/officeDocument/2006/math">
-                    <m:r>
-                      <a:rPr lang="en-US" sz="1200" i="1">
-                        <a:latin typeface="Cambria Math" panose="02040503050406030204" pitchFamily="18" charset="0"/>
-                        <a:ea typeface="Cambria Math" panose="02040503050406030204" pitchFamily="18" charset="0"/>
-                      </a:rPr>
-                      <m:t>𝔼</m:t>
-                    </m:r>
-                    <m:r>
-                      <a:rPr lang="en-US" sz="1200" i="1">
-                        <a:latin typeface="Cambria Math" panose="02040503050406030204" pitchFamily="18" charset="0"/>
-                        <a:ea typeface="Cambria Math" panose="02040503050406030204" pitchFamily="18" charset="0"/>
-                      </a:rPr>
-                      <m:t>[</m:t>
-                    </m:r>
-                    <m:r>
-                      <a:rPr lang="en-US" sz="1200" i="1">
-                        <a:latin typeface="Cambria Math" panose="02040503050406030204" pitchFamily="18" charset="0"/>
-                        <a:ea typeface="Cambria Math" panose="02040503050406030204" pitchFamily="18" charset="0"/>
-                      </a:rPr>
-                      <m:t>𝑋</m:t>
-                    </m:r>
-                    <m:r>
-                      <a:rPr lang="en-US" sz="1200" i="1">
-                        <a:latin typeface="Cambria Math" panose="02040503050406030204" pitchFamily="18" charset="0"/>
-                        <a:ea typeface="Cambria Math" panose="02040503050406030204" pitchFamily="18" charset="0"/>
-                      </a:rPr>
-                      <m:t>]</m:t>
-                    </m:r>
-                  </m:oMath>
-                </a14:m>
-                <a:r>
-                  <a:rPr lang="en-US" sz="1200" dirty="0"/>
-                  <a:t>	expectation of a random variable </a:t>
-                </a:r>
-                <a14:m>
-                  <m:oMath xmlns:m="http://schemas.openxmlformats.org/officeDocument/2006/math">
-                    <m:r>
-                      <a:rPr lang="en-US" sz="1200" i="1" dirty="0">
-                        <a:latin typeface="Cambria Math" panose="02040503050406030204" pitchFamily="18" charset="0"/>
-                      </a:rPr>
-                      <m:t>𝑋</m:t>
-                    </m:r>
-                  </m:oMath>
-                </a14:m>
-                <a:r>
-                  <a:rPr lang="en-US" sz="1200" dirty="0"/>
-                  <a:t>, i.e., </a:t>
-                </a:r>
-                <a14:m>
-                  <m:oMath xmlns:m="http://schemas.openxmlformats.org/officeDocument/2006/math">
-                    <m:r>
-                      <a:rPr lang="en-US" sz="1200" i="1">
-                        <a:latin typeface="Cambria Math" panose="02040503050406030204" pitchFamily="18" charset="0"/>
-                        <a:ea typeface="Cambria Math" panose="02040503050406030204" pitchFamily="18" charset="0"/>
-                      </a:rPr>
-                      <m:t>𝔼</m:t>
-                    </m:r>
-                    <m:d>
-                      <m:dPr>
-                        <m:begChr m:val="["/>
-                        <m:endChr m:val="]"/>
-                        <m:ctrlPr>
-                          <a:rPr lang="en-US" sz="1200" i="1">
-                            <a:latin typeface="Cambria Math" panose="02040503050406030204" pitchFamily="18" charset="0"/>
-                            <a:ea typeface="Cambria Math" panose="02040503050406030204" pitchFamily="18" charset="0"/>
-                          </a:rPr>
-                        </m:ctrlPr>
-                      </m:dPr>
-                      <m:e>
-                        <m:r>
-                          <a:rPr lang="en-US" sz="1200" i="1">
-                            <a:latin typeface="Cambria Math" panose="02040503050406030204" pitchFamily="18" charset="0"/>
-                            <a:ea typeface="Cambria Math" panose="02040503050406030204" pitchFamily="18" charset="0"/>
-                          </a:rPr>
-                          <m:t>𝑋</m:t>
-                        </m:r>
-                      </m:e>
-                    </m:d>
-                    <m:r>
-                      <a:rPr lang="en-US" sz="1200" i="1">
-                        <a:latin typeface="Cambria Math" panose="02040503050406030204" pitchFamily="18" charset="0"/>
-                        <a:ea typeface="Cambria Math" panose="02040503050406030204" pitchFamily="18" charset="0"/>
-                      </a:rPr>
-                      <m:t>=</m:t>
-                    </m:r>
-                    <m:nary>
-                      <m:naryPr>
-                        <m:chr m:val="∑"/>
-                        <m:supHide m:val="on"/>
-                        <m:ctrlPr>
-                          <a:rPr lang="en-US" sz="1200" i="1">
-                            <a:latin typeface="Cambria Math" panose="02040503050406030204" pitchFamily="18" charset="0"/>
-                            <a:ea typeface="Cambria Math" panose="02040503050406030204" pitchFamily="18" charset="0"/>
-                          </a:rPr>
-                        </m:ctrlPr>
-                      </m:naryPr>
-                      <m:sub>
-                        <m:r>
-                          <a:rPr lang="en-US" sz="1200" i="1">
-                            <a:latin typeface="Cambria Math" panose="02040503050406030204" pitchFamily="18" charset="0"/>
-                            <a:ea typeface="Cambria Math" panose="02040503050406030204" pitchFamily="18" charset="0"/>
-                          </a:rPr>
-                          <m:t>𝑥</m:t>
-                        </m:r>
-                      </m:sub>
-                      <m:sup/>
-                      <m:e>
-                        <m:r>
-                          <a:rPr lang="en-US" sz="1200" i="1">
-                            <a:latin typeface="Cambria Math" panose="02040503050406030204" pitchFamily="18" charset="0"/>
-                            <a:ea typeface="Cambria Math" panose="02040503050406030204" pitchFamily="18" charset="0"/>
-                          </a:rPr>
-                          <m:t>𝑝</m:t>
-                        </m:r>
-                        <m:d>
-                          <m:dPr>
-                            <m:ctrlPr>
-                              <a:rPr lang="en-US" sz="1200" i="1">
-                                <a:latin typeface="Cambria Math" panose="02040503050406030204" pitchFamily="18" charset="0"/>
-                                <a:ea typeface="Cambria Math" panose="02040503050406030204" pitchFamily="18" charset="0"/>
-                              </a:rPr>
-                            </m:ctrlPr>
-                          </m:dPr>
-                          <m:e>
-                            <m:r>
-                              <a:rPr lang="en-US" sz="1200" i="1">
-                                <a:latin typeface="Cambria Math" panose="02040503050406030204" pitchFamily="18" charset="0"/>
-                                <a:ea typeface="Cambria Math" panose="02040503050406030204" pitchFamily="18" charset="0"/>
-                              </a:rPr>
-                              <m:t>𝑥</m:t>
-                            </m:r>
-                          </m:e>
-                        </m:d>
-                        <m:r>
-                          <a:rPr lang="en-US" sz="1200" i="1">
-                            <a:latin typeface="Cambria Math" panose="02040503050406030204" pitchFamily="18" charset="0"/>
-                            <a:ea typeface="Cambria Math" panose="02040503050406030204" pitchFamily="18" charset="0"/>
-                          </a:rPr>
-                          <m:t>𝑥</m:t>
-                        </m:r>
-                      </m:e>
-                    </m:nary>
-                  </m:oMath>
-                </a14:m>
-                <a:endParaRPr lang="en-US" sz="1200" dirty="0">
-                  <a:ea typeface="Cambria Math" panose="02040503050406030204" pitchFamily="18" charset="0"/>
-                </a:endParaRPr>
-              </a:p>
-              <a:p>
-                <a14:m>
-                  <m:oMath xmlns:m="http://schemas.openxmlformats.org/officeDocument/2006/math">
-                    <m:sSub>
-                      <m:sSubPr>
-                        <m:ctrlPr>
-                          <a:rPr lang="en-US" sz="1200" i="1" dirty="0">
-                            <a:latin typeface="Cambria Math" panose="02040503050406030204" pitchFamily="18" charset="0"/>
-                          </a:rPr>
-                        </m:ctrlPr>
-                      </m:sSubPr>
-                      <m:e>
-                        <m:r>
-                          <m:rPr>
-                            <m:sty m:val="p"/>
-                          </m:rPr>
-                          <a:rPr lang="en-US" sz="1200" dirty="0">
-                            <a:latin typeface="Cambria Math" panose="02040503050406030204" pitchFamily="18" charset="0"/>
-                          </a:rPr>
-                          <m:t>argmax</m:t>
-                        </m:r>
-                      </m:e>
-                      <m:sub>
-                        <m:r>
-                          <m:rPr>
-                            <m:sty m:val="p"/>
-                          </m:rPr>
-                          <a:rPr lang="en-US" sz="1200" dirty="0">
-                            <a:latin typeface="Cambria Math" panose="02040503050406030204" pitchFamily="18" charset="0"/>
-                          </a:rPr>
-                          <m:t>a</m:t>
-                        </m:r>
-                      </m:sub>
-                    </m:sSub>
-                    <m:r>
-                      <a:rPr lang="en-US" sz="1200" dirty="0">
-                        <a:latin typeface="Cambria Math" panose="02040503050406030204" pitchFamily="18" charset="0"/>
-                      </a:rPr>
-                      <m:t> </m:t>
-                    </m:r>
-                    <m:r>
-                      <a:rPr lang="en-US" sz="1200" i="1" dirty="0">
-                        <a:latin typeface="Cambria Math" panose="02040503050406030204" pitchFamily="18" charset="0"/>
-                      </a:rPr>
-                      <m:t>𝑓</m:t>
-                    </m:r>
-                    <m:r>
-                      <a:rPr lang="en-US" sz="1200" i="1" dirty="0">
-                        <a:latin typeface="Cambria Math" panose="02040503050406030204" pitchFamily="18" charset="0"/>
-                      </a:rPr>
-                      <m:t>(</m:t>
-                    </m:r>
-                    <m:r>
-                      <a:rPr lang="en-US" sz="1200" i="1" dirty="0">
-                        <a:latin typeface="Cambria Math" panose="02040503050406030204" pitchFamily="18" charset="0"/>
-                      </a:rPr>
-                      <m:t>𝑎</m:t>
-                    </m:r>
-                    <m:r>
-                      <a:rPr lang="en-US" sz="1200" i="1" dirty="0">
-                        <a:latin typeface="Cambria Math" panose="02040503050406030204" pitchFamily="18" charset="0"/>
-                      </a:rPr>
-                      <m:t>)</m:t>
-                    </m:r>
-                  </m:oMath>
-                </a14:m>
-                <a:r>
-                  <a:rPr lang="en-US" sz="1200" dirty="0"/>
-                  <a:t> a value of action </a:t>
-                </a:r>
-                <a14:m>
-                  <m:oMath xmlns:m="http://schemas.openxmlformats.org/officeDocument/2006/math">
-                    <m:r>
-                      <a:rPr lang="en-US" sz="1200" i="1" dirty="0">
-                        <a:latin typeface="Cambria Math" panose="02040503050406030204" pitchFamily="18" charset="0"/>
-                      </a:rPr>
-                      <m:t>𝑎</m:t>
-                    </m:r>
-                  </m:oMath>
-                </a14:m>
-                <a:r>
-                  <a:rPr lang="en-US" sz="1200" dirty="0"/>
-                  <a:t> at which </a:t>
-                </a:r>
-                <a14:m>
-                  <m:oMath xmlns:m="http://schemas.openxmlformats.org/officeDocument/2006/math">
-                    <m:r>
-                      <a:rPr lang="en-US" sz="1200" i="1" dirty="0">
-                        <a:latin typeface="Cambria Math" panose="02040503050406030204" pitchFamily="18" charset="0"/>
-                      </a:rPr>
-                      <m:t>𝑓</m:t>
-                    </m:r>
-                    <m:r>
-                      <a:rPr lang="en-US" sz="1200" i="1" dirty="0">
-                        <a:latin typeface="Cambria Math" panose="02040503050406030204" pitchFamily="18" charset="0"/>
-                      </a:rPr>
-                      <m:t>(</m:t>
-                    </m:r>
-                    <m:r>
-                      <a:rPr lang="en-US" sz="1200" i="1" dirty="0">
-                        <a:latin typeface="Cambria Math" panose="02040503050406030204" pitchFamily="18" charset="0"/>
-                      </a:rPr>
-                      <m:t>𝑎</m:t>
-                    </m:r>
-                    <m:r>
-                      <a:rPr lang="en-US" sz="1200" i="1" dirty="0">
-                        <a:latin typeface="Cambria Math" panose="02040503050406030204" pitchFamily="18" charset="0"/>
-                      </a:rPr>
-                      <m:t>)</m:t>
-                    </m:r>
-                  </m:oMath>
-                </a14:m>
-                <a:r>
-                  <a:rPr lang="en-US" sz="1200" dirty="0"/>
-                  <a:t> takes its maximal value</a:t>
-                </a:r>
-              </a:p>
-            </p:txBody>
-          </p:sp>
-        </mc:Choice>
-        <mc:Fallback xmlns="">
-          <p:sp>
-            <p:nvSpPr>
-              <p:cNvPr id="10" name="TextBox 9">
-                <a:extLst>
-                  <a:ext uri="{FF2B5EF4-FFF2-40B4-BE49-F238E27FC236}">
-                    <a16:creationId xmlns:a16="http://schemas.microsoft.com/office/drawing/2014/main" id="{5CD475E5-BE3B-5594-57DC-46A17411F2F9}"/>
-                  </a:ext>
-                </a:extLst>
-              </p:cNvPr>
-              <p:cNvSpPr txBox="1">
-                <a:spLocks noRot="1" noChangeAspect="1" noMove="1" noResize="1" noEditPoints="1" noAdjustHandles="1" noChangeArrowheads="1" noChangeShapeType="1" noTextEdit="1"/>
-              </p:cNvSpPr>
-              <p:nvPr/>
-            </p:nvSpPr>
-            <p:spPr>
-              <a:xfrm>
-                <a:off x="822820" y="1124198"/>
-                <a:ext cx="5273179" cy="2308324"/>
-              </a:xfrm>
-              <a:prstGeom prst="rect">
-                <a:avLst/>
-              </a:prstGeom>
-              <a:blipFill>
-                <a:blip r:embed="rId3"/>
-                <a:stretch>
-                  <a:fillRect b="-9424"/>
-                </a:stretch>
-              </a:blipFill>
-            </p:spPr>
-            <p:txBody>
-              <a:bodyPr/>
-              <a:lstStyle/>
-              <a:p>
-                <a:r>
-                  <a:rPr lang="en-US">
-                    <a:noFill/>
-                  </a:rPr>
-                  <a:t> </a:t>
-                </a:r>
-              </a:p>
-            </p:txBody>
-          </p:sp>
-        </mc:Fallback>
-      </mc:AlternateContent>
-      <mc:AlternateContent xmlns:mc="http://schemas.openxmlformats.org/markup-compatibility/2006" xmlns:a14="http://schemas.microsoft.com/office/drawing/2010/main">
-        <mc:Choice Requires="a14">
-          <p:sp>
-            <p:nvSpPr>
-              <p:cNvPr id="11" name="Content Placeholder 2">
+              <p:cNvPr id="11" name="Content Placeholder 2" descr="MDP. s, s prime states. a an action. r a reward. S set of all (nonterminal) states, S to the power plus are all states. A(s) set of all actions available in state s. gamma discount-rate parameter. t discrete time step. T final time step of an episode (a.k.a. horizon). A sub t random variable for the action at time t. S sub t random variable for the state at time t. R sub t random variable for the reward at time t. p (s prime,r | s, a) probability of transition to state s prime and receiving reward r, from state s taking action a . p (s prime | s, a) probability of transition to state s prime fom state s taking action a . r(s,a) expected immediate reward from state s after action a. r(s,a,s prime) expected immediate reward from state s to s prime with action a. pi (a given s) probability of taking action a in state s under stochastic policy pi. pi (s) action taken in state s under deterministic policy pi">
                 <a:extLst>
                   <a:ext uri="{FF2B5EF4-FFF2-40B4-BE49-F238E27FC236}">
                     <a16:creationId xmlns:a16="http://schemas.microsoft.com/office/drawing/2014/main" id="{6F45EA4F-65F9-5141-0B09-C395CF9CA7A0}"/>
@@ -15394,7 +15459,7 @@
                     <m:sSup>
                       <m:sSupPr>
                         <m:ctrlPr>
-                          <a:rPr lang="en-US" sz="1200" b="0" i="1" dirty="0" smtClean="0">
+                          <a:rPr lang="en-US" sz="1200" i="1" dirty="0">
                             <a:latin typeface="Cambria Math" panose="02040503050406030204" pitchFamily="18" charset="0"/>
                             <a:ea typeface="Cambria Math" panose="02040503050406030204" pitchFamily="18" charset="0"/>
                           </a:rPr>
@@ -15559,7 +15624,7 @@
                     <m:sSub>
                       <m:sSubPr>
                         <m:ctrlPr>
-                          <a:rPr lang="en-US" sz="1200" b="0" i="1" dirty="0" smtClean="0">
+                          <a:rPr lang="en-US" sz="1200" i="1" dirty="0" smtClean="0">
                             <a:latin typeface="Cambria Math" panose="02040503050406030204" pitchFamily="18" charset="0"/>
                           </a:rPr>
                         </m:ctrlPr>
@@ -15611,7 +15676,7 @@
                     <m:sSub>
                       <m:sSubPr>
                         <m:ctrlPr>
-                          <a:rPr lang="en-US" sz="1200" b="0" i="1" dirty="0" smtClean="0">
+                          <a:rPr lang="en-US" sz="1200" i="1" dirty="0" smtClean="0">
                             <a:latin typeface="Cambria Math" panose="02040503050406030204" pitchFamily="18" charset="0"/>
                           </a:rPr>
                         </m:ctrlPr>
@@ -15663,7 +15728,7 @@
                     <m:sSub>
                       <m:sSubPr>
                         <m:ctrlPr>
-                          <a:rPr lang="en-US" sz="1200" b="0" i="1" dirty="0" smtClean="0">
+                          <a:rPr lang="en-US" sz="1200" i="1" dirty="0" smtClean="0">
                             <a:latin typeface="Cambria Math" panose="02040503050406030204" pitchFamily="18" charset="0"/>
                           </a:rPr>
                         </m:ctrlPr>
@@ -16418,7 +16483,7 @@
         <mc:Fallback xmlns="">
           <p:sp>
             <p:nvSpPr>
-              <p:cNvPr id="11" name="Content Placeholder 2">
+              <p:cNvPr id="11" name="Content Placeholder 2" descr="MDP. s, s prime states. a an action. r a reward. S set of all (nonterminal) states, S to the power plus are all states. A(s) set of all actions available in state s. gamma discount-rate parameter. t discrete time step. T final time step of an episode (a.k.a. horizon). A sub t random variable for the action at time t. S sub t random variable for the state at time t. R sub t random variable for the reward at time t. p (s prime,r | s, a) probability of transition to state s prime and receiving reward r, from state s taking action a . p (s prime | s, a) probability of transition to state s prime fom state s taking action a . r(s,a) expected immediate reward from state s after action a. r(s,a,s prime) expected immediate reward from state s to s prime with action a. pi (a given s) probability of taking action a in state s under stochastic policy pi. pi (s) action taken in state s under deterministic policy pi">
                 <a:extLst>
                   <a:ext uri="{FF2B5EF4-FFF2-40B4-BE49-F238E27FC236}">
                     <a16:creationId xmlns:a16="http://schemas.microsoft.com/office/drawing/2014/main" id="{6F45EA4F-65F9-5141-0B09-C395CF9CA7A0}"/>
@@ -16464,7 +16529,7 @@
         <mc:Choice Requires="a14">
           <p:sp>
             <p:nvSpPr>
-              <p:cNvPr id="4" name="Content Placeholder 2">
+              <p:cNvPr id="4" name="Content Placeholder 2" descr="Temporal Difference Learning. U sub t target for estimate at time t. delta sub t TD error">
                 <a:extLst>
                   <a:ext uri="{FF2B5EF4-FFF2-40B4-BE49-F238E27FC236}">
                     <a16:creationId xmlns:a16="http://schemas.microsoft.com/office/drawing/2014/main" id="{4C5E539A-F9A7-F959-ACD3-4ADE5900F587}"/>
@@ -16785,7 +16850,7 @@
                     <m:sSub>
                       <m:sSubPr>
                         <m:ctrlPr>
-                          <a:rPr lang="en-US" sz="1200" i="1" dirty="0">
+                          <a:rPr lang="en-US" sz="1200" b="0" i="1" dirty="0" smtClean="0">
                             <a:solidFill>
                               <a:schemeClr val="tx1"/>
                             </a:solidFill>
@@ -16833,7 +16898,7 @@
         <mc:Fallback xmlns="">
           <p:sp>
             <p:nvSpPr>
-              <p:cNvPr id="4" name="Content Placeholder 2">
+              <p:cNvPr id="4" name="Content Placeholder 2" descr="Temporal Difference Learning. U sub t target for estimate at time t. delta sub t TD error">
                 <a:extLst>
                   <a:ext uri="{FF2B5EF4-FFF2-40B4-BE49-F238E27FC236}">
                     <a16:creationId xmlns:a16="http://schemas.microsoft.com/office/drawing/2014/main" id="{4C5E539A-F9A7-F959-ACD3-4ADE5900F587}"/>
@@ -16946,6 +17011,9 @@
               <a:ext uri="{FF2B5EF4-FFF2-40B4-BE49-F238E27FC236}">
                 <a16:creationId xmlns:a16="http://schemas.microsoft.com/office/drawing/2014/main" id="{8230DEA1-85A2-8128-AB1F-6A511F14B1FC}"/>
               </a:ext>
+              <a:ext uri="{C183D7F6-B498-43B3-948B-1728B52AA6E4}">
+                <adec:decorative xmlns:adec="http://schemas.microsoft.com/office/drawing/2017/decorative" val="1"/>
+              </a:ext>
             </a:extLst>
           </p:cNvPr>
           <p:cNvSpPr>
@@ -17017,7 +17085,7 @@
           <a:p>
             <a:r>
               <a:rPr lang="en-US" dirty="0"/>
-              <a:t>Planning vs. Learning</a:t>
+              <a:t>Planning vs. Learning </a:t>
             </a:r>
           </a:p>
         </p:txBody>
@@ -17077,71 +17145,6 @@
       </p:sp>
       <p:sp>
         <p:nvSpPr>
-          <p:cNvPr id="3" name="Content Placeholder 2">
-            <a:extLst>
-              <a:ext uri="{FF2B5EF4-FFF2-40B4-BE49-F238E27FC236}">
-                <a16:creationId xmlns:a16="http://schemas.microsoft.com/office/drawing/2014/main" id="{75386ED9-B3B0-4E7E-C9D8-36D605A9CED5}"/>
-              </a:ext>
-            </a:extLst>
-          </p:cNvPr>
-          <p:cNvSpPr>
-            <a:spLocks noGrp="1"/>
-          </p:cNvSpPr>
-          <p:nvPr>
-            <p:ph sz="half" idx="2"/>
-          </p:nvPr>
-        </p:nvSpPr>
-        <p:spPr>
-          <a:xfrm>
-            <a:off x="839788" y="2142114"/>
-            <a:ext cx="5157787" cy="1325563"/>
-          </a:xfrm>
-        </p:spPr>
-        <p:style>
-          <a:lnRef idx="2">
-            <a:schemeClr val="accent2"/>
-          </a:lnRef>
-          <a:fillRef idx="1">
-            <a:schemeClr val="lt1"/>
-          </a:fillRef>
-          <a:effectRef idx="0">
-            <a:schemeClr val="accent2"/>
-          </a:effectRef>
-          <a:fontRef idx="minor">
-            <a:schemeClr val="dk1"/>
-          </a:fontRef>
-        </p:style>
-        <p:txBody>
-          <a:bodyPr>
-            <a:normAutofit fontScale="77500" lnSpcReduction="20000"/>
-          </a:bodyPr>
-          <a:lstStyle/>
-          <a:p>
-            <a:r>
-              <a:rPr lang="en-US" dirty="0"/>
-              <a:t>Requires knowledge of the MDP model.</a:t>
-            </a:r>
-          </a:p>
-          <a:p>
-            <a:r>
-              <a:rPr lang="en-US" dirty="0"/>
-              <a:t>Methods: Dynamic Programming, heuristic search</a:t>
-            </a:r>
-          </a:p>
-          <a:p>
-            <a:r>
-              <a:rPr lang="en-US" dirty="0"/>
-              <a:t>Use the known model to </a:t>
-            </a:r>
-            <a:r>
-              <a:rPr lang="en-US" b="1" dirty="0"/>
-              <a:t>plan</a:t>
-            </a:r>
-          </a:p>
-        </p:txBody>
-      </p:sp>
-      <p:sp>
-        <p:nvSpPr>
           <p:cNvPr id="5" name="Text Placeholder 4">
             <a:extLst>
               <a:ext uri="{FF2B5EF4-FFF2-40B4-BE49-F238E27FC236}">
@@ -17195,6 +17198,71 @@
       </p:sp>
       <p:sp>
         <p:nvSpPr>
+          <p:cNvPr id="3" name="Content Placeholder 2">
+            <a:extLst>
+              <a:ext uri="{FF2B5EF4-FFF2-40B4-BE49-F238E27FC236}">
+                <a16:creationId xmlns:a16="http://schemas.microsoft.com/office/drawing/2014/main" id="{75386ED9-B3B0-4E7E-C9D8-36D605A9CED5}"/>
+              </a:ext>
+            </a:extLst>
+          </p:cNvPr>
+          <p:cNvSpPr>
+            <a:spLocks noGrp="1"/>
+          </p:cNvSpPr>
+          <p:nvPr>
+            <p:ph sz="half" idx="2"/>
+          </p:nvPr>
+        </p:nvSpPr>
+        <p:spPr>
+          <a:xfrm>
+            <a:off x="839788" y="2142114"/>
+            <a:ext cx="5157787" cy="1325563"/>
+          </a:xfrm>
+        </p:spPr>
+        <p:style>
+          <a:lnRef idx="2">
+            <a:schemeClr val="accent2"/>
+          </a:lnRef>
+          <a:fillRef idx="1">
+            <a:schemeClr val="lt1"/>
+          </a:fillRef>
+          <a:effectRef idx="0">
+            <a:schemeClr val="accent2"/>
+          </a:effectRef>
+          <a:fontRef idx="minor">
+            <a:schemeClr val="dk1"/>
+          </a:fontRef>
+        </p:style>
+        <p:txBody>
+          <a:bodyPr>
+            <a:normAutofit fontScale="77500" lnSpcReduction="20000"/>
+          </a:bodyPr>
+          <a:lstStyle/>
+          <a:p>
+            <a:r>
+              <a:rPr lang="en-US" dirty="0"/>
+              <a:t>Requires knowledge of the MDP model.</a:t>
+            </a:r>
+          </a:p>
+          <a:p>
+            <a:r>
+              <a:rPr lang="en-US" dirty="0"/>
+              <a:t>Methods: Dynamic Programming, heuristic search</a:t>
+            </a:r>
+          </a:p>
+          <a:p>
+            <a:r>
+              <a:rPr lang="en-US" dirty="0"/>
+              <a:t>Use the known model to </a:t>
+            </a:r>
+            <a:r>
+              <a:rPr lang="en-US" b="1" dirty="0"/>
+              <a:t>plan</a:t>
+            </a:r>
+          </a:p>
+        </p:txBody>
+      </p:sp>
+      <p:sp>
+        <p:nvSpPr>
           <p:cNvPr id="6" name="Content Placeholder 5">
             <a:extLst>
               <a:ext uri="{FF2B5EF4-FFF2-40B4-BE49-F238E27FC236}">
@@ -17258,6 +17326,163 @@
           </a:p>
         </p:txBody>
       </p:sp>
+      <p:grpSp>
+        <p:nvGrpSpPr>
+          <p:cNvPr id="13" name="Group 12" descr="Diagram with labels: + use the MDP as a simulation model for Model-free RL.">
+            <a:extLst>
+              <a:ext uri="{FF2B5EF4-FFF2-40B4-BE49-F238E27FC236}">
+                <a16:creationId xmlns:a16="http://schemas.microsoft.com/office/drawing/2014/main" id="{E82F68D9-8E69-A250-D35E-1231A1F5B17C}"/>
+              </a:ext>
+            </a:extLst>
+          </p:cNvPr>
+          <p:cNvGrpSpPr/>
+          <p:nvPr/>
+        </p:nvGrpSpPr>
+        <p:grpSpPr>
+          <a:xfrm>
+            <a:off x="3118262" y="3594779"/>
+            <a:ext cx="5758626" cy="806207"/>
+            <a:chOff x="3118262" y="3594779"/>
+            <a:chExt cx="5758626" cy="806207"/>
+          </a:xfrm>
+        </p:grpSpPr>
+        <p:sp>
+          <p:nvSpPr>
+            <p:cNvPr id="8" name="TextBox 7">
+              <a:extLst>
+                <a:ext uri="{FF2B5EF4-FFF2-40B4-BE49-F238E27FC236}">
+                  <a16:creationId xmlns:a16="http://schemas.microsoft.com/office/drawing/2014/main" id="{E4675E7B-A0EA-C8F4-0666-CCA5988ACAC1}"/>
+                </a:ext>
+              </a:extLst>
+            </p:cNvPr>
+            <p:cNvSpPr txBox="1"/>
+            <p:nvPr/>
+          </p:nvSpPr>
+          <p:spPr>
+            <a:xfrm>
+              <a:off x="3118262" y="4031654"/>
+              <a:ext cx="5758626" cy="369332"/>
+            </a:xfrm>
+            <a:prstGeom prst="rect">
+              <a:avLst/>
+            </a:prstGeom>
+          </p:spPr>
+          <p:style>
+            <a:lnRef idx="2">
+              <a:schemeClr val="accent5">
+                <a:shade val="15000"/>
+              </a:schemeClr>
+            </a:lnRef>
+            <a:fillRef idx="1">
+              <a:schemeClr val="accent5"/>
+            </a:fillRef>
+            <a:effectRef idx="0">
+              <a:schemeClr val="accent5"/>
+            </a:effectRef>
+            <a:fontRef idx="minor">
+              <a:schemeClr val="lt1"/>
+            </a:fontRef>
+          </p:style>
+          <p:txBody>
+            <a:bodyPr wrap="square" rtlCol="0">
+              <a:spAutoFit/>
+            </a:bodyPr>
+            <a:lstStyle/>
+            <a:p>
+              <a:r>
+                <a:rPr lang="en-US" dirty="0"/>
+                <a:t>+ use the MDP as a simulation model for Model-free RL</a:t>
+              </a:r>
+            </a:p>
+          </p:txBody>
+        </p:sp>
+        <p:cxnSp>
+          <p:nvCxnSpPr>
+            <p:cNvPr id="10" name="Straight Arrow Connector 9">
+              <a:extLst>
+                <a:ext uri="{FF2B5EF4-FFF2-40B4-BE49-F238E27FC236}">
+                  <a16:creationId xmlns:a16="http://schemas.microsoft.com/office/drawing/2014/main" id="{2347AD2C-46E6-E6D8-9F53-949CED70E983}"/>
+                </a:ext>
+                <a:ext uri="{C183D7F6-B498-43B3-948B-1728B52AA6E4}">
+                  <adec:decorative xmlns:adec="http://schemas.microsoft.com/office/drawing/2017/decorative" val="1"/>
+                </a:ext>
+              </a:extLst>
+            </p:cNvPr>
+            <p:cNvCxnSpPr/>
+            <p:nvPr/>
+          </p:nvCxnSpPr>
+          <p:spPr>
+            <a:xfrm>
+              <a:off x="3762302" y="3594779"/>
+              <a:ext cx="711976" cy="383908"/>
+            </a:xfrm>
+            <a:prstGeom prst="straightConnector1">
+              <a:avLst/>
+            </a:prstGeom>
+            <a:ln>
+              <a:tailEnd type="triangle"/>
+            </a:ln>
+          </p:spPr>
+          <p:style>
+            <a:lnRef idx="2">
+              <a:schemeClr val="accent5"/>
+            </a:lnRef>
+            <a:fillRef idx="0">
+              <a:schemeClr val="accent5"/>
+            </a:fillRef>
+            <a:effectRef idx="1">
+              <a:schemeClr val="accent5"/>
+            </a:effectRef>
+            <a:fontRef idx="minor">
+              <a:schemeClr val="tx1"/>
+            </a:fontRef>
+          </p:style>
+        </p:cxnSp>
+        <p:cxnSp>
+          <p:nvCxnSpPr>
+            <p:cNvPr id="11" name="Straight Arrow Connector 10">
+              <a:extLst>
+                <a:ext uri="{FF2B5EF4-FFF2-40B4-BE49-F238E27FC236}">
+                  <a16:creationId xmlns:a16="http://schemas.microsoft.com/office/drawing/2014/main" id="{3C91D920-DB4A-1FD1-3DF5-018FDCA5C225}"/>
+                </a:ext>
+                <a:ext uri="{C183D7F6-B498-43B3-948B-1728B52AA6E4}">
+                  <adec:decorative xmlns:adec="http://schemas.microsoft.com/office/drawing/2017/decorative" val="1"/>
+                </a:ext>
+              </a:extLst>
+            </p:cNvPr>
+            <p:cNvCxnSpPr>
+              <a:cxnSpLocks/>
+            </p:cNvCxnSpPr>
+            <p:nvPr/>
+          </p:nvCxnSpPr>
+          <p:spPr>
+            <a:xfrm flipV="1">
+              <a:off x="7005748" y="3660782"/>
+              <a:ext cx="777122" cy="310924"/>
+            </a:xfrm>
+            <a:prstGeom prst="straightConnector1">
+              <a:avLst/>
+            </a:prstGeom>
+            <a:ln>
+              <a:tailEnd type="triangle"/>
+            </a:ln>
+          </p:spPr>
+          <p:style>
+            <a:lnRef idx="2">
+              <a:schemeClr val="accent5"/>
+            </a:lnRef>
+            <a:fillRef idx="0">
+              <a:schemeClr val="accent5"/>
+            </a:fillRef>
+            <a:effectRef idx="1">
+              <a:schemeClr val="accent5"/>
+            </a:effectRef>
+            <a:fontRef idx="minor">
+              <a:schemeClr val="tx1"/>
+            </a:fontRef>
+          </p:style>
+        </p:cxnSp>
+      </p:grpSp>
       <p:sp>
         <p:nvSpPr>
           <p:cNvPr id="7" name="Content Placeholder 2">
@@ -17482,157 +17707,6 @@
           </a:p>
         </p:txBody>
       </p:sp>
-      <p:grpSp>
-        <p:nvGrpSpPr>
-          <p:cNvPr id="13" name="Group 12">
-            <a:extLst>
-              <a:ext uri="{FF2B5EF4-FFF2-40B4-BE49-F238E27FC236}">
-                <a16:creationId xmlns:a16="http://schemas.microsoft.com/office/drawing/2014/main" id="{E82F68D9-8E69-A250-D35E-1231A1F5B17C}"/>
-              </a:ext>
-            </a:extLst>
-          </p:cNvPr>
-          <p:cNvGrpSpPr/>
-          <p:nvPr/>
-        </p:nvGrpSpPr>
-        <p:grpSpPr>
-          <a:xfrm>
-            <a:off x="3118262" y="3594779"/>
-            <a:ext cx="5758626" cy="806207"/>
-            <a:chOff x="3118262" y="3594779"/>
-            <a:chExt cx="5758626" cy="806207"/>
-          </a:xfrm>
-        </p:grpSpPr>
-        <p:sp>
-          <p:nvSpPr>
-            <p:cNvPr id="8" name="TextBox 7">
-              <a:extLst>
-                <a:ext uri="{FF2B5EF4-FFF2-40B4-BE49-F238E27FC236}">
-                  <a16:creationId xmlns:a16="http://schemas.microsoft.com/office/drawing/2014/main" id="{E4675E7B-A0EA-C8F4-0666-CCA5988ACAC1}"/>
-                </a:ext>
-              </a:extLst>
-            </p:cNvPr>
-            <p:cNvSpPr txBox="1"/>
-            <p:nvPr/>
-          </p:nvSpPr>
-          <p:spPr>
-            <a:xfrm>
-              <a:off x="3118262" y="4031654"/>
-              <a:ext cx="5758626" cy="369332"/>
-            </a:xfrm>
-            <a:prstGeom prst="rect">
-              <a:avLst/>
-            </a:prstGeom>
-          </p:spPr>
-          <p:style>
-            <a:lnRef idx="2">
-              <a:schemeClr val="accent5">
-                <a:shade val="15000"/>
-              </a:schemeClr>
-            </a:lnRef>
-            <a:fillRef idx="1">
-              <a:schemeClr val="accent5"/>
-            </a:fillRef>
-            <a:effectRef idx="0">
-              <a:schemeClr val="accent5"/>
-            </a:effectRef>
-            <a:fontRef idx="minor">
-              <a:schemeClr val="lt1"/>
-            </a:fontRef>
-          </p:style>
-          <p:txBody>
-            <a:bodyPr wrap="square" rtlCol="0">
-              <a:spAutoFit/>
-            </a:bodyPr>
-            <a:lstStyle/>
-            <a:p>
-              <a:r>
-                <a:rPr lang="en-US" dirty="0"/>
-                <a:t>+ use the MDP as a simulation model for Model-free RL</a:t>
-              </a:r>
-            </a:p>
-          </p:txBody>
-        </p:sp>
-        <p:cxnSp>
-          <p:nvCxnSpPr>
-            <p:cNvPr id="10" name="Straight Arrow Connector 9">
-              <a:extLst>
-                <a:ext uri="{FF2B5EF4-FFF2-40B4-BE49-F238E27FC236}">
-                  <a16:creationId xmlns:a16="http://schemas.microsoft.com/office/drawing/2014/main" id="{2347AD2C-46E6-E6D8-9F53-949CED70E983}"/>
-                </a:ext>
-              </a:extLst>
-            </p:cNvPr>
-            <p:cNvCxnSpPr/>
-            <p:nvPr/>
-          </p:nvCxnSpPr>
-          <p:spPr>
-            <a:xfrm>
-              <a:off x="3762302" y="3594779"/>
-              <a:ext cx="711976" cy="383908"/>
-            </a:xfrm>
-            <a:prstGeom prst="straightConnector1">
-              <a:avLst/>
-            </a:prstGeom>
-            <a:ln>
-              <a:tailEnd type="triangle"/>
-            </a:ln>
-          </p:spPr>
-          <p:style>
-            <a:lnRef idx="2">
-              <a:schemeClr val="accent5"/>
-            </a:lnRef>
-            <a:fillRef idx="0">
-              <a:schemeClr val="accent5"/>
-            </a:fillRef>
-            <a:effectRef idx="1">
-              <a:schemeClr val="accent5"/>
-            </a:effectRef>
-            <a:fontRef idx="minor">
-              <a:schemeClr val="tx1"/>
-            </a:fontRef>
-          </p:style>
-        </p:cxnSp>
-        <p:cxnSp>
-          <p:nvCxnSpPr>
-            <p:cNvPr id="11" name="Straight Arrow Connector 10">
-              <a:extLst>
-                <a:ext uri="{FF2B5EF4-FFF2-40B4-BE49-F238E27FC236}">
-                  <a16:creationId xmlns:a16="http://schemas.microsoft.com/office/drawing/2014/main" id="{3C91D920-DB4A-1FD1-3DF5-018FDCA5C225}"/>
-                </a:ext>
-              </a:extLst>
-            </p:cNvPr>
-            <p:cNvCxnSpPr>
-              <a:cxnSpLocks/>
-            </p:cNvCxnSpPr>
-            <p:nvPr/>
-          </p:nvCxnSpPr>
-          <p:spPr>
-            <a:xfrm flipV="1">
-              <a:off x="7005748" y="3660782"/>
-              <a:ext cx="777122" cy="310924"/>
-            </a:xfrm>
-            <a:prstGeom prst="straightConnector1">
-              <a:avLst/>
-            </a:prstGeom>
-            <a:ln>
-              <a:tailEnd type="triangle"/>
-            </a:ln>
-          </p:spPr>
-          <p:style>
-            <a:lnRef idx="2">
-              <a:schemeClr val="accent5"/>
-            </a:lnRef>
-            <a:fillRef idx="0">
-              <a:schemeClr val="accent5"/>
-            </a:fillRef>
-            <a:effectRef idx="1">
-              <a:schemeClr val="accent5"/>
-            </a:effectRef>
-            <a:fontRef idx="minor">
-              <a:schemeClr val="tx1"/>
-            </a:fontRef>
-          </p:style>
-        </p:cxnSp>
-      </p:grpSp>
     </p:spTree>
     <p:extLst>
       <p:ext uri="{BB962C8B-B14F-4D97-AF65-F5344CB8AC3E}">
@@ -17818,7 +17892,7 @@
         <mc:Choice Requires="a14">
           <p:sp>
             <p:nvSpPr>
-              <p:cNvPr id="8" name="Content Placeholder 7">
+              <p:cNvPr id="8" name="Content Placeholder 7" descr="Model of the environment: Anything the agent can use to predict the outcome of actions (e.g., next state and reward). Models can be:. Distribution models: Specify the complete distribution of all possible outcomes. For finite MDPs this is the function p (s prime,r | s,a). Used by dynamic programming methods for planning. Sample models: Simulate the real environment by producing one outcome for an action. The outcome needs to be a valid sample from the distribution model. Are typically easier to create. Can be used for MC and TD methods for learning. This is called trajectory sampling. Notes:. The real environment can be seen as a physically represented model with sequential sampling access. Model-free methods often use sample models when accessing the real environment is slow, expensive or dangerous">
                 <a:extLst>
                   <a:ext uri="{FF2B5EF4-FFF2-40B4-BE49-F238E27FC236}">
                     <a16:creationId xmlns:a16="http://schemas.microsoft.com/office/drawing/2014/main" id="{D1E8B6AB-5A2F-3677-9E00-F7B344478115}"/>
@@ -18065,7 +18139,7 @@
         <mc:Fallback xmlns="">
           <p:sp>
             <p:nvSpPr>
-              <p:cNvPr id="8" name="Content Placeholder 7">
+              <p:cNvPr id="8" name="Content Placeholder 7" descr="Model of the environment: Anything the agent can use to predict the outcome of actions (e.g., next state and reward). Models can be:. Distribution models: Specify the complete distribution of all possible outcomes. For finite MDPs this is the function p (s prime,r | s,a). Used by dynamic programming methods for planning. Sample models: Simulate the real environment by producing one outcome for an action. The outcome needs to be a valid sample from the distribution model. Are typically easier to create. Can be used for MC and TD methods for learning. This is called trajectory sampling. Notes:. The real environment can be seen as a physically represented model with sequential sampling access. Model-free methods often use sample models when accessing the real environment is slow, expensive or dangerous">
                 <a:extLst>
                   <a:ext uri="{FF2B5EF4-FFF2-40B4-BE49-F238E27FC236}">
                     <a16:creationId xmlns:a16="http://schemas.microsoft.com/office/drawing/2014/main" id="{D1E8B6AB-5A2F-3677-9E00-F7B344478115}"/>
@@ -18462,36 +18536,6 @@
           <a:chExt cx="0" cy="0"/>
         </a:xfrm>
       </p:grpSpPr>
-      <p:pic>
-        <p:nvPicPr>
-          <p:cNvPr id="5" name="Picture 4">
-            <a:extLst>
-              <a:ext uri="{FF2B5EF4-FFF2-40B4-BE49-F238E27FC236}">
-                <a16:creationId xmlns:a16="http://schemas.microsoft.com/office/drawing/2014/main" id="{13EC5060-ED9D-A7CB-C624-3FD02CBD1E3A}"/>
-              </a:ext>
-            </a:extLst>
-          </p:cNvPr>
-          <p:cNvPicPr>
-            <a:picLocks noChangeAspect="1"/>
-          </p:cNvPicPr>
-          <p:nvPr/>
-        </p:nvPicPr>
-        <p:blipFill>
-          <a:blip r:embed="rId2"/>
-          <a:stretch>
-            <a:fillRect/>
-          </a:stretch>
-        </p:blipFill>
-        <p:spPr>
-          <a:xfrm>
-            <a:off x="7398961" y="1720207"/>
-            <a:ext cx="4326058" cy="3417586"/>
-          </a:xfrm>
-          <a:prstGeom prst="rect">
-            <a:avLst/>
-          </a:prstGeom>
-        </p:spPr>
-      </p:pic>
       <p:sp>
         <p:nvSpPr>
           <p:cNvPr id="2" name="Title 1">
@@ -18522,11 +18566,11 @@
           </a:p>
         </p:txBody>
       </p:sp>
-      <mc:AlternateContent xmlns:mc="http://schemas.openxmlformats.org/markup-compatibility/2006" xmlns:a14="http://schemas.microsoft.com/office/drawing/2010/main">
-        <mc:Choice Requires="a14">
+      <mc:AlternateContent xmlns:mc="http://schemas.openxmlformats.org/markup-compatibility/2006">
+        <mc:Choice xmlns:a14="http://schemas.microsoft.com/office/drawing/2010/main" Requires="a14">
           <p:sp>
             <p:nvSpPr>
-              <p:cNvPr id="3" name="Content Placeholder 2">
+              <p:cNvPr id="3" name="Content Placeholder 2" descr="Direct RL is model-free Learning:. Use sampled experience directly to improve the value function/policy. E.g., via one-step Q-learning. Model Learning and Planning:. Real experience is also used to learn a model. E.g., by recording for each S sub t,A sub t to R sub t plus 1, S sub t plus 1 to estimate p hat (S sub t plus 1,R sub t plus 1, given S sub t,A sub t). The model can be used for planning to improve the value function/policy. E.g., by sampling from the model to update the Q-values. Advantage: Model learning and planning makes the approach much more sample efficient. Experience is not just used once but retained in the model">
                 <a:extLst>
                   <a:ext uri="{FF2B5EF4-FFF2-40B4-BE49-F238E27FC236}">
                     <a16:creationId xmlns:a16="http://schemas.microsoft.com/office/drawing/2014/main" id="{B972B9BF-6244-6E3F-DF65-DFA52504F8C0}"/>
@@ -18542,7 +18586,7 @@
             </p:nvSpPr>
             <p:spPr>
               <a:xfrm>
-                <a:off x="838199" y="1397332"/>
+                <a:off x="503151" y="1397332"/>
                 <a:ext cx="6895810" cy="4486938"/>
               </a:xfrm>
             </p:spPr>
@@ -18752,7 +18796,7 @@
                       <m:accPr>
                         <m:chr m:val="̂"/>
                         <m:ctrlPr>
-                          <a:rPr lang="en-US" i="1" smtClean="0">
+                          <a:rPr lang="en-US" b="0" i="1" smtClean="0">
                             <a:latin typeface="Cambria Math" panose="02040503050406030204" pitchFamily="18" charset="0"/>
                           </a:rPr>
                         </m:ctrlPr>
@@ -18947,10 +18991,10 @@
             </p:txBody>
           </p:sp>
         </mc:Choice>
-        <mc:Fallback xmlns="">
+        <mc:Fallback>
           <p:sp>
             <p:nvSpPr>
-              <p:cNvPr id="3" name="Content Placeholder 2">
+              <p:cNvPr id="3" name="Content Placeholder 2" descr="Direct RL is model-free Learning:. Use sampled experience directly to improve the value function/policy. E.g., via one-step Q-learning. Model Learning and Planning:. Real experience is also used to learn a model. E.g., by recording for each S sub t,A sub t to R sub t plus 1, S sub t plus 1 to estimate p hat (S sub t plus 1,R sub t plus 1, given S sub t,A sub t). The model can be used for planning to improve the value function/policy. E.g., by sampling from the model to update the Q-values. Advantage: Model learning and planning makes the approach much more sample efficient. Experience is not just used once but retained in the model">
                 <a:extLst>
                   <a:ext uri="{FF2B5EF4-FFF2-40B4-BE49-F238E27FC236}">
                     <a16:creationId xmlns:a16="http://schemas.microsoft.com/office/drawing/2014/main" id="{B972B9BF-6244-6E3F-DF65-DFA52504F8C0}"/>
@@ -18966,13 +19010,13 @@
             </p:nvSpPr>
             <p:spPr>
               <a:xfrm>
-                <a:off x="838199" y="1397332"/>
+                <a:off x="503151" y="1397332"/>
                 <a:ext cx="6895810" cy="4486938"/>
               </a:xfrm>
               <a:blipFill>
-                <a:blip r:embed="rId3"/>
+                <a:blip r:embed="rId2"/>
                 <a:stretch>
-                  <a:fillRect l="-1325" t="-2989" r="-1590" b="-2582"/>
+                  <a:fillRect l="-1287" t="-2817" r="-1654" b="-2535"/>
                 </a:stretch>
               </a:blipFill>
             </p:spPr>
@@ -18991,6 +19035,36 @@
           </p:sp>
         </mc:Fallback>
       </mc:AlternateContent>
+      <p:pic>
+        <p:nvPicPr>
+          <p:cNvPr id="5" name="Picture 4" descr="Dyna cycle (Sutton and Barto Figure 8.1): acting turns the value/policy into experience; experience improves the value/policy directly (direct RL) and is also used for model learning; the model is then used for planning, which improves the value/policy again.">
+            <a:extLst>
+              <a:ext uri="{FF2B5EF4-FFF2-40B4-BE49-F238E27FC236}">
+                <a16:creationId xmlns:a16="http://schemas.microsoft.com/office/drawing/2014/main" id="{13EC5060-ED9D-A7CB-C624-3FD02CBD1E3A}"/>
+              </a:ext>
+            </a:extLst>
+          </p:cNvPr>
+          <p:cNvPicPr>
+            <a:picLocks noChangeAspect="1"/>
+          </p:cNvPicPr>
+          <p:nvPr/>
+        </p:nvPicPr>
+        <p:blipFill>
+          <a:blip r:embed="rId3"/>
+          <a:stretch>
+            <a:fillRect/>
+          </a:stretch>
+        </p:blipFill>
+        <p:spPr>
+          <a:xfrm>
+            <a:off x="7398961" y="1720207"/>
+            <a:ext cx="4326058" cy="3417586"/>
+          </a:xfrm>
+          <a:prstGeom prst="rect">
+            <a:avLst/>
+          </a:prstGeom>
+        </p:spPr>
+      </p:pic>
     </p:spTree>
     <p:extLst>
       <p:ext uri="{BB962C8B-B14F-4D97-AF65-F5344CB8AC3E}">
@@ -19324,7 +19398,7 @@
       </p:sp>
       <p:pic>
         <p:nvPicPr>
-          <p:cNvPr id="12" name="Picture 11">
+          <p:cNvPr id="12" name="Picture 11" descr="Dyna cycle (Sutton and Barto Figure 8.1): acting turns the value/policy into experience; experience improves the value/policy directly (direct RL) and is also used for model learning; the model is then used for planning, which improves the value/policy again.">
             <a:extLst>
               <a:ext uri="{FF2B5EF4-FFF2-40B4-BE49-F238E27FC236}">
                 <a16:creationId xmlns:a16="http://schemas.microsoft.com/office/drawing/2014/main" id="{F592F7C4-E638-E7F0-C86E-4207F5C5A0A3}"/>
@@ -19354,7 +19428,7 @@
       </p:pic>
       <p:grpSp>
         <p:nvGrpSpPr>
-          <p:cNvPr id="11" name="Group 10">
+          <p:cNvPr id="11" name="Group 10" descr="Algorithm box: Tabular Dyna-Q. Initialize Q(s, a) and Model(s, a) for all s in S and a in A(s). Loop forever: (a) S ← current (nonterminal) state; (b) A ← epsilon-greedy(S, Q); (c) Take action A; observe resultant reward, R, and state, S′; (d) Q(S, A) ← Q(S, A) + alpha [R + gamma max over a of Q(S′, a) − Q(S, A)]; (e) Model(S, A) ← R, S′ (assuming deterministic environment); (f) Loop repeat n times: S ← random previously observed state; A ← random action previously taken in S; R, S′ ← Model(S, A); Q(S, A) ← Q(S, A) + alpha [R + gamma max over a of Q(S′, a) − Q(S, A)]. Labels: Direct RL: Q-Learning; Improve Q using the model (Planning).">
             <a:extLst>
               <a:ext uri="{FF2B5EF4-FFF2-40B4-BE49-F238E27FC236}">
                 <a16:creationId xmlns:a16="http://schemas.microsoft.com/office/drawing/2014/main" id="{4937AB9C-6AA5-A7EB-5688-445A6D78D962}"/>
@@ -19376,7 +19450,7 @@
         </p:grpSpPr>
         <p:pic>
           <p:nvPicPr>
-            <p:cNvPr id="5" name="Picture 4">
+            <p:cNvPr id="5" name="Picture 4" descr="Algorithm box: Tabular Dyna-Q. Initialize Q(s, a) and Model(s, a) for all s in S and a in A(s). Loop forever: (a) S ← current (nonterminal) state; (b) A ← epsilon-greedy(S, Q); (c) Take action A; observe resultant reward, R, and state, S′; (d) Q(S, A) ← Q(S, A) + alpha [R + gamma max over a of Q(S′, a) − Q(S, A)]; (e) Model(S, A) ← R, S′ (assuming deterministic environment); (f) Loop repeat n times: S ← random previously observed state; A ← random action previously taken in S; R, S′ ← Model(S, A); Q(S, A) ← Q(S, A) + alpha [R + gamma max over a of Q(S′, a) − Q(S, A)].">
               <a:extLst>
                 <a:ext uri="{FF2B5EF4-FFF2-40B4-BE49-F238E27FC236}">
                   <a16:creationId xmlns:a16="http://schemas.microsoft.com/office/drawing/2014/main" id="{5CB7BD3E-BFBF-D93E-B3A8-87CE35EB3E73}"/>
@@ -19463,6 +19537,9 @@
               <a:extLst>
                 <a:ext uri="{FF2B5EF4-FFF2-40B4-BE49-F238E27FC236}">
                   <a16:creationId xmlns:a16="http://schemas.microsoft.com/office/drawing/2014/main" id="{34714BA1-C236-3E36-3CE9-E93B07A696BD}"/>
+                </a:ext>
+                <a:ext uri="{C183D7F6-B498-43B3-948B-1728B52AA6E4}">
+                  <adec:decorative xmlns:adec="http://schemas.microsoft.com/office/drawing/2017/decorative" val="1"/>
                 </a:ext>
               </a:extLst>
             </p:cNvPr>
@@ -19556,7 +19633,7 @@
         <mc:Choice Requires="a14">
           <p:sp>
             <p:nvSpPr>
-              <p:cNvPr id="3" name="Speech Bubble: Rectangle with Corners Rounded 2">
+              <p:cNvPr id="3" name="Speech Bubble: Rectangle with Corners Rounded 2" descr="Model learning: learn p(s prime,r given s,a)">
                 <a:extLst>
                   <a:ext uri="{FF2B5EF4-FFF2-40B4-BE49-F238E27FC236}">
                     <a16:creationId xmlns:a16="http://schemas.microsoft.com/office/drawing/2014/main" id="{8DF5D581-CEB0-AD06-59A9-C85B97349AB2}"/>
@@ -19695,7 +19772,7 @@
         <mc:Fallback xmlns="">
           <p:sp>
             <p:nvSpPr>
-              <p:cNvPr id="3" name="Speech Bubble: Rectangle with Corners Rounded 2">
+              <p:cNvPr id="3" name="Speech Bubble: Rectangle with Corners Rounded 2" descr="Model learning: learn p(s prime,r given s,a)">
                 <a:extLst>
                   <a:ext uri="{FF2B5EF4-FFF2-40B4-BE49-F238E27FC236}">
                     <a16:creationId xmlns:a16="http://schemas.microsoft.com/office/drawing/2014/main" id="{8DF5D581-CEB0-AD06-59A9-C85B97349AB2}"/>

--- a/slides/Lecture_Chapter08.pptx
+++ b/slides/Lecture_Chapter08.pptx
@@ -330,7 +330,7 @@
           <a:p>
             <a:fld id="{3E22BF2E-04DA-469E-97C5-BB68A0368813}" type="datetimeFigureOut">
               <a:rPr lang="en-US" smtClean="0"/>
-              <a:t>10/15/26</a:t>
+              <a:t>10/19/2026</a:t>
             </a:fld>
             <a:endParaRPr lang="en-US"/>
           </a:p>
@@ -528,7 +528,7 @@
           <a:p>
             <a:fld id="{3E22BF2E-04DA-469E-97C5-BB68A0368813}" type="datetimeFigureOut">
               <a:rPr lang="en-US" smtClean="0"/>
-              <a:t>10/15/26</a:t>
+              <a:t>10/19/2026</a:t>
             </a:fld>
             <a:endParaRPr lang="en-US"/>
           </a:p>
@@ -736,7 +736,7 @@
           <a:p>
             <a:fld id="{3E22BF2E-04DA-469E-97C5-BB68A0368813}" type="datetimeFigureOut">
               <a:rPr lang="en-US" smtClean="0"/>
-              <a:t>10/15/26</a:t>
+              <a:t>10/19/2026</a:t>
             </a:fld>
             <a:endParaRPr lang="en-US"/>
           </a:p>
@@ -944,7 +944,7 @@
           <a:p>
             <a:fld id="{3E22BF2E-04DA-469E-97C5-BB68A0368813}" type="datetimeFigureOut">
               <a:rPr lang="en-US" smtClean="0"/>
-              <a:t>10/15/26</a:t>
+              <a:t>10/19/2026</a:t>
             </a:fld>
             <a:endParaRPr lang="en-US"/>
           </a:p>
@@ -1219,7 +1219,7 @@
           <a:p>
             <a:fld id="{3E22BF2E-04DA-469E-97C5-BB68A0368813}" type="datetimeFigureOut">
               <a:rPr lang="en-US" smtClean="0"/>
-              <a:t>10/15/26</a:t>
+              <a:t>10/19/2026</a:t>
             </a:fld>
             <a:endParaRPr lang="en-US"/>
           </a:p>
@@ -1484,7 +1484,7 @@
           <a:p>
             <a:fld id="{3E22BF2E-04DA-469E-97C5-BB68A0368813}" type="datetimeFigureOut">
               <a:rPr lang="en-US" smtClean="0"/>
-              <a:t>10/15/26</a:t>
+              <a:t>10/19/2026</a:t>
             </a:fld>
             <a:endParaRPr lang="en-US"/>
           </a:p>
@@ -1896,7 +1896,7 @@
           <a:p>
             <a:fld id="{3E22BF2E-04DA-469E-97C5-BB68A0368813}" type="datetimeFigureOut">
               <a:rPr lang="en-US" smtClean="0"/>
-              <a:t>10/15/26</a:t>
+              <a:t>10/19/2026</a:t>
             </a:fld>
             <a:endParaRPr lang="en-US"/>
           </a:p>
@@ -2037,7 +2037,7 @@
           <a:p>
             <a:fld id="{3E22BF2E-04DA-469E-97C5-BB68A0368813}" type="datetimeFigureOut">
               <a:rPr lang="en-US" smtClean="0"/>
-              <a:t>10/15/26</a:t>
+              <a:t>10/19/2026</a:t>
             </a:fld>
             <a:endParaRPr lang="en-US"/>
           </a:p>
@@ -2150,7 +2150,7 @@
           <a:p>
             <a:fld id="{3E22BF2E-04DA-469E-97C5-BB68A0368813}" type="datetimeFigureOut">
               <a:rPr lang="en-US" smtClean="0"/>
-              <a:t>10/15/26</a:t>
+              <a:t>10/19/2026</a:t>
             </a:fld>
             <a:endParaRPr lang="en-US"/>
           </a:p>
@@ -2461,7 +2461,7 @@
           <a:p>
             <a:fld id="{3E22BF2E-04DA-469E-97C5-BB68A0368813}" type="datetimeFigureOut">
               <a:rPr lang="en-US" smtClean="0"/>
-              <a:t>10/15/26</a:t>
+              <a:t>10/19/2026</a:t>
             </a:fld>
             <a:endParaRPr lang="en-US"/>
           </a:p>
@@ -2749,7 +2749,7 @@
           <a:p>
             <a:fld id="{3E22BF2E-04DA-469E-97C5-BB68A0368813}" type="datetimeFigureOut">
               <a:rPr lang="en-US" smtClean="0"/>
-              <a:t>10/15/26</a:t>
+              <a:t>10/19/2026</a:t>
             </a:fld>
             <a:endParaRPr lang="en-US"/>
           </a:p>
@@ -2990,7 +2990,7 @@
           <a:p>
             <a:fld id="{3E22BF2E-04DA-469E-97C5-BB68A0368813}" type="datetimeFigureOut">
               <a:rPr lang="en-US" smtClean="0"/>
-              <a:t>10/15/26</a:t>
+              <a:t>10/19/2026</a:t>
             </a:fld>
             <a:endParaRPr lang="en-US"/>
           </a:p>
@@ -5811,172 +5811,8 @@
           <a:chExt cx="0" cy="0"/>
         </a:xfrm>
       </p:grpSpPr>
-      <p:sp>
-        <p:nvSpPr>
-          <p:cNvPr id="8" name="Speech Bubble: Rectangle with Corners Rounded 7">
-            <a:extLst>
-              <a:ext uri="{FF2B5EF4-FFF2-40B4-BE49-F238E27FC236}">
-                <a16:creationId xmlns:a16="http://schemas.microsoft.com/office/drawing/2014/main" id="{9CBFCEF7-963A-4187-6A15-D0E256203C8E}"/>
-              </a:ext>
-              <a:ext uri="{C183D7F6-B498-43B3-948B-1728B52AA6E4}">
-                <adec:decorative xmlns:adec="http://schemas.microsoft.com/office/drawing/2017/decorative" val="1"/>
-              </a:ext>
-            </a:extLst>
-          </p:cNvPr>
-          <p:cNvSpPr/>
-          <p:nvPr/>
-        </p:nvSpPr>
-        <p:spPr>
-          <a:xfrm>
-            <a:off x="8214611" y="5561579"/>
-            <a:ext cx="3247086" cy="359863"/>
-          </a:xfrm>
-          <a:prstGeom prst="wedgeRoundRectCallout">
-            <a:avLst>
-              <a:gd name="adj1" fmla="val 37593"/>
-              <a:gd name="adj2" fmla="val -381818"/>
-              <a:gd name="adj3" fmla="val 16667"/>
-            </a:avLst>
-          </a:prstGeom>
-        </p:spPr>
-        <p:style>
-          <a:lnRef idx="2">
-            <a:schemeClr val="accent1">
-              <a:shade val="15000"/>
-            </a:schemeClr>
-          </a:lnRef>
-          <a:fillRef idx="1">
-            <a:schemeClr val="accent1"/>
-          </a:fillRef>
-          <a:effectRef idx="0">
-            <a:schemeClr val="accent1"/>
-          </a:effectRef>
-          <a:fontRef idx="minor">
-            <a:schemeClr val="lt1"/>
-          </a:fontRef>
-        </p:style>
-        <p:txBody>
-          <a:bodyPr rtlCol="0" anchor="ctr"/>
-          <a:lstStyle/>
-          <a:p>
-            <a:pPr algn="ctr"/>
-            <a:r>
-              <a:rPr lang="en-US" dirty="0"/>
-              <a:t>2. Estimate leaf node values</a:t>
-            </a:r>
-          </a:p>
-        </p:txBody>
-      </p:sp>
-      <p:sp>
-        <p:nvSpPr>
-          <p:cNvPr id="10" name="Arrow: Down 9">
-            <a:extLst>
-              <a:ext uri="{FF2B5EF4-FFF2-40B4-BE49-F238E27FC236}">
-                <a16:creationId xmlns:a16="http://schemas.microsoft.com/office/drawing/2014/main" id="{E4EFD103-2544-1279-0631-58B4728E2AD2}"/>
-              </a:ext>
-              <a:ext uri="{C183D7F6-B498-43B3-948B-1728B52AA6E4}">
-                <adec:decorative xmlns:adec="http://schemas.microsoft.com/office/drawing/2017/decorative" val="1"/>
-              </a:ext>
-            </a:extLst>
-          </p:cNvPr>
-          <p:cNvSpPr/>
-          <p:nvPr/>
-        </p:nvSpPr>
-        <p:spPr>
-          <a:xfrm flipV="1">
-            <a:off x="11154283" y="2248525"/>
-            <a:ext cx="781777" cy="2764966"/>
-          </a:xfrm>
-          <a:prstGeom prst="downArrow">
-            <a:avLst/>
-          </a:prstGeom>
-        </p:spPr>
-        <p:style>
-          <a:lnRef idx="2">
-            <a:schemeClr val="accent1">
-              <a:shade val="15000"/>
-            </a:schemeClr>
-          </a:lnRef>
-          <a:fillRef idx="1">
-            <a:schemeClr val="accent1"/>
-          </a:fillRef>
-          <a:effectRef idx="0">
-            <a:schemeClr val="accent1"/>
-          </a:effectRef>
-          <a:fontRef idx="minor">
-            <a:schemeClr val="lt1"/>
-          </a:fontRef>
-        </p:style>
-        <p:txBody>
-          <a:bodyPr vert="vert" rtlCol="0" anchor="ctr"/>
-          <a:lstStyle/>
-          <a:p>
-            <a:pPr algn="ctr"/>
-            <a:r>
-              <a:rPr lang="en-US" dirty="0"/>
-              <a:t>3. backup</a:t>
-            </a:r>
-          </a:p>
-        </p:txBody>
-      </p:sp>
-      <p:sp>
-        <p:nvSpPr>
-          <p:cNvPr id="11" name="Speech Bubble: Rectangle with Corners Rounded 10">
-            <a:extLst>
-              <a:ext uri="{FF2B5EF4-FFF2-40B4-BE49-F238E27FC236}">
-                <a16:creationId xmlns:a16="http://schemas.microsoft.com/office/drawing/2014/main" id="{25F441F9-26AE-4857-0003-6C4FFDACE6EE}"/>
-              </a:ext>
-              <a:ext uri="{C183D7F6-B498-43B3-948B-1728B52AA6E4}">
-                <adec:decorative xmlns:adec="http://schemas.microsoft.com/office/drawing/2017/decorative" val="1"/>
-              </a:ext>
-            </a:extLst>
-          </p:cNvPr>
-          <p:cNvSpPr/>
-          <p:nvPr/>
-        </p:nvSpPr>
-        <p:spPr>
-          <a:xfrm>
-            <a:off x="7689758" y="901563"/>
-            <a:ext cx="2938744" cy="665202"/>
-          </a:xfrm>
-          <a:prstGeom prst="wedgeRoundRectCallout">
-            <a:avLst>
-              <a:gd name="adj1" fmla="val -29245"/>
-              <a:gd name="adj2" fmla="val 141648"/>
-              <a:gd name="adj3" fmla="val 16667"/>
-            </a:avLst>
-          </a:prstGeom>
-        </p:spPr>
-        <p:style>
-          <a:lnRef idx="2">
-            <a:schemeClr val="accent1">
-              <a:shade val="15000"/>
-            </a:schemeClr>
-          </a:lnRef>
-          <a:fillRef idx="1">
-            <a:schemeClr val="accent1"/>
-          </a:fillRef>
-          <a:effectRef idx="0">
-            <a:schemeClr val="accent1"/>
-          </a:effectRef>
-          <a:fontRef idx="minor">
-            <a:schemeClr val="lt1"/>
-          </a:fontRef>
-        </p:style>
-        <p:txBody>
-          <a:bodyPr rtlCol="0" anchor="ctr"/>
-          <a:lstStyle/>
-          <a:p>
-            <a:pPr algn="ctr"/>
-            <a:r>
-              <a:rPr lang="en-US" dirty="0"/>
-              <a:t>4. Pick best action leasing to largest Q-value</a:t>
-            </a:r>
-          </a:p>
-        </p:txBody>
-      </p:sp>
-      <mc:AlternateContent xmlns:mc="http://schemas.openxmlformats.org/markup-compatibility/2006">
-        <mc:Choice xmlns:a14="http://schemas.microsoft.com/office/drawing/2010/main" Requires="a14">
+      <mc:AlternateContent xmlns:mc="http://schemas.openxmlformats.org/markup-compatibility/2006" xmlns:a14="http://schemas.microsoft.com/office/drawing/2010/main">
+        <mc:Choice Requires="a14">
           <p:sp>
             <p:nvSpPr>
               <p:cNvPr id="2" name="TextBox 1">
@@ -6026,7 +5862,7 @@
             </p:txBody>
           </p:sp>
         </mc:Choice>
-        <mc:Fallback>
+        <mc:Fallback xmlns="">
           <p:sp>
             <p:nvSpPr>
               <p:cNvPr id="2" name="TextBox 1">
@@ -6074,8 +5910,8 @@
           </p:sp>
         </mc:Fallback>
       </mc:AlternateContent>
-      <mc:AlternateContent xmlns:mc="http://schemas.openxmlformats.org/markup-compatibility/2006">
-        <mc:Choice xmlns:a14="http://schemas.microsoft.com/office/drawing/2010/main" Requires="a14">
+      <mc:AlternateContent xmlns:mc="http://schemas.openxmlformats.org/markup-compatibility/2006" xmlns:a14="http://schemas.microsoft.com/office/drawing/2010/main">
+        <mc:Choice Requires="a14">
           <p:sp>
             <p:nvSpPr>
               <p:cNvPr id="6" name="TextBox 5">
@@ -6125,7 +5961,7 @@
             </p:txBody>
           </p:sp>
         </mc:Choice>
-        <mc:Fallback>
+        <mc:Fallback xmlns="">
           <p:sp>
             <p:nvSpPr>
               <p:cNvPr id="6" name="TextBox 5">
@@ -6173,8 +6009,8 @@
           </p:sp>
         </mc:Fallback>
       </mc:AlternateContent>
-      <mc:AlternateContent xmlns:mc="http://schemas.openxmlformats.org/markup-compatibility/2006">
-        <mc:Choice xmlns:a14="http://schemas.microsoft.com/office/drawing/2010/main" Requires="a14">
+      <mc:AlternateContent xmlns:mc="http://schemas.openxmlformats.org/markup-compatibility/2006" xmlns:a14="http://schemas.microsoft.com/office/drawing/2010/main">
+        <mc:Choice Requires="a14">
           <p:sp>
             <p:nvSpPr>
               <p:cNvPr id="9" name="TextBox 8">
@@ -6224,7 +6060,7 @@
             </p:txBody>
           </p:sp>
         </mc:Choice>
-        <mc:Fallback>
+        <mc:Fallback xmlns="">
           <p:sp>
             <p:nvSpPr>
               <p:cNvPr id="9" name="TextBox 8">
@@ -6272,8 +6108,8 @@
           </p:sp>
         </mc:Fallback>
       </mc:AlternateContent>
-      <mc:AlternateContent xmlns:mc="http://schemas.openxmlformats.org/markup-compatibility/2006">
-        <mc:Choice xmlns:a14="http://schemas.microsoft.com/office/drawing/2010/main" Requires="a14">
+      <mc:AlternateContent xmlns:mc="http://schemas.openxmlformats.org/markup-compatibility/2006" xmlns:a14="http://schemas.microsoft.com/office/drawing/2010/main">
+        <mc:Choice Requires="a14">
           <p:sp>
             <p:nvSpPr>
               <p:cNvPr id="12" name="TextBox 11">
@@ -6323,7 +6159,7 @@
             </p:txBody>
           </p:sp>
         </mc:Choice>
-        <mc:Fallback>
+        <mc:Fallback xmlns="">
           <p:sp>
             <p:nvSpPr>
               <p:cNvPr id="12" name="TextBox 11">
@@ -6371,8 +6207,8 @@
           </p:sp>
         </mc:Fallback>
       </mc:AlternateContent>
-      <mc:AlternateContent xmlns:mc="http://schemas.openxmlformats.org/markup-compatibility/2006">
-        <mc:Choice xmlns:a14="http://schemas.microsoft.com/office/drawing/2010/main" Requires="a14">
+      <mc:AlternateContent xmlns:mc="http://schemas.openxmlformats.org/markup-compatibility/2006" xmlns:a14="http://schemas.microsoft.com/office/drawing/2010/main">
+        <mc:Choice Requires="a14">
           <p:sp>
             <p:nvSpPr>
               <p:cNvPr id="13" name="TextBox 12">
@@ -6422,7 +6258,7 @@
             </p:txBody>
           </p:sp>
         </mc:Choice>
-        <mc:Fallback>
+        <mc:Fallback xmlns="">
           <p:sp>
             <p:nvSpPr>
               <p:cNvPr id="13" name="TextBox 12">
@@ -6487,8 +6323,8 @@
         </p:nvSpPr>
         <p:spPr>
           <a:xfrm>
-            <a:off x="3238995" y="6217463"/>
-            <a:ext cx="6593669" cy="369332"/>
+            <a:off x="2261937" y="6238975"/>
+            <a:ext cx="8447133" cy="369332"/>
           </a:xfrm>
           <a:prstGeom prst="rect">
             <a:avLst/>
@@ -6523,7 +6359,7 @@
             </a:r>
             <a:r>
               <a:rPr lang="en-US" dirty="0"/>
-              <a:t>: This is like heuristic (cut-off) min-max search for games.</a:t>
+              <a:t>: This is like heuristic cut-off min-max search for games (without min steps).</a:t>
             </a:r>
           </a:p>
         </p:txBody>
@@ -6556,8 +6392,8 @@
           </a:p>
         </p:txBody>
       </p:sp>
-      <mc:AlternateContent xmlns:mc="http://schemas.openxmlformats.org/markup-compatibility/2006" xmlns:a14="http://schemas.microsoft.com/office/drawing/2010/main">
-        <mc:Choice Requires="a14">
+      <mc:AlternateContent xmlns:mc="http://schemas.openxmlformats.org/markup-compatibility/2006">
+        <mc:Choice xmlns:a14="http://schemas.microsoft.com/office/drawing/2010/main" Requires="a14">
           <p:sp>
             <p:nvSpPr>
               <p:cNvPr id="5" name="Content Placeholder 4" descr="At decision time in state s :. Consider a large tree of possible continuations (trajectories of a given length) for the current state. Apply an approx. value function to the states in leaf nodes. Back values towards the current state (using max). Similar to n -step estimation, but it always uses the best and not the observed action. Choose the best next action for the current state">
@@ -6577,7 +6413,7 @@
             <p:spPr>
               <a:xfrm>
                 <a:off x="838200" y="1397330"/>
-                <a:ext cx="4656364" cy="4583745"/>
+                <a:ext cx="4401946" cy="4583745"/>
               </a:xfrm>
             </p:spPr>
             <p:txBody>
@@ -6693,7 +6529,7 @@
             </p:txBody>
           </p:sp>
         </mc:Choice>
-        <mc:Fallback xmlns="">
+        <mc:Fallback>
           <p:sp>
             <p:nvSpPr>
               <p:cNvPr id="5" name="Content Placeholder 4" descr="At decision time in state s :. Consider a large tree of possible continuations (trajectories of a given length) for the current state. Apply an approx. value function to the states in leaf nodes. Back values towards the current state (using max). Similar to n -step estimation, but it always uses the best and not the observed action. Choose the best next action for the current state">
@@ -6713,12 +6549,12 @@
             <p:spPr>
               <a:xfrm>
                 <a:off x="838200" y="1397330"/>
-                <a:ext cx="4656364" cy="4583745"/>
+                <a:ext cx="4401946" cy="4583745"/>
               </a:xfrm>
               <a:blipFill>
                 <a:blip r:embed="rId7"/>
                 <a:stretch>
-                  <a:fillRect l="-1442" t="-2261"/>
+                  <a:fillRect l="-1524" t="-2261" r="-2493"/>
                 </a:stretch>
               </a:blipFill>
             </p:spPr>
@@ -6737,36 +6573,477 @@
           </p:sp>
         </mc:Fallback>
       </mc:AlternateContent>
-      <p:pic>
-        <p:nvPicPr>
-          <p:cNvPr id="7" name="Picture 6" descr="Heuristic search as a sequence of one-step updates (Sutton and Barto Figure 8.9): a game tree below the current state, with the backed-up part outlined in blue and numbered 1 to 10. Updates 1 and 2 back up leaf values into their parents, 3 combines them, 4 to 9 do the same in the right subtree, and 10 finally backs everything up to the root, so values flow from the leaves of the selected subtree up to the current state.">
+      <p:grpSp>
+        <p:nvGrpSpPr>
+          <p:cNvPr id="20" name="Group 19" descr="Heuristic search as a sequence of one-step updates (Sutton and Barto Figure 8.9): a game tree below the current state, with the backed-up part outlined in blue and numbered 1 to 10. Updates 1 and 2 back up leaf values into their parents, 3 combines them, 4 to 9 do the same in the right subtree, and 10 finally backs everything up to the root, so values flow from the leaves of the selected subtree up to the current state.">
             <a:extLst>
               <a:ext uri="{FF2B5EF4-FFF2-40B4-BE49-F238E27FC236}">
-                <a16:creationId xmlns:a16="http://schemas.microsoft.com/office/drawing/2014/main" id="{3A6356EF-E592-3AC7-97BD-5A89144E7797}"/>
+                <a16:creationId xmlns:a16="http://schemas.microsoft.com/office/drawing/2014/main" id="{4C9B5AB0-5AC8-093E-F8EA-1DEB70CBA60A}"/>
               </a:ext>
             </a:extLst>
           </p:cNvPr>
-          <p:cNvPicPr>
-            <a:picLocks noChangeAspect="1"/>
-          </p:cNvPicPr>
+          <p:cNvGrpSpPr/>
           <p:nvPr/>
-        </p:nvPicPr>
-        <p:blipFill>
-          <a:blip r:embed="rId8"/>
-          <a:stretch>
-            <a:fillRect/>
-          </a:stretch>
-        </p:blipFill>
+        </p:nvGrpSpPr>
+        <p:grpSpPr>
+          <a:xfrm>
+            <a:off x="5155917" y="1891481"/>
+            <a:ext cx="6456730" cy="3397731"/>
+            <a:chOff x="5155917" y="1891481"/>
+            <a:chExt cx="6456730" cy="3397731"/>
+          </a:xfrm>
+        </p:grpSpPr>
+        <p:pic>
+          <p:nvPicPr>
+            <p:cNvPr id="7" name="Picture 6" descr="Heuristic search as a sequence of one-step updates (Sutton and Barto Figure 8.9): a game tree below the current state, with the backed-up part outlined in blue and numbered 1 to 10. Updates 1 and 2 back up leaf values into their parents, 3 combines them, 4 to 9 do the same in the right subtree, and 10 finally backs everything up to the root, so values flow from the leaves of the selected subtree up to the current state.">
+              <a:extLst>
+                <a:ext uri="{FF2B5EF4-FFF2-40B4-BE49-F238E27FC236}">
+                  <a16:creationId xmlns:a16="http://schemas.microsoft.com/office/drawing/2014/main" id="{3A6356EF-E592-3AC7-97BD-5A89144E7797}"/>
+                </a:ext>
+              </a:extLst>
+            </p:cNvPr>
+            <p:cNvPicPr>
+              <a:picLocks noChangeAspect="1"/>
+            </p:cNvPicPr>
+            <p:nvPr/>
+          </p:nvPicPr>
+          <p:blipFill>
+            <a:blip r:embed="rId8"/>
+            <a:stretch>
+              <a:fillRect/>
+            </a:stretch>
+          </p:blipFill>
+          <p:spPr>
+            <a:xfrm>
+              <a:off x="5155917" y="2076147"/>
+              <a:ext cx="6456730" cy="3213065"/>
+            </a:xfrm>
+            <a:prstGeom prst="rect">
+              <a:avLst/>
+            </a:prstGeom>
+          </p:spPr>
+        </p:pic>
+        <mc:AlternateContent xmlns:mc="http://schemas.openxmlformats.org/markup-compatibility/2006">
+          <mc:Choice xmlns:a14="http://schemas.microsoft.com/office/drawing/2010/main" Requires="a14">
+            <p:sp>
+              <p:nvSpPr>
+                <p:cNvPr id="17" name="TextBox 16">
+                  <a:extLst>
+                    <a:ext uri="{FF2B5EF4-FFF2-40B4-BE49-F238E27FC236}">
+                      <a16:creationId xmlns:a16="http://schemas.microsoft.com/office/drawing/2014/main" id="{FC38C926-3B9B-D7C0-01B0-BA7175B7B538}"/>
+                    </a:ext>
+                  </a:extLst>
+                </p:cNvPr>
+                <p:cNvSpPr txBox="1"/>
+                <p:nvPr/>
+              </p:nvSpPr>
+              <p:spPr>
+                <a:xfrm>
+                  <a:off x="7887680" y="1891481"/>
+                  <a:ext cx="226502" cy="369332"/>
+                </a:xfrm>
+                <a:prstGeom prst="rect">
+                  <a:avLst/>
+                </a:prstGeom>
+                <a:noFill/>
+              </p:spPr>
+              <p:txBody>
+                <a:bodyPr wrap="square" rtlCol="0">
+                  <a:spAutoFit/>
+                </a:bodyPr>
+                <a:lstStyle/>
+                <a:p>
+                  <a14:m>
+                    <m:oMathPara xmlns:m="http://schemas.openxmlformats.org/officeDocument/2006/math">
+                      <m:oMath>
+                        <m:r>
+                          <a:rPr lang="en-US" b="0" i="1" smtClean="0">
+                            <a:latin typeface="Cambria Math" panose="02040503050406030204" pitchFamily="18" charset="0"/>
+                          </a:rPr>
+                          <m:t>𝑠</m:t>
+                        </m:r>
+                      </m:oMath>
+                    </m:oMathPara>
+                  </a14:m>
+                  <a:endParaRPr lang="en-US" dirty="0"/>
+                </a:p>
+              </p:txBody>
+            </p:sp>
+          </mc:Choice>
+          <mc:Fallback>
+            <p:sp>
+              <p:nvSpPr>
+                <p:cNvPr id="17" name="TextBox 16">
+                  <a:extLst>
+                    <a:ext uri="{FF2B5EF4-FFF2-40B4-BE49-F238E27FC236}">
+                      <a16:creationId xmlns:a16="http://schemas.microsoft.com/office/drawing/2014/main" id="{FC38C926-3B9B-D7C0-01B0-BA7175B7B538}"/>
+                    </a:ext>
+                  </a:extLst>
+                </p:cNvPr>
+                <p:cNvSpPr txBox="1">
+                  <a:spLocks noRot="1" noChangeAspect="1" noMove="1" noResize="1" noEditPoints="1" noAdjustHandles="1" noChangeArrowheads="1" noChangeShapeType="1" noTextEdit="1"/>
+                </p:cNvSpPr>
+                <p:nvPr/>
+              </p:nvSpPr>
+              <p:spPr>
+                <a:xfrm>
+                  <a:off x="7887680" y="1891481"/>
+                  <a:ext cx="226502" cy="369332"/>
+                </a:xfrm>
+                <a:prstGeom prst="rect">
+                  <a:avLst/>
+                </a:prstGeom>
+                <a:blipFill>
+                  <a:blip r:embed="rId9"/>
+                  <a:stretch>
+                    <a:fillRect r="-16216"/>
+                  </a:stretch>
+                </a:blipFill>
+              </p:spPr>
+              <p:txBody>
+                <a:bodyPr/>
+                <a:lstStyle/>
+                <a:p>
+                  <a:r>
+                    <a:rPr lang="en-US">
+                      <a:noFill/>
+                    </a:rPr>
+                    <a:t> </a:t>
+                  </a:r>
+                </a:p>
+              </p:txBody>
+            </p:sp>
+          </mc:Fallback>
+        </mc:AlternateContent>
+        <mc:AlternateContent xmlns:mc="http://schemas.openxmlformats.org/markup-compatibility/2006">
+          <mc:Choice xmlns:a14="http://schemas.microsoft.com/office/drawing/2010/main" Requires="a14">
+            <p:sp>
+              <p:nvSpPr>
+                <p:cNvPr id="19" name="TextBox 18">
+                  <a:extLst>
+                    <a:ext uri="{FF2B5EF4-FFF2-40B4-BE49-F238E27FC236}">
+                      <a16:creationId xmlns:a16="http://schemas.microsoft.com/office/drawing/2014/main" id="{59654E4C-66EC-FF3C-D8B5-3C5B584D87BB}"/>
+                    </a:ext>
+                  </a:extLst>
+                </p:cNvPr>
+                <p:cNvSpPr txBox="1"/>
+                <p:nvPr/>
+              </p:nvSpPr>
+              <p:spPr>
+                <a:xfrm>
+                  <a:off x="7851445" y="2269065"/>
+                  <a:ext cx="618113" cy="369332"/>
+                </a:xfrm>
+                <a:prstGeom prst="rect">
+                  <a:avLst/>
+                </a:prstGeom>
+                <a:noFill/>
+              </p:spPr>
+              <p:txBody>
+                <a:bodyPr wrap="square" rtlCol="0">
+                  <a:spAutoFit/>
+                </a:bodyPr>
+                <a:lstStyle/>
+                <a:p>
+                  <a:pPr/>
+                  <a14:m>
+                    <m:oMathPara xmlns:m="http://schemas.openxmlformats.org/officeDocument/2006/math">
+                      <m:oMath>
+                        <m:func>
+                          <m:funcPr>
+                            <m:ctrlPr>
+                              <a:rPr lang="en-US" b="0" i="0" smtClean="0">
+                                <a:latin typeface="Cambria Math" panose="02040503050406030204" pitchFamily="18" charset="0"/>
+                              </a:rPr>
+                            </m:ctrlPr>
+                          </m:funcPr>
+                          <m:fName>
+                            <m:r>
+                              <m:rPr>
+                                <m:sty m:val="p"/>
+                              </m:rPr>
+                              <a:rPr lang="en-US" b="0" i="0" smtClean="0">
+                                <a:latin typeface="Cambria Math" panose="02040503050406030204" pitchFamily="18" charset="0"/>
+                              </a:rPr>
+                              <m:t>max</m:t>
+                            </m:r>
+                          </m:fName>
+                          <m:e/>
+                        </m:func>
+                      </m:oMath>
+                    </m:oMathPara>
+                  </a14:m>
+                  <a:endParaRPr lang="en-US" dirty="0"/>
+                </a:p>
+              </p:txBody>
+            </p:sp>
+          </mc:Choice>
+          <mc:Fallback>
+            <p:sp>
+              <p:nvSpPr>
+                <p:cNvPr id="19" name="TextBox 18">
+                  <a:extLst>
+                    <a:ext uri="{FF2B5EF4-FFF2-40B4-BE49-F238E27FC236}">
+                      <a16:creationId xmlns:a16="http://schemas.microsoft.com/office/drawing/2014/main" id="{59654E4C-66EC-FF3C-D8B5-3C5B584D87BB}"/>
+                    </a:ext>
+                  </a:extLst>
+                </p:cNvPr>
+                <p:cNvSpPr txBox="1">
+                  <a:spLocks noRot="1" noChangeAspect="1" noMove="1" noResize="1" noEditPoints="1" noAdjustHandles="1" noChangeArrowheads="1" noChangeShapeType="1" noTextEdit="1"/>
+                </p:cNvSpPr>
+                <p:nvPr/>
+              </p:nvSpPr>
+              <p:spPr>
+                <a:xfrm>
+                  <a:off x="7851445" y="2269065"/>
+                  <a:ext cx="618113" cy="369332"/>
+                </a:xfrm>
+                <a:prstGeom prst="rect">
+                  <a:avLst/>
+                </a:prstGeom>
+                <a:blipFill>
+                  <a:blip r:embed="rId10"/>
+                  <a:stretch>
+                    <a:fillRect/>
+                  </a:stretch>
+                </a:blipFill>
+              </p:spPr>
+              <p:txBody>
+                <a:bodyPr/>
+                <a:lstStyle/>
+                <a:p>
+                  <a:r>
+                    <a:rPr lang="en-US">
+                      <a:noFill/>
+                    </a:rPr>
+                    <a:t> </a:t>
+                  </a:r>
+                </a:p>
+              </p:txBody>
+            </p:sp>
+          </mc:Fallback>
+        </mc:AlternateContent>
+      </p:grpSp>
+      <p:sp>
+        <p:nvSpPr>
+          <p:cNvPr id="11" name="Speech Bubble: Rectangle with Corners Rounded 10">
+            <a:extLst>
+              <a:ext uri="{FF2B5EF4-FFF2-40B4-BE49-F238E27FC236}">
+                <a16:creationId xmlns:a16="http://schemas.microsoft.com/office/drawing/2014/main" id="{25F441F9-26AE-4857-0003-6C4FFDACE6EE}"/>
+              </a:ext>
+              <a:ext uri="{C183D7F6-B498-43B3-948B-1728B52AA6E4}">
+                <adec:decorative xmlns:adec="http://schemas.microsoft.com/office/drawing/2017/decorative" val="1"/>
+              </a:ext>
+            </a:extLst>
+          </p:cNvPr>
+          <p:cNvSpPr/>
+          <p:nvPr/>
+        </p:nvSpPr>
         <p:spPr>
           <a:xfrm>
-            <a:off x="5155917" y="2076147"/>
-            <a:ext cx="6456730" cy="3213065"/>
+            <a:off x="7689758" y="901563"/>
+            <a:ext cx="2938744" cy="665202"/>
           </a:xfrm>
-          <a:prstGeom prst="rect">
+          <a:prstGeom prst="wedgeRoundRectCallout">
+            <a:avLst>
+              <a:gd name="adj1" fmla="val -29245"/>
+              <a:gd name="adj2" fmla="val 141648"/>
+              <a:gd name="adj3" fmla="val 16667"/>
+            </a:avLst>
+          </a:prstGeom>
+        </p:spPr>
+        <p:style>
+          <a:lnRef idx="2">
+            <a:schemeClr val="accent1">
+              <a:shade val="15000"/>
+            </a:schemeClr>
+          </a:lnRef>
+          <a:fillRef idx="1">
+            <a:schemeClr val="accent1"/>
+          </a:fillRef>
+          <a:effectRef idx="0">
+            <a:schemeClr val="accent1"/>
+          </a:effectRef>
+          <a:fontRef idx="minor">
+            <a:schemeClr val="lt1"/>
+          </a:fontRef>
+        </p:style>
+        <p:txBody>
+          <a:bodyPr rtlCol="0" anchor="ctr"/>
+          <a:lstStyle/>
+          <a:p>
+            <a:pPr algn="ctr"/>
+            <a:r>
+              <a:rPr lang="en-US" dirty="0"/>
+              <a:t>4. Pick best action leasing to largest Q-value</a:t>
+            </a:r>
+          </a:p>
+        </p:txBody>
+      </p:sp>
+      <p:sp>
+        <p:nvSpPr>
+          <p:cNvPr id="15" name="Speech Bubble: Rectangle with Corners Rounded 14">
+            <a:extLst>
+              <a:ext uri="{FF2B5EF4-FFF2-40B4-BE49-F238E27FC236}">
+                <a16:creationId xmlns:a16="http://schemas.microsoft.com/office/drawing/2014/main" id="{3CF325ED-ECB7-C278-B4CB-F2AFB77914C8}"/>
+              </a:ext>
+              <a:ext uri="{C183D7F6-B498-43B3-948B-1728B52AA6E4}">
+                <adec:decorative xmlns:adec="http://schemas.microsoft.com/office/drawing/2017/decorative" val="1"/>
+              </a:ext>
+            </a:extLst>
+          </p:cNvPr>
+          <p:cNvSpPr/>
+          <p:nvPr/>
+        </p:nvSpPr>
+        <p:spPr>
+          <a:xfrm>
+            <a:off x="6273570" y="1803015"/>
+            <a:ext cx="423868" cy="392234"/>
+          </a:xfrm>
+          <a:prstGeom prst="wedgeRoundRectCallout">
+            <a:avLst>
+              <a:gd name="adj1" fmla="val 122160"/>
+              <a:gd name="adj2" fmla="val 137370"/>
+              <a:gd name="adj3" fmla="val 16667"/>
+            </a:avLst>
+          </a:prstGeom>
+        </p:spPr>
+        <p:style>
+          <a:lnRef idx="2">
+            <a:schemeClr val="accent1">
+              <a:shade val="15000"/>
+            </a:schemeClr>
+          </a:lnRef>
+          <a:fillRef idx="1">
+            <a:schemeClr val="accent1"/>
+          </a:fillRef>
+          <a:effectRef idx="0">
+            <a:schemeClr val="accent1"/>
+          </a:effectRef>
+          <a:fontRef idx="minor">
+            <a:schemeClr val="lt1"/>
+          </a:fontRef>
+        </p:style>
+        <p:txBody>
+          <a:bodyPr rtlCol="0" anchor="ctr"/>
+          <a:lstStyle/>
+          <a:p>
+            <a:pPr algn="ctr"/>
+            <a:r>
+              <a:rPr lang="en-US" dirty="0"/>
+              <a:t>1.</a:t>
+            </a:r>
+          </a:p>
+        </p:txBody>
+      </p:sp>
+      <p:sp>
+        <p:nvSpPr>
+          <p:cNvPr id="8" name="Speech Bubble: Rectangle with Corners Rounded 7">
+            <a:extLst>
+              <a:ext uri="{FF2B5EF4-FFF2-40B4-BE49-F238E27FC236}">
+                <a16:creationId xmlns:a16="http://schemas.microsoft.com/office/drawing/2014/main" id="{9CBFCEF7-963A-4187-6A15-D0E256203C8E}"/>
+              </a:ext>
+              <a:ext uri="{C183D7F6-B498-43B3-948B-1728B52AA6E4}">
+                <adec:decorative xmlns:adec="http://schemas.microsoft.com/office/drawing/2017/decorative" val="1"/>
+              </a:ext>
+            </a:extLst>
+          </p:cNvPr>
+          <p:cNvSpPr/>
+          <p:nvPr/>
+        </p:nvSpPr>
+        <p:spPr>
+          <a:xfrm>
+            <a:off x="8214611" y="5561579"/>
+            <a:ext cx="3247086" cy="359863"/>
+          </a:xfrm>
+          <a:prstGeom prst="wedgeRoundRectCallout">
+            <a:avLst>
+              <a:gd name="adj1" fmla="val 37593"/>
+              <a:gd name="adj2" fmla="val -381818"/>
+              <a:gd name="adj3" fmla="val 16667"/>
+            </a:avLst>
+          </a:prstGeom>
+        </p:spPr>
+        <p:style>
+          <a:lnRef idx="2">
+            <a:schemeClr val="accent1">
+              <a:shade val="15000"/>
+            </a:schemeClr>
+          </a:lnRef>
+          <a:fillRef idx="1">
+            <a:schemeClr val="accent1"/>
+          </a:fillRef>
+          <a:effectRef idx="0">
+            <a:schemeClr val="accent1"/>
+          </a:effectRef>
+          <a:fontRef idx="minor">
+            <a:schemeClr val="lt1"/>
+          </a:fontRef>
+        </p:style>
+        <p:txBody>
+          <a:bodyPr rtlCol="0" anchor="ctr"/>
+          <a:lstStyle/>
+          <a:p>
+            <a:pPr algn="ctr"/>
+            <a:r>
+              <a:rPr lang="en-US" dirty="0"/>
+              <a:t>2. Estimate leaf node values</a:t>
+            </a:r>
+          </a:p>
+        </p:txBody>
+      </p:sp>
+      <p:sp>
+        <p:nvSpPr>
+          <p:cNvPr id="10" name="Arrow: Down 9">
+            <a:extLst>
+              <a:ext uri="{FF2B5EF4-FFF2-40B4-BE49-F238E27FC236}">
+                <a16:creationId xmlns:a16="http://schemas.microsoft.com/office/drawing/2014/main" id="{E4EFD103-2544-1279-0631-58B4728E2AD2}"/>
+              </a:ext>
+              <a:ext uri="{C183D7F6-B498-43B3-948B-1728B52AA6E4}">
+                <adec:decorative xmlns:adec="http://schemas.microsoft.com/office/drawing/2017/decorative" val="1"/>
+              </a:ext>
+            </a:extLst>
+          </p:cNvPr>
+          <p:cNvSpPr/>
+          <p:nvPr/>
+        </p:nvSpPr>
+        <p:spPr>
+          <a:xfrm flipV="1">
+            <a:off x="11154283" y="2248525"/>
+            <a:ext cx="781777" cy="2764966"/>
+          </a:xfrm>
+          <a:prstGeom prst="downArrow">
             <a:avLst/>
           </a:prstGeom>
         </p:spPr>
-      </p:pic>
+        <p:style>
+          <a:lnRef idx="2">
+            <a:schemeClr val="accent1">
+              <a:shade val="15000"/>
+            </a:schemeClr>
+          </a:lnRef>
+          <a:fillRef idx="1">
+            <a:schemeClr val="accent1"/>
+          </a:fillRef>
+          <a:effectRef idx="0">
+            <a:schemeClr val="accent1"/>
+          </a:effectRef>
+          <a:fontRef idx="minor">
+            <a:schemeClr val="lt1"/>
+          </a:fontRef>
+        </p:style>
+        <p:txBody>
+          <a:bodyPr vert="vert" rtlCol="0" anchor="ctr"/>
+          <a:lstStyle/>
+          <a:p>
+            <a:pPr algn="ctr"/>
+            <a:r>
+              <a:rPr lang="en-US" dirty="0"/>
+              <a:t>3. backup</a:t>
+            </a:r>
+          </a:p>
+        </p:txBody>
+      </p:sp>
     </p:spTree>
     <p:extLst>
       <p:ext uri="{BB962C8B-B14F-4D97-AF65-F5344CB8AC3E}">
@@ -6789,9 +7066,6 @@
                     <p:cTn id="3" fill="hold">
                       <p:stCondLst>
                         <p:cond delay="indefinite"/>
-                        <p:cond evt="onBegin" delay="0">
-                          <p:tn val="2"/>
-                        </p:cond>
                       </p:stCondLst>
                       <p:childTnLst>
                         <p:par>
@@ -6801,7 +7075,7 @@
                             </p:stCondLst>
                             <p:childTnLst>
                               <p:par>
-                                <p:cTn id="5" presetID="1" presetClass="entr" presetSubtype="0" fill="hold" grpId="0" nodeType="withEffect">
+                                <p:cTn id="5" presetID="1" presetClass="entr" presetSubtype="0" fill="hold" grpId="0" nodeType="clickEffect">
                                   <p:stCondLst>
                                     <p:cond delay="0"/>
                                   </p:stCondLst>
@@ -6809,105 +7083,6 @@
                                     <p:set>
                                       <p:cBhvr>
                                         <p:cTn id="6" dur="1" fill="hold">
-                                          <p:stCondLst>
-                                            <p:cond delay="0"/>
-                                          </p:stCondLst>
-                                        </p:cTn>
-                                        <p:tgtEl>
-                                          <p:spTgt spid="8"/>
-                                        </p:tgtEl>
-                                        <p:attrNameLst>
-                                          <p:attrName>style.visibility</p:attrName>
-                                        </p:attrNameLst>
-                                      </p:cBhvr>
-                                      <p:to>
-                                        <p:strVal val="visible"/>
-                                      </p:to>
-                                    </p:set>
-                                  </p:childTnLst>
-                                </p:cTn>
-                              </p:par>
-                              <p:par>
-                                <p:cTn id="7" presetID="1" presetClass="entr" presetSubtype="0" fill="hold" grpId="0" nodeType="withEffect">
-                                  <p:stCondLst>
-                                    <p:cond delay="0"/>
-                                  </p:stCondLst>
-                                  <p:childTnLst>
-                                    <p:set>
-                                      <p:cBhvr>
-                                        <p:cTn id="8" dur="1" fill="hold">
-                                          <p:stCondLst>
-                                            <p:cond delay="0"/>
-                                          </p:stCondLst>
-                                        </p:cTn>
-                                        <p:tgtEl>
-                                          <p:spTgt spid="10"/>
-                                        </p:tgtEl>
-                                        <p:attrNameLst>
-                                          <p:attrName>style.visibility</p:attrName>
-                                        </p:attrNameLst>
-                                      </p:cBhvr>
-                                      <p:to>
-                                        <p:strVal val="visible"/>
-                                      </p:to>
-                                    </p:set>
-                                  </p:childTnLst>
-                                </p:cTn>
-                              </p:par>
-                              <p:par>
-                                <p:cTn id="9" presetID="1" presetClass="entr" presetSubtype="0" fill="hold" grpId="0" nodeType="withEffect">
-                                  <p:stCondLst>
-                                    <p:cond delay="0"/>
-                                  </p:stCondLst>
-                                  <p:childTnLst>
-                                    <p:set>
-                                      <p:cBhvr>
-                                        <p:cTn id="10" dur="1" fill="hold">
-                                          <p:stCondLst>
-                                            <p:cond delay="0"/>
-                                          </p:stCondLst>
-                                        </p:cTn>
-                                        <p:tgtEl>
-                                          <p:spTgt spid="11"/>
-                                        </p:tgtEl>
-                                        <p:attrNameLst>
-                                          <p:attrName>style.visibility</p:attrName>
-                                        </p:attrNameLst>
-                                      </p:cBhvr>
-                                      <p:to>
-                                        <p:strVal val="visible"/>
-                                      </p:to>
-                                    </p:set>
-                                  </p:childTnLst>
-                                </p:cTn>
-                              </p:par>
-                            </p:childTnLst>
-                          </p:cTn>
-                        </p:par>
-                      </p:childTnLst>
-                    </p:cTn>
-                  </p:par>
-                  <p:par>
-                    <p:cTn id="11" fill="hold">
-                      <p:stCondLst>
-                        <p:cond delay="indefinite"/>
-                      </p:stCondLst>
-                      <p:childTnLst>
-                        <p:par>
-                          <p:cTn id="12" fill="hold">
-                            <p:stCondLst>
-                              <p:cond delay="0"/>
-                            </p:stCondLst>
-                            <p:childTnLst>
-                              <p:par>
-                                <p:cTn id="13" presetID="1" presetClass="entr" presetSubtype="0" fill="hold" grpId="0" nodeType="clickEffect">
-                                  <p:stCondLst>
-                                    <p:cond delay="0"/>
-                                  </p:stCondLst>
-                                  <p:childTnLst>
-                                    <p:set>
-                                      <p:cBhvr>
-                                        <p:cTn id="14" dur="1" fill="hold">
                                           <p:stCondLst>
                                             <p:cond delay="0"/>
                                           </p:stCondLst>
@@ -6954,9 +7129,6 @@
       </p:par>
     </p:tnLst>
     <p:bldLst>
-      <p:bldP spid="8" grpId="0" animBg="1"/>
-      <p:bldP spid="10" grpId="0" animBg="1"/>
-      <p:bldP spid="11" grpId="0" animBg="1"/>
       <p:bldP spid="3" grpId="0" animBg="1"/>
     </p:bldLst>
   </p:timing>
@@ -7010,8 +7182,8 @@
           </a:p>
         </p:txBody>
       </p:sp>
-      <mc:AlternateContent xmlns:mc="http://schemas.openxmlformats.org/markup-compatibility/2006" xmlns:a14="http://schemas.microsoft.com/office/drawing/2010/main">
-        <mc:Choice Requires="a14">
+      <mc:AlternateContent xmlns:mc="http://schemas.openxmlformats.org/markup-compatibility/2006">
+        <mc:Choice xmlns:a14="http://schemas.microsoft.com/office/drawing/2010/main" Requires="a14">
           <p:sp>
             <p:nvSpPr>
               <p:cNvPr id="3" name="Content Placeholder 2" descr="Start with an initial policy pi called the base policy. At decision time in state s :. Monte Carlo Policy Estimation: Use many simulated trajectories to approximate all state/action values q sub pi (s,a) for the current state s . Choose the best action a equals argmax over a, of q sub pi (s,a) according to the estimates. This is called the rollout policy. Properties:. If the base policy is reasonable (i.e., somewhat similar to the optimal policy), rollouts are locally optimal. Rollout policy is guaranteed to be at least as good as the base policy (in expectation). You get policy improvement without solving Bellman equations">
@@ -7098,18 +7270,30 @@
                     <m:sSub>
                       <m:sSubPr>
                         <m:ctrlPr>
-                          <a:rPr lang="en-US" b="0" i="1" smtClean="0">
+                          <a:rPr lang="en-US" i="1">
                             <a:latin typeface="Cambria Math" panose="02040503050406030204" pitchFamily="18" charset="0"/>
                           </a:rPr>
                         </m:ctrlPr>
                       </m:sSubPr>
                       <m:e>
-                        <m:r>
-                          <a:rPr lang="en-US" b="0" i="1" smtClean="0">
-                            <a:latin typeface="Cambria Math" panose="02040503050406030204" pitchFamily="18" charset="0"/>
-                          </a:rPr>
-                          <m:t>𝑞</m:t>
-                        </m:r>
+                        <m:acc>
+                          <m:accPr>
+                            <m:chr m:val="̂"/>
+                            <m:ctrlPr>
+                              <a:rPr lang="en-US" i="1">
+                                <a:latin typeface="Cambria Math" panose="02040503050406030204" pitchFamily="18" charset="0"/>
+                              </a:rPr>
+                            </m:ctrlPr>
+                          </m:accPr>
+                          <m:e>
+                            <m:r>
+                              <a:rPr lang="en-US" i="1">
+                                <a:latin typeface="Cambria Math" panose="02040503050406030204" pitchFamily="18" charset="0"/>
+                              </a:rPr>
+                              <m:t>𝑞</m:t>
+                            </m:r>
+                          </m:e>
+                        </m:acc>
                       </m:e>
                       <m:sub>
                         <m:r>
@@ -7242,12 +7426,24 @@
                             </m:ctrlPr>
                           </m:sSubPr>
                           <m:e>
-                            <m:r>
-                              <a:rPr lang="en-US" i="1">
-                                <a:latin typeface="Cambria Math" panose="02040503050406030204" pitchFamily="18" charset="0"/>
-                              </a:rPr>
-                              <m:t>𝑞</m:t>
-                            </m:r>
+                            <m:acc>
+                              <m:accPr>
+                                <m:chr m:val="̂"/>
+                                <m:ctrlPr>
+                                  <a:rPr lang="en-US" i="1">
+                                    <a:latin typeface="Cambria Math" panose="02040503050406030204" pitchFamily="18" charset="0"/>
+                                  </a:rPr>
+                                </m:ctrlPr>
+                              </m:accPr>
+                              <m:e>
+                                <m:r>
+                                  <a:rPr lang="en-US" i="1">
+                                    <a:latin typeface="Cambria Math" panose="02040503050406030204" pitchFamily="18" charset="0"/>
+                                  </a:rPr>
+                                  <m:t>𝑞</m:t>
+                                </m:r>
+                              </m:e>
+                            </m:acc>
                           </m:e>
                           <m:sub>
                             <m:r>
@@ -7367,7 +7563,7 @@
             </p:txBody>
           </p:sp>
         </mc:Choice>
-        <mc:Fallback xmlns="">
+        <mc:Fallback>
           <p:sp>
             <p:nvSpPr>
               <p:cNvPr id="3" name="Content Placeholder 2" descr="Start with an initial policy pi called the base policy. At decision time in state s :. Monte Carlo Policy Estimation: Use many simulated trajectories to approximate all state/action values q sub pi (s,a) for the current state s . Choose the best action a equals argmax over a, of q sub pi (s,a) according to the estimates. This is called the rollout policy. Properties:. If the base policy is reasonable (i.e., somewhat similar to the optimal policy), rollouts are locally optimal. Rollout policy is guaranteed to be at least as good as the base policy (in expectation). You get policy improvement without solving Bellman equations">
@@ -7388,7 +7584,7 @@
               <a:blipFill>
                 <a:blip r:embed="rId2"/>
                 <a:stretch>
-                  <a:fillRect l="-1043" t="-3189" r="-1217"/>
+                  <a:fillRect l="-1043" t="-3189" r="-1159"/>
                 </a:stretch>
               </a:blipFill>
             </p:spPr>
@@ -7639,98 +7835,159 @@
           </a:p>
         </p:txBody>
       </p:sp>
-      <p:sp>
-        <p:nvSpPr>
-          <p:cNvPr id="3" name="Content Placeholder 2">
-            <a:extLst>
-              <a:ext uri="{FF2B5EF4-FFF2-40B4-BE49-F238E27FC236}">
-                <a16:creationId xmlns:a16="http://schemas.microsoft.com/office/drawing/2014/main" id="{59C45C3E-18E2-0CBC-535D-7E0DD489F2F6}"/>
-              </a:ext>
-            </a:extLst>
-          </p:cNvPr>
-          <p:cNvSpPr>
-            <a:spLocks noGrp="1"/>
-          </p:cNvSpPr>
-          <p:nvPr>
-            <p:ph idx="1"/>
-          </p:nvPr>
-        </p:nvSpPr>
-        <p:spPr>
-          <a:xfrm>
-            <a:off x="838200" y="1397330"/>
-            <a:ext cx="5023757" cy="4779633"/>
-          </a:xfrm>
-        </p:spPr>
-        <p:txBody>
-          <a:bodyPr>
-            <a:normAutofit fontScale="77500" lnSpcReduction="20000"/>
-          </a:bodyPr>
-          <a:lstStyle/>
-          <a:p>
-            <a:r>
-              <a:rPr lang="en-US" dirty="0"/>
-              <a:t>MCTS is a rollout algorithm that stores some intermediate estimates in a depth-limited tree structure. </a:t>
-            </a:r>
-          </a:p>
-          <a:p>
-            <a:pPr lvl="1"/>
-            <a:r>
-              <a:rPr lang="en-US" b="1" dirty="0"/>
-              <a:t>Selection</a:t>
-            </a:r>
-            <a:r>
-              <a:rPr lang="en-US" dirty="0"/>
-              <a:t>: Pick the currently best leaf node (e.g., greedy, UCB).</a:t>
-            </a:r>
-          </a:p>
-          <a:p>
-            <a:pPr lvl="1"/>
-            <a:r>
-              <a:rPr lang="en-US" b="1" dirty="0"/>
-              <a:t>Expansion</a:t>
-            </a:r>
-            <a:r>
-              <a:rPr lang="en-US" dirty="0"/>
-              <a:t>: Add new nodes, but keep the tree small enough.</a:t>
-            </a:r>
-          </a:p>
-          <a:p>
-            <a:pPr lvl="1"/>
-            <a:r>
-              <a:rPr lang="en-US" b="1" dirty="0"/>
-              <a:t>Simulation</a:t>
-            </a:r>
-            <a:r>
-              <a:rPr lang="en-US" dirty="0"/>
-              <a:t>: From a selected node, simulate complete episode(s). </a:t>
-            </a:r>
-          </a:p>
-          <a:p>
-            <a:pPr lvl="1"/>
-            <a:r>
-              <a:rPr lang="en-US" b="1" dirty="0"/>
-              <a:t>Backup</a:t>
-            </a:r>
-            <a:r>
-              <a:rPr lang="en-US" dirty="0"/>
-              <a:t>: update the tree with the result of the playout.</a:t>
-            </a:r>
-          </a:p>
-          <a:p>
-            <a:endParaRPr lang="en-US" dirty="0"/>
-          </a:p>
-          <a:p>
-            <a:r>
-              <a:rPr lang="en-US" b="1" dirty="0"/>
-              <a:t>Advantage</a:t>
-            </a:r>
-            <a:r>
-              <a:rPr lang="en-US" dirty="0"/>
-              <a:t>: selection steers the simulation towards better trajectories. This avoids approximating the full value function.</a:t>
-            </a:r>
-          </a:p>
-        </p:txBody>
-      </p:sp>
+      <mc:AlternateContent xmlns:mc="http://schemas.openxmlformats.org/markup-compatibility/2006">
+        <mc:Choice xmlns:a14="http://schemas.microsoft.com/office/drawing/2010/main" Requires="a14">
+          <p:sp>
+            <p:nvSpPr>
+              <p:cNvPr id="3" name="Content Placeholder 2">
+                <a:extLst>
+                  <a:ext uri="{FF2B5EF4-FFF2-40B4-BE49-F238E27FC236}">
+                    <a16:creationId xmlns:a16="http://schemas.microsoft.com/office/drawing/2014/main" id="{59C45C3E-18E2-0CBC-535D-7E0DD489F2F6}"/>
+                  </a:ext>
+                </a:extLst>
+              </p:cNvPr>
+              <p:cNvSpPr>
+                <a:spLocks noGrp="1"/>
+              </p:cNvSpPr>
+              <p:nvPr>
+                <p:ph idx="1"/>
+              </p:nvPr>
+            </p:nvSpPr>
+            <p:spPr>
+              <a:xfrm>
+                <a:off x="783152" y="1397330"/>
+                <a:ext cx="4964171" cy="4779633"/>
+              </a:xfrm>
+            </p:spPr>
+            <p:txBody>
+              <a:bodyPr>
+                <a:normAutofit fontScale="77500" lnSpcReduction="20000"/>
+              </a:bodyPr>
+              <a:lstStyle/>
+              <a:p>
+                <a:r>
+                  <a:rPr lang="en-US" dirty="0"/>
+                  <a:t>MCTS is a rollout algorithm that stores some intermediate estimates in a depth-limited tree structure. </a:t>
+                </a:r>
+              </a:p>
+              <a:p>
+                <a:pPr lvl="1"/>
+                <a:r>
+                  <a:rPr lang="en-US" b="1" dirty="0"/>
+                  <a:t>Selection</a:t>
+                </a:r>
+                <a:r>
+                  <a:rPr lang="en-US" dirty="0"/>
+                  <a:t>: Pick the currently best leaf node (e.g., greedy, UCB).</a:t>
+                </a:r>
+              </a:p>
+              <a:p>
+                <a:pPr lvl="1"/>
+                <a:r>
+                  <a:rPr lang="en-US" b="1" dirty="0"/>
+                  <a:t>Expansion</a:t>
+                </a:r>
+                <a:r>
+                  <a:rPr lang="en-US" dirty="0"/>
+                  <a:t>: Add new nodes, but keep the tree small enough.</a:t>
+                </a:r>
+              </a:p>
+              <a:p>
+                <a:pPr lvl="1"/>
+                <a:r>
+                  <a:rPr lang="en-US" b="1" dirty="0"/>
+                  <a:t>Simulation</a:t>
+                </a:r>
+                <a:r>
+                  <a:rPr lang="en-US" dirty="0"/>
+                  <a:t>: From a selected node, simulate complete episode(s). </a:t>
+                </a:r>
+              </a:p>
+              <a:p>
+                <a:pPr lvl="1"/>
+                <a:r>
+                  <a:rPr lang="en-US" b="1" dirty="0"/>
+                  <a:t>Backup</a:t>
+                </a:r>
+                <a:r>
+                  <a:rPr lang="en-US" dirty="0"/>
+                  <a:t>: update the </a:t>
+                </a:r>
+                <a14:m>
+                  <m:oMath xmlns:m="http://schemas.openxmlformats.org/officeDocument/2006/math">
+                    <m:r>
+                      <a:rPr lang="en-US" b="0" i="1" smtClean="0">
+                        <a:latin typeface="Cambria Math" panose="02040503050406030204" pitchFamily="18" charset="0"/>
+                      </a:rPr>
+                      <m:t>𝑞</m:t>
+                    </m:r>
+                  </m:oMath>
+                </a14:m>
+                <a:r>
+                  <a:rPr lang="en-US" dirty="0"/>
+                  <a:t>-values in the tree with the result of the playout.</a:t>
+                </a:r>
+              </a:p>
+              <a:p>
+                <a:endParaRPr lang="en-US" dirty="0"/>
+              </a:p>
+              <a:p>
+                <a:r>
+                  <a:rPr lang="en-US" b="1" dirty="0"/>
+                  <a:t>Advantage</a:t>
+                </a:r>
+                <a:r>
+                  <a:rPr lang="en-US" dirty="0"/>
+                  <a:t>: selection steers the simulation towards better trajectories. This avoids approximating the full value function.</a:t>
+                </a:r>
+              </a:p>
+            </p:txBody>
+          </p:sp>
+        </mc:Choice>
+        <mc:Fallback>
+          <p:sp>
+            <p:nvSpPr>
+              <p:cNvPr id="3" name="Content Placeholder 2">
+                <a:extLst>
+                  <a:ext uri="{FF2B5EF4-FFF2-40B4-BE49-F238E27FC236}">
+                    <a16:creationId xmlns:a16="http://schemas.microsoft.com/office/drawing/2014/main" id="{59C45C3E-18E2-0CBC-535D-7E0DD489F2F6}"/>
+                  </a:ext>
+                </a:extLst>
+              </p:cNvPr>
+              <p:cNvSpPr>
+                <a:spLocks noGrp="1" noRot="1" noChangeAspect="1" noMove="1" noResize="1" noEditPoints="1" noAdjustHandles="1" noChangeArrowheads="1" noChangeShapeType="1" noTextEdit="1"/>
+              </p:cNvSpPr>
+              <p:nvPr>
+                <p:ph idx="1"/>
+              </p:nvPr>
+            </p:nvSpPr>
+            <p:spPr>
+              <a:xfrm>
+                <a:off x="783152" y="1397330"/>
+                <a:ext cx="4964171" cy="4779633"/>
+              </a:xfrm>
+              <a:blipFill>
+                <a:blip r:embed="rId2"/>
+                <a:stretch>
+                  <a:fillRect l="-1350" t="-2551"/>
+                </a:stretch>
+              </a:blipFill>
+            </p:spPr>
+            <p:txBody>
+              <a:bodyPr/>
+              <a:lstStyle/>
+              <a:p>
+                <a:r>
+                  <a:rPr lang="en-US">
+                    <a:noFill/>
+                  </a:rPr>
+                  <a:t> </a:t>
+                </a:r>
+              </a:p>
+            </p:txBody>
+          </p:sp>
+        </mc:Fallback>
+      </mc:AlternateContent>
       <p:pic>
         <p:nvPicPr>
           <p:cNvPr id="5" name="Picture 4" descr="Monte Carlo Tree Search (Sutton and Barto Figure 8.10): four steps in a loop labelled &quot;Repeat while time remains&quot;. Selection: starting at the root, the tree policy follows blue arrows down the existing tree to a leaf node. Expansion: one or more child nodes are added below that leaf. Simulation: from the new node, the rollout policy follows a dashed blue path to a terminal state (a triangle). Backup: red arrows carry the result of the simulation back up through the nodes visited by the tree policy to the root.">
@@ -7746,7 +8003,7 @@
           <p:nvPr/>
         </p:nvPicPr>
         <p:blipFill>
-          <a:blip r:embed="rId2"/>
+          <a:blip r:embed="rId3"/>
           <a:stretch>
             <a:fillRect/>
           </a:stretch>
@@ -7761,8 +8018,8 @@
           </a:prstGeom>
         </p:spPr>
       </p:pic>
-      <mc:AlternateContent xmlns:mc="http://schemas.openxmlformats.org/markup-compatibility/2006" xmlns:a14="http://schemas.microsoft.com/office/drawing/2010/main">
-        <mc:Choice Requires="a14">
+      <mc:AlternateContent xmlns:mc="http://schemas.openxmlformats.org/markup-compatibility/2006">
+        <mc:Choice xmlns:a14="http://schemas.microsoft.com/office/drawing/2010/main" Requires="a14">
           <p:sp>
             <p:nvSpPr>
               <p:cNvPr id="8" name="Speech Bubble: Rectangle with Corners Rounded 7" descr="Stores estimated q(s,a) values">
@@ -7815,12 +8072,24 @@
                 </a:r>
                 <a14:m>
                   <m:oMath xmlns:m="http://schemas.openxmlformats.org/officeDocument/2006/math">
-                    <m:r>
-                      <a:rPr lang="en-US" sz="1400" b="0" i="1" smtClean="0">
-                        <a:latin typeface="Cambria Math" panose="02040503050406030204" pitchFamily="18" charset="0"/>
-                      </a:rPr>
-                      <m:t>𝑞</m:t>
-                    </m:r>
+                    <m:acc>
+                      <m:accPr>
+                        <m:chr m:val="̂"/>
+                        <m:ctrlPr>
+                          <a:rPr lang="en-US" sz="1400" i="1">
+                            <a:latin typeface="Cambria Math" panose="02040503050406030204" pitchFamily="18" charset="0"/>
+                          </a:rPr>
+                        </m:ctrlPr>
+                      </m:accPr>
+                      <m:e>
+                        <m:r>
+                          <a:rPr lang="en-US" sz="1400" i="1">
+                            <a:latin typeface="Cambria Math" panose="02040503050406030204" pitchFamily="18" charset="0"/>
+                          </a:rPr>
+                          <m:t>𝑞</m:t>
+                        </m:r>
+                      </m:e>
+                    </m:acc>
                     <m:r>
                       <a:rPr lang="en-US" sz="1400" i="1">
                         <a:latin typeface="Cambria Math" panose="02040503050406030204" pitchFamily="18" charset="0"/>
@@ -7861,7 +8130,7 @@
             </p:txBody>
           </p:sp>
         </mc:Choice>
-        <mc:Fallback xmlns="">
+        <mc:Fallback>
           <p:sp>
             <p:nvSpPr>
               <p:cNvPr id="8" name="Speech Bubble: Rectangle with Corners Rounded 7" descr="Stores estimated q(s,a) values">
@@ -7889,7 +8158,7 @@
                 </a:avLst>
               </a:prstGeom>
               <a:blipFill>
-                <a:blip r:embed="rId3"/>
+                <a:blip r:embed="rId4"/>
                 <a:stretch>
                   <a:fillRect b="-4481"/>
                 </a:stretch>
@@ -7992,7 +8261,7 @@
                             </p:stCondLst>
                             <p:childTnLst>
                               <p:par>
-                                <p:cTn id="5" presetID="1" presetClass="entr" presetSubtype="0" fill="hold" nodeType="clickEffect">
+                                <p:cTn id="5" presetID="1" presetClass="entr" presetSubtype="0" fill="hold" grpId="0" nodeType="clickEffect">
                                   <p:stCondLst>
                                     <p:cond delay="0"/>
                                   </p:stCondLst>
@@ -8000,55 +8269,6 @@
                                     <p:set>
                                       <p:cBhvr>
                                         <p:cTn id="6" dur="1" fill="hold">
-                                          <p:stCondLst>
-                                            <p:cond delay="0"/>
-                                          </p:stCondLst>
-                                        </p:cTn>
-                                        <p:tgtEl>
-                                          <p:spTgt spid="3">
-                                            <p:txEl>
-                                              <p:pRg st="6" end="6"/>
-                                            </p:txEl>
-                                          </p:spTgt>
-                                        </p:tgtEl>
-                                        <p:attrNameLst>
-                                          <p:attrName>style.visibility</p:attrName>
-                                        </p:attrNameLst>
-                                      </p:cBhvr>
-                                      <p:to>
-                                        <p:strVal val="visible"/>
-                                      </p:to>
-                                    </p:set>
-                                  </p:childTnLst>
-                                </p:cTn>
-                              </p:par>
-                            </p:childTnLst>
-                          </p:cTn>
-                        </p:par>
-                      </p:childTnLst>
-                    </p:cTn>
-                  </p:par>
-                  <p:par>
-                    <p:cTn id="7" fill="hold">
-                      <p:stCondLst>
-                        <p:cond delay="indefinite"/>
-                      </p:stCondLst>
-                      <p:childTnLst>
-                        <p:par>
-                          <p:cTn id="8" fill="hold">
-                            <p:stCondLst>
-                              <p:cond delay="0"/>
-                            </p:stCondLst>
-                            <p:childTnLst>
-                              <p:par>
-                                <p:cTn id="9" presetID="1" presetClass="entr" presetSubtype="0" fill="hold" grpId="0" nodeType="clickEffect">
-                                  <p:stCondLst>
-                                    <p:cond delay="0"/>
-                                  </p:stCondLst>
-                                  <p:childTnLst>
-                                    <p:set>
-                                      <p:cBhvr>
-                                        <p:cTn id="10" dur="1" fill="hold">
                                           <p:stCondLst>
                                             <p:cond delay="0"/>
                                           </p:stCondLst>
@@ -8876,12 +9096,12 @@
         <p:spPr>
           <a:xfrm>
             <a:off x="838200" y="1397331"/>
-            <a:ext cx="7421380" cy="4163786"/>
+            <a:ext cx="7421380" cy="4653986"/>
           </a:xfrm>
         </p:spPr>
         <p:txBody>
           <a:bodyPr>
-            <a:normAutofit fontScale="92500" lnSpcReduction="10000"/>
+            <a:normAutofit fontScale="92500" lnSpcReduction="20000"/>
           </a:bodyPr>
           <a:lstStyle/>
           <a:p>
@@ -8929,6 +9149,20 @@
           </a:p>
           <a:p>
             <a:endParaRPr lang="en-US" dirty="0"/>
+          </a:p>
+          <a:p>
+            <a:pPr marL="0" indent="0">
+              <a:buNone/>
+            </a:pPr>
+            <a:r>
+              <a:rPr lang="en-US" b="1" dirty="0"/>
+              <a:t>Convergence: </a:t>
+            </a:r>
+            <a:r>
+              <a:rPr lang="en-US" dirty="0"/>
+              <a:t>Policy improvement theorem for greedy action choice.</a:t>
+            </a:r>
+            <a:endParaRPr lang="en-US" b="1" dirty="0"/>
           </a:p>
           <a:p>
             <a:pPr marL="0" indent="0">
@@ -9664,56 +9898,6 @@
           </a:p>
         </p:txBody>
       </p:sp>
-      <p:sp>
-        <p:nvSpPr>
-          <p:cNvPr id="23" name="TextBox 22">
-            <a:extLst>
-              <a:ext uri="{FF2B5EF4-FFF2-40B4-BE49-F238E27FC236}">
-                <a16:creationId xmlns:a16="http://schemas.microsoft.com/office/drawing/2014/main" id="{E0808173-01FB-4745-DD56-A2D88A5FE9FD}"/>
-              </a:ext>
-            </a:extLst>
-          </p:cNvPr>
-          <p:cNvSpPr txBox="1"/>
-          <p:nvPr/>
-        </p:nvSpPr>
-        <p:spPr>
-          <a:xfrm>
-            <a:off x="8986196" y="2360586"/>
-            <a:ext cx="2275530" cy="1200329"/>
-          </a:xfrm>
-          <a:prstGeom prst="rect">
-            <a:avLst/>
-          </a:prstGeom>
-        </p:spPr>
-        <p:style>
-          <a:lnRef idx="2">
-            <a:schemeClr val="accent3">
-              <a:shade val="15000"/>
-            </a:schemeClr>
-          </a:lnRef>
-          <a:fillRef idx="1">
-            <a:schemeClr val="accent3"/>
-          </a:fillRef>
-          <a:effectRef idx="0">
-            <a:schemeClr val="accent3"/>
-          </a:effectRef>
-          <a:fontRef idx="minor">
-            <a:schemeClr val="lt1"/>
-          </a:fontRef>
-        </p:style>
-        <p:txBody>
-          <a:bodyPr wrap="square" rtlCol="0">
-            <a:spAutoFit/>
-          </a:bodyPr>
-          <a:lstStyle/>
-          <a:p>
-            <a:r>
-              <a:rPr lang="en-US" dirty="0"/>
-              <a:t>Bias decreases the closer we get to the optimal value function.</a:t>
-            </a:r>
-          </a:p>
-        </p:txBody>
-      </p:sp>
       <p:grpSp>
         <p:nvGrpSpPr>
           <p:cNvPr id="22" name="Group 21" descr="Point in the chart labelled n-step Sarsa.">
@@ -9929,56 +10113,6 @@
           </p:txBody>
         </p:sp>
       </p:grpSp>
-      <p:sp>
-        <p:nvSpPr>
-          <p:cNvPr id="25" name="TextBox 24">
-            <a:extLst>
-              <a:ext uri="{FF2B5EF4-FFF2-40B4-BE49-F238E27FC236}">
-                <a16:creationId xmlns:a16="http://schemas.microsoft.com/office/drawing/2014/main" id="{09B2548B-E9B6-44AE-AA51-21FD905A4927}"/>
-              </a:ext>
-            </a:extLst>
-          </p:cNvPr>
-          <p:cNvSpPr txBox="1"/>
-          <p:nvPr/>
-        </p:nvSpPr>
-        <p:spPr>
-          <a:xfrm>
-            <a:off x="8986196" y="3724748"/>
-            <a:ext cx="2275530" cy="646331"/>
-          </a:xfrm>
-          <a:prstGeom prst="rect">
-            <a:avLst/>
-          </a:prstGeom>
-        </p:spPr>
-        <p:style>
-          <a:lnRef idx="2">
-            <a:schemeClr val="accent3">
-              <a:shade val="15000"/>
-            </a:schemeClr>
-          </a:lnRef>
-          <a:fillRef idx="1">
-            <a:schemeClr val="accent3"/>
-          </a:fillRef>
-          <a:effectRef idx="0">
-            <a:schemeClr val="accent3"/>
-          </a:effectRef>
-          <a:fontRef idx="minor">
-            <a:schemeClr val="lt1"/>
-          </a:fontRef>
-        </p:style>
-        <p:txBody>
-          <a:bodyPr wrap="square" rtlCol="0">
-            <a:spAutoFit/>
-          </a:bodyPr>
-          <a:lstStyle/>
-          <a:p>
-            <a:r>
-              <a:rPr lang="en-US" dirty="0"/>
-              <a:t>Variance decreases with sample size.</a:t>
-            </a:r>
-          </a:p>
-        </p:txBody>
-      </p:sp>
       <p:grpSp>
         <p:nvGrpSpPr>
           <p:cNvPr id="17" name="Group 16" descr="Point in the chart labelled Rollout Algorithms.">
@@ -10097,7 +10231,7 @@
         </p:nvSpPr>
         <p:spPr>
           <a:xfrm>
-            <a:off x="8986196" y="4797303"/>
+            <a:off x="8844780" y="2768499"/>
             <a:ext cx="2275530" cy="923330"/>
           </a:xfrm>
           <a:prstGeom prst="rect">
@@ -10435,33 +10569,6 @@
                                   </p:childTnLst>
                                 </p:cTn>
                               </p:par>
-                              <p:par>
-                                <p:cTn id="11" presetID="1" presetClass="entr" presetSubtype="0" fill="hold" grpId="0" nodeType="withEffect">
-                                  <p:stCondLst>
-                                    <p:cond delay="0"/>
-                                  </p:stCondLst>
-                                  <p:childTnLst>
-                                    <p:set>
-                                      <p:cBhvr>
-                                        <p:cTn id="12" dur="1" fill="hold">
-                                          <p:stCondLst>
-                                            <p:cond delay="0"/>
-                                          </p:stCondLst>
-                                        </p:cTn>
-                                        <p:tgtEl>
-                                          <p:spTgt spid="23"/>
-                                        </p:tgtEl>
-                                        <p:attrNameLst>
-                                          <p:attrName>style.visibility</p:attrName>
-                                        </p:attrNameLst>
-                                      </p:cBhvr>
-                                      <p:to>
-                                        <p:strVal val="visible"/>
-                                      </p:to>
-                                    </p:set>
-                                  </p:childTnLst>
-                                </p:cTn>
-                              </p:par>
                             </p:childTnLst>
                           </p:cTn>
                         </p:par>
@@ -10469,26 +10576,26 @@
                     </p:cTn>
                   </p:par>
                   <p:par>
-                    <p:cTn id="13" fill="hold">
+                    <p:cTn id="11" fill="hold">
                       <p:stCondLst>
                         <p:cond delay="indefinite"/>
                       </p:stCondLst>
                       <p:childTnLst>
                         <p:par>
-                          <p:cTn id="14" fill="hold">
+                          <p:cTn id="12" fill="hold">
                             <p:stCondLst>
                               <p:cond delay="0"/>
                             </p:stCondLst>
                             <p:childTnLst>
                               <p:par>
-                                <p:cTn id="15" presetID="1" presetClass="entr" presetSubtype="0" fill="hold" nodeType="clickEffect">
+                                <p:cTn id="13" presetID="1" presetClass="entr" presetSubtype="0" fill="hold" nodeType="clickEffect">
                                   <p:stCondLst>
                                     <p:cond delay="0"/>
                                   </p:stCondLst>
                                   <p:childTnLst>
                                     <p:set>
                                       <p:cBhvr>
-                                        <p:cTn id="16" dur="1" fill="hold">
+                                        <p:cTn id="14" dur="1" fill="hold">
                                           <p:stCondLst>
                                             <p:cond delay="0"/>
                                           </p:stCondLst>
@@ -10514,26 +10621,26 @@
                     </p:cTn>
                   </p:par>
                   <p:par>
-                    <p:cTn id="17" fill="hold">
+                    <p:cTn id="15" fill="hold">
                       <p:stCondLst>
                         <p:cond delay="indefinite"/>
                       </p:stCondLst>
                       <p:childTnLst>
                         <p:par>
-                          <p:cTn id="18" fill="hold">
+                          <p:cTn id="16" fill="hold">
                             <p:stCondLst>
                               <p:cond delay="0"/>
                             </p:stCondLst>
                             <p:childTnLst>
                               <p:par>
-                                <p:cTn id="19" presetID="1" presetClass="entr" presetSubtype="0" fill="hold" grpId="0" nodeType="clickEffect">
+                                <p:cTn id="17" presetID="1" presetClass="entr" presetSubtype="0" fill="hold" grpId="0" nodeType="clickEffect">
                                   <p:stCondLst>
                                     <p:cond delay="0"/>
                                   </p:stCondLst>
                                   <p:childTnLst>
                                     <p:set>
                                       <p:cBhvr>
-                                        <p:cTn id="20" dur="1" fill="hold">
+                                        <p:cTn id="18" dur="1" fill="hold">
                                           <p:stCondLst>
                                             <p:cond delay="0"/>
                                           </p:stCondLst>
@@ -10552,8 +10659,26 @@
                                   </p:childTnLst>
                                 </p:cTn>
                               </p:par>
+                            </p:childTnLst>
+                          </p:cTn>
+                        </p:par>
+                      </p:childTnLst>
+                    </p:cTn>
+                  </p:par>
+                  <p:par>
+                    <p:cTn id="19" fill="hold">
+                      <p:stCondLst>
+                        <p:cond delay="indefinite"/>
+                      </p:stCondLst>
+                      <p:childTnLst>
+                        <p:par>
+                          <p:cTn id="20" fill="hold">
+                            <p:stCondLst>
+                              <p:cond delay="0"/>
+                            </p:stCondLst>
+                            <p:childTnLst>
                               <p:par>
-                                <p:cTn id="21" presetID="1" presetClass="entr" presetSubtype="0" fill="hold" grpId="0" nodeType="withEffect">
+                                <p:cTn id="21" presetID="1" presetClass="entr" presetSubtype="0" fill="hold" grpId="0" nodeType="clickEffect">
                                   <p:stCondLst>
                                     <p:cond delay="0"/>
                                   </p:stCondLst>
@@ -10566,7 +10691,7 @@
                                           </p:stCondLst>
                                         </p:cTn>
                                         <p:tgtEl>
-                                          <p:spTgt spid="25"/>
+                                          <p:spTgt spid="3"/>
                                         </p:tgtEl>
                                         <p:attrNameLst>
                                           <p:attrName>style.visibility</p:attrName>
@@ -10611,7 +10736,7 @@
                                           </p:stCondLst>
                                         </p:cTn>
                                         <p:tgtEl>
-                                          <p:spTgt spid="3"/>
+                                          <p:spTgt spid="18"/>
                                         </p:tgtEl>
                                         <p:attrNameLst>
                                           <p:attrName>style.visibility</p:attrName>
@@ -10656,7 +10781,7 @@
                                           </p:stCondLst>
                                         </p:cTn>
                                         <p:tgtEl>
-                                          <p:spTgt spid="18"/>
+                                          <p:spTgt spid="19"/>
                                         </p:tgtEl>
                                         <p:attrNameLst>
                                           <p:attrName>style.visibility</p:attrName>
@@ -10688,7 +10813,7 @@
                             </p:stCondLst>
                             <p:childTnLst>
                               <p:par>
-                                <p:cTn id="33" presetID="1" presetClass="entr" presetSubtype="0" fill="hold" grpId="0" nodeType="clickEffect">
+                                <p:cTn id="33" presetID="1" presetClass="entr" presetSubtype="0" fill="hold" nodeType="clickEffect">
                                   <p:stCondLst>
                                     <p:cond delay="0"/>
                                   </p:stCondLst>
@@ -10701,7 +10826,7 @@
                                           </p:stCondLst>
                                         </p:cTn>
                                         <p:tgtEl>
-                                          <p:spTgt spid="19"/>
+                                          <p:spTgt spid="22"/>
                                         </p:tgtEl>
                                         <p:attrNameLst>
                                           <p:attrName>style.visibility</p:attrName>
@@ -10746,7 +10871,7 @@
                                           </p:stCondLst>
                                         </p:cTn>
                                         <p:tgtEl>
-                                          <p:spTgt spid="22"/>
+                                          <p:spTgt spid="27"/>
                                         </p:tgtEl>
                                         <p:attrNameLst>
                                           <p:attrName>style.visibility</p:attrName>
@@ -10786,51 +10911,6 @@
                                     <p:set>
                                       <p:cBhvr>
                                         <p:cTn id="42" dur="1" fill="hold">
-                                          <p:stCondLst>
-                                            <p:cond delay="0"/>
-                                          </p:stCondLst>
-                                        </p:cTn>
-                                        <p:tgtEl>
-                                          <p:spTgt spid="27"/>
-                                        </p:tgtEl>
-                                        <p:attrNameLst>
-                                          <p:attrName>style.visibility</p:attrName>
-                                        </p:attrNameLst>
-                                      </p:cBhvr>
-                                      <p:to>
-                                        <p:strVal val="visible"/>
-                                      </p:to>
-                                    </p:set>
-                                  </p:childTnLst>
-                                </p:cTn>
-                              </p:par>
-                            </p:childTnLst>
-                          </p:cTn>
-                        </p:par>
-                      </p:childTnLst>
-                    </p:cTn>
-                  </p:par>
-                  <p:par>
-                    <p:cTn id="43" fill="hold">
-                      <p:stCondLst>
-                        <p:cond delay="indefinite"/>
-                      </p:stCondLst>
-                      <p:childTnLst>
-                        <p:par>
-                          <p:cTn id="44" fill="hold">
-                            <p:stCondLst>
-                              <p:cond delay="0"/>
-                            </p:stCondLst>
-                            <p:childTnLst>
-                              <p:par>
-                                <p:cTn id="45" presetID="1" presetClass="entr" presetSubtype="0" fill="hold" nodeType="clickEffect">
-                                  <p:stCondLst>
-                                    <p:cond delay="0"/>
-                                  </p:stCondLst>
-                                  <p:childTnLst>
-                                    <p:set>
-                                      <p:cBhvr>
-                                        <p:cTn id="46" dur="1" fill="hold">
                                           <p:stCondLst>
                                             <p:cond delay="0"/>
                                           </p:stCondLst>
@@ -10880,8 +10960,6 @@
       <p:bldP spid="18" grpId="0"/>
       <p:bldP spid="19" grpId="0"/>
       <p:bldP spid="24" grpId="0" animBg="1"/>
-      <p:bldP spid="23" grpId="0" animBg="1"/>
-      <p:bldP spid="25" grpId="0" animBg="1"/>
       <p:bldP spid="3" grpId="0" animBg="1"/>
       <p:bldP spid="26" grpId="0" animBg="1"/>
     </p:bldLst>
@@ -12983,8 +13061,9 @@
                     <m:d>
                       <m:dPr>
                         <m:ctrlPr>
-                          <a:rPr lang="en-US" b="0" i="1" smtClean="0">
+                          <a:rPr lang="en-US" i="1" dirty="0">
                             <a:latin typeface="Cambria Math" panose="02040503050406030204" pitchFamily="18" charset="0"/>
+                            <a:ea typeface="Cambria Math" panose="02040503050406030204" pitchFamily="18" charset="0"/>
                           </a:rPr>
                         </m:ctrlPr>
                       </m:dPr>
@@ -17317,7 +17396,7 @@
           <a:p>
             <a:r>
               <a:rPr lang="en-US" b="1" dirty="0"/>
-              <a:t>Learn</a:t>
+              <a:t>Explore + Learn</a:t>
             </a:r>
             <a:r>
               <a:rPr lang="en-US" dirty="0"/>
@@ -17483,230 +17562,292 @@
           </p:style>
         </p:cxnSp>
       </p:grpSp>
-      <p:sp>
-        <p:nvSpPr>
-          <p:cNvPr id="7" name="Content Placeholder 2">
-            <a:extLst>
-              <a:ext uri="{FF2B5EF4-FFF2-40B4-BE49-F238E27FC236}">
-                <a16:creationId xmlns:a16="http://schemas.microsoft.com/office/drawing/2014/main" id="{47549527-8988-50D5-4FD2-A4EACAA47452}"/>
-              </a:ext>
-            </a:extLst>
-          </p:cNvPr>
-          <p:cNvSpPr txBox="1">
-            <a:spLocks/>
-          </p:cNvSpPr>
-          <p:nvPr/>
-        </p:nvSpPr>
-        <p:spPr>
-          <a:xfrm>
-            <a:off x="839788" y="4788384"/>
-            <a:ext cx="10515600" cy="1254791"/>
-          </a:xfrm>
-          <a:prstGeom prst="rect">
-            <a:avLst/>
-          </a:prstGeom>
-        </p:spPr>
-        <p:txBody>
-          <a:bodyPr vert="horz" lIns="91440" tIns="45720" rIns="91440" bIns="45720" rtlCol="0">
-            <a:normAutofit fontScale="92500" lnSpcReduction="20000"/>
-          </a:bodyPr>
-          <a:lstStyle>
-            <a:lvl1pPr marL="228600" indent="-228600" algn="l" defTabSz="914400" rtl="0" eaLnBrk="1" latinLnBrk="0" hangingPunct="1">
-              <a:lnSpc>
-                <a:spcPct val="90000"/>
-              </a:lnSpc>
-              <a:spcBef>
-                <a:spcPts val="1000"/>
-              </a:spcBef>
-              <a:buFont typeface="Arial" panose="020B0604020202020204" pitchFamily="34" charset="0"/>
-              <a:buChar char="•"/>
-              <a:defRPr sz="2800" kern="1200">
-                <a:solidFill>
-                  <a:schemeClr val="tx1"/>
-                </a:solidFill>
-                <a:latin typeface="+mn-lt"/>
-                <a:ea typeface="+mn-ea"/>
-                <a:cs typeface="+mn-cs"/>
-              </a:defRPr>
-            </a:lvl1pPr>
-            <a:lvl2pPr marL="685800" indent="-228600" algn="l" defTabSz="914400" rtl="0" eaLnBrk="1" latinLnBrk="0" hangingPunct="1">
-              <a:lnSpc>
-                <a:spcPct val="90000"/>
-              </a:lnSpc>
-              <a:spcBef>
-                <a:spcPts val="500"/>
-              </a:spcBef>
-              <a:buFont typeface="Arial" panose="020B0604020202020204" pitchFamily="34" charset="0"/>
-              <a:buChar char="•"/>
-              <a:defRPr sz="2400" kern="1200">
-                <a:solidFill>
-                  <a:schemeClr val="tx1"/>
-                </a:solidFill>
-                <a:latin typeface="+mn-lt"/>
-                <a:ea typeface="+mn-ea"/>
-                <a:cs typeface="+mn-cs"/>
-              </a:defRPr>
-            </a:lvl2pPr>
-            <a:lvl3pPr marL="1143000" indent="-228600" algn="l" defTabSz="914400" rtl="0" eaLnBrk="1" latinLnBrk="0" hangingPunct="1">
-              <a:lnSpc>
-                <a:spcPct val="90000"/>
-              </a:lnSpc>
-              <a:spcBef>
-                <a:spcPts val="500"/>
-              </a:spcBef>
-              <a:buFont typeface="Arial" panose="020B0604020202020204" pitchFamily="34" charset="0"/>
-              <a:buChar char="•"/>
-              <a:defRPr sz="2000" kern="1200">
-                <a:solidFill>
-                  <a:schemeClr val="tx1"/>
-                </a:solidFill>
-                <a:latin typeface="+mn-lt"/>
-                <a:ea typeface="+mn-ea"/>
-                <a:cs typeface="+mn-cs"/>
-              </a:defRPr>
-            </a:lvl3pPr>
-            <a:lvl4pPr marL="1600200" indent="-228600" algn="l" defTabSz="914400" rtl="0" eaLnBrk="1" latinLnBrk="0" hangingPunct="1">
-              <a:lnSpc>
-                <a:spcPct val="90000"/>
-              </a:lnSpc>
-              <a:spcBef>
-                <a:spcPts val="500"/>
-              </a:spcBef>
-              <a:buFont typeface="Arial" panose="020B0604020202020204" pitchFamily="34" charset="0"/>
-              <a:buChar char="•"/>
-              <a:defRPr sz="1800" kern="1200">
-                <a:solidFill>
-                  <a:schemeClr val="tx1"/>
-                </a:solidFill>
-                <a:latin typeface="+mn-lt"/>
-                <a:ea typeface="+mn-ea"/>
-                <a:cs typeface="+mn-cs"/>
-              </a:defRPr>
-            </a:lvl4pPr>
-            <a:lvl5pPr marL="2057400" indent="-228600" algn="l" defTabSz="914400" rtl="0" eaLnBrk="1" latinLnBrk="0" hangingPunct="1">
-              <a:lnSpc>
-                <a:spcPct val="90000"/>
-              </a:lnSpc>
-              <a:spcBef>
-                <a:spcPts val="500"/>
-              </a:spcBef>
-              <a:buFont typeface="Arial" panose="020B0604020202020204" pitchFamily="34" charset="0"/>
-              <a:buChar char="•"/>
-              <a:defRPr sz="1800" kern="1200">
-                <a:solidFill>
-                  <a:schemeClr val="tx1"/>
-                </a:solidFill>
-                <a:latin typeface="+mn-lt"/>
-                <a:ea typeface="+mn-ea"/>
-                <a:cs typeface="+mn-cs"/>
-              </a:defRPr>
-            </a:lvl5pPr>
-            <a:lvl6pPr marL="2514600" indent="-228600" algn="l" defTabSz="914400" rtl="0" eaLnBrk="1" latinLnBrk="0" hangingPunct="1">
-              <a:lnSpc>
-                <a:spcPct val="90000"/>
-              </a:lnSpc>
-              <a:spcBef>
-                <a:spcPts val="500"/>
-              </a:spcBef>
-              <a:buFont typeface="Arial" panose="020B0604020202020204" pitchFamily="34" charset="0"/>
-              <a:buChar char="•"/>
-              <a:defRPr sz="1800" kern="1200">
-                <a:solidFill>
-                  <a:schemeClr val="tx1"/>
-                </a:solidFill>
-                <a:latin typeface="+mn-lt"/>
-                <a:ea typeface="+mn-ea"/>
-                <a:cs typeface="+mn-cs"/>
-              </a:defRPr>
-            </a:lvl6pPr>
-            <a:lvl7pPr marL="2971800" indent="-228600" algn="l" defTabSz="914400" rtl="0" eaLnBrk="1" latinLnBrk="0" hangingPunct="1">
-              <a:lnSpc>
-                <a:spcPct val="90000"/>
-              </a:lnSpc>
-              <a:spcBef>
-                <a:spcPts val="500"/>
-              </a:spcBef>
-              <a:buFont typeface="Arial" panose="020B0604020202020204" pitchFamily="34" charset="0"/>
-              <a:buChar char="•"/>
-              <a:defRPr sz="1800" kern="1200">
-                <a:solidFill>
-                  <a:schemeClr val="tx1"/>
-                </a:solidFill>
-                <a:latin typeface="+mn-lt"/>
-                <a:ea typeface="+mn-ea"/>
-                <a:cs typeface="+mn-cs"/>
-              </a:defRPr>
-            </a:lvl7pPr>
-            <a:lvl8pPr marL="3429000" indent="-228600" algn="l" defTabSz="914400" rtl="0" eaLnBrk="1" latinLnBrk="0" hangingPunct="1">
-              <a:lnSpc>
-                <a:spcPct val="90000"/>
-              </a:lnSpc>
-              <a:spcBef>
-                <a:spcPts val="500"/>
-              </a:spcBef>
-              <a:buFont typeface="Arial" panose="020B0604020202020204" pitchFamily="34" charset="0"/>
-              <a:buChar char="•"/>
-              <a:defRPr sz="1800" kern="1200">
-                <a:solidFill>
-                  <a:schemeClr val="tx1"/>
-                </a:solidFill>
-                <a:latin typeface="+mn-lt"/>
-                <a:ea typeface="+mn-ea"/>
-                <a:cs typeface="+mn-cs"/>
-              </a:defRPr>
-            </a:lvl8pPr>
-            <a:lvl9pPr marL="3886200" indent="-228600" algn="l" defTabSz="914400" rtl="0" eaLnBrk="1" latinLnBrk="0" hangingPunct="1">
-              <a:lnSpc>
-                <a:spcPct val="90000"/>
-              </a:lnSpc>
-              <a:spcBef>
-                <a:spcPts val="500"/>
-              </a:spcBef>
-              <a:buFont typeface="Arial" panose="020B0604020202020204" pitchFamily="34" charset="0"/>
-              <a:buChar char="•"/>
-              <a:defRPr sz="1800" kern="1200">
-                <a:solidFill>
-                  <a:schemeClr val="tx1"/>
-                </a:solidFill>
-                <a:latin typeface="+mn-lt"/>
-                <a:ea typeface="+mn-ea"/>
-                <a:cs typeface="+mn-cs"/>
-              </a:defRPr>
-            </a:lvl9pPr>
-          </a:lstStyle>
-          <a:p>
-            <a:pPr marL="0" indent="0">
-              <a:buNone/>
-            </a:pPr>
-            <a:r>
-              <a:rPr lang="en-US" dirty="0"/>
-              <a:t>All methods do the following:</a:t>
-            </a:r>
-          </a:p>
-          <a:p>
-            <a:pPr lvl="1"/>
-            <a:r>
-              <a:rPr lang="en-US" b="1" dirty="0"/>
-              <a:t>Policy evaluation </a:t>
-            </a:r>
-            <a:r>
-              <a:rPr lang="en-US" dirty="0"/>
-              <a:t>(prediction): Compute a value function/policy.</a:t>
-            </a:r>
-          </a:p>
-          <a:p>
-            <a:pPr lvl="1"/>
-            <a:r>
-              <a:rPr lang="en-US" b="1" dirty="0"/>
-              <a:t>Look ahead </a:t>
-            </a:r>
-            <a:r>
-              <a:rPr lang="en-US" dirty="0"/>
-              <a:t>to future events (rewards, states, actions) and compute a backed-up value to update an approximate value function.</a:t>
-            </a:r>
-          </a:p>
-        </p:txBody>
-      </p:sp>
+      <mc:AlternateContent xmlns:mc="http://schemas.openxmlformats.org/markup-compatibility/2006">
+        <mc:Choice xmlns:a14="http://schemas.microsoft.com/office/drawing/2010/main" Requires="a14">
+          <p:sp>
+            <p:nvSpPr>
+              <p:cNvPr id="7" name="Content Placeholder 2">
+                <a:extLst>
+                  <a:ext uri="{FF2B5EF4-FFF2-40B4-BE49-F238E27FC236}">
+                    <a16:creationId xmlns:a16="http://schemas.microsoft.com/office/drawing/2014/main" id="{47549527-8988-50D5-4FD2-A4EACAA47452}"/>
+                  </a:ext>
+                </a:extLst>
+              </p:cNvPr>
+              <p:cNvSpPr txBox="1">
+                <a:spLocks/>
+              </p:cNvSpPr>
+              <p:nvPr/>
+            </p:nvSpPr>
+            <p:spPr>
+              <a:xfrm>
+                <a:off x="839788" y="4788384"/>
+                <a:ext cx="10515600" cy="1254791"/>
+              </a:xfrm>
+              <a:prstGeom prst="rect">
+                <a:avLst/>
+              </a:prstGeom>
+            </p:spPr>
+            <p:txBody>
+              <a:bodyPr vert="horz" lIns="91440" tIns="45720" rIns="91440" bIns="45720" rtlCol="0">
+                <a:normAutofit fontScale="92500" lnSpcReduction="20000"/>
+              </a:bodyPr>
+              <a:lstStyle>
+                <a:lvl1pPr marL="228600" indent="-228600" algn="l" defTabSz="914400" rtl="0" eaLnBrk="1" latinLnBrk="0" hangingPunct="1">
+                  <a:lnSpc>
+                    <a:spcPct val="90000"/>
+                  </a:lnSpc>
+                  <a:spcBef>
+                    <a:spcPts val="1000"/>
+                  </a:spcBef>
+                  <a:buFont typeface="Arial" panose="020B0604020202020204" pitchFamily="34" charset="0"/>
+                  <a:buChar char="•"/>
+                  <a:defRPr sz="2800" kern="1200">
+                    <a:solidFill>
+                      <a:schemeClr val="tx1"/>
+                    </a:solidFill>
+                    <a:latin typeface="+mn-lt"/>
+                    <a:ea typeface="+mn-ea"/>
+                    <a:cs typeface="+mn-cs"/>
+                  </a:defRPr>
+                </a:lvl1pPr>
+                <a:lvl2pPr marL="685800" indent="-228600" algn="l" defTabSz="914400" rtl="0" eaLnBrk="1" latinLnBrk="0" hangingPunct="1">
+                  <a:lnSpc>
+                    <a:spcPct val="90000"/>
+                  </a:lnSpc>
+                  <a:spcBef>
+                    <a:spcPts val="500"/>
+                  </a:spcBef>
+                  <a:buFont typeface="Arial" panose="020B0604020202020204" pitchFamily="34" charset="0"/>
+                  <a:buChar char="•"/>
+                  <a:defRPr sz="2400" kern="1200">
+                    <a:solidFill>
+                      <a:schemeClr val="tx1"/>
+                    </a:solidFill>
+                    <a:latin typeface="+mn-lt"/>
+                    <a:ea typeface="+mn-ea"/>
+                    <a:cs typeface="+mn-cs"/>
+                  </a:defRPr>
+                </a:lvl2pPr>
+                <a:lvl3pPr marL="1143000" indent="-228600" algn="l" defTabSz="914400" rtl="0" eaLnBrk="1" latinLnBrk="0" hangingPunct="1">
+                  <a:lnSpc>
+                    <a:spcPct val="90000"/>
+                  </a:lnSpc>
+                  <a:spcBef>
+                    <a:spcPts val="500"/>
+                  </a:spcBef>
+                  <a:buFont typeface="Arial" panose="020B0604020202020204" pitchFamily="34" charset="0"/>
+                  <a:buChar char="•"/>
+                  <a:defRPr sz="2000" kern="1200">
+                    <a:solidFill>
+                      <a:schemeClr val="tx1"/>
+                    </a:solidFill>
+                    <a:latin typeface="+mn-lt"/>
+                    <a:ea typeface="+mn-ea"/>
+                    <a:cs typeface="+mn-cs"/>
+                  </a:defRPr>
+                </a:lvl3pPr>
+                <a:lvl4pPr marL="1600200" indent="-228600" algn="l" defTabSz="914400" rtl="0" eaLnBrk="1" latinLnBrk="0" hangingPunct="1">
+                  <a:lnSpc>
+                    <a:spcPct val="90000"/>
+                  </a:lnSpc>
+                  <a:spcBef>
+                    <a:spcPts val="500"/>
+                  </a:spcBef>
+                  <a:buFont typeface="Arial" panose="020B0604020202020204" pitchFamily="34" charset="0"/>
+                  <a:buChar char="•"/>
+                  <a:defRPr sz="1800" kern="1200">
+                    <a:solidFill>
+                      <a:schemeClr val="tx1"/>
+                    </a:solidFill>
+                    <a:latin typeface="+mn-lt"/>
+                    <a:ea typeface="+mn-ea"/>
+                    <a:cs typeface="+mn-cs"/>
+                  </a:defRPr>
+                </a:lvl4pPr>
+                <a:lvl5pPr marL="2057400" indent="-228600" algn="l" defTabSz="914400" rtl="0" eaLnBrk="1" latinLnBrk="0" hangingPunct="1">
+                  <a:lnSpc>
+                    <a:spcPct val="90000"/>
+                  </a:lnSpc>
+                  <a:spcBef>
+                    <a:spcPts val="500"/>
+                  </a:spcBef>
+                  <a:buFont typeface="Arial" panose="020B0604020202020204" pitchFamily="34" charset="0"/>
+                  <a:buChar char="•"/>
+                  <a:defRPr sz="1800" kern="1200">
+                    <a:solidFill>
+                      <a:schemeClr val="tx1"/>
+                    </a:solidFill>
+                    <a:latin typeface="+mn-lt"/>
+                    <a:ea typeface="+mn-ea"/>
+                    <a:cs typeface="+mn-cs"/>
+                  </a:defRPr>
+                </a:lvl5pPr>
+                <a:lvl6pPr marL="2514600" indent="-228600" algn="l" defTabSz="914400" rtl="0" eaLnBrk="1" latinLnBrk="0" hangingPunct="1">
+                  <a:lnSpc>
+                    <a:spcPct val="90000"/>
+                  </a:lnSpc>
+                  <a:spcBef>
+                    <a:spcPts val="500"/>
+                  </a:spcBef>
+                  <a:buFont typeface="Arial" panose="020B0604020202020204" pitchFamily="34" charset="0"/>
+                  <a:buChar char="•"/>
+                  <a:defRPr sz="1800" kern="1200">
+                    <a:solidFill>
+                      <a:schemeClr val="tx1"/>
+                    </a:solidFill>
+                    <a:latin typeface="+mn-lt"/>
+                    <a:ea typeface="+mn-ea"/>
+                    <a:cs typeface="+mn-cs"/>
+                  </a:defRPr>
+                </a:lvl6pPr>
+                <a:lvl7pPr marL="2971800" indent="-228600" algn="l" defTabSz="914400" rtl="0" eaLnBrk="1" latinLnBrk="0" hangingPunct="1">
+                  <a:lnSpc>
+                    <a:spcPct val="90000"/>
+                  </a:lnSpc>
+                  <a:spcBef>
+                    <a:spcPts val="500"/>
+                  </a:spcBef>
+                  <a:buFont typeface="Arial" panose="020B0604020202020204" pitchFamily="34" charset="0"/>
+                  <a:buChar char="•"/>
+                  <a:defRPr sz="1800" kern="1200">
+                    <a:solidFill>
+                      <a:schemeClr val="tx1"/>
+                    </a:solidFill>
+                    <a:latin typeface="+mn-lt"/>
+                    <a:ea typeface="+mn-ea"/>
+                    <a:cs typeface="+mn-cs"/>
+                  </a:defRPr>
+                </a:lvl7pPr>
+                <a:lvl8pPr marL="3429000" indent="-228600" algn="l" defTabSz="914400" rtl="0" eaLnBrk="1" latinLnBrk="0" hangingPunct="1">
+                  <a:lnSpc>
+                    <a:spcPct val="90000"/>
+                  </a:lnSpc>
+                  <a:spcBef>
+                    <a:spcPts val="500"/>
+                  </a:spcBef>
+                  <a:buFont typeface="Arial" panose="020B0604020202020204" pitchFamily="34" charset="0"/>
+                  <a:buChar char="•"/>
+                  <a:defRPr sz="1800" kern="1200">
+                    <a:solidFill>
+                      <a:schemeClr val="tx1"/>
+                    </a:solidFill>
+                    <a:latin typeface="+mn-lt"/>
+                    <a:ea typeface="+mn-ea"/>
+                    <a:cs typeface="+mn-cs"/>
+                  </a:defRPr>
+                </a:lvl8pPr>
+                <a:lvl9pPr marL="3886200" indent="-228600" algn="l" defTabSz="914400" rtl="0" eaLnBrk="1" latinLnBrk="0" hangingPunct="1">
+                  <a:lnSpc>
+                    <a:spcPct val="90000"/>
+                  </a:lnSpc>
+                  <a:spcBef>
+                    <a:spcPts val="500"/>
+                  </a:spcBef>
+                  <a:buFont typeface="Arial" panose="020B0604020202020204" pitchFamily="34" charset="0"/>
+                  <a:buChar char="•"/>
+                  <a:defRPr sz="1800" kern="1200">
+                    <a:solidFill>
+                      <a:schemeClr val="tx1"/>
+                    </a:solidFill>
+                    <a:latin typeface="+mn-lt"/>
+                    <a:ea typeface="+mn-ea"/>
+                    <a:cs typeface="+mn-cs"/>
+                  </a:defRPr>
+                </a:lvl9pPr>
+              </a:lstStyle>
+              <a:p>
+                <a:pPr marL="0" indent="0">
+                  <a:buNone/>
+                </a:pPr>
+                <a:r>
+                  <a:rPr lang="en-US" dirty="0"/>
+                  <a:t>All methods do the following:</a:t>
+                </a:r>
+              </a:p>
+              <a:p>
+                <a:pPr lvl="1"/>
+                <a:r>
+                  <a:rPr lang="en-US" b="1" dirty="0"/>
+                  <a:t>Generalized Policy Iteration:  </a:t>
+                </a:r>
+                <a:r>
+                  <a:rPr lang="en-US" dirty="0"/>
+                  <a:t>Prediction and policy improvement.</a:t>
+                </a:r>
+              </a:p>
+              <a:p>
+                <a:pPr lvl="1"/>
+                <a:r>
+                  <a:rPr lang="en-US" b="1" dirty="0"/>
+                  <a:t>One- or </a:t>
+                </a:r>
+                <a14:m>
+                  <m:oMath xmlns:m="http://schemas.openxmlformats.org/officeDocument/2006/math">
+                    <m:r>
+                      <a:rPr lang="en-US" b="1" i="1">
+                        <a:latin typeface="Cambria Math" panose="02040503050406030204" pitchFamily="18" charset="0"/>
+                      </a:rPr>
+                      <m:t>𝒏</m:t>
+                    </m:r>
+                  </m:oMath>
+                </a14:m>
+                <a:r>
+                  <a:rPr lang="en-US" b="1" dirty="0"/>
+                  <a:t>-step lookahead </a:t>
+                </a:r>
+                <a:r>
+                  <a:rPr lang="en-US" dirty="0"/>
+                  <a:t>to future events (rewards, states, actions) and compute a backed-up value to update an approximate value function.</a:t>
+                </a:r>
+              </a:p>
+            </p:txBody>
+          </p:sp>
+        </mc:Choice>
+        <mc:Fallback>
+          <p:sp>
+            <p:nvSpPr>
+              <p:cNvPr id="7" name="Content Placeholder 2">
+                <a:extLst>
+                  <a:ext uri="{FF2B5EF4-FFF2-40B4-BE49-F238E27FC236}">
+                    <a16:creationId xmlns:a16="http://schemas.microsoft.com/office/drawing/2014/main" id="{47549527-8988-50D5-4FD2-A4EACAA47452}"/>
+                  </a:ext>
+                </a:extLst>
+              </p:cNvPr>
+              <p:cNvSpPr txBox="1">
+                <a:spLocks noRot="1" noChangeAspect="1" noMove="1" noResize="1" noEditPoints="1" noAdjustHandles="1" noChangeArrowheads="1" noChangeShapeType="1" noTextEdit="1"/>
+              </p:cNvSpPr>
+              <p:nvPr/>
+            </p:nvSpPr>
+            <p:spPr>
+              <a:xfrm>
+                <a:off x="839788" y="4788384"/>
+                <a:ext cx="10515600" cy="1254791"/>
+              </a:xfrm>
+              <a:prstGeom prst="rect">
+                <a:avLst/>
+              </a:prstGeom>
+              <a:blipFill>
+                <a:blip r:embed="rId2"/>
+                <a:stretch>
+                  <a:fillRect l="-1043" t="-12136" b="-7282"/>
+                </a:stretch>
+              </a:blipFill>
+            </p:spPr>
+            <p:txBody>
+              <a:bodyPr/>
+              <a:lstStyle/>
+              <a:p>
+                <a:r>
+                  <a:rPr lang="en-US">
+                    <a:noFill/>
+                  </a:rPr>
+                  <a:t> </a:t>
+                </a:r>
+              </a:p>
+            </p:txBody>
+          </p:sp>
+        </mc:Fallback>
+      </mc:AlternateContent>
     </p:spTree>
     <p:extLst>
       <p:ext uri="{BB962C8B-B14F-4D97-AF65-F5344CB8AC3E}">
@@ -17888,8 +18029,8 @@
           </a:p>
         </p:txBody>
       </p:sp>
-      <mc:AlternateContent xmlns:mc="http://schemas.openxmlformats.org/markup-compatibility/2006" xmlns:a14="http://schemas.microsoft.com/office/drawing/2010/main">
-        <mc:Choice Requires="a14">
+      <mc:AlternateContent xmlns:mc="http://schemas.openxmlformats.org/markup-compatibility/2006">
+        <mc:Choice xmlns:a14="http://schemas.microsoft.com/office/drawing/2010/main" Requires="a14">
           <p:sp>
             <p:nvSpPr>
               <p:cNvPr id="8" name="Content Placeholder 7" descr="Model of the environment: Anything the agent can use to predict the outcome of actions (e.g., next state and reward). Models can be:. Distribution models: Specify the complete distribution of all possible outcomes. For finite MDPs this is the function p (s prime,r | s,a). Used by dynamic programming methods for planning. Sample models: Simulate the real environment by producing one outcome for an action. The outcome needs to be a valid sample from the distribution model. Are typically easier to create. Can be used for MC and TD methods for learning. This is called trajectory sampling. Notes:. The real environment can be seen as a physically represented model with sequential sampling access. Model-free methods often use sample models when accessing the real environment is slow, expensive or dangerous">
@@ -17908,7 +18049,7 @@
             </p:nvSpPr>
             <p:spPr>
               <a:xfrm>
-                <a:off x="838200" y="1397331"/>
+                <a:off x="838200" y="1550894"/>
                 <a:ext cx="10515600" cy="4438078"/>
               </a:xfrm>
             </p:spPr>
@@ -18075,29 +18216,29 @@
                 </a:r>
                 <a:r>
                   <a:rPr lang="en-US" dirty="0"/>
-                  <a:t>: Simulate the real environment by producing one outcome for an action. The outcome needs to be a valid sample from the distribution model.</a:t>
+                  <a:t>: Simulate the real environment by producing one outcome for an action. The outcome is a valid sample from the distribution model.</a:t>
                 </a:r>
               </a:p>
               <a:p>
                 <a:pPr lvl="2"/>
                 <a:r>
                   <a:rPr lang="en-US" dirty="0"/>
-                  <a:t>Are typically easier to create.</a:t>
+                  <a:t>Can be used for MC and TD methods for learning. This is also called </a:t>
+                </a:r>
+                <a:r>
+                  <a:rPr lang="en-US" b="1" dirty="0"/>
+                  <a:t>trajectory sampling</a:t>
+                </a:r>
+                <a:r>
+                  <a:rPr lang="en-US" dirty="0"/>
+                  <a:t>.</a:t>
                 </a:r>
               </a:p>
               <a:p>
                 <a:pPr lvl="2"/>
                 <a:r>
                   <a:rPr lang="en-US" dirty="0"/>
-                  <a:t>Can be used for MC and TD methods for learning. This is called </a:t>
-                </a:r>
-                <a:r>
-                  <a:rPr lang="en-US" b="1" dirty="0"/>
-                  <a:t>trajectory sampling</a:t>
-                </a:r>
-                <a:r>
-                  <a:rPr lang="en-US" dirty="0"/>
-                  <a:t>.</a:t>
+                  <a:t>Simulations are typically easier to create and can be used instead of slow, expensive, or dangerous real environments. </a:t>
                 </a:r>
               </a:p>
               <a:p>
@@ -18112,7 +18253,7 @@
                 </a:pPr>
                 <a:r>
                   <a:rPr lang="en-US" b="1" dirty="0"/>
-                  <a:t>Notes</a:t>
+                  <a:t>Note</a:t>
                 </a:r>
                 <a:r>
                   <a:rPr lang="en-US" dirty="0"/>
@@ -18124,19 +18265,12 @@
                 <a:r>
                   <a:rPr lang="en-US" dirty="0"/>
                   <a:t>The real environment can be seen as a physically represented model with sequential sampling access.</a:t>
-                </a:r>
-              </a:p>
-              <a:p>
-                <a:pPr lvl="1"/>
-                <a:r>
-                  <a:rPr lang="en-US" dirty="0"/>
-                  <a:t>Model-free methods often use sample models when accessing the real environment is slow, expensive or dangerous. </a:t>
                 </a:r>
               </a:p>
             </p:txBody>
           </p:sp>
         </mc:Choice>
-        <mc:Fallback xmlns="">
+        <mc:Fallback>
           <p:sp>
             <p:nvSpPr>
               <p:cNvPr id="8" name="Content Placeholder 7" descr="Model of the environment: Anything the agent can use to predict the outcome of actions (e.g., next state and reward). Models can be:. Distribution models: Specify the complete distribution of all possible outcomes. For finite MDPs this is the function p (s prime,r | s,a). Used by dynamic programming methods for planning. Sample models: Simulate the real environment by producing one outcome for an action. The outcome needs to be a valid sample from the distribution model. Are typically easier to create. Can be used for MC and TD methods for learning. This is called trajectory sampling. Notes:. The real environment can be seen as a physically represented model with sequential sampling access. Model-free methods often use sample models when accessing the real environment is slow, expensive or dangerous">
@@ -18155,7 +18289,7 @@
             </p:nvSpPr>
             <p:spPr>
               <a:xfrm>
-                <a:off x="838200" y="1397331"/>
+                <a:off x="838200" y="1550894"/>
                 <a:ext cx="10515600" cy="4438078"/>
               </a:xfrm>
               <a:blipFill>
@@ -18323,37 +18457,6 @@
                                   </p:childTnLst>
                                 </p:cTn>
                               </p:par>
-                              <p:par>
-                                <p:cTn id="9" presetID="1" presetClass="entr" presetSubtype="0" fill="hold" nodeType="withEffect">
-                                  <p:stCondLst>
-                                    <p:cond delay="0"/>
-                                  </p:stCondLst>
-                                  <p:childTnLst>
-                                    <p:set>
-                                      <p:cBhvr>
-                                        <p:cTn id="10" dur="1" fill="hold">
-                                          <p:stCondLst>
-                                            <p:cond delay="0"/>
-                                          </p:stCondLst>
-                                        </p:cTn>
-                                        <p:tgtEl>
-                                          <p:spTgt spid="8">
-                                            <p:txEl>
-                                              <p:pRg st="13" end="13"/>
-                                            </p:txEl>
-                                          </p:spTgt>
-                                        </p:tgtEl>
-                                        <p:attrNameLst>
-                                          <p:attrName>style.visibility</p:attrName>
-                                        </p:attrNameLst>
-                                      </p:cBhvr>
-                                      <p:to>
-                                        <p:strVal val="visible"/>
-                                      </p:to>
-                                    </p:set>
-                                  </p:childTnLst>
-                                </p:cTn>
-                              </p:par>
                             </p:childTnLst>
                           </p:cTn>
                         </p:par>
@@ -18361,26 +18464,26 @@
                     </p:cTn>
                   </p:par>
                   <p:par>
-                    <p:cTn id="11" fill="hold">
+                    <p:cTn id="9" fill="hold">
                       <p:stCondLst>
                         <p:cond delay="indefinite"/>
                       </p:stCondLst>
                       <p:childTnLst>
                         <p:par>
-                          <p:cTn id="12" fill="hold">
+                          <p:cTn id="10" fill="hold">
                             <p:stCondLst>
                               <p:cond delay="0"/>
                             </p:stCondLst>
                             <p:childTnLst>
                               <p:par>
-                                <p:cTn id="13" presetID="1" presetClass="entr" presetSubtype="0" fill="hold" grpId="0" nodeType="clickEffect">
+                                <p:cTn id="11" presetID="1" presetClass="entr" presetSubtype="0" fill="hold" grpId="0" nodeType="clickEffect">
                                   <p:stCondLst>
                                     <p:cond delay="0"/>
                                   </p:stCondLst>
                                   <p:childTnLst>
                                     <p:set>
                                       <p:cBhvr>
-                                        <p:cTn id="14" dur="1" fill="hold">
+                                        <p:cTn id="12" dur="1" fill="hold">
                                           <p:stCondLst>
                                             <p:cond delay="0"/>
                                           </p:stCondLst>
@@ -18592,10 +18695,13 @@
             </p:spPr>
             <p:txBody>
               <a:bodyPr>
-                <a:normAutofit fontScale="85000" lnSpcReduction="20000"/>
+                <a:normAutofit fontScale="77500" lnSpcReduction="20000"/>
               </a:bodyPr>
               <a:lstStyle/>
               <a:p>
+                <a:pPr marL="0" indent="0">
+                  <a:buNone/>
+                </a:pPr>
                 <a:r>
                   <a:rPr lang="en-US" b="1" dirty="0"/>
                   <a:t>Direct RL is model-free Learning</a:t>
@@ -18624,6 +18730,9 @@
                 <a:endParaRPr lang="en-US" dirty="0"/>
               </a:p>
               <a:p>
+                <a:pPr marL="0" indent="0">
+                  <a:buNone/>
+                </a:pPr>
                 <a:r>
                   <a:rPr lang="en-US" b="1" dirty="0"/>
                   <a:t>Model Learning and Planning</a:t>
@@ -18645,12 +18754,10 @@
                 </a:r>
                 <a:r>
                   <a:rPr lang="en-US" dirty="0"/>
-                  <a:t>. E.g., by recording for each </a:t>
+                  <a:t>. E.g., by recording each observed transition</a:t>
                 </a:r>
                 <a:br>
-                  <a:rPr lang="en-US" b="0" i="1" dirty="0">
-                    <a:latin typeface="Cambria Math" panose="02040503050406030204" pitchFamily="18" charset="0"/>
-                  </a:rPr>
+                  <a:rPr lang="en-US" dirty="0"/>
                 </a:br>
                 <a14:m>
                   <m:oMath xmlns:m="http://schemas.openxmlformats.org/officeDocument/2006/math">
@@ -18985,7 +19092,21 @@
                 </a:r>
                 <a:r>
                   <a:rPr lang="en-US" dirty="0"/>
-                  <a:t>: Model learning and planning makes the approach much more sample efficient. Experience is not just used once but retained in the model.</a:t>
+                  <a:t>: Model learning and planning makes the approach much more sample efficient. </a:t>
+                </a:r>
+              </a:p>
+              <a:p>
+                <a:pPr lvl="1"/>
+                <a:r>
+                  <a:rPr lang="en-US" dirty="0"/>
+                  <a:t>Direct RL explores and makes sure we get good data.</a:t>
+                </a:r>
+              </a:p>
+              <a:p>
+                <a:pPr lvl="1"/>
+                <a:r>
+                  <a:rPr lang="en-US" dirty="0"/>
+                  <a:t>The model makes sure that we use experience is not just once.</a:t>
                 </a:r>
               </a:p>
             </p:txBody>
@@ -19016,7 +19137,7 @@
               <a:blipFill>
                 <a:blip r:embed="rId2"/>
                 <a:stretch>
-                  <a:fillRect l="-1287" t="-2817" r="-1654" b="-2535"/>
+                  <a:fillRect l="-1149" t="-2717" b="-2038"/>
                 </a:stretch>
               </a:blipFill>
             </p:spPr>
@@ -19317,6 +19438,68 @@
                                   </p:childTnLst>
                                 </p:cTn>
                               </p:par>
+                              <p:par>
+                                <p:cTn id="21" presetID="1" presetClass="entr" presetSubtype="0" fill="hold" grpId="0" nodeType="withEffect">
+                                  <p:stCondLst>
+                                    <p:cond delay="0"/>
+                                  </p:stCondLst>
+                                  <p:childTnLst>
+                                    <p:set>
+                                      <p:cBhvr>
+                                        <p:cTn id="22" dur="1" fill="hold">
+                                          <p:stCondLst>
+                                            <p:cond delay="0"/>
+                                          </p:stCondLst>
+                                        </p:cTn>
+                                        <p:tgtEl>
+                                          <p:spTgt spid="3">
+                                            <p:txEl>
+                                              <p:pRg st="8" end="8"/>
+                                            </p:txEl>
+                                          </p:spTgt>
+                                        </p:tgtEl>
+                                        <p:attrNameLst>
+                                          <p:attrName>style.visibility</p:attrName>
+                                        </p:attrNameLst>
+                                      </p:cBhvr>
+                                      <p:to>
+                                        <p:strVal val="visible"/>
+                                      </p:to>
+                                    </p:set>
+                                  </p:childTnLst>
+                                </p:cTn>
+                              </p:par>
+                              <p:par>
+                                <p:cTn id="23" presetID="1" presetClass="entr" presetSubtype="0" fill="hold" grpId="0" nodeType="withEffect">
+                                  <p:stCondLst>
+                                    <p:cond delay="0"/>
+                                  </p:stCondLst>
+                                  <p:childTnLst>
+                                    <p:set>
+                                      <p:cBhvr>
+                                        <p:cTn id="24" dur="1" fill="hold">
+                                          <p:stCondLst>
+                                            <p:cond delay="0"/>
+                                          </p:stCondLst>
+                                        </p:cTn>
+                                        <p:tgtEl>
+                                          <p:spTgt spid="3">
+                                            <p:txEl>
+                                              <p:pRg st="9" end="9"/>
+                                            </p:txEl>
+                                          </p:spTgt>
+                                        </p:tgtEl>
+                                        <p:attrNameLst>
+                                          <p:attrName>style.visibility</p:attrName>
+                                        </p:attrNameLst>
+                                      </p:cBhvr>
+                                      <p:to>
+                                        <p:strVal val="visible"/>
+                                      </p:to>
+                                    </p:set>
+                                  </p:childTnLst>
+                                </p:cTn>
+                              </p:par>
                             </p:childTnLst>
                           </p:cTn>
                         </p:par>
@@ -19442,8 +19625,8 @@
         </p:nvGrpSpPr>
         <p:grpSpPr>
           <a:xfrm>
-            <a:off x="693614" y="2680969"/>
-            <a:ext cx="10270766" cy="3558915"/>
+            <a:off x="357043" y="2505513"/>
+            <a:ext cx="11216937" cy="3886772"/>
             <a:chOff x="1027761" y="1690688"/>
             <a:chExt cx="12705267" cy="4550975"/>
           </a:xfrm>
@@ -19629,8 +19812,8 @@
           </p:txBody>
         </p:sp>
       </p:grpSp>
-      <mc:AlternateContent xmlns:mc="http://schemas.openxmlformats.org/markup-compatibility/2006" xmlns:a14="http://schemas.microsoft.com/office/drawing/2010/main">
-        <mc:Choice Requires="a14">
+      <mc:AlternateContent xmlns:mc="http://schemas.openxmlformats.org/markup-compatibility/2006">
+        <mc:Choice xmlns:a14="http://schemas.microsoft.com/office/drawing/2010/main" Requires="a14">
           <p:sp>
             <p:nvSpPr>
               <p:cNvPr id="3" name="Speech Bubble: Rectangle with Corners Rounded 2" descr="Model learning: learn p(s prime,r given s,a)">
@@ -19645,7 +19828,7 @@
             </p:nvSpPr>
             <p:spPr>
               <a:xfrm>
-                <a:off x="7134545" y="4567464"/>
+                <a:off x="7337745" y="4585096"/>
                 <a:ext cx="3419445" cy="338553"/>
               </a:xfrm>
               <a:prstGeom prst="wedgeRoundRectCallout">
@@ -19769,7 +19952,7 @@
             </p:txBody>
           </p:sp>
         </mc:Choice>
-        <mc:Fallback xmlns="">
+        <mc:Fallback>
           <p:sp>
             <p:nvSpPr>
               <p:cNvPr id="3" name="Speech Bubble: Rectangle with Corners Rounded 2" descr="Model learning: learn p(s prime,r given s,a)">
@@ -19786,7 +19969,7 @@
             </p:nvSpPr>
             <p:spPr>
               <a:xfrm>
-                <a:off x="7134545" y="4567464"/>
+                <a:off x="7337745" y="4585096"/>
                 <a:ext cx="3419445" cy="338553"/>
               </a:xfrm>
               <a:prstGeom prst="wedgeRoundRectCallout">
@@ -19799,7 +19982,7 @@
               <a:blipFill>
                 <a:blip r:embed="rId4"/>
                 <a:stretch>
-                  <a:fillRect t="-1695" b="-18644"/>
+                  <a:fillRect t="-3390" b="-16949"/>
                 </a:stretch>
               </a:blipFill>
             </p:spPr>

--- a/slides/Lecture_Chapter08.pptx
+++ b/slides/Lecture_Chapter08.pptx
@@ -15,20 +15,21 @@
     <p:sldId id="388" r:id="rId9"/>
     <p:sldId id="389" r:id="rId10"/>
     <p:sldId id="390" r:id="rId11"/>
-    <p:sldId id="394" r:id="rId12"/>
-    <p:sldId id="391" r:id="rId13"/>
-    <p:sldId id="396" r:id="rId14"/>
-    <p:sldId id="398" r:id="rId15"/>
-    <p:sldId id="399" r:id="rId16"/>
-    <p:sldId id="400" r:id="rId17"/>
-    <p:sldId id="402" r:id="rId18"/>
-    <p:sldId id="403" r:id="rId19"/>
-    <p:sldId id="404" r:id="rId20"/>
-    <p:sldId id="405" r:id="rId21"/>
-    <p:sldId id="406" r:id="rId22"/>
-    <p:sldId id="407" r:id="rId23"/>
-    <p:sldId id="479" r:id="rId24"/>
-    <p:sldId id="408" r:id="rId25"/>
+    <p:sldId id="486" r:id="rId12"/>
+    <p:sldId id="394" r:id="rId13"/>
+    <p:sldId id="391" r:id="rId14"/>
+    <p:sldId id="396" r:id="rId15"/>
+    <p:sldId id="398" r:id="rId16"/>
+    <p:sldId id="399" r:id="rId17"/>
+    <p:sldId id="400" r:id="rId18"/>
+    <p:sldId id="402" r:id="rId19"/>
+    <p:sldId id="403" r:id="rId20"/>
+    <p:sldId id="404" r:id="rId21"/>
+    <p:sldId id="405" r:id="rId22"/>
+    <p:sldId id="406" r:id="rId23"/>
+    <p:sldId id="407" r:id="rId24"/>
+    <p:sldId id="479" r:id="rId25"/>
+    <p:sldId id="408" r:id="rId26"/>
   </p:sldIdLst>
   <p:sldSz cx="12192000" cy="6858000"/>
   <p:notesSz cx="6858000" cy="9144000"/>
@@ -150,6 +151,7 @@
             <p14:sldId id="388"/>
             <p14:sldId id="389"/>
             <p14:sldId id="390"/>
+            <p14:sldId id="486"/>
           </p14:sldIdLst>
         </p14:section>
         <p14:section name="Sampling" id="{9D014FB2-5D5A-464A-8C19-F3F7FC3F9627}">
@@ -330,7 +332,7 @@
           <a:p>
             <a:fld id="{3E22BF2E-04DA-469E-97C5-BB68A0368813}" type="datetimeFigureOut">
               <a:rPr lang="en-US" smtClean="0"/>
-              <a:t>10/19/2026</a:t>
+              <a:t>10/23/2026</a:t>
             </a:fld>
             <a:endParaRPr lang="en-US"/>
           </a:p>
@@ -528,7 +530,7 @@
           <a:p>
             <a:fld id="{3E22BF2E-04DA-469E-97C5-BB68A0368813}" type="datetimeFigureOut">
               <a:rPr lang="en-US" smtClean="0"/>
-              <a:t>10/19/2026</a:t>
+              <a:t>10/23/2026</a:t>
             </a:fld>
             <a:endParaRPr lang="en-US"/>
           </a:p>
@@ -736,7 +738,7 @@
           <a:p>
             <a:fld id="{3E22BF2E-04DA-469E-97C5-BB68A0368813}" type="datetimeFigureOut">
               <a:rPr lang="en-US" smtClean="0"/>
-              <a:t>10/19/2026</a:t>
+              <a:t>10/23/2026</a:t>
             </a:fld>
             <a:endParaRPr lang="en-US"/>
           </a:p>
@@ -944,7 +946,7 @@
           <a:p>
             <a:fld id="{3E22BF2E-04DA-469E-97C5-BB68A0368813}" type="datetimeFigureOut">
               <a:rPr lang="en-US" smtClean="0"/>
-              <a:t>10/19/2026</a:t>
+              <a:t>10/23/2026</a:t>
             </a:fld>
             <a:endParaRPr lang="en-US"/>
           </a:p>
@@ -1219,7 +1221,7 @@
           <a:p>
             <a:fld id="{3E22BF2E-04DA-469E-97C5-BB68A0368813}" type="datetimeFigureOut">
               <a:rPr lang="en-US" smtClean="0"/>
-              <a:t>10/19/2026</a:t>
+              <a:t>10/23/2026</a:t>
             </a:fld>
             <a:endParaRPr lang="en-US"/>
           </a:p>
@@ -1484,7 +1486,7 @@
           <a:p>
             <a:fld id="{3E22BF2E-04DA-469E-97C5-BB68A0368813}" type="datetimeFigureOut">
               <a:rPr lang="en-US" smtClean="0"/>
-              <a:t>10/19/2026</a:t>
+              <a:t>10/23/2026</a:t>
             </a:fld>
             <a:endParaRPr lang="en-US"/>
           </a:p>
@@ -1896,7 +1898,7 @@
           <a:p>
             <a:fld id="{3E22BF2E-04DA-469E-97C5-BB68A0368813}" type="datetimeFigureOut">
               <a:rPr lang="en-US" smtClean="0"/>
-              <a:t>10/19/2026</a:t>
+              <a:t>10/23/2026</a:t>
             </a:fld>
             <a:endParaRPr lang="en-US"/>
           </a:p>
@@ -2037,7 +2039,7 @@
           <a:p>
             <a:fld id="{3E22BF2E-04DA-469E-97C5-BB68A0368813}" type="datetimeFigureOut">
               <a:rPr lang="en-US" smtClean="0"/>
-              <a:t>10/19/2026</a:t>
+              <a:t>10/23/2026</a:t>
             </a:fld>
             <a:endParaRPr lang="en-US"/>
           </a:p>
@@ -2150,7 +2152,7 @@
           <a:p>
             <a:fld id="{3E22BF2E-04DA-469E-97C5-BB68A0368813}" type="datetimeFigureOut">
               <a:rPr lang="en-US" smtClean="0"/>
-              <a:t>10/19/2026</a:t>
+              <a:t>10/23/2026</a:t>
             </a:fld>
             <a:endParaRPr lang="en-US"/>
           </a:p>
@@ -2461,7 +2463,7 @@
           <a:p>
             <a:fld id="{3E22BF2E-04DA-469E-97C5-BB68A0368813}" type="datetimeFigureOut">
               <a:rPr lang="en-US" smtClean="0"/>
-              <a:t>10/19/2026</a:t>
+              <a:t>10/23/2026</a:t>
             </a:fld>
             <a:endParaRPr lang="en-US"/>
           </a:p>
@@ -2749,7 +2751,7 @@
           <a:p>
             <a:fld id="{3E22BF2E-04DA-469E-97C5-BB68A0368813}" type="datetimeFigureOut">
               <a:rPr lang="en-US" smtClean="0"/>
-              <a:t>10/19/2026</a:t>
+              <a:t>10/23/2026</a:t>
             </a:fld>
             <a:endParaRPr lang="en-US"/>
           </a:p>
@@ -2990,7 +2992,7 @@
           <a:p>
             <a:fld id="{3E22BF2E-04DA-469E-97C5-BB68A0368813}" type="datetimeFigureOut">
               <a:rPr lang="en-US" smtClean="0"/>
-              <a:t>10/19/2026</a:t>
+              <a:t>10/23/2026</a:t>
             </a:fld>
             <a:endParaRPr lang="en-US"/>
           </a:p>
@@ -4793,6 +4795,120 @@
 </file>
 
 <file path=ppt/slides/slide11.xml><?xml version="1.0" encoding="utf-8"?>
+<p:sld xmlns:a="http://schemas.openxmlformats.org/drawingml/2006/main" xmlns:r="http://schemas.openxmlformats.org/officeDocument/2006/relationships" xmlns:p="http://schemas.openxmlformats.org/presentationml/2006/main">
+  <p:cSld>
+    <p:spTree>
+      <p:nvGrpSpPr>
+        <p:cNvPr id="1" name=""/>
+        <p:cNvGrpSpPr/>
+        <p:nvPr/>
+      </p:nvGrpSpPr>
+      <p:grpSpPr>
+        <a:xfrm>
+          <a:off x="0" y="0"/>
+          <a:ext cx="0" cy="0"/>
+          <a:chOff x="0" y="0"/>
+          <a:chExt cx="0" cy="0"/>
+        </a:xfrm>
+      </p:grpSpPr>
+      <p:sp>
+        <p:nvSpPr>
+          <p:cNvPr id="4" name="Title 3">
+            <a:extLst>
+              <a:ext uri="{FF2B5EF4-FFF2-40B4-BE49-F238E27FC236}">
+                <a16:creationId xmlns:a16="http://schemas.microsoft.com/office/drawing/2014/main" id="{24CD2877-1046-6123-CF1E-BE9F2D8536CB}"/>
+              </a:ext>
+            </a:extLst>
+          </p:cNvPr>
+          <p:cNvSpPr>
+            <a:spLocks noGrp="1"/>
+          </p:cNvSpPr>
+          <p:nvPr>
+            <p:ph type="title"/>
+          </p:nvPr>
+        </p:nvSpPr>
+        <p:spPr>
+          <a:xfrm>
+            <a:off x="1105486" y="2766218"/>
+            <a:ext cx="10515600" cy="1168047"/>
+          </a:xfrm>
+        </p:spPr>
+        <p:txBody>
+          <a:bodyPr>
+            <a:normAutofit fontScale="90000"/>
+          </a:bodyPr>
+          <a:lstStyle/>
+          <a:p>
+            <a:r>
+              <a:rPr lang="en-US" b="1" dirty="0"/>
+              <a:t>Code example</a:t>
+            </a:r>
+            <a:r>
+              <a:rPr lang="en-US" dirty="0"/>
+              <a:t>: Learning and Planning with Dyna</a:t>
+            </a:r>
+          </a:p>
+        </p:txBody>
+      </p:sp>
+      <p:sp>
+        <p:nvSpPr>
+          <p:cNvPr id="5" name="TextBox 4">
+            <a:extLst>
+              <a:ext uri="{FF2B5EF4-FFF2-40B4-BE49-F238E27FC236}">
+                <a16:creationId xmlns:a16="http://schemas.microsoft.com/office/drawing/2014/main" id="{5AA484FF-058C-4694-424C-0B3B26DF9F45}"/>
+              </a:ext>
+            </a:extLst>
+          </p:cNvPr>
+          <p:cNvSpPr txBox="1"/>
+          <p:nvPr/>
+        </p:nvSpPr>
+        <p:spPr>
+          <a:xfrm>
+            <a:off x="1191065" y="6011594"/>
+            <a:ext cx="8811064" cy="307777"/>
+          </a:xfrm>
+          <a:prstGeom prst="rect">
+            <a:avLst/>
+          </a:prstGeom>
+          <a:noFill/>
+        </p:spPr>
+        <p:txBody>
+          <a:bodyPr wrap="square" rtlCol="0">
+            <a:spAutoFit/>
+          </a:bodyPr>
+          <a:lstStyle/>
+          <a:p>
+            <a:r>
+              <a:rPr lang="en-US" sz="1400" dirty="0"/>
+              <a:t>See Code on </a:t>
+            </a:r>
+            <a:r>
+              <a:rPr lang="en-US" sz="1400" dirty="0">
+                <a:hlinkClick r:id="rId2"/>
+              </a:rPr>
+              <a:t>https://michael.hahsler.net/Introduction_to_Reinforcement_Learning/</a:t>
+            </a:r>
+            <a:r>
+              <a:rPr lang="en-US" sz="1400" dirty="0"/>
+              <a:t> </a:t>
+            </a:r>
+          </a:p>
+        </p:txBody>
+      </p:sp>
+    </p:spTree>
+    <p:extLst>
+      <p:ext uri="{BB962C8B-B14F-4D97-AF65-F5344CB8AC3E}">
+        <p14:creationId xmlns:p14="http://schemas.microsoft.com/office/powerpoint/2010/main" val="190193640"/>
+      </p:ext>
+    </p:extLst>
+  </p:cSld>
+  <p:clrMapOvr>
+    <a:masterClrMapping/>
+  </p:clrMapOvr>
+</p:sld>
+</file>
+
+<file path=ppt/slides/slide12.xml><?xml version="1.0" encoding="utf-8"?>
 <p:sld xmlns:a="http://schemas.openxmlformats.org/drawingml/2006/main" xmlns:r="http://schemas.openxmlformats.org/officeDocument/2006/relationships" xmlns:p="http://schemas.openxmlformats.org/presentationml/2006/main" show="0">
   <p:cSld>
     <p:spTree>
@@ -4884,7 +5000,7 @@
 </p:sld>
 </file>
 
-<file path=ppt/slides/slide12.xml><?xml version="1.0" encoding="utf-8"?>
+<file path=ppt/slides/slide13.xml><?xml version="1.0" encoding="utf-8"?>
 <p:sld xmlns:a="http://schemas.openxmlformats.org/drawingml/2006/main" xmlns:r="http://schemas.openxmlformats.org/officeDocument/2006/relationships" xmlns:p="http://schemas.openxmlformats.org/presentationml/2006/main" show="0">
   <p:cSld>
     <p:spTree>
@@ -5701,7 +5817,7 @@
 </p:sld>
 </file>
 
-<file path=ppt/slides/slide13.xml><?xml version="1.0" encoding="utf-8"?>
+<file path=ppt/slides/slide14.xml><?xml version="1.0" encoding="utf-8"?>
 <p:sld xmlns:a="http://schemas.openxmlformats.org/drawingml/2006/main" xmlns:r="http://schemas.openxmlformats.org/officeDocument/2006/relationships" xmlns:p="http://schemas.openxmlformats.org/presentationml/2006/main">
   <p:cSld>
     <p:spTree>
@@ -5794,7 +5910,7 @@
 </p:sld>
 </file>
 
-<file path=ppt/slides/slide14.xml><?xml version="1.0" encoding="utf-8"?>
+<file path=ppt/slides/slide15.xml><?xml version="1.0" encoding="utf-8"?>
 <p:sld xmlns:a="http://schemas.openxmlformats.org/drawingml/2006/main" xmlns:r="http://schemas.openxmlformats.org/officeDocument/2006/relationships" xmlns:p="http://schemas.openxmlformats.org/presentationml/2006/main">
   <p:cSld>
     <p:spTree>
@@ -6392,8 +6508,8 @@
           </a:p>
         </p:txBody>
       </p:sp>
-      <mc:AlternateContent xmlns:mc="http://schemas.openxmlformats.org/markup-compatibility/2006">
-        <mc:Choice xmlns:a14="http://schemas.microsoft.com/office/drawing/2010/main" Requires="a14">
+      <mc:AlternateContent xmlns:mc="http://schemas.openxmlformats.org/markup-compatibility/2006" xmlns:a14="http://schemas.microsoft.com/office/drawing/2010/main">
+        <mc:Choice Requires="a14">
           <p:sp>
             <p:nvSpPr>
               <p:cNvPr id="5" name="Content Placeholder 4" descr="At decision time in state s :. Consider a large tree of possible continuations (trajectories of a given length) for the current state. Apply an approx. value function to the states in leaf nodes. Back values towards the current state (using max). Similar to n -step estimation, but it always uses the best and not the observed action. Choose the best next action for the current state">
@@ -6529,7 +6645,7 @@
             </p:txBody>
           </p:sp>
         </mc:Choice>
-        <mc:Fallback>
+        <mc:Fallback xmlns="">
           <p:sp>
             <p:nvSpPr>
               <p:cNvPr id="5" name="Content Placeholder 4" descr="At decision time in state s :. Consider a large tree of possible continuations (trajectories of a given length) for the current state. Apply an approx. value function to the states in leaf nodes. Back values towards the current state (using max). Similar to n -step estimation, but it always uses the best and not the observed action. Choose the best next action for the current state">
@@ -6623,8 +6739,8 @@
             </a:prstGeom>
           </p:spPr>
         </p:pic>
-        <mc:AlternateContent xmlns:mc="http://schemas.openxmlformats.org/markup-compatibility/2006">
-          <mc:Choice xmlns:a14="http://schemas.microsoft.com/office/drawing/2010/main" Requires="a14">
+        <mc:AlternateContent xmlns:mc="http://schemas.openxmlformats.org/markup-compatibility/2006" xmlns:a14="http://schemas.microsoft.com/office/drawing/2010/main">
+          <mc:Choice Requires="a14">
             <p:sp>
               <p:nvSpPr>
                 <p:cNvPr id="17" name="TextBox 16">
@@ -6653,6 +6769,7 @@
                 </a:bodyPr>
                 <a:lstStyle/>
                 <a:p>
+                  <a:pPr/>
                   <a14:m>
                     <m:oMathPara xmlns:m="http://schemas.openxmlformats.org/officeDocument/2006/math">
                       <m:oMath>
@@ -6670,7 +6787,7 @@
               </p:txBody>
             </p:sp>
           </mc:Choice>
-          <mc:Fallback>
+          <mc:Fallback xmlns="">
             <p:sp>
               <p:nvSpPr>
                 <p:cNvPr id="17" name="TextBox 16">
@@ -6715,8 +6832,8 @@
             </p:sp>
           </mc:Fallback>
         </mc:AlternateContent>
-        <mc:AlternateContent xmlns:mc="http://schemas.openxmlformats.org/markup-compatibility/2006">
-          <mc:Choice xmlns:a14="http://schemas.microsoft.com/office/drawing/2010/main" Requires="a14">
+        <mc:AlternateContent xmlns:mc="http://schemas.openxmlformats.org/markup-compatibility/2006" xmlns:a14="http://schemas.microsoft.com/office/drawing/2010/main">
+          <mc:Choice Requires="a14">
             <p:sp>
               <p:nvSpPr>
                 <p:cNvPr id="19" name="TextBox 18">
@@ -6778,7 +6895,7 @@
               </p:txBody>
             </p:sp>
           </mc:Choice>
-          <mc:Fallback>
+          <mc:Fallback xmlns="">
             <p:sp>
               <p:nvSpPr>
                 <p:cNvPr id="19" name="TextBox 18">
@@ -7135,7 +7252,7 @@
 </p:sld>
 </file>
 
-<file path=ppt/slides/slide15.xml><?xml version="1.0" encoding="utf-8"?>
+<file path=ppt/slides/slide16.xml><?xml version="1.0" encoding="utf-8"?>
 <p:sld xmlns:a="http://schemas.openxmlformats.org/drawingml/2006/main" xmlns:r="http://schemas.openxmlformats.org/officeDocument/2006/relationships" xmlns:p="http://schemas.openxmlformats.org/presentationml/2006/main">
   <p:cSld>
     <p:spTree>
@@ -7182,8 +7299,8 @@
           </a:p>
         </p:txBody>
       </p:sp>
-      <mc:AlternateContent xmlns:mc="http://schemas.openxmlformats.org/markup-compatibility/2006">
-        <mc:Choice xmlns:a14="http://schemas.microsoft.com/office/drawing/2010/main" Requires="a14">
+      <mc:AlternateContent xmlns:mc="http://schemas.openxmlformats.org/markup-compatibility/2006" xmlns:a14="http://schemas.microsoft.com/office/drawing/2010/main">
+        <mc:Choice Requires="a14">
           <p:sp>
             <p:nvSpPr>
               <p:cNvPr id="3" name="Content Placeholder 2" descr="Start with an initial policy pi called the base policy. At decision time in state s :. Monte Carlo Policy Estimation: Use many simulated trajectories to approximate all state/action values q sub pi (s,a) for the current state s . Choose the best action a equals argmax over a, of q sub pi (s,a) according to the estimates. This is called the rollout policy. Properties:. If the base policy is reasonable (i.e., somewhat similar to the optimal policy), rollouts are locally optimal. Rollout policy is guaranteed to be at least as good as the base policy (in expectation). You get policy improvement without solving Bellman equations">
@@ -7563,7 +7680,7 @@
             </p:txBody>
           </p:sp>
         </mc:Choice>
-        <mc:Fallback>
+        <mc:Fallback xmlns="">
           <p:sp>
             <p:nvSpPr>
               <p:cNvPr id="3" name="Content Placeholder 2" descr="Start with an initial policy pi called the base policy. At decision time in state s :. Monte Carlo Policy Estimation: Use many simulated trajectories to approximate all state/action values q sub pi (s,a) for the current state s . Choose the best action a equals argmax over a, of q sub pi (s,a) according to the estimates. This is called the rollout policy. Properties:. If the base policy is reasonable (i.e., somewhat similar to the optimal policy), rollouts are locally optimal. Rollout policy is guaranteed to be at least as good as the base policy (in expectation). You get policy improvement without solving Bellman equations">
@@ -7788,7 +7905,7 @@
 </p:sld>
 </file>
 
-<file path=ppt/slides/slide16.xml><?xml version="1.0" encoding="utf-8"?>
+<file path=ppt/slides/slide17.xml><?xml version="1.0" encoding="utf-8"?>
 <p:sld xmlns:a="http://schemas.openxmlformats.org/drawingml/2006/main" xmlns:r="http://schemas.openxmlformats.org/officeDocument/2006/relationships" xmlns:p="http://schemas.openxmlformats.org/presentationml/2006/main">
   <p:cSld>
     <p:spTree>
@@ -7835,8 +7952,8 @@
           </a:p>
         </p:txBody>
       </p:sp>
-      <mc:AlternateContent xmlns:mc="http://schemas.openxmlformats.org/markup-compatibility/2006">
-        <mc:Choice xmlns:a14="http://schemas.microsoft.com/office/drawing/2010/main" Requires="a14">
+      <mc:AlternateContent xmlns:mc="http://schemas.openxmlformats.org/markup-compatibility/2006" xmlns:a14="http://schemas.microsoft.com/office/drawing/2010/main">
+        <mc:Choice Requires="a14">
           <p:sp>
             <p:nvSpPr>
               <p:cNvPr id="3" name="Content Placeholder 2">
@@ -7944,7 +8061,7 @@
             </p:txBody>
           </p:sp>
         </mc:Choice>
-        <mc:Fallback>
+        <mc:Fallback xmlns="">
           <p:sp>
             <p:nvSpPr>
               <p:cNvPr id="3" name="Content Placeholder 2">
@@ -8018,8 +8135,8 @@
           </a:prstGeom>
         </p:spPr>
       </p:pic>
-      <mc:AlternateContent xmlns:mc="http://schemas.openxmlformats.org/markup-compatibility/2006">
-        <mc:Choice xmlns:a14="http://schemas.microsoft.com/office/drawing/2010/main" Requires="a14">
+      <mc:AlternateContent xmlns:mc="http://schemas.openxmlformats.org/markup-compatibility/2006" xmlns:a14="http://schemas.microsoft.com/office/drawing/2010/main">
+        <mc:Choice Requires="a14">
           <p:sp>
             <p:nvSpPr>
               <p:cNvPr id="8" name="Speech Bubble: Rectangle with Corners Rounded 7" descr="Stores estimated q(s,a) values">
@@ -8130,7 +8247,7 @@
             </p:txBody>
           </p:sp>
         </mc:Choice>
-        <mc:Fallback>
+        <mc:Fallback xmlns="">
           <p:sp>
             <p:nvSpPr>
               <p:cNvPr id="8" name="Speech Bubble: Rectangle with Corners Rounded 7" descr="Stores estimated q(s,a) values">
@@ -8321,7 +8438,7 @@
 </p:sld>
 </file>
 
-<file path=ppt/slides/slide17.xml><?xml version="1.0" encoding="utf-8"?>
+<file path=ppt/slides/slide18.xml><?xml version="1.0" encoding="utf-8"?>
 <p:sld xmlns:a="http://schemas.openxmlformats.org/drawingml/2006/main" xmlns:r="http://schemas.openxmlformats.org/officeDocument/2006/relationships" xmlns:p="http://schemas.openxmlformats.org/presentationml/2006/main">
   <p:cSld>
     <p:bg>
@@ -8939,7 +9056,7 @@
 </p:sld>
 </file>
 
-<file path=ppt/slides/slide18.xml><?xml version="1.0" encoding="utf-8"?>
+<file path=ppt/slides/slide19.xml><?xml version="1.0" encoding="utf-8"?>
 <p:sld xmlns:a="http://schemas.openxmlformats.org/drawingml/2006/main" xmlns:r="http://schemas.openxmlformats.org/officeDocument/2006/relationships" xmlns:p="http://schemas.openxmlformats.org/presentationml/2006/main">
   <p:cSld>
     <p:spTree>
@@ -9032,7 +9149,189 @@
 </p:sld>
 </file>
 
-<file path=ppt/slides/slide19.xml><?xml version="1.0" encoding="utf-8"?>
+<file path=ppt/slides/slide2.xml><?xml version="1.0" encoding="utf-8"?>
+<p:sld xmlns:a="http://schemas.openxmlformats.org/drawingml/2006/main" xmlns:r="http://schemas.openxmlformats.org/officeDocument/2006/relationships" xmlns:p="http://schemas.openxmlformats.org/presentationml/2006/main">
+  <p:cSld>
+    <p:spTree>
+      <p:nvGrpSpPr>
+        <p:cNvPr id="1" name=""/>
+        <p:cNvGrpSpPr/>
+        <p:nvPr/>
+      </p:nvGrpSpPr>
+      <p:grpSpPr>
+        <a:xfrm>
+          <a:off x="0" y="0"/>
+          <a:ext cx="0" cy="0"/>
+          <a:chOff x="0" y="0"/>
+          <a:chExt cx="0" cy="0"/>
+        </a:xfrm>
+      </p:grpSpPr>
+      <p:sp>
+        <p:nvSpPr>
+          <p:cNvPr id="2" name="Title 1">
+            <a:extLst>
+              <a:ext uri="{FF2B5EF4-FFF2-40B4-BE49-F238E27FC236}">
+                <a16:creationId xmlns:a16="http://schemas.microsoft.com/office/drawing/2014/main" id="{9E7A3493-2ED6-DF09-F569-7F3DCA81AB18}"/>
+              </a:ext>
+            </a:extLst>
+          </p:cNvPr>
+          <p:cNvSpPr>
+            <a:spLocks noGrp="1"/>
+          </p:cNvSpPr>
+          <p:nvPr>
+            <p:ph type="title"/>
+          </p:nvPr>
+        </p:nvSpPr>
+        <p:spPr/>
+        <p:txBody>
+          <a:bodyPr/>
+          <a:lstStyle/>
+          <a:p>
+            <a:r>
+              <a:rPr lang="en-US" dirty="0"/>
+              <a:t>Topics of this Course</a:t>
+            </a:r>
+          </a:p>
+        </p:txBody>
+      </p:sp>
+      <p:sp>
+        <p:nvSpPr>
+          <p:cNvPr id="3" name="Content Placeholder 2">
+            <a:extLst>
+              <a:ext uri="{FF2B5EF4-FFF2-40B4-BE49-F238E27FC236}">
+                <a16:creationId xmlns:a16="http://schemas.microsoft.com/office/drawing/2014/main" id="{8F95E019-92A5-79AC-D777-59B4926F61AA}"/>
+              </a:ext>
+            </a:extLst>
+          </p:cNvPr>
+          <p:cNvSpPr>
+            <a:spLocks noGrp="1"/>
+          </p:cNvSpPr>
+          <p:nvPr>
+            <p:ph idx="1"/>
+          </p:nvPr>
+        </p:nvSpPr>
+        <p:spPr/>
+        <p:txBody>
+          <a:bodyPr>
+            <a:normAutofit fontScale="85000" lnSpcReduction="20000"/>
+          </a:bodyPr>
+          <a:lstStyle/>
+          <a:p>
+            <a:r>
+              <a:rPr lang="en-US" dirty="0"/>
+              <a:t>Introduction to reinforcement learning</a:t>
+            </a:r>
+          </a:p>
+          <a:p>
+            <a:r>
+              <a:rPr lang="en-US" dirty="0"/>
+              <a:t>Markov decision processes</a:t>
+            </a:r>
+          </a:p>
+          <a:p>
+            <a:r>
+              <a:rPr lang="en-US" b="1" dirty="0"/>
+              <a:t>Part I: Tabular Methods</a:t>
+            </a:r>
+          </a:p>
+          <a:p>
+            <a:pPr lvl="1"/>
+            <a:r>
+              <a:rPr lang="en-US" dirty="0"/>
+              <a:t>Dynamic programming</a:t>
+            </a:r>
+          </a:p>
+          <a:p>
+            <a:pPr lvl="1"/>
+            <a:r>
+              <a:rPr lang="en-US" dirty="0"/>
+              <a:t>Monte Carlo methods</a:t>
+            </a:r>
+          </a:p>
+          <a:p>
+            <a:pPr lvl="1"/>
+            <a:r>
+              <a:rPr lang="en-US" dirty="0"/>
+              <a:t>Temporal-difference learning</a:t>
+            </a:r>
+          </a:p>
+          <a:p>
+            <a:pPr lvl="1"/>
+            <a:r>
+              <a:rPr lang="en-US" dirty="0"/>
+              <a:t>Multi-step bootstrapping</a:t>
+            </a:r>
+          </a:p>
+          <a:p>
+            <a:pPr lvl="1"/>
+            <a:r>
+              <a:rPr lang="en-US" b="1" dirty="0"/>
+              <a:t>Planning and learning with tabular methods</a:t>
+            </a:r>
+          </a:p>
+          <a:p>
+            <a:r>
+              <a:rPr lang="en-US" dirty="0"/>
+              <a:t>Part II: Approximate Solution Methods</a:t>
+            </a:r>
+          </a:p>
+          <a:p>
+            <a:pPr lvl="1"/>
+            <a:r>
+              <a:rPr lang="en-US" dirty="0"/>
+              <a:t>Prediction and Control using Approximation</a:t>
+            </a:r>
+          </a:p>
+          <a:p>
+            <a:pPr lvl="1"/>
+            <a:r>
+              <a:rPr lang="en-US" dirty="0"/>
+              <a:t>Eligibility Traces</a:t>
+            </a:r>
+          </a:p>
+          <a:p>
+            <a:pPr lvl="1"/>
+            <a:r>
+              <a:rPr lang="en-US" dirty="0"/>
+              <a:t>Policy Gradient Methods</a:t>
+            </a:r>
+          </a:p>
+          <a:p>
+            <a:r>
+              <a:rPr lang="en-US" dirty="0"/>
+              <a:t>Part III: Modern RL Methods</a:t>
+            </a:r>
+          </a:p>
+          <a:p>
+            <a:pPr lvl="1"/>
+            <a:r>
+              <a:rPr lang="en-US" dirty="0"/>
+              <a:t>Deep Reinforcement Learning</a:t>
+            </a:r>
+          </a:p>
+          <a:p>
+            <a:pPr lvl="1"/>
+            <a:r>
+              <a:rPr lang="en-US" dirty="0"/>
+              <a:t>Current Applications</a:t>
+            </a:r>
+          </a:p>
+        </p:txBody>
+      </p:sp>
+    </p:spTree>
+    <p:extLst>
+      <p:ext uri="{BB962C8B-B14F-4D97-AF65-F5344CB8AC3E}">
+        <p14:creationId xmlns:p14="http://schemas.microsoft.com/office/powerpoint/2010/main" val="3653367536"/>
+      </p:ext>
+    </p:extLst>
+  </p:cSld>
+  <p:clrMapOvr>
+    <a:masterClrMapping/>
+  </p:clrMapOvr>
+</p:sld>
+</file>
+
+<file path=ppt/slides/slide20.xml><?xml version="1.0" encoding="utf-8"?>
 <p:sld xmlns:a="http://schemas.openxmlformats.org/drawingml/2006/main" xmlns:r="http://schemas.openxmlformats.org/officeDocument/2006/relationships" xmlns:p="http://schemas.openxmlformats.org/presentationml/2006/main">
   <p:cSld>
     <p:spTree>
@@ -9282,189 +9581,7 @@
 </p:sld>
 </file>
 
-<file path=ppt/slides/slide2.xml><?xml version="1.0" encoding="utf-8"?>
-<p:sld xmlns:a="http://schemas.openxmlformats.org/drawingml/2006/main" xmlns:r="http://schemas.openxmlformats.org/officeDocument/2006/relationships" xmlns:p="http://schemas.openxmlformats.org/presentationml/2006/main">
-  <p:cSld>
-    <p:spTree>
-      <p:nvGrpSpPr>
-        <p:cNvPr id="1" name=""/>
-        <p:cNvGrpSpPr/>
-        <p:nvPr/>
-      </p:nvGrpSpPr>
-      <p:grpSpPr>
-        <a:xfrm>
-          <a:off x="0" y="0"/>
-          <a:ext cx="0" cy="0"/>
-          <a:chOff x="0" y="0"/>
-          <a:chExt cx="0" cy="0"/>
-        </a:xfrm>
-      </p:grpSpPr>
-      <p:sp>
-        <p:nvSpPr>
-          <p:cNvPr id="2" name="Title 1">
-            <a:extLst>
-              <a:ext uri="{FF2B5EF4-FFF2-40B4-BE49-F238E27FC236}">
-                <a16:creationId xmlns:a16="http://schemas.microsoft.com/office/drawing/2014/main" id="{9E7A3493-2ED6-DF09-F569-7F3DCA81AB18}"/>
-              </a:ext>
-            </a:extLst>
-          </p:cNvPr>
-          <p:cNvSpPr>
-            <a:spLocks noGrp="1"/>
-          </p:cNvSpPr>
-          <p:nvPr>
-            <p:ph type="title"/>
-          </p:nvPr>
-        </p:nvSpPr>
-        <p:spPr/>
-        <p:txBody>
-          <a:bodyPr/>
-          <a:lstStyle/>
-          <a:p>
-            <a:r>
-              <a:rPr lang="en-US" dirty="0"/>
-              <a:t>Topics of this Course</a:t>
-            </a:r>
-          </a:p>
-        </p:txBody>
-      </p:sp>
-      <p:sp>
-        <p:nvSpPr>
-          <p:cNvPr id="3" name="Content Placeholder 2">
-            <a:extLst>
-              <a:ext uri="{FF2B5EF4-FFF2-40B4-BE49-F238E27FC236}">
-                <a16:creationId xmlns:a16="http://schemas.microsoft.com/office/drawing/2014/main" id="{8F95E019-92A5-79AC-D777-59B4926F61AA}"/>
-              </a:ext>
-            </a:extLst>
-          </p:cNvPr>
-          <p:cNvSpPr>
-            <a:spLocks noGrp="1"/>
-          </p:cNvSpPr>
-          <p:nvPr>
-            <p:ph idx="1"/>
-          </p:nvPr>
-        </p:nvSpPr>
-        <p:spPr/>
-        <p:txBody>
-          <a:bodyPr>
-            <a:normAutofit fontScale="85000" lnSpcReduction="20000"/>
-          </a:bodyPr>
-          <a:lstStyle/>
-          <a:p>
-            <a:r>
-              <a:rPr lang="en-US" dirty="0"/>
-              <a:t>Introduction to reinforcement learning</a:t>
-            </a:r>
-          </a:p>
-          <a:p>
-            <a:r>
-              <a:rPr lang="en-US" dirty="0"/>
-              <a:t>Markov decision processes</a:t>
-            </a:r>
-          </a:p>
-          <a:p>
-            <a:r>
-              <a:rPr lang="en-US" b="1" dirty="0"/>
-              <a:t>Part I: Tabular Methods</a:t>
-            </a:r>
-          </a:p>
-          <a:p>
-            <a:pPr lvl="1"/>
-            <a:r>
-              <a:rPr lang="en-US" dirty="0"/>
-              <a:t>Dynamic programming</a:t>
-            </a:r>
-          </a:p>
-          <a:p>
-            <a:pPr lvl="1"/>
-            <a:r>
-              <a:rPr lang="en-US" dirty="0"/>
-              <a:t>Monte Carlo methods</a:t>
-            </a:r>
-          </a:p>
-          <a:p>
-            <a:pPr lvl="1"/>
-            <a:r>
-              <a:rPr lang="en-US" dirty="0"/>
-              <a:t>Temporal-difference learning</a:t>
-            </a:r>
-          </a:p>
-          <a:p>
-            <a:pPr lvl="1"/>
-            <a:r>
-              <a:rPr lang="en-US" dirty="0"/>
-              <a:t>Multi-step bootstrapping</a:t>
-            </a:r>
-          </a:p>
-          <a:p>
-            <a:pPr lvl="1"/>
-            <a:r>
-              <a:rPr lang="en-US" b="1" dirty="0"/>
-              <a:t>Planning and learning with tabular methods</a:t>
-            </a:r>
-          </a:p>
-          <a:p>
-            <a:r>
-              <a:rPr lang="en-US" dirty="0"/>
-              <a:t>Part II: Approximate Solution Methods</a:t>
-            </a:r>
-          </a:p>
-          <a:p>
-            <a:pPr lvl="1"/>
-            <a:r>
-              <a:rPr lang="en-US" dirty="0"/>
-              <a:t>Prediction and Control using Approximation</a:t>
-            </a:r>
-          </a:p>
-          <a:p>
-            <a:pPr lvl="1"/>
-            <a:r>
-              <a:rPr lang="en-US" dirty="0"/>
-              <a:t>Eligibility Traces</a:t>
-            </a:r>
-          </a:p>
-          <a:p>
-            <a:pPr lvl="1"/>
-            <a:r>
-              <a:rPr lang="en-US" dirty="0"/>
-              <a:t>Policy Gradient Methods</a:t>
-            </a:r>
-          </a:p>
-          <a:p>
-            <a:r>
-              <a:rPr lang="en-US" dirty="0"/>
-              <a:t>Part III: Modern RL Methods</a:t>
-            </a:r>
-          </a:p>
-          <a:p>
-            <a:pPr lvl="1"/>
-            <a:r>
-              <a:rPr lang="en-US" dirty="0"/>
-              <a:t>Deep Reinforcement Learning</a:t>
-            </a:r>
-          </a:p>
-          <a:p>
-            <a:pPr lvl="1"/>
-            <a:r>
-              <a:rPr lang="en-US" dirty="0"/>
-              <a:t>Current Applications</a:t>
-            </a:r>
-          </a:p>
-        </p:txBody>
-      </p:sp>
-    </p:spTree>
-    <p:extLst>
-      <p:ext uri="{BB962C8B-B14F-4D97-AF65-F5344CB8AC3E}">
-        <p14:creationId xmlns:p14="http://schemas.microsoft.com/office/powerpoint/2010/main" val="3653367536"/>
-      </p:ext>
-    </p:extLst>
-  </p:cSld>
-  <p:clrMapOvr>
-    <a:masterClrMapping/>
-  </p:clrMapOvr>
-</p:sld>
-</file>
-
-<file path=ppt/slides/slide20.xml><?xml version="1.0" encoding="utf-8"?>
+<file path=ppt/slides/slide21.xml><?xml version="1.0" encoding="utf-8"?>
 <p:sld xmlns:a="http://schemas.openxmlformats.org/drawingml/2006/main" xmlns:r="http://schemas.openxmlformats.org/officeDocument/2006/relationships" xmlns:p="http://schemas.openxmlformats.org/presentationml/2006/main">
   <p:cSld>
     <p:spTree>
@@ -10967,7 +11084,7 @@
 </p:sld>
 </file>
 
-<file path=ppt/slides/slide21.xml><?xml version="1.0" encoding="utf-8"?>
+<file path=ppt/slides/slide22.xml><?xml version="1.0" encoding="utf-8"?>
 <p:sld xmlns:a="http://schemas.openxmlformats.org/drawingml/2006/main" xmlns:r="http://schemas.openxmlformats.org/officeDocument/2006/relationships" xmlns:p="http://schemas.openxmlformats.org/presentationml/2006/main">
   <p:cSld>
     <p:spTree>
@@ -11460,7 +11577,7 @@
 </p:sld>
 </file>
 
-<file path=ppt/slides/slide22.xml><?xml version="1.0" encoding="utf-8"?>
+<file path=ppt/slides/slide23.xml><?xml version="1.0" encoding="utf-8"?>
 <p:sld xmlns:a="http://schemas.openxmlformats.org/drawingml/2006/main" xmlns:r="http://schemas.openxmlformats.org/officeDocument/2006/relationships" xmlns:p="http://schemas.openxmlformats.org/presentationml/2006/main">
   <p:cSld>
     <p:spTree>
@@ -12069,7 +12186,7 @@
 </p:sld>
 </file>
 
-<file path=ppt/slides/slide23.xml><?xml version="1.0" encoding="utf-8"?>
+<file path=ppt/slides/slide24.xml><?xml version="1.0" encoding="utf-8"?>
 <p:sld xmlns:a="http://schemas.openxmlformats.org/drawingml/2006/main" xmlns:r="http://schemas.openxmlformats.org/officeDocument/2006/relationships" xmlns:p="http://schemas.openxmlformats.org/presentationml/2006/main">
   <p:cSld>
     <p:spTree>
@@ -12944,7 +13061,7 @@
 </p:sld>
 </file>
 
-<file path=ppt/slides/slide24.xml><?xml version="1.0" encoding="utf-8"?>
+<file path=ppt/slides/slide25.xml><?xml version="1.0" encoding="utf-8"?>
 <p:sld xmlns:a="http://schemas.openxmlformats.org/drawingml/2006/main" xmlns:r="http://schemas.openxmlformats.org/officeDocument/2006/relationships" xmlns:p="http://schemas.openxmlformats.org/presentationml/2006/main">
   <p:cSld>
     <p:spTree>
@@ -17562,8 +17679,8 @@
           </p:style>
         </p:cxnSp>
       </p:grpSp>
-      <mc:AlternateContent xmlns:mc="http://schemas.openxmlformats.org/markup-compatibility/2006">
-        <mc:Choice xmlns:a14="http://schemas.microsoft.com/office/drawing/2010/main" Requires="a14">
+      <mc:AlternateContent xmlns:mc="http://schemas.openxmlformats.org/markup-compatibility/2006" xmlns:a14="http://schemas.microsoft.com/office/drawing/2010/main">
+        <mc:Choice Requires="a14">
           <p:sp>
             <p:nvSpPr>
               <p:cNvPr id="7" name="Content Placeholder 2">
@@ -17803,7 +17920,7 @@
             </p:txBody>
           </p:sp>
         </mc:Choice>
-        <mc:Fallback>
+        <mc:Fallback xmlns="">
           <p:sp>
             <p:nvSpPr>
               <p:cNvPr id="7" name="Content Placeholder 2">
@@ -18029,8 +18146,8 @@
           </a:p>
         </p:txBody>
       </p:sp>
-      <mc:AlternateContent xmlns:mc="http://schemas.openxmlformats.org/markup-compatibility/2006">
-        <mc:Choice xmlns:a14="http://schemas.microsoft.com/office/drawing/2010/main" Requires="a14">
+      <mc:AlternateContent xmlns:mc="http://schemas.openxmlformats.org/markup-compatibility/2006" xmlns:a14="http://schemas.microsoft.com/office/drawing/2010/main">
+        <mc:Choice Requires="a14">
           <p:sp>
             <p:nvSpPr>
               <p:cNvPr id="8" name="Content Placeholder 7" descr="Model of the environment: Anything the agent can use to predict the outcome of actions (e.g., next state and reward). Models can be:. Distribution models: Specify the complete distribution of all possible outcomes. For finite MDPs this is the function p (s prime,r | s,a). Used by dynamic programming methods for planning. Sample models: Simulate the real environment by producing one outcome for an action. The outcome needs to be a valid sample from the distribution model. Are typically easier to create. Can be used for MC and TD methods for learning. This is called trajectory sampling. Notes:. The real environment can be seen as a physically represented model with sequential sampling access. Model-free methods often use sample models when accessing the real environment is slow, expensive or dangerous">
@@ -18270,7 +18387,7 @@
             </p:txBody>
           </p:sp>
         </mc:Choice>
-        <mc:Fallback>
+        <mc:Fallback xmlns="">
           <p:sp>
             <p:nvSpPr>
               <p:cNvPr id="8" name="Content Placeholder 7" descr="Model of the environment: Anything the agent can use to predict the outcome of actions (e.g., next state and reward). Models can be:. Distribution models: Specify the complete distribution of all possible outcomes. For finite MDPs this is the function p (s prime,r | s,a). Used by dynamic programming methods for planning. Sample models: Simulate the real environment by producing one outcome for an action. The outcome needs to be a valid sample from the distribution model. Are typically easier to create. Can be used for MC and TD methods for learning. This is called trajectory sampling. Notes:. The real environment can be seen as a physically represented model with sequential sampling access. Model-free methods often use sample models when accessing the real environment is slow, expensive or dangerous">
@@ -18669,8 +18786,8 @@
           </a:p>
         </p:txBody>
       </p:sp>
-      <mc:AlternateContent xmlns:mc="http://schemas.openxmlformats.org/markup-compatibility/2006">
-        <mc:Choice xmlns:a14="http://schemas.microsoft.com/office/drawing/2010/main" Requires="a14">
+      <mc:AlternateContent xmlns:mc="http://schemas.openxmlformats.org/markup-compatibility/2006" xmlns:a14="http://schemas.microsoft.com/office/drawing/2010/main">
+        <mc:Choice Requires="a14">
           <p:sp>
             <p:nvSpPr>
               <p:cNvPr id="3" name="Content Placeholder 2" descr="Direct RL is model-free Learning:. Use sampled experience directly to improve the value function/policy. E.g., via one-step Q-learning. Model Learning and Planning:. Real experience is also used to learn a model. E.g., by recording for each S sub t,A sub t to R sub t plus 1, S sub t plus 1 to estimate p hat (S sub t plus 1,R sub t plus 1, given S sub t,A sub t). The model can be used for planning to improve the value function/policy. E.g., by sampling from the model to update the Q-values. Advantage: Model learning and planning makes the approach much more sample efficient. Experience is not just used once but retained in the model">
@@ -19112,7 +19229,7 @@
             </p:txBody>
           </p:sp>
         </mc:Choice>
-        <mc:Fallback>
+        <mc:Fallback xmlns="">
           <p:sp>
             <p:nvSpPr>
               <p:cNvPr id="3" name="Content Placeholder 2" descr="Direct RL is model-free Learning:. Use sampled experience directly to improve the value function/policy. E.g., via one-step Q-learning. Model Learning and Planning:. Real experience is also used to learn a model. E.g., by recording for each S sub t,A sub t to R sub t plus 1, S sub t plus 1 to estimate p hat (S sub t plus 1,R sub t plus 1, given S sub t,A sub t). The model can be used for planning to improve the value function/policy. E.g., by sampling from the model to update the Q-values. Advantage: Model learning and planning makes the approach much more sample efficient. Experience is not just used once but retained in the model">
@@ -19812,8 +19929,8 @@
           </p:txBody>
         </p:sp>
       </p:grpSp>
-      <mc:AlternateContent xmlns:mc="http://schemas.openxmlformats.org/markup-compatibility/2006">
-        <mc:Choice xmlns:a14="http://schemas.microsoft.com/office/drawing/2010/main" Requires="a14">
+      <mc:AlternateContent xmlns:mc="http://schemas.openxmlformats.org/markup-compatibility/2006" xmlns:a14="http://schemas.microsoft.com/office/drawing/2010/main">
+        <mc:Choice Requires="a14">
           <p:sp>
             <p:nvSpPr>
               <p:cNvPr id="3" name="Speech Bubble: Rectangle with Corners Rounded 2" descr="Model learning: learn p(s prime,r given s,a)">
@@ -19952,7 +20069,7 @@
             </p:txBody>
           </p:sp>
         </mc:Choice>
-        <mc:Fallback>
+        <mc:Fallback xmlns="">
           <p:sp>
             <p:nvSpPr>
               <p:cNvPr id="3" name="Speech Bubble: Rectangle with Corners Rounded 2" descr="Model learning: learn p(s prime,r given s,a)">
